--- a/AgenticAI/2-Core-Concepts/1_components_of_AI_agents.pptx
+++ b/AgenticAI/2-Core-Concepts/1_components_of_AI_agents.pptx
@@ -5,10 +5,10 @@
     <p:sldMasterId id="2147483648" r:id="rId1"/>
   </p:sldMasterIdLst>
   <p:notesMasterIdLst>
-    <p:notesMasterId r:id="rId29"/>
+    <p:notesMasterId r:id="rId32"/>
   </p:notesMasterIdLst>
   <p:handoutMasterIdLst>
-    <p:handoutMasterId r:id="rId30"/>
+    <p:handoutMasterId r:id="rId33"/>
   </p:handoutMasterIdLst>
   <p:sldIdLst>
     <p:sldId id="257" r:id="rId2"/>
@@ -23,21 +23,24 @@
     <p:sldId id="309" r:id="rId11"/>
     <p:sldId id="298" r:id="rId12"/>
     <p:sldId id="299" r:id="rId13"/>
-    <p:sldId id="300" r:id="rId14"/>
-    <p:sldId id="301" r:id="rId15"/>
-    <p:sldId id="302" r:id="rId16"/>
-    <p:sldId id="303" r:id="rId17"/>
-    <p:sldId id="258" r:id="rId18"/>
-    <p:sldId id="260" r:id="rId19"/>
-    <p:sldId id="277" r:id="rId20"/>
-    <p:sldId id="261" r:id="rId21"/>
-    <p:sldId id="293" r:id="rId22"/>
-    <p:sldId id="280" r:id="rId23"/>
-    <p:sldId id="295" r:id="rId24"/>
-    <p:sldId id="296" r:id="rId25"/>
-    <p:sldId id="297" r:id="rId26"/>
-    <p:sldId id="294" r:id="rId27"/>
-    <p:sldId id="279" r:id="rId28"/>
+    <p:sldId id="310" r:id="rId14"/>
+    <p:sldId id="300" r:id="rId15"/>
+    <p:sldId id="301" r:id="rId16"/>
+    <p:sldId id="302" r:id="rId17"/>
+    <p:sldId id="303" r:id="rId18"/>
+    <p:sldId id="311" r:id="rId19"/>
+    <p:sldId id="258" r:id="rId20"/>
+    <p:sldId id="260" r:id="rId21"/>
+    <p:sldId id="277" r:id="rId22"/>
+    <p:sldId id="312" r:id="rId23"/>
+    <p:sldId id="261" r:id="rId24"/>
+    <p:sldId id="293" r:id="rId25"/>
+    <p:sldId id="280" r:id="rId26"/>
+    <p:sldId id="295" r:id="rId27"/>
+    <p:sldId id="296" r:id="rId28"/>
+    <p:sldId id="297" r:id="rId29"/>
+    <p:sldId id="294" r:id="rId30"/>
+    <p:sldId id="279" r:id="rId31"/>
   </p:sldIdLst>
   <p:sldSz cx="12192000" cy="6858000"/>
   <p:notesSz cx="6858000" cy="9144000"/>
@@ -241,7 +244,7 @@
           <a:p>
             <a:fld id="{7BAEECA8-D063-486F-AE31-5020270C1449}" type="datetimeFigureOut">
               <a:rPr lang="en-US" smtClean="0"/>
-              <a:t>7/13/2026</a:t>
+              <a:t>9/5/2026</a:t>
             </a:fld>
             <a:endParaRPr lang="en-US"/>
           </a:p>
@@ -1124,15 +1127,15 @@
           <inkml:channelProperty channel="OE" name="resolution" value="1000" units="1/deg"/>
         </inkml:channelProperties>
       </inkml:inkSource>
-      <inkml:timestamp xml:id="ts0" timeString="2026-07-09T02:51:36.024"/>
+      <inkml:timestamp xml:id="ts0" timeString="2026-07-09T02:54:05.523"/>
     </inkml:context>
     <inkml:brush xml:id="br0">
       <inkml:brushProperty name="width" value="0.1" units="cm"/>
       <inkml:brushProperty name="height" value="0.1" units="cm"/>
-      <inkml:brushProperty name="color" value="#5B2D90"/>
+      <inkml:brushProperty name="color" value="#33CCFF"/>
     </inkml:brush>
   </inkml:definitions>
-  <inkml:trace contextRef="#ctx0" brushRef="#br0">45 65 6257 0 0,'0'0'-132'0'0,"-3"0"20"0"0,-8 2 42 0 0,-20 0 1087 0 0,47-8 512 0 0,48-9-822 0 0,-22 10-675 0 0,591-37 282 0 0,-630 42-268 0 0,10 0 521 0 0,-7 0-1604 0 0</inkml:trace>
+  <inkml:trace contextRef="#ctx0" brushRef="#br0">49 176 6113 0 0,'-35'6'1438'0'0,"21"3"1189"0"0,24-4-1399 0 0,34-3-1024 0 0,367-14-151 0 0,-215 10-20 0 0,286-13 104 0 0,-479 15-123 0 0,55-3 228 0 0,-57 1 345 0 0,-7-4-202 0 0,-21-13-50 0 0,-47-26-212 0 0,65 39-14 0 0,-105-56 88 0 0,112 62-181 0 0,-35-24 209 0 0,36 23-172 0 0,135 31-1069 0 0,-86-21 997 0 0,205 54-190 0 0,-237-59 163 0 0,-11-3 23 0 0,-1 0 0 0 0,0 0 1 0 0,0 0-1 0 0,0 1 0 0 0,0-1 1 0 0,0 1-1 0 0,0 0 0 0 0,-1 0 1 0 0,1 1-1 0 0,-1-1 0 0 0,4 4 0 0 0,-6-5-5 0 0,-12 16-62 0 0,-3-6 82 0 0,0 0-1 0 0,-2-1 1 0 0,1 0-1 0 0,-1-1 1 0 0,-19 7-1 0 0,-95 33 0 0 0,42-17-4 0 0,66-23-109 0 0,-17 7-509 0 0,-67 18-1 0 0</inkml:trace>
 </inkml:ink>
 </file>
 
@@ -1156,15 +1159,15 @@
           <inkml:channelProperty channel="OE" name="resolution" value="1000" units="1/deg"/>
         </inkml:channelProperties>
       </inkml:inkSource>
-      <inkml:timestamp xml:id="ts0" timeString="2026-07-09T02:51:36.546"/>
+      <inkml:timestamp xml:id="ts0" timeString="2026-07-09T02:54:06.587"/>
     </inkml:context>
     <inkml:brush xml:id="br0">
       <inkml:brushProperty name="width" value="0.1" units="cm"/>
       <inkml:brushProperty name="height" value="0.1" units="cm"/>
-      <inkml:brushProperty name="color" value="#5B2D90"/>
+      <inkml:brushProperty name="color" value="#33CCFF"/>
     </inkml:brush>
   </inkml:definitions>
-  <inkml:trace contextRef="#ctx0" brushRef="#br0">0 6 6129 0 0,'6'-6'3823'0'0,"6"28"-3819"0"0,-1 1 0 0 0,-1 0 0 0 0,11 35 0 0 0,10 25 6 0 0,-2 4 67 0 0,-28-85-64 0 0,1 5 258 0 0,-1 0-1015 0 0,12-39-6995 0 0</inkml:trace>
+  <inkml:trace contextRef="#ctx0" brushRef="#br0">38 0 6209 0 0,'-16'0'-58'0'0,"13"0"306"0"0,-9 4 213 0 0,12-4-432 0 0,0-1 0 0 0,0 1-1 0 0,-1 0 1 0 0,1 0 0 0 0,0 0-1 0 0,0 0 1 0 0,0 0 0 0 0,0 0-1 0 0,-1 0 1 0 0,1 0 0 0 0,0 0-1 0 0,0 0 1 0 0,0 0 0 0 0,0 0-1 0 0,-1 0 1 0 0,1 0 0 0 0,0 0-1 0 0,0 0 1 0 0,0 0 0 0 0,-1 0-1 0 0,1 0 1 0 0,0 0 0 0 0,0 0-1 0 0,0 0 1 0 0,0 1 0 0 0,-1-1-1 0 0,1 0 1 0 0,0 0 0 0 0,0 0-1 0 0,0 0 1 0 0,0 0 0 0 0,0 0-1 0 0,0 0 1 0 0,-1 1 0 0 0,1-1-1 0 0,0 0 1 0 0,0 0 0 0 0,0 0-1 0 0,0 0 1 0 0,0 1 0 0 0,0-1-1 0 0,0 0 1 0 0,0 0 0 0 0,0 0-1 0 0,0 0 1 0 0,0 1 0 0 0,0-1-1 0 0,0 0 1 0 0,0 0 0 0 0,0 0-1 0 0,0 0 1 0 0,0 1 0 0 0,0-1-1 0 0,0 0 1 0 0,0 0-1 0 0,0 0 1 0 0,0 1 0 0 0,0-1-1 0 0,0 0 1 0 0,0 0 0 0 0,0 0-1 0 0,16 4-17 0 0,-1 0 0 0 0,1-2-1 0 0,0 0 1 0 0,-1 0 0 0 0,32-3-1 0 0,-3 2 1 0 0,551 41 122 0 0,-534-35 234 0 0,-59-7-294 0 0,21 2 261 0 0,-23-2-343 0 0,12-6-436 0 0,-5-6-3902 0 0,-2 3 1385 0 0</inkml:trace>
 </inkml:ink>
 </file>
 
@@ -1188,15 +1191,15 @@
           <inkml:channelProperty channel="OE" name="resolution" value="1000" units="1/deg"/>
         </inkml:channelProperties>
       </inkml:inkSource>
-      <inkml:timestamp xml:id="ts0" timeString="2026-07-09T02:51:37.174"/>
+      <inkml:timestamp xml:id="ts0" timeString="2026-07-09T02:54:07.161"/>
     </inkml:context>
     <inkml:brush xml:id="br0">
       <inkml:brushProperty name="width" value="0.1" units="cm"/>
       <inkml:brushProperty name="height" value="0.1" units="cm"/>
-      <inkml:brushProperty name="color" value="#5B2D90"/>
+      <inkml:brushProperty name="color" value="#33CCFF"/>
     </inkml:brush>
   </inkml:definitions>
-  <inkml:trace contextRef="#ctx0" brushRef="#br0">53 15 6053 0 0,'0'0'28'0'0,"-3"5"-33"0"0,-43 66-30 0 0,45-68 43 0 0,0 0 0 0 0,0 0-1 0 0,1 0 1 0 0,0-1-1 0 0,-1 1 1 0 0,1 0 0 0 0,0 0-1 0 0,1 0 1 0 0,-1 0 0 0 0,0 0-1 0 0,1 0 1 0 0,0 0 0 0 0,-1-1-1 0 0,1 1 1 0 0,0 0 0 0 0,1 0-1 0 0,-1-1 1 0 0,0 1 0 0 0,1-1-1 0 0,-1 1 1 0 0,1-1 0 0 0,0 0-1 0 0,0 1 1 0 0,0-1 0 0 0,0 0-1 0 0,3 2 1 0 0,-1-1 37 0 0,0 0 0 0 0,0 0 0 0 0,1-1 0 0 0,-1 0 0 0 0,1 1 0 0 0,-1-2 0 0 0,1 1 0 0 0,0 0 1 0 0,0-1-1 0 0,0 0 0 0 0,0 0 0 0 0,0 0 0 0 0,0-1 0 0 0,0 0 0 0 0,0 0 0 0 0,0 0 0 0 0,0 0 0 0 0,0-1 0 0 0,0 0 0 0 0,0 0 0 0 0,0 0 0 0 0,0-1 0 0 0,-1 0 1 0 0,1 0-1 0 0,8-4 0 0 0,-8 3 35 0 0,0 0 0 0 0,0-1 0 0 0,0 1 0 0 0,-1-1 0 0 0,0 0 0 0 0,0 0 0 0 0,0 0 0 0 0,0 0 0 0 0,-1-1 0 0 0,1 0 0 0 0,-1 0 0 0 0,0 1 0 0 0,-1-2 0 0 0,1 1 0 0 0,-1 0 1 0 0,0-1-1 0 0,0 1 0 0 0,-1-1 0 0 0,1 1 0 0 0,-1-1 0 0 0,0-10 0 0 0,-1 14-65 0 0,-1 0 1 0 0,0 0-1 0 0,1 0 0 0 0,-1 0 1 0 0,0 1-1 0 0,0-1 0 0 0,0 0 1 0 0,0 0-1 0 0,0 1 0 0 0,-1-1 1 0 0,1 1-1 0 0,0-1 1 0 0,-1 1-1 0 0,1-1 0 0 0,-1 1 1 0 0,0 0-1 0 0,1 0 0 0 0,-1 0 1 0 0,0 0-1 0 0,0 0 0 0 0,0 0 1 0 0,1 0-1 0 0,-1 1 1 0 0,0-1-1 0 0,-3 0 0 0 0,-50-11 113 0 0,52 11-112 0 0,-25-5 31 0 0,7 1-1202 0 0,7 4-3143 0 0</inkml:trace>
+  <inkml:trace contextRef="#ctx0" brushRef="#br0">88 47 6681 0 0,'-35'-23'-557'0'0,"-18"-1"6113"0"0,63 27-5574 0 0,93 21 25 0 0,285 85-130 0 0,-386-109 113 0 0,0 1 1 0 0,0-1 0 0 0,-1 1 0 0 0,1 0-1 0 0,0 0 1 0 0,0 0 0 0 0,-1 0 0 0 0,1 0-1 0 0,0 0 1 0 0,-1 0 0 0 0,1 0 0 0 0,-1 1-1 0 0,0-1 1 0 0,1 1 0 0 0,-1-1 0 0 0,0 1-1 0 0,0-1 1 0 0,0 1 0 0 0,1 3 0 0 0,-1-3 4 0 0,-1-1 0 0 0,0 1 0 0 0,0 0 0 0 0,0-1 0 0 0,0 1 0 0 0,0 0 0 0 0,-1-1 0 0 0,1 1 0 0 0,0 0 0 0 0,-1-1 0 0 0,1 1 0 0 0,-1-1 0 0 0,0 1-1 0 0,0-1 1 0 0,1 1 0 0 0,-1-1 0 0 0,0 1 0 0 0,-1 0 0 0 0,-7 8-6 0 0,0-1-1 0 0,0 0 0 0 0,0-1 0 0 0,-19 13 0 0 0,22-16 8 0 0,-59 37-50 0 0,-138 67 1 0 0,98-56-38 0 0,100-50-126 0 0,1-1-1 0 0,-1 0 0 0 0,0 1 1 0 0,0-2-1 0 0,0 1 0 0 0,0-1 1 0 0,0 1-1 0 0,-8 0 0 0 0</inkml:trace>
 </inkml:ink>
 </file>
 
@@ -1220,15 +1223,15 @@
           <inkml:channelProperty channel="OE" name="resolution" value="1000" units="1/deg"/>
         </inkml:channelProperties>
       </inkml:inkSource>
-      <inkml:timestamp xml:id="ts0" timeString="2026-07-09T02:51:37.676"/>
+      <inkml:timestamp xml:id="ts0" timeString="2026-07-09T02:54:08.394"/>
     </inkml:context>
     <inkml:brush xml:id="br0">
       <inkml:brushProperty name="width" value="0.1" units="cm"/>
       <inkml:brushProperty name="height" value="0.1" units="cm"/>
-      <inkml:brushProperty name="color" value="#5B2D90"/>
+      <inkml:brushProperty name="color" value="#33CCFF"/>
     </inkml:brush>
   </inkml:definitions>
-  <inkml:trace contextRef="#ctx0" brushRef="#br0">31 15 5953 0 0,'1'0'-83'0'0,"22"-7"18"0"0,-23 7 74 0 0,1-1-1 0 0,0 1 1 0 0,-1 0-1 0 0,1 0 1 0 0,-1 0 0 0 0,1 0-1 0 0,0 0 1 0 0,-1 0-1 0 0,1 0 1 0 0,0 0-1 0 0,-1 0 1 0 0,1 0-1 0 0,0 0 1 0 0,-1 0-1 0 0,1 0 1 0 0,-1 1-1 0 0,1-1 1 0 0,0 0 0 0 0,-1 0-1 0 0,1 1 1 0 0,-1-1-1 0 0,1 1 1 0 0,-1-1-1 0 0,1 0 1 0 0,-1 1-1 0 0,1-1 1 0 0,-1 1-1 0 0,1-1 1 0 0,-1 1-1 0 0,0-1 1 0 0,1 1 0 0 0,-1-1-1 0 0,0 1 1 0 0,1-1-1 0 0,-1 1 1 0 0,0 1-1 0 0,-1 0-6 0 0,0 1 0 0 0,0-1 0 0 0,-1 1 0 0 0,1-1 0 0 0,-1 0 0 0 0,1 1 0 0 0,-1-1 0 0 0,0 0 0 0 0,0 0 0 0 0,0 0 0 0 0,-3 2 0 0 0,-8 9-4 0 0,-21 42-28 0 0,33-54 33 0 0,0 1 1 0 0,1 0-1 0 0,-1-1 1 0 0,1 1 0 0 0,-1 0-1 0 0,1 0 1 0 0,0-1-1 0 0,-1 1 1 0 0,1 0 0 0 0,0 0-1 0 0,0-1 1 0 0,1 1-1 0 0,-1 0 1 0 0,0 0 0 0 0,0-1-1 0 0,1 1 1 0 0,-1 0-1 0 0,1-1 1 0 0,0 1 0 0 0,-1 0-1 0 0,1-1 1 0 0,0 1 0 0 0,0-1-1 0 0,0 1 1 0 0,0-1-1 0 0,0 0 1 0 0,0 1 0 0 0,1-1-1 0 0,-1 0 1 0 0,0 0-1 0 0,1 0 1 0 0,-1 0 0 0 0,2 1-1 0 0,2 2 22 0 0,0-1 0 0 0,0 0-1 0 0,0 0 1 0 0,1 0 0 0 0,-1-1 0 0 0,0 0-1 0 0,1 0 1 0 0,5 1 0 0 0,-2-2 30 0 0,-1 0 0 0 0,1 0 0 0 0,-1-1 0 0 0,0 0 0 0 0,1-1 0 0 0,-1 0 0 0 0,1 0 0 0 0,-1-1 1 0 0,0 0-1 0 0,0 0 0 0 0,14-6 0 0 0,-19 6-7 0 0,1 0 0 0 0,0 0 1 0 0,-1-1-1 0 0,1 1 0 0 0,-1-1 1 0 0,0 1-1 0 0,0-1 0 0 0,0 0 0 0 0,0 0 1 0 0,0 0-1 0 0,-1-1 0 0 0,1 1 1 0 0,-1-1-1 0 0,0 1 0 0 0,0-1 0 0 0,0 0 1 0 0,0 0-1 0 0,-1 0 0 0 0,0 0 1 0 0,0 0-1 0 0,0 0 0 0 0,0 0 1 0 0,-1 0-1 0 0,1-9 0 0 0,-1 11-11 0 0,0-1-1 0 0,-1 0 1 0 0,1 0-1 0 0,-1 0 1 0 0,1 0-1 0 0,-1 1 1 0 0,0-1-1 0 0,0 0 1 0 0,-1 1-1 0 0,1-1 1 0 0,0 1-1 0 0,-1-1 1 0 0,1 1-1 0 0,-1 0 1 0 0,0-1 0 0 0,0 1-1 0 0,0 0 1 0 0,0 0-1 0 0,0 0 1 0 0,-1 1-1 0 0,1-1 1 0 0,0 0-1 0 0,-1 1 1 0 0,1-1-1 0 0,-1 1 1 0 0,-3-1-1 0 0,-8-3-284 0 0,1 0-1 0 0,-2 2 0 0 0,1 0 0 0 0,-15-2 1 0 0,-1 0-3680 0 0</inkml:trace>
+  <inkml:trace contextRef="#ctx0" brushRef="#br0">56 37 6773 0 0,'-16'3'-359'0'0,"12"-3"533"0"0,1 0-1 0 0,0 1 1 0 0,-1 0-1 0 0,1-1 1 0 0,0 1-1 0 0,0 0 0 0 0,0 0 1 0 0,0 1-1 0 0,-7 3 2205 0 0,375-17-1244 0 0,129 17-1057 0 0,-404-8-629 0 0,-68-31-6157 0 0,-17 26 4262 0 0</inkml:trace>
 </inkml:ink>
 </file>
 
@@ -1252,15 +1255,15 @@
           <inkml:channelProperty channel="OE" name="resolution" value="1000" units="1/deg"/>
         </inkml:channelProperties>
       </inkml:inkSource>
-      <inkml:timestamp xml:id="ts0" timeString="2026-07-09T02:51:38.048"/>
+      <inkml:timestamp xml:id="ts0" timeString="2026-07-09T02:54:08.917"/>
     </inkml:context>
     <inkml:brush xml:id="br0">
       <inkml:brushProperty name="width" value="0.1" units="cm"/>
       <inkml:brushProperty name="height" value="0.1" units="cm"/>
-      <inkml:brushProperty name="color" value="#5B2D90"/>
+      <inkml:brushProperty name="color" value="#33CCFF"/>
     </inkml:brush>
   </inkml:definitions>
-  <inkml:trace contextRef="#ctx0" brushRef="#br0">9 72 6081 0 0,'-8'-70'3546'0'0,"8"68"-3103"0"0,2 27 81 0 0,4 39-602 0 0,17 73 1 0 0,1 12 72 0 0,-19-59-759 0 0,-5-53-4242 0 0</inkml:trace>
+  <inkml:trace contextRef="#ctx0" brushRef="#br0">267 41 5741 0 0,'-54'-31'728'0'0,"53"30"-467"0"0,-32-7 4577 0 0,142 31-4783 0 0,-2 5-1 0 0,172 70 1 0 0,-277-97-60 0 0,40 19-115 0 0,-41-19 112 0 0,1 0 0 0 0,-1 0-1 0 0,1 0 1 0 0,-1 0 0 0 0,1 0 0 0 0,-1 1 0 0 0,0-1-1 0 0,1 0 1 0 0,-1 1 0 0 0,0-1 0 0 0,0 0 0 0 0,0 1 0 0 0,0 0-1 0 0,0-1 1 0 0,0 1 0 0 0,0-1 0 0 0,-1 1 0 0 0,1 0-1 0 0,-1 0 1 0 0,1 2 0 0 0,-3-1 4 0 0,0 0-1 0 0,0 1 1 0 0,0-1-1 0 0,-1 0 1 0 0,1 0-1 0 0,-1 0 1 0 0,0 0-1 0 0,0-1 1 0 0,0 1-1 0 0,0-1 1 0 0,-1 0-1 0 0,1 0 1 0 0,-7 3-1 0 0,-52 25-14 0 0,-1-4 0 0 0,-2-2 0 0 0,-112 26-1 0 0,91-27-12 0 0,-85 21-960 0 0,99-29-4649 0 0</inkml:trace>
 </inkml:ink>
 </file>
 
@@ -1284,15 +1287,15 @@
           <inkml:channelProperty channel="OE" name="resolution" value="1000" units="1/deg"/>
         </inkml:channelProperties>
       </inkml:inkSource>
-      <inkml:timestamp xml:id="ts0" timeString="2026-07-09T02:51:39.175"/>
+      <inkml:timestamp xml:id="ts0" timeString="2026-07-09T02:54:12.694"/>
     </inkml:context>
     <inkml:brush xml:id="br0">
       <inkml:brushProperty name="width" value="0.1" units="cm"/>
       <inkml:brushProperty name="height" value="0.1" units="cm"/>
-      <inkml:brushProperty name="color" value="#5B2D90"/>
+      <inkml:brushProperty name="color" value="#33CCFF"/>
     </inkml:brush>
   </inkml:definitions>
-  <inkml:trace contextRef="#ctx0" brushRef="#br0">26 38 6577 0 0,'0'0'-18'0'0,"-18"-2"32"0"0,10 0 169 0 0,11 1 197 0 0,635-31-406 0 0,-597 32 130 0 0,-23 0-4169 0 0</inkml:trace>
+  <inkml:trace contextRef="#ctx0" brushRef="#br0">1 1855 6669 0 0,'17'-26'3823'0'0,"43"-36"-3760"0"0,-21 24 94 0 0,109-106-71 0 0,-66 68-48 0 0,-6 2-16 0 0,198-173-2 0 0,198-53-74 0 0,-315 207 40 0 0,-115 68 27 0 0,307-167-90 0 0,10 38 0 0 0,-245 111 40 0 0,143-34 1 0 0,541-83-38 0 0,150 76 25 0 0,-590 64 61 0 0,746-20 13 0 0,-38 82-36 0 0,-487 8 13 0 0,-517-43-15 0 0,431 62-63 0 0,-116 3 87 0 0,312 91-117 0 0,-532-122 16 0 0,241 98 1 0 0,33 31 8 0 0,157 119 40 0 0,-561-274 59 0 0,8 3-65 0 0,-2 1 0 0 0,0 1 1 0 0,50 42-1 0 0,67 50 117 0 0,-149-111-65 0 0,17 12 55 0 0,-11-9-48 0 0,-5-4 15 0 0,-6-3-1647 0 0,-16-13 342 0 0,5 3-1156 0 0,2 4-399 0 0</inkml:trace>
 </inkml:ink>
 </file>
 
@@ -1316,15 +1319,15 @@
           <inkml:channelProperty channel="OE" name="resolution" value="1000" units="1/deg"/>
         </inkml:channelProperties>
       </inkml:inkSource>
-      <inkml:timestamp xml:id="ts0" timeString="2026-07-09T02:51:39.580"/>
+      <inkml:timestamp xml:id="ts0" timeString="2026-07-09T02:54:13.979"/>
     </inkml:context>
     <inkml:brush xml:id="br0">
       <inkml:brushProperty name="width" value="0.1" units="cm"/>
       <inkml:brushProperty name="height" value="0.1" units="cm"/>
-      <inkml:brushProperty name="color" value="#5B2D90"/>
+      <inkml:brushProperty name="color" value="#33CCFF"/>
     </inkml:brush>
   </inkml:definitions>
-  <inkml:trace contextRef="#ctx0" brushRef="#br0">0 1 4320 0 0,'0'0'4601'0'0,"3"13"-4587"0"0,2 10-48 0 0,0 1 0 0 0,2-1 1 0 0,1 0-1 0 0,0 0 0 0 0,2-1 0 0 0,0 0 1 0 0,22 32-1 0 0,-14-23-26 0 0,21 51 0 0 0,-31-64 27 0 0,-10-10 320 0 0</inkml:trace>
+  <inkml:trace contextRef="#ctx0" brushRef="#br0">531 27 6481 0 0,'-37'-26'4114'0'0,"35"37"-3190"0"0,7 23-881 0 0,10 36-259 0 0,-7-38 195 0 0,2 1 0 0 0,17 37 1 0 0,18 50-20 0 0,-42-112 35 0 0,21 48-82 0 0,-23-54 87 0 0,6 21 69 0 0,-6-22 192 0 0,-5 0-233 0 0,1 0 1 0 0,-1-1 0 0 0,0 1-1 0 0,0-1 1 0 0,1 0 0 0 0,-1 0-1 0 0,0 0 1 0 0,0-1 0 0 0,-4 0-1 0 0,-3 0 4 0 0,-180-5 173 0 0,-70-5 153 0 0,157-3-21 0 0,85 7-922 0 0,18 6 279 0 0,0 0 1 0 0,1 1 0 0 0,-1-1 0 0 0,0 0-1 0 0,0 0 1 0 0,1 0 0 0 0,-1 1 0 0 0,1-1-1 0 0,-1 0 1 0 0,1 0 0 0 0,-1 0 0 0 0,1 0-1 0 0,-1 0 1 0 0,1 0 0 0 0,0 0 0 0 0,0 0 0 0 0,-1 0-1 0 0,1 0 1 0 0,0-1 0 0 0,0 1 0 0 0,0 0-1 0 0,0 0 1 0 0,0 0 0 0 0,0 0 0 0 0,1-1-1 0 0</inkml:trace>
 </inkml:ink>
 </file>
 
@@ -1348,15 +1351,15 @@
           <inkml:channelProperty channel="OE" name="resolution" value="1000" units="1/deg"/>
         </inkml:channelProperties>
       </inkml:inkSource>
-      <inkml:timestamp xml:id="ts0" timeString="2026-07-09T02:51:40.069"/>
+      <inkml:timestamp xml:id="ts0" timeString="2026-07-09T02:55:58.393"/>
     </inkml:context>
     <inkml:brush xml:id="br0">
       <inkml:brushProperty name="width" value="0.1" units="cm"/>
       <inkml:brushProperty name="height" value="0.1" units="cm"/>
-      <inkml:brushProperty name="color" value="#5B2D90"/>
+      <inkml:brushProperty name="color" value="#33CCFF"/>
     </inkml:brush>
   </inkml:definitions>
-  <inkml:trace contextRef="#ctx0" brushRef="#br0">52 1 5937 0 0,'1'0'2'0'0,"-1"0"1"0"0,0 0 0 0 0,0 0 0 0 0,0 0-1 0 0,0 0 1 0 0,0 0 0 0 0,0 0 0 0 0,0 0-1 0 0,0 0 1 0 0,0 0 0 0 0,0 0 0 0 0,0 0-1 0 0,0 0 1 0 0,0 0 0 0 0,0 0 0 0 0,0 0-1 0 0,0 0 1 0 0,0 0 0 0 0,0 0 0 0 0,1 0-1 0 0,-1 0 1 0 0,0 0 0 0 0,0 0 0 0 0,0 0 0 0 0,0 0-1 0 0,0 0 1 0 0,0 0 0 0 0,0 0 0 0 0,-8 13 19 0 0,-22 39-79 0 0,28-49 54 0 0,-1 1 1 0 0,2 1-1 0 0,-1-1 1 0 0,0 0 0 0 0,1 0-1 0 0,0 1 1 0 0,0-1-1 0 0,0 1 1 0 0,0-1 0 0 0,1 8-1 0 0,1-9 13 0 0,1 1-1 0 0,-1 0 0 0 0,1 0 1 0 0,0-1-1 0 0,0 1 0 0 0,0-1 1 0 0,0 0-1 0 0,1 1 0 0 0,0-1 1 0 0,-1 0-1 0 0,1-1 0 0 0,0 1 1 0 0,0 0-1 0 0,1-1 0 0 0,-1 0 1 0 0,0 1-1 0 0,1-1 0 0 0,0-1 1 0 0,-1 1-1 0 0,1 0 0 0 0,0-1 1 0 0,0 0-1 0 0,0 0 1 0 0,0 0-1 0 0,4 0 0 0 0,18 4 93 0 0,0-1-1 0 0,44 1 0 0 0,-54-4-43 0 0,-8 0-9 0 0,0-2-1 0 0,-1 1 1 0 0,1-1 0 0 0,-1 0-1 0 0,1 0 1 0 0,-1-1-1 0 0,1 0 1 0 0,-1 0 0 0 0,0-1-1 0 0,0 0 1 0 0,0 0 0 0 0,0-1-1 0 0,7-5 1 0 0,-12 8-28 0 0,0-1-1 0 0,1 0 1 0 0,-1 0-1 0 0,0 0 1 0 0,0-1-1 0 0,0 1 1 0 0,-1 0-1 0 0,1-1 1 0 0,0 1 0 0 0,-1-1-1 0 0,0 0 1 0 0,1 1-1 0 0,-1-1 1 0 0,0 0-1 0 0,0 0 1 0 0,-1 0-1 0 0,1 1 1 0 0,-1-1-1 0 0,1 0 1 0 0,-1 0 0 0 0,0 0-1 0 0,0 0 1 0 0,0 0-1 0 0,0 0 1 0 0,-1 0-1 0 0,1 0 1 0 0,-1 0-1 0 0,0 0 1 0 0,0 0-1 0 0,0 1 1 0 0,0-1 0 0 0,0 0-1 0 0,-1 0 1 0 0,1 1-1 0 0,-4-5 1 0 0,1 2 35 0 0,0 0 0 0 0,0 1 0 0 0,0-1 0 0 0,-1 1 0 0 0,0 0 0 0 0,1 0 0 0 0,-2 1 0 0 0,1-1 0 0 0,0 1 0 0 0,-1 0 0 0 0,1 1 0 0 0,-8-3 0 0 0,-33-9-616 0 0,0 10-3455 0 0</inkml:trace>
+  <inkml:trace contextRef="#ctx0" brushRef="#br0">9 126 1400 0 0,'-8'0'7463'0'0,"32"6"-7437"0"0,-19-4 22 0 0,3 0-10 0 0,0 0 1 0 0,0-1 0 0 0,0 0-1 0 0,13 1 1 0 0,-20-2-38 0 0,354 9 1106 0 0,-336-6-965 0 0,-16-4 4 0 0,-29-8 0 0 0,-8-1-152 0 0,1-2 1 0 0,-57-27 0 0 0,9 0-25 0 0,9 8 149 0 0,71 31-52 0 0,-14-12 74 0 0,13 11-109 0 0,9 4-24 0 0,283 69 149 0 0,-253-58-35 0 0,-36-14-69 0 0,-36 25 22 0 0,-31 11-11 0 0,-78 58 1 0 0,39-24 4 0 0,46-27-1006 0 0</inkml:trace>
 </inkml:ink>
 </file>
 
@@ -1380,15 +1383,15 @@
           <inkml:channelProperty channel="OE" name="resolution" value="1000" units="1/deg"/>
         </inkml:channelProperties>
       </inkml:inkSource>
-      <inkml:timestamp xml:id="ts0" timeString="2026-07-09T02:51:40.492"/>
+      <inkml:timestamp xml:id="ts0" timeString="2026-07-09T02:56:01.276"/>
     </inkml:context>
     <inkml:brush xml:id="br0">
       <inkml:brushProperty name="width" value="0.1" units="cm"/>
       <inkml:brushProperty name="height" value="0.1" units="cm"/>
-      <inkml:brushProperty name="color" value="#5B2D90"/>
+      <inkml:brushProperty name="color" value="#33CCFF"/>
     </inkml:brush>
   </inkml:definitions>
-  <inkml:trace contextRef="#ctx0" brushRef="#br0">92 0 5917 0 0,'-5'3'-19'0'0,"-1"1"0"0"0,1-1 0 0 0,0 1 0 0 0,0 0 0 0 0,1 1 0 0 0,-1-1 0 0 0,1 1 0 0 0,0 0 0 0 0,0 0 0 0 0,-6 10 0 0 0,3-4-11 0 0,1 0 0 0 0,1 0 0 0 0,0 1-1 0 0,-5 16 1 0 0,10-26 41 0 0,-1 0 0 0 0,1 1 1 0 0,0-1-1 0 0,-1 1 0 0 0,1-1 0 0 0,1 1 0 0 0,-1-1 0 0 0,0 0 1 0 0,0 1-1 0 0,1-1 0 0 0,-1 1 0 0 0,1-1 0 0 0,0 0 0 0 0,0 1 1 0 0,0-1-1 0 0,0 0 0 0 0,0 0 0 0 0,0 0 0 0 0,1 0 0 0 0,-1 0 0 0 0,1 0 1 0 0,-1 0-1 0 0,1 0 0 0 0,0-1 0 0 0,0 1 0 0 0,0 0 0 0 0,0-1 1 0 0,0 0-1 0 0,0 1 0 0 0,0-1 0 0 0,0 0 0 0 0,0 0 0 0 0,1 0 0 0 0,-1 0 1 0 0,0-1-1 0 0,5 2 0 0 0,2 0 56 0 0,1 0 1 0 0,-1 0-1 0 0,0 0 1 0 0,1-1-1 0 0,-1-1 1 0 0,1 0-1 0 0,-1 0 1 0 0,12-2-1 0 0,-12 0 14 0 0,-1 0 0 0 0,1 0-1 0 0,0-1 1 0 0,-1-1 0 0 0,0 0 0 0 0,0 0-1 0 0,0 0 1 0 0,0-1 0 0 0,-1 0-1 0 0,0 0 1 0 0,10-10 0 0 0,-16 13-49 0 0,1 0 1 0 0,0 0 0 0 0,-1 0-1 0 0,1 0 1 0 0,-1 0-1 0 0,1 0 1 0 0,-1-1-1 0 0,0 1 1 0 0,0-1 0 0 0,0 1-1 0 0,0 0 1 0 0,-1-1-1 0 0,1 0 1 0 0,-1 1-1 0 0,1-1 1 0 0,-1 1 0 0 0,0-5-1 0 0,-1 4-11 0 0,0 0 0 0 0,0-1 0 0 0,0 1 0 0 0,0 0-1 0 0,0 0 1 0 0,-1 0 0 0 0,0 1 0 0 0,1-1 0 0 0,-1 0 0 0 0,0 0 0 0 0,0 1-1 0 0,-1 0 1 0 0,1-1 0 0 0,0 1 0 0 0,-1 0 0 0 0,0 0 0 0 0,-4-3-1 0 0,0 1 16 0 0,0 0-1 0 0,0 0 0 0 0,-1 1 0 0 0,1 0 0 0 0,-1 1 0 0 0,1-1 0 0 0,-1 2 0 0 0,0-1 0 0 0,-10 0 0 0 0,-72-1-1791 0 0,60 4-1176 0 0</inkml:trace>
+  <inkml:trace contextRef="#ctx0" brushRef="#br0">8 104 6633 0 0,'0'0'-429'0'0,"-2"0"-252"0"0,2 0 714 0 0,-1 0 0 0 0,1 0 0 0 0,0 0-1 0 0,0 0 1 0 0,-1 0 0 0 0,1 0 0 0 0,0 0-1 0 0,0 0 1 0 0,-1 0 0 0 0,1 0 0 0 0,0 0-1 0 0,0-1 1 0 0,0 1 0 0 0,-1 0 0 0 0,1 0 0 0 0,0 0-1 0 0,0 0 1 0 0,0 0 0 0 0,-1-1 0 0 0,1 1-1 0 0,0 0 1 0 0,0 0 0 0 0,0 0 0 0 0,0-1-1 0 0,0 1 1 0 0,0 0 0 0 0,-1 0 0 0 0,1-1 0 0 0,0 1-1 0 0,0 0 1 0 0,0 0 0 0 0,0 0 0 0 0,0-1-1 0 0,0 1 1 0 0,0 0 0 0 0,0 0 0 0 0,0-1-1 0 0,0 1 1 0 0,0-1 0 0 0,9-2 24 0 0,1 1-1 0 0,-1-1 1 0 0,1 2-1 0 0,-1-1 1 0 0,1 1 0 0 0,0 1-1 0 0,11 0 1 0 0,84 7 160 0 0,-55-3-135 0 0,95 4 489 0 0,-142-8-406 0 0,14-2 111 0 0,-17-1-268 0 0,-3-7 45 0 0,-19-10-19 0 0,1 8-42 0 0,-1 0 0 0 0,0 2 1 0 0,-1 0-1 0 0,-24-7 1 0 0,34 13 6 0 0,10 3 6 0 0,1 0-11 0 0,-7 0 19 0 0,7 0 49 0 0,11 3-53 0 0,24 4-11 0 0,0 2 1 0 0,0 2-1 0 0,-1 1 1 0 0,-1 1-1 0 0,0 1 1 0 0,45 28-1 0 0,-75-41 5 0 0,-1 1-1 0 0,1-1 1 0 0,-1 0-1 0 0,1 0 1 0 0,-1 1-1 0 0,1-1 1 0 0,-1 0 0 0 0,1 1-1 0 0,-1-1 1 0 0,1 0-1 0 0,-1 1 1 0 0,0-1-1 0 0,1 1 1 0 0,-1-1-1 0 0,0 1 1 0 0,1-1 0 0 0,-1 1-1 0 0,0-1 1 0 0,1 1-1 0 0,-1-1 1 0 0,0 1-1 0 0,0-1 1 0 0,0 1 0 0 0,0 0-1 0 0,0-1 1 0 0,1 1-1 0 0,-1-1 1 0 0,0 1-1 0 0,0-1 1 0 0,0 1-1 0 0,0 0 1 0 0,-1-1 0 0 0,1 1-1 0 0,0 0 1 0 0,-18 15 87 0 0,-43 10 52 0 0,50-22-118 0 0,-55 18 34 0 0,41-15-2697 0 0</inkml:trace>
 </inkml:ink>
 </file>
 
@@ -1444,15 +1447,15 @@
           <inkml:channelProperty channel="OE" name="resolution" value="1000" units="1/deg"/>
         </inkml:channelProperties>
       </inkml:inkSource>
-      <inkml:timestamp xml:id="ts0" timeString="2026-07-09T02:51:40.757"/>
+      <inkml:timestamp xml:id="ts0" timeString="2026-07-09T04:58:32.379"/>
     </inkml:context>
     <inkml:brush xml:id="br0">
-      <inkml:brushProperty name="width" value="0.1" units="cm"/>
-      <inkml:brushProperty name="height" value="0.1" units="cm"/>
-      <inkml:brushProperty name="color" value="#5B2D90"/>
+      <inkml:brushProperty name="width" value="0.2" units="cm"/>
+      <inkml:brushProperty name="height" value="0.2" units="cm"/>
+      <inkml:brushProperty name="color" value="#FFC114"/>
     </inkml:brush>
   </inkml:definitions>
-  <inkml:trace contextRef="#ctx0" brushRef="#br0">0 10 6153 0 0,'4'-8'1593'0'0,"-4"8"-1565"0"0,0 0 1 0 0,0 0 0 0 0,1 0 0 0 0,-1 0-1 0 0,0 0 1 0 0,0 0 0 0 0,0 0 0 0 0,0 0-1 0 0,0 1 1 0 0,0-1 0 0 0,0 0-1 0 0,0 0 1 0 0,0 0 0 0 0,1 0 0 0 0,-1 0-1 0 0,0 0 1 0 0,0 0 0 0 0,0 0-1 0 0,0 0 1 0 0,0 0 0 0 0,0 0 0 0 0,0 0-1 0 0,1 0 1 0 0,-1 0 0 0 0,0 0-1 0 0,0 0 1 0 0,0 0 0 0 0,0 0 0 0 0,0 0-1 0 0,0 0 1 0 0,0 0 0 0 0,1 0-1 0 0,-1 0 1 0 0,0 0 0 0 0,0 0 0 0 0,0 0-1 0 0,0 0 1 0 0,0 0 0 0 0,0 0-1 0 0,0 0 1 0 0,1 0 0 0 0,-1-1 0 0 0,0 1-1 0 0,0 0 1 0 0,0 0 0 0 0,0 0 0 0 0,0 0-1 0 0,0 0 1 0 0,0 0 0 0 0,0 0-1 0 0,0 0 1 0 0,0-1 0 0 0,0 1 0 0 0,0 0-1 0 0,0 0 1 0 0,0 0 0 0 0,1 0-1 0 0,-1 0 1 0 0,0 0 0 0 0,0-1 0 0 0,3 33-62 0 0,-1-1 0 0 0,-3 56 1 0 0,2 28 7 0 0,39 297-2273 0 0,-32-356-16 0 0,-5-3-593 0 0</inkml:trace>
+  <inkml:trace contextRef="#ctx0" brushRef="#br0">53 5 2484 0 0,'0'0'1367'0'0,"-4"-1"-1181"0"0,-1 0-461 0 0,-39-2 4882 0 0,61 13-4601 0 0,-12-8 18 0 0,0-1-1 0 0,0 0 1 0 0,0 0-1 0 0,1 0 0 0 0,-1 0 1 0 0,0-1-1 0 0,10 0 1 0 0,9 1 59 0 0,6 1-40 0 0,600 25 344 0 0,-594-25-374 0 0,225 21 90 0 0,-182-16 352 0 0,-76-7-373 0 0,60-2 107 0 0,50-6-101 0 0,-23 8 69 0 0,-87 0 12 0 0,18 3 262 0 0</inkml:trace>
 </inkml:ink>
 </file>
 
@@ -1476,15 +1479,15 @@
           <inkml:channelProperty channel="OE" name="resolution" value="1000" units="1/deg"/>
         </inkml:channelProperties>
       </inkml:inkSource>
-      <inkml:timestamp xml:id="ts0" timeString="2026-07-09T02:51:42.594"/>
+      <inkml:timestamp xml:id="ts0" timeString="2026-07-09T04:58:33.128"/>
     </inkml:context>
     <inkml:brush xml:id="br0">
-      <inkml:brushProperty name="width" value="0.1" units="cm"/>
-      <inkml:brushProperty name="height" value="0.1" units="cm"/>
-      <inkml:brushProperty name="color" value="#5B2D90"/>
+      <inkml:brushProperty name="width" value="0.2" units="cm"/>
+      <inkml:brushProperty name="height" value="0.2" units="cm"/>
+      <inkml:brushProperty name="color" value="#FFC114"/>
     </inkml:brush>
   </inkml:definitions>
-  <inkml:trace contextRef="#ctx0" brushRef="#br0">48 85 6449 0 0,'0'0'-296'0'0,"-4"0"-310"0"0,-14 0 478 0 0,0 4 331 0 0,10-2 292 0 0,13-2 274 0 0,430-58-642 0 0,-309 43-27 0 0,-123 15-93 0 0,10-2 56 0 0,-21-13-5390 0 0</inkml:trace>
+  <inkml:trace contextRef="#ctx0" brushRef="#br0">158 65 5621 0 0,'-13'-6'-338'0'0,"-76"-42"1955"0"0,87 47-1392 0 0,-34-9 989 0 0,359 98-533 0 0,-202-60-586 0 0,-102-23-72 0 0,-10-4 6 0 0,0 1-1 0 0,-1 1 1 0 0,1 0-1 0 0,-1 0 0 0 0,14 7 1 0 0,-21-9 19 0 0,-1 1-44 0 0,-1 0 1 0 0,0-1-1 0 0,0 1 0 0 0,1 0 1 0 0,-1 0-1 0 0,-1-1 1 0 0,1 1-1 0 0,0 0 0 0 0,0-1 1 0 0,-1 1-1 0 0,1-1 0 0 0,0 0 1 0 0,-1 1-1 0 0,0-1 1 0 0,-2 1-1 0 0,-27 19 26 0 0,-463 232-410 0 0</inkml:trace>
 </inkml:ink>
 </file>
 
@@ -1508,15 +1511,15 @@
           <inkml:channelProperty channel="OE" name="resolution" value="1000" units="1/deg"/>
         </inkml:channelProperties>
       </inkml:inkSource>
-      <inkml:timestamp xml:id="ts0" timeString="2026-07-09T02:51:42.983"/>
+      <inkml:timestamp xml:id="ts0" timeString="2026-07-09T04:58:34.081"/>
     </inkml:context>
     <inkml:brush xml:id="br0">
-      <inkml:brushProperty name="width" value="0.1" units="cm"/>
-      <inkml:brushProperty name="height" value="0.1" units="cm"/>
-      <inkml:brushProperty name="color" value="#5B2D90"/>
+      <inkml:brushProperty name="width" value="0.2" units="cm"/>
+      <inkml:brushProperty name="height" value="0.2" units="cm"/>
+      <inkml:brushProperty name="color" value="#FFC114"/>
     </inkml:brush>
   </inkml:definitions>
-  <inkml:trace contextRef="#ctx0" brushRef="#br0">50 3 4380 0 0,'0'0'1277'0'0,"-4"-1"-1022"0"0,3 1-221 0 0,1-1 0 0 0,-1 1 0 0 0,0 0 1 0 0,0 0-1 0 0,0 0 0 0 0,0-1 0 0 0,0 1 0 0 0,0 0 1 0 0,0 0-1 0 0,0 0 0 0 0,0 0 0 0 0,1 0 0 0 0,-1 1 0 0 0,0-1 1 0 0,0 0-1 0 0,0 0 0 0 0,0 0 0 0 0,0 1 0 0 0,0-1 1 0 0,1 1-1 0 0,-1-1 0 0 0,0 1 0 0 0,0-1 0 0 0,0 1 0 0 0,1-1 1 0 0,-1 1-1 0 0,0-1 0 0 0,1 1 0 0 0,-2 1 0 0 0,1 0-4 0 0,0 1-1 0 0,-1-1 1 0 0,1 1-1 0 0,1-1 1 0 0,-1 1-1 0 0,0 0 0 0 0,0-1 1 0 0,1 1-1 0 0,0 0 1 0 0,-1 0-1 0 0,1 5 1 0 0,8 119-7 0 0,0 18 0 0 0,-8-127-6 0 0,-2 0 1 0 0,1 0-1 0 0,-2 0 1 0 0,-1 0-1 0 0,-9 31 0 0 0,9-42 103 0 0</inkml:trace>
+  <inkml:trace contextRef="#ctx0" brushRef="#br0">61 151 6373 0 0,'2'-50'-204'0'0,"-1"34"566"0"0,0 0-1 0 0,-1 0 0 0 0,0 0 0 0 0,-4-19 0 0 0,4 33-157 0 0,-5 5-196 0 0,0 2-4 0 0,0 0 0 0 0,0 1 0 0 0,1-1 0 0 0,0 1 0 0 0,0 0 0 0 0,0 0 1 0 0,0 1-1 0 0,1-1 0 0 0,0 1 0 0 0,1 0 0 0 0,-1 0 0 0 0,1 0 0 0 0,1 0 0 0 0,-1 0 1 0 0,1 0-1 0 0,0 11 0 0 0,0-9 2 0 0,0 0 0 0 0,1 0 1 0 0,0-1-1 0 0,1 1 0 0 0,0 0 0 0 0,0-1 1 0 0,0 1-1 0 0,1-1 0 0 0,1 1 0 0 0,0-1 1 0 0,0 0-1 0 0,0 0 0 0 0,1 0 0 0 0,7 10 1 0 0,-7-14 9 0 0,1 1 0 0 0,0-1-1 0 0,0 0 1 0 0,0-1 0 0 0,1 1 0 0 0,-1-1 0 0 0,1 0 0 0 0,0-1 0 0 0,-1 1 0 0 0,2-1-1 0 0,-1 0 1 0 0,0-1 0 0 0,0 1 0 0 0,0-1 0 0 0,1-1 0 0 0,-1 1 0 0 0,11-1 0 0 0,14-1-2 0 0,0 0 0 0 0,39-9 1 0 0,-55 8-41 0 0,-5 1-320 0 0,1-1 1 0 0,-1-1-1 0 0,1 0 0 0 0,-1 0 1 0 0,0-1-1 0 0,0 0 0 0 0,-1 0 0 0 0,1-1 1 0 0,-1-1-1 0 0,0 0 0 0 0,0 0 0 0 0,12-11 1 0 0,-4-3-1959 0 0</inkml:trace>
 </inkml:ink>
 </file>
 
@@ -1540,15 +1543,15 @@
           <inkml:channelProperty channel="OE" name="resolution" value="1000" units="1/deg"/>
         </inkml:channelProperties>
       </inkml:inkSource>
-      <inkml:timestamp xml:id="ts0" timeString="2026-07-09T02:51:43.564"/>
+      <inkml:timestamp xml:id="ts0" timeString="2026-07-09T04:58:34.282"/>
     </inkml:context>
     <inkml:brush xml:id="br0">
-      <inkml:brushProperty name="width" value="0.1" units="cm"/>
-      <inkml:brushProperty name="height" value="0.1" units="cm"/>
-      <inkml:brushProperty name="color" value="#5B2D90"/>
+      <inkml:brushProperty name="width" value="0.2" units="cm"/>
+      <inkml:brushProperty name="height" value="0.2" units="cm"/>
+      <inkml:brushProperty name="color" value="#FFC114"/>
     </inkml:brush>
   </inkml:definitions>
-  <inkml:trace contextRef="#ctx0" brushRef="#br0">88 0 4992 0 0,'-14'17'651'0'0,"6"-9"-651"0"0,0 1 0 0 0,0 0 0 0 0,1 0 0 0 0,1 1 0 0 0,-1-1 0 0 0,2 2 0 0 0,-1-1 0 0 0,1 0 0 0 0,-4 13 0 0 0,8-20 4 0 0,1 0 1 0 0,-1-1-1 0 0,0 1 0 0 0,1-1 0 0 0,-1 1 0 0 0,1 0 0 0 0,0-1 0 0 0,0 1 0 0 0,0 0 0 0 0,0-1 0 0 0,1 1 0 0 0,-1 0 0 0 0,1-1 0 0 0,-1 1 0 0 0,1 0 0 0 0,0-1 0 0 0,0 1 0 0 0,0-1 0 0 0,0 0 1 0 0,1 1-1 0 0,-1-1 0 0 0,1 0 0 0 0,-1 0 0 0 0,1 1 0 0 0,0-1 0 0 0,0-1 0 0 0,-1 1 0 0 0,2 0 0 0 0,-1 0 0 0 0,0-1 0 0 0,0 1 0 0 0,0-1 0 0 0,1 0 0 0 0,-1 1 0 0 0,1-1 0 0 0,-1 0 1 0 0,1-1-1 0 0,-1 1 0 0 0,1 0 0 0 0,0-1 0 0 0,-1 1 0 0 0,6-1 0 0 0,-3 1 70 0 0,-1 0-1 0 0,1-1 1 0 0,-1 1 0 0 0,1-1-1 0 0,-1 0 1 0 0,1 0 0 0 0,0 0-1 0 0,-1-1 1 0 0,1 0 0 0 0,-1 0-1 0 0,1 0 1 0 0,-1 0-1 0 0,0-1 1 0 0,1 0 0 0 0,-1 1-1 0 0,0-2 1 0 0,0 1 0 0 0,0 0-1 0 0,0-1 1 0 0,-1 0 0 0 0,1 0-1 0 0,-1 0 1 0 0,0 0 0 0 0,0 0-1 0 0,0-1 1 0 0,0 1 0 0 0,0-1-1 0 0,-1 0 1 0 0,1 0 0 0 0,-1 0-1 0 0,0 0 1 0 0,0-1 0 0 0,-1 1-1 0 0,3-8 1 0 0,-4 10-46 0 0,0 1 0 0 0,1-1 0 0 0,-1 0-1 0 0,0 0 1 0 0,0 0 0 0 0,0 0 0 0 0,0 0 0 0 0,0 1-1 0 0,-1-1 1 0 0,1 0 0 0 0,-1 0 0 0 0,1 0 0 0 0,-1 1 0 0 0,1-1-1 0 0,-1 0 1 0 0,0 1 0 0 0,0-1 0 0 0,0 0 0 0 0,0 1-1 0 0,0-1 1 0 0,0 1 0 0 0,0-1 0 0 0,-1 1 0 0 0,1 0-1 0 0,0 0 1 0 0,-1-1 0 0 0,1 1 0 0 0,-1 0 0 0 0,-3-1 0 0 0,-3-3 31 0 0,-1 1 1 0 0,0 0 0 0 0,0 1 0 0 0,-12-4-1 0 0,13 5-44 0 0,3 1-170 0 0,-21-8-423 0 0,12-1-3617 0 0</inkml:trace>
+  <inkml:trace contextRef="#ctx0" brushRef="#br0">93 75 6401 0 0,'-38'-30'325'0'0,"32"27"-34"0"0,1-1-1 0 0,-1 0 0 0 0,1 0 1 0 0,0 0-1 0 0,-9-10 0 0 0,13 12-139 0 0,-12-7 83 0 0</inkml:trace>
 </inkml:ink>
 </file>
 
@@ -1572,15 +1575,15 @@
           <inkml:channelProperty channel="OE" name="resolution" value="1000" units="1/deg"/>
         </inkml:channelProperties>
       </inkml:inkSource>
-      <inkml:timestamp xml:id="ts0" timeString="2026-07-09T02:51:43.988"/>
+      <inkml:timestamp xml:id="ts0" timeString="2026-07-09T04:58:35.270"/>
     </inkml:context>
     <inkml:brush xml:id="br0">
-      <inkml:brushProperty name="width" value="0.1" units="cm"/>
-      <inkml:brushProperty name="height" value="0.1" units="cm"/>
-      <inkml:brushProperty name="color" value="#5B2D90"/>
+      <inkml:brushProperty name="width" value="0.2" units="cm"/>
+      <inkml:brushProperty name="height" value="0.2" units="cm"/>
+      <inkml:brushProperty name="color" value="#FFC114"/>
     </inkml:brush>
   </inkml:definitions>
-  <inkml:trace contextRef="#ctx0" brushRef="#br0">51 1 6309 0 0,'0'0'223'0'0,"-3"23"250"0"0,-18 22-403 0 0,17-39-69 0 0,0 1-1 0 0,0 1 1 0 0,1-1-1 0 0,0 0 1 0 0,0 1 0 0 0,-2 11-1 0 0,5-16 0 0 0,-1 0-1 0 0,1 0 0 0 0,1 0 1 0 0,-1 0-1 0 0,0 0 0 0 0,1 0 0 0 0,-1 0 1 0 0,1 0-1 0 0,0 0 0 0 0,0 0 1 0 0,0 0-1 0 0,0-1 0 0 0,1 1 1 0 0,-1 0-1 0 0,1-1 0 0 0,-1 1 1 0 0,1-1-1 0 0,0 0 0 0 0,0 1 0 0 0,0-1 1 0 0,3 2-1 0 0,0 0 29 0 0,-1-1 0 0 0,1 1 0 0 0,0-1 1 0 0,0-1-1 0 0,0 1 0 0 0,0-1 0 0 0,0 0 0 0 0,1 0 0 0 0,10 2 0 0 0,-14-3 207 0 0,19-11 52 0 0,-19 9-259 0 0,-1 0-1 0 0,0-1 0 0 0,1 0 1 0 0,-1 1-1 0 0,0-1 0 0 0,0 1 1 0 0,0-1-1 0 0,0 0 0 0 0,0 0 1 0 0,-1 0-1 0 0,1 0 0 0 0,-1 0 1 0 0,1 1-1 0 0,-1-1 0 0 0,1 0 1 0 0,-1 0-1 0 0,0 0 0 0 0,0 0 1 0 0,0 0-1 0 0,0 0 0 0 0,0 0 1 0 0,-2-4-1 0 0,-10-40 386 0 0,10 41-410 0 0,0 0-1 0 0,0 1 0 0 0,-1 0 0 0 0,0 0 0 0 0,1-1 1 0 0,-2 1-1 0 0,1 1 0 0 0,0-1 0 0 0,-1 0 0 0 0,1 1 0 0 0,-1 0 1 0 0,0 0-1 0 0,0 0 0 0 0,-1 0 0 0 0,1 1 0 0 0,0 0 1 0 0,-7-3-1 0 0,-29-6-4409 0 0</inkml:trace>
+  <inkml:trace contextRef="#ctx0" brushRef="#br0">10 74 6049 0 0,'0'0'-151'0'0,"0"0"101"0"0,0 0 71 0 0,-1-1 0 0 0,1 1-1 0 0,0 0 1 0 0,0 0 0 0 0,0-1 0 0 0,0 1-1 0 0,0 0 1 0 0,0 0 0 0 0,-1-1 0 0 0,1 1-1 0 0,0 0 1 0 0,0 0 0 0 0,0 0 0 0 0,-1 0 0 0 0,1-1-1 0 0,0 1 1 0 0,0 0 0 0 0,-1 0 0 0 0,1 0-1 0 0,0 0 1 0 0,0 0 0 0 0,-1 0 0 0 0,1 0-1 0 0,0 0 1 0 0,0-1 0 0 0,-1 1 0 0 0,1 0-1 0 0,0 0 1 0 0,0 0 0 0 0,-1 0 0 0 0,1 0 0 0 0,0 1-1 0 0,-1-1 1 0 0,1 0 0 0 0,0 0 0 0 0,0 0-1 0 0,-1 0 1 0 0,1 0 0 0 0,0 0 0 0 0,-1 12-19 0 0,1-1 0 0 0,1 0 0 0 0,0 0 0 0 0,1 1 0 0 0,0-1 0 0 0,1 0 1 0 0,0 0-1 0 0,0-1 0 0 0,6 12 0 0 0,7 31 21 0 0,12 65 14 0 0,-27-97 1984 0 0,-8-37-1581 0 0,-7-46-307 0 0,14 33-67 0 0,1 1 1 0 0,1-1-1 0 0,1 1 0 0 0,2 0 0 0 0,0 0 1 0 0,2 0-1 0 0,14-34 0 0 0,-20 59-73 0 0,0 0 1 0 0,0 0-1 0 0,1 0 0 0 0,-1 1 0 0 0,1-1 1 0 0,-1 0-1 0 0,1 1 0 0 0,0 0 0 0 0,0-1 1 0 0,0 1-1 0 0,0 0 0 0 0,1 0 0 0 0,-1 0 0 0 0,1 0 1 0 0,-1 0-1 0 0,1 1 0 0 0,-1-1 0 0 0,6-1 1 0 0,-6 2-8 0 0,2 3-26 0 0,3 1 32 0 0,0 1-1 0 0,-1 0 0 0 0,0 0 1 0 0,1 0-1 0 0,-2 1 0 0 0,1 0 1 0 0,0 0-1 0 0,-1 0 1 0 0,0 1-1 0 0,7 9 0 0 0,42 75-25 0 0,-6-10 11 0 0,-9-11 41 0 0,-21-33-174 0 0,-17-34-169 0 0</inkml:trace>
 </inkml:ink>
 </file>
 
@@ -1604,15 +1607,15 @@
           <inkml:channelProperty channel="OE" name="resolution" value="1000" units="1/deg"/>
         </inkml:channelProperties>
       </inkml:inkSource>
-      <inkml:timestamp xml:id="ts0" timeString="2026-07-09T02:51:44.286"/>
+      <inkml:timestamp xml:id="ts0" timeString="2026-07-09T04:58:36.250"/>
     </inkml:context>
     <inkml:brush xml:id="br0">
-      <inkml:brushProperty name="width" value="0.1" units="cm"/>
-      <inkml:brushProperty name="height" value="0.1" units="cm"/>
-      <inkml:brushProperty name="color" value="#5B2D90"/>
+      <inkml:brushProperty name="width" value="0.2" units="cm"/>
+      <inkml:brushProperty name="height" value="0.2" units="cm"/>
+      <inkml:brushProperty name="color" value="#FFC114"/>
     </inkml:brush>
   </inkml:definitions>
-  <inkml:trace contextRef="#ctx0" brushRef="#br0">0 111 6605 0 0,'3'-5'-9'0'0,"3"-9"562"0"0,0-1 0 0 0,2 2 0 0 0,0-1 0 0 0,0 1 1 0 0,21-23-1 0 0,-28 35-333 0 0,18 33-111 0 0,-11 32-68 0 0,-2 0 1 0 0,-3 67 0 0 0,2 30-199 0 0,-2-97-61 0 0,0 1-948 0 0,2-22-2513 0 0,-2-25 386 0 0</inkml:trace>
+  <inkml:trace contextRef="#ctx0" brushRef="#br0">22 121 6301 0 0,'5'-17'112'0'0,"-1"-1"0"0"0,-1 0 0 0 0,-1 0 1 0 0,1-32-1 0 0,-3 51-112 0 0,0 0 0 0 0,0 0 0 0 0,0-1 0 0 0,0 1 0 0 0,-1 0 0 0 0,1 0 1 0 0,0-1-1 0 0,0 1 0 0 0,0 0 0 0 0,-1 0 0 0 0,1-1 0 0 0,0 1 0 0 0,-1 0 0 0 0,1-1 0 0 0,-1 1 0 0 0,1 0 0 0 0,-1-1 1 0 0,1 1-1 0 0,-1-1 0 0 0,1 1 0 0 0,-1-1 0 0 0,0 1 0 0 0,0 0 0 0 0,0 0 0 0 0,0-1 0 0 0,0 1 0 0 0,0 0 0 0 0,0 0 0 0 0,0 0-1 0 0,0 0 1 0 0,0 0 0 0 0,0 0 0 0 0,1 0 0 0 0,-1 1 0 0 0,0-1 0 0 0,1 0 0 0 0,-1 0 0 0 0,1 1-1 0 0,-1-1 1 0 0,1 0 0 0 0,0 0 0 0 0,0 1 0 0 0,-1 1 0 0 0,-4 46 3 0 0,2 1 0 0 0,2 1 0 0 0,2-1 0 0 0,3-1 0 0 0,2 1 0 0 0,1 0 0 0 0,3-1 0 0 0,28 82 0 0 0,-21-84 30 0 0,14 50 1641 0 0,-36-102-1524 0 0,-5-8-83 0 0,0 0 0 0 0,1-1-1 0 0,0 0 1 0 0,1 0 0 0 0,1-1-1 0 0,0 0 1 0 0,1-1 0 0 0,0 1-1 0 0,2-1 1 0 0,0 0 0 0 0,-3-21 0 0 0,-3-37 103 0 0,-3-81 1 0 0,7-48 91 0 0,6 200-265 0 0,0 1 0 0 0,1 0 0 0 0,-1 0 0 0 0,0 0 0 0 0,1 0 0 0 0,-1 0 0 0 0,1 0 0 0 0,0 0 0 0 0,0 0 0 0 0,0 0 0 0 0,0 0 0 0 0,0 0 0 0 0,0 1 0 0 0,0-1 0 0 0,0 0 1 0 0,1 1-1 0 0,-1-1 0 0 0,1 1 0 0 0,1-3 0 0 0,2 2-2 0 0,-1-1 0 0 0,0 0 0 0 0,1 1 0 0 0,-1 0 1 0 0,1 0-1 0 0,0 0 0 0 0,9-2 0 0 0,4 1-16 0 0,0 0 0 0 0,1 1 0 0 0,23 1 0 0 0,-27 2 3 0 0,0 0 1 0 0,-1 0-1 0 0,1 1 1 0 0,-1 1 0 0 0,1 1-1 0 0,-1 0 1 0 0,0 1 0 0 0,-1 0-1 0 0,1 1 1 0 0,-1 1-1 0 0,0 0 1 0 0,0 0 0 0 0,-1 2-1 0 0,0-1 1 0 0,17 18 0 0 0,-28-26 15 0 0,0 1-1 0 0,0 0 1 0 0,0 0 0 0 0,0 0 0 0 0,-1 0 0 0 0,1 0 0 0 0,0 0 0 0 0,-1 0 0 0 0,1 0 0 0 0,-1 0 0 0 0,1 0 0 0 0,-1 0 0 0 0,1 0 0 0 0,-1 0 0 0 0,1 1 0 0 0,-1-1 0 0 0,0 0 0 0 0,0 0 0 0 0,0 0 0 0 0,0 1 0 0 0,0-1 0 0 0,0 0 0 0 0,0 0 0 0 0,0 0 0 0 0,0 1 0 0 0,-1-1 0 0 0,0 2-1 0 0,0 0 2 0 0,-1 0 0 0 0,1 0 0 0 0,-1 0-1 0 0,0 0 1 0 0,-1 0 0 0 0,1-1 0 0 0,0 1-1 0 0,-1-1 1 0 0,-4 4 0 0 0,-6 4 6 0 0,1-2 1 0 0,-2 0-1 0 0,-21 10 1 0 0,11-7 76 0 0,0-1 1 0 0,-1-1-1 0 0,0-1 1 0 0,-35 5-1 0 0,57-12-17 0 0,0-2-260 0 0,0 0 0 0 0,0 0-1 0 0,0 0 1 0 0,0 0 0 0 0,1-1 0 0 0,-1 1 0 0 0,0-1-1 0 0,-4-3 1 0 0,20-17-3765 0 0</inkml:trace>
 </inkml:ink>
 </file>
 
@@ -1636,15 +1639,15 @@
           <inkml:channelProperty channel="OE" name="resolution" value="1000" units="1/deg"/>
         </inkml:channelProperties>
       </inkml:inkSource>
-      <inkml:timestamp xml:id="ts0" timeString="2026-07-09T02:51:45.519"/>
+      <inkml:timestamp xml:id="ts0" timeString="2026-07-09T04:58:37.607"/>
     </inkml:context>
     <inkml:brush xml:id="br0">
-      <inkml:brushProperty name="width" value="0.1" units="cm"/>
-      <inkml:brushProperty name="height" value="0.1" units="cm"/>
-      <inkml:brushProperty name="color" value="#5B2D90"/>
+      <inkml:brushProperty name="width" value="0.2" units="cm"/>
+      <inkml:brushProperty name="height" value="0.2" units="cm"/>
+      <inkml:brushProperty name="color" value="#FFC114"/>
     </inkml:brush>
   </inkml:definitions>
-  <inkml:trace contextRef="#ctx0" brushRef="#br0">31 23 6661 0 0,'-20'12'-1320'0'0,"18"-12"1128"0"0,-6 7-272 0 0,8-7 473 0 0,0 0 0 0 0,0 0 0 0 0,0 0-1 0 0,1 0 1 0 0,-1 0 0 0 0,0 0 0 0 0,0 0 0 0 0,0 0 0 0 0,0 0 0 0 0,0 0 0 0 0,0 0 0 0 0,1 0 0 0 0,-1 0 0 0 0,0 0 0 0 0,0 1-1 0 0,0-1 1 0 0,0 0 0 0 0,0 0 0 0 0,0 0 0 0 0,0 0 0 0 0,0 0 0 0 0,0 0 0 0 0,0 0 0 0 0,1 1 0 0 0,-1-1 0 0 0,0 0 0 0 0,0 0 0 0 0,0 0-1 0 0,0 0 1 0 0,0 0 0 0 0,0 0 0 0 0,0 1 0 0 0,0-1 0 0 0,0 0 0 0 0,0 0 0 0 0,0 0 0 0 0,0 0 0 0 0,0 0 0 0 0,0 1 0 0 0,0-1-1 0 0,0 0 1 0 0,0 0 0 0 0,-1 0 0 0 0,1 0 0 0 0,0 0 0 0 0,0 0 0 0 0,0 1 0 0 0,0-1 0 0 0,0 0 0 0 0,0 0 0 0 0,0 0 0 0 0,0 0 0 0 0,0 0-1 0 0,0 0 1 0 0,-1 0 0 0 0,1 0 0 0 0,0 0 0 0 0,0 1 0 0 0,0-1 0 0 0,0 0 0 0 0,-1 0 0 0 0,163-16 129 0 0,-46 3-91 0 0,145-5 41 0 0,-257 18-121 0 0,13 5-2477 0 0</inkml:trace>
+  <inkml:trace contextRef="#ctx0" brushRef="#br0">10 538 6021 0 0,'3'-8'23'0'0,"0"-1"0"0"0,-1 0 1 0 0,0 0-1 0 0,0 0 1 0 0,-1 0-1 0 0,0-13 1 0 0,-1 21 142 0 0,-5-42 1041 0 0,4 41-994 0 0,-16 52-198 0 0,17-44-7 0 0,-1 1-1 0 0,1-1 1 0 0,0 1-1 0 0,1-1 1 0 0,0 0-1 0 0,0 1 1 0 0,0-1-1 0 0,0 0 1 0 0,1 0-1 0 0,0 1 0 0 0,1-1 1 0 0,-1-1-1 0 0,1 1 1 0 0,0 0-1 0 0,1-1 1 0 0,-1 1-1 0 0,1-1 1 0 0,0 0-1 0 0,1 0 1 0 0,-1-1-1 0 0,1 1 1 0 0,0-1-1 0 0,0 0 1 0 0,0 0-1 0 0,0-1 1 0 0,1 1-1 0 0,6 2 1 0 0,-6-3-1 0 0,-1-1 0 0 0,1 0 1 0 0,0 0-1 0 0,0 0 0 0 0,0 0 1 0 0,0-1-1 0 0,0 0 0 0 0,0-1 1 0 0,0 1-1 0 0,0-1 0 0 0,0 0 0 0 0,0-1 1 0 0,0 0-1 0 0,0 1 0 0 0,0-2 1 0 0,0 1-1 0 0,0-1 0 0 0,0 0 1 0 0,0 0-1 0 0,-1-1 0 0 0,1 1 0 0 0,-1-1 1 0 0,0-1-1 0 0,1 1 0 0 0,-2-1 1 0 0,1 1-1 0 0,0-2 0 0 0,-1 1 0 0 0,5-5 1 0 0,2-6 52 0 0,-1 1 0 0 0,-1-2 0 0 0,0 1 0 0 0,-1-2 0 0 0,0 1 0 0 0,-1-1 0 0 0,-1 0 0 0 0,5-24 0 0 0,-11 42-47 0 0,0-13 3 0 0,-5 15-12 0 0,-6 16 23 0 0,10-15-27 0 0,0 1 0 0 0,0-1 0 0 0,0 1 0 0 0,0-1 0 0 0,1 1 1 0 0,-1-1-1 0 0,1 1 0 0 0,0-1 0 0 0,1 1 0 0 0,-1-1 0 0 0,1 1 0 0 0,0-1 1 0 0,0 0-1 0 0,2 6 0 0 0,1 3 9 0 0,1-1-1 0 0,0-1 1 0 0,10 18-1 0 0,-10-21 3 0 0,0-1 0 0 0,1 0 0 0 0,0 0 0 0 0,0-1 0 0 0,1 1 0 0 0,-1-1 0 0 0,1-1-1 0 0,1 1 1 0 0,-1-1 0 0 0,1-1 0 0 0,0 1 0 0 0,0-1 0 0 0,0-1 0 0 0,1 1 0 0 0,-1-1-1 0 0,14 2 1 0 0,-17-4-2 0 0,0 0 0 0 0,0 0-1 0 0,1-1 1 0 0,-1 1 0 0 0,0-1-1 0 0,0-1 1 0 0,1 1 0 0 0,-1-1 0 0 0,0 0-1 0 0,0 0 1 0 0,0 0 0 0 0,0-1-1 0 0,0 0 1 0 0,0 0 0 0 0,0 0-1 0 0,0 0 1 0 0,-1-1 0 0 0,1 0-1 0 0,-1 0 1 0 0,0 0 0 0 0,0 0-1 0 0,0-1 1 0 0,0 0 0 0 0,-1 0-1 0 0,1 0 1 0 0,-1 0 0 0 0,0 0-1 0 0,0-1 1 0 0,2-5 0 0 0,3-7 6 0 0,-1 0 1 0 0,0-1 0 0 0,-2 0-1 0 0,0-1 1 0 0,3-23-1 0 0,6-98 25 0 0,-11 87-14 0 0,-2 13 125 0 0,-1 1 1 0 0,-7-39-1 0 0,0-31 485 0 0,7 107-611 0 0,-2 7-32 0 0,-1 3 5 0 0,0 1-1 0 0,1-1 0 0 0,0 1 1 0 0,0 0-1 0 0,1-1 0 0 0,0 1 1 0 0,1 0-1 0 0,0 11 0 0 0,8 84-11 0 0,-5-80 18 0 0,1 72 8 0 0,-4-66-4 0 0,1 0 0 0 0,2-1-1 0 0,8 40 1 0 0,-8-55-5 0 0,-1-3 9 0 0,1 0 0 0 0,1 0 0 0 0,0 0 1 0 0,0 0-1 0 0,6 9 0 0 0,-8-16-4 0 0,1 0 0 0 0,0 0 0 0 0,0-1 0 0 0,1 1 0 0 0,-1-1 0 0 0,1 0 0 0 0,0 0 0 0 0,-1 0 0 0 0,1 0 0 0 0,1-1 0 0 0,-1 0 0 0 0,0 1-1 0 0,0-2 1 0 0,1 1 0 0 0,6 1 0 0 0,8 2-54 0 0,1-2 0 0 0,-1 0 0 0 0,1-1 0 0 0,0-1 0 0 0,0-1 0 0 0,0 0 0 0 0,-1-2 0 0 0,30-6 0 0 0,-10 0-1441 0 0,0-2 0 0 0,0-2-1 0 0,43-19 1 0 0,-48 14-1070 0 0</inkml:trace>
 </inkml:ink>
 </file>
 
@@ -1668,15 +1671,15 @@
           <inkml:channelProperty channel="OE" name="resolution" value="1000" units="1/deg"/>
         </inkml:channelProperties>
       </inkml:inkSource>
-      <inkml:timestamp xml:id="ts0" timeString="2026-07-09T02:51:45.914"/>
+      <inkml:timestamp xml:id="ts0" timeString="2026-07-09T04:58:37.953"/>
     </inkml:context>
     <inkml:brush xml:id="br0">
-      <inkml:brushProperty name="width" value="0.1" units="cm"/>
-      <inkml:brushProperty name="height" value="0.1" units="cm"/>
-      <inkml:brushProperty name="color" value="#5B2D90"/>
+      <inkml:brushProperty name="width" value="0.2" units="cm"/>
+      <inkml:brushProperty name="height" value="0.2" units="cm"/>
+      <inkml:brushProperty name="color" value="#FFC114"/>
     </inkml:brush>
   </inkml:definitions>
-  <inkml:trace contextRef="#ctx0" brushRef="#br0">45 0 3996 0 0,'-16'0'22'0'0,"12"0"206"0"0,-18 1 1268 0 0,20 1-1459 0 0,4 32 11 0 0,2 1 1 0 0,1-1 0 0 0,2 1 0 0 0,1-1-1 0 0,23 61 1 0 0,7 16 103 0 0,-37-109-49 0 0</inkml:trace>
+  <inkml:trace contextRef="#ctx0" brushRef="#br0">36 94 6289 0 0,'-19'-2'-42'0'0,"7"1"101"0"0,8 0 42 0 0,10-2 475 0 0,71-13-331 0 0,104-6-1 0 0,-93 13-1731 0 0,87-21 1 0 0,-158 25 15 0 0,-5 0 299 0 0</inkml:trace>
 </inkml:ink>
 </file>
 
@@ -1700,15 +1703,15 @@
           <inkml:channelProperty channel="OE" name="resolution" value="1000" units="1/deg"/>
         </inkml:channelProperties>
       </inkml:inkSource>
-      <inkml:timestamp xml:id="ts0" timeString="2026-07-09T02:51:46.433"/>
+      <inkml:timestamp xml:id="ts0" timeString="2026-07-09T04:58:39.964"/>
     </inkml:context>
     <inkml:brush xml:id="br0">
-      <inkml:brushProperty name="width" value="0.1" units="cm"/>
-      <inkml:brushProperty name="height" value="0.1" units="cm"/>
-      <inkml:brushProperty name="color" value="#5B2D90"/>
+      <inkml:brushProperty name="width" value="0.2" units="cm"/>
+      <inkml:brushProperty name="height" value="0.2" units="cm"/>
+      <inkml:brushProperty name="color" value="#FFC114"/>
     </inkml:brush>
   </inkml:definitions>
-  <inkml:trace contextRef="#ctx0" brushRef="#br0">87 1 4808 0 0,'0'0'-8'0'0,"-3"4"-290"0"0,-11 20 253 0 0,5-11 12 0 0,1 0 1 0 0,0 1-1 0 0,1 0 0 0 0,-7 18 1 0 0,14-31 34 0 0,1 0 0 0 0,-1 0 0 0 0,0 0-1 0 0,0 1 1 0 0,1-1 0 0 0,-1 0 0 0 0,0 0 0 0 0,1 0 0 0 0,-1 1 0 0 0,1-1 0 0 0,0 0 0 0 0,-1 0 0 0 0,1 0 0 0 0,0 0 0 0 0,-1 0 0 0 0,1 0-1 0 0,0 0 1 0 0,0-1 0 0 0,0 1 0 0 0,0 0 0 0 0,0 0 0 0 0,0-1 0 0 0,0 1 0 0 0,0-1 0 0 0,2 1 0 0 0,28 14 71 0 0,-29-14-68 0 0,5 1 45 0 0,0 0 0 0 0,0 0 1 0 0,0 0-1 0 0,1-1 0 0 0,10 0 1 0 0,-14-1 99 0 0,20-3 190 0 0,-21 2-262 0 0,0 1 1 0 0,-1-1 0 0 0,1 0-1 0 0,-1-1 1 0 0,1 1 0 0 0,-1 0-1 0 0,1-1 1 0 0,-1 1 0 0 0,0-1-1 0 0,1 0 1 0 0,-1 0 0 0 0,0 0-1 0 0,0 0 1 0 0,-1 0-1 0 0,1 0 1 0 0,0 0 0 0 0,-1 0-1 0 0,1-1 1 0 0,-1 1 0 0 0,2-5-1 0 0,-2 5-36 0 0,-1 1-1 0 0,1-1 0 0 0,-1 1 1 0 0,0-1-1 0 0,0 0 1 0 0,1 1-1 0 0,-1-1 0 0 0,0 1 1 0 0,0-1-1 0 0,0 1 0 0 0,0-1 1 0 0,-1 0-1 0 0,1 1 1 0 0,0-1-1 0 0,-1 1 0 0 0,1-1 1 0 0,-1 1-1 0 0,0-1 0 0 0,1 1 1 0 0,-1-1-1 0 0,0 1 1 0 0,0 0-1 0 0,0-1 0 0 0,0 1 1 0 0,0 0-1 0 0,0 0 0 0 0,0 0 1 0 0,0 0-1 0 0,0 0 0 0 0,-1 0 1 0 0,1 0-1 0 0,0 0 1 0 0,-1 0-1 0 0,1 1 0 0 0,-1-1 1 0 0,1 0-1 0 0,-2 0 0 0 0,-14-4 73 0 0,0 1-1 0 0,0 0 0 0 0,0 1 0 0 0,-29-1 1 0 0,-4-1-897 0 0,50 5 687 0 0,-1 0 0 0 0,0 0-1 0 0,1 0 1 0 0,-1 0-1 0 0,1 0 1 0 0,-1 0-1 0 0,0 0 1 0 0,1 0-1 0 0,-1-1 1 0 0,1 1 0 0 0,-1 0-1 0 0,1 0 1 0 0,-1 0-1 0 0,1-1 1 0 0,-1 1-1 0 0,1 0 1 0 0,-1-1-1 0 0,1 1 1 0 0,-1 0 0 0 0,1-1-1 0 0,-1 1 1 0 0,1-1-1 0 0,0 1 1 0 0,-1 0-1 0 0,1-1 1 0 0,0 1-1 0 0,-1-1 1 0 0,1 1 0 0 0,0-1-1 0 0,0 0 1 0 0,-1 1-1 0 0,1-1 1 0 0,0 1-1 0 0,0-1 1 0 0,0 1-1 0 0,0-1 1 0 0,0 0 0 0 0,0 1-1 0 0,0-1 1 0 0,0 1-1 0 0,0-1 1 0 0,0 1-1 0 0,0-1 1 0 0,0 0-1 0 0,1 0 1 0 0</inkml:trace>
+  <inkml:trace contextRef="#ctx0" brushRef="#br0">11 29 3924 0 0,'-10'0'2228'0'0,"96"3"-1984"0"0,117-11 0 0 0,-38 0-143 0 0,-56 7-66 0 0,121-6 88 0 0,-122 5 707 0 0,-105 2-605 0 0,15-6-634 0 0</inkml:trace>
 </inkml:ink>
 </file>
 
@@ -1732,15 +1735,15 @@
           <inkml:channelProperty channel="OE" name="resolution" value="1000" units="1/deg"/>
         </inkml:channelProperties>
       </inkml:inkSource>
-      <inkml:timestamp xml:id="ts0" timeString="2026-07-09T02:51:46.876"/>
+      <inkml:timestamp xml:id="ts0" timeString="2026-07-09T04:58:40.570"/>
     </inkml:context>
     <inkml:brush xml:id="br0">
-      <inkml:brushProperty name="width" value="0.1" units="cm"/>
-      <inkml:brushProperty name="height" value="0.1" units="cm"/>
-      <inkml:brushProperty name="color" value="#5B2D90"/>
+      <inkml:brushProperty name="width" value="0.2" units="cm"/>
+      <inkml:brushProperty name="height" value="0.2" units="cm"/>
+      <inkml:brushProperty name="color" value="#FFC114"/>
     </inkml:brush>
   </inkml:definitions>
-  <inkml:trace contextRef="#ctx0" brushRef="#br0">69 15 5140 0 0,'0'0'422'0'0,"-4"1"-421"0"0,0 1-4 0 0,-1 0 0 0 0,1 1 1 0 0,0-1-1 0 0,0 1 0 0 0,0 0 1 0 0,1 0-1 0 0,-1 0 0 0 0,1 1 1 0 0,-1-1-1 0 0,1 1 0 0 0,0 0 1 0 0,1 0-1 0 0,-1 0 0 0 0,0 0 1 0 0,1 0-1 0 0,0 1 0 0 0,0-1 1 0 0,1 1-1 0 0,-1-1 0 0 0,0 7 1 0 0,1-9 3 0 0,1-1 0 0 0,1 1 0 0 0,-1 0 0 0 0,0-1 0 0 0,0 1 0 0 0,0 0 0 0 0,1-1 0 0 0,-1 1 0 0 0,1-1 1 0 0,-1 1-1 0 0,1-1 0 0 0,0 1 0 0 0,0-1 0 0 0,0 1 0 0 0,-1-1 0 0 0,1 0 0 0 0,1 1 0 0 0,-1-1 0 0 0,0 0 1 0 0,0 0-1 0 0,0 0 0 0 0,0 0 0 0 0,1 0 0 0 0,-1 0 0 0 0,1 0 0 0 0,-1 0 0 0 0,1-1 0 0 0,-1 1 1 0 0,1 0-1 0 0,-1-1 0 0 0,1 1 0 0 0,-1-1 0 0 0,3 1 0 0 0,53 9 94 0 0,-49-9 15 0 0,1 0 1 0 0,0-1 0 0 0,0-1 0 0 0,-1 1 0 0 0,16-4 0 0 0,-22 3-48 0 0,0 1-1 0 0,0-1 1 0 0,0 1-1 0 0,0-1 1 0 0,0 0-1 0 0,0 1 1 0 0,0-1-1 0 0,-1 0 1 0 0,1-1-1 0 0,0 1 1 0 0,-1 0-1 0 0,1 0 1 0 0,-1-1-1 0 0,1 1 1 0 0,-1-1-1 0 0,0 1 1 0 0,1-1-1 0 0,-1 1 1 0 0,0-1 0 0 0,0 0-1 0 0,0 0 1 0 0,0 1-1 0 0,-1-1 1 0 0,1 0-1 0 0,0 0 1 0 0,-1 0-1 0 0,1 0 1 0 0,-1 0-1 0 0,0 0 1 0 0,1-4-1 0 0,-2 3-16 0 0,1-1 1 0 0,-1 1-1 0 0,0 0 0 0 0,0-1 1 0 0,0 1-1 0 0,-1 0 0 0 0,1-1 1 0 0,-1 1-1 0 0,1 0 0 0 0,-1 0 1 0 0,0 0-1 0 0,0 0 0 0 0,-1 1 1 0 0,1-1-1 0 0,0 0 0 0 0,-1 1 1 0 0,0 0-1 0 0,1 0 0 0 0,-1 0 1 0 0,0 0-1 0 0,-6-3 0 0 0,-2-1-536 0 0,0 1-1 0 0,0 0 0 0 0,-1 0 1 0 0,-18-4-1 0 0,21 7-1719 0 0</inkml:trace>
+  <inkml:trace contextRef="#ctx0" brushRef="#br0">87 12 5332 0 0,'0'0'-166'0'0,"-20"-3"21"0"0,-43-6 1422 0 0,63 10-1267 0 0,0-1-1 0 0,0 0 1 0 0,1 0-1 0 0,-1 0 1 0 0,0 0 0 0 0,0 0-1 0 0,0 0 1 0 0,0 1 0 0 0,0-1-1 0 0,0 0 1 0 0,0 0-1 0 0,0 0 1 0 0,0 0 0 0 0,0 0-1 0 0,0 1 1 0 0,0-1 0 0 0,0 0-1 0 0,0 0 1 0 0,0 0-1 0 0,0 0 1 0 0,0 0 0 0 0,0 1-1 0 0,0-1 1 0 0,0 0 0 0 0,0 0-1 0 0,0 0 1 0 0,0 0 0 0 0,0 0-1 0 0,-1 0 1 0 0,1 1-1 0 0,0-1 1 0 0,0 0 0 0 0,0 0-1 0 0,0 0 1 0 0,0 0 0 0 0,0 0-1 0 0,0 0 1 0 0,0 0-1 0 0,-1 0 1 0 0,1 1 0 0 0,0-1-1 0 0,0 0 1 0 0,0 0 0 0 0,0 0-1 0 0,0 0 1 0 0,-1 0-1 0 0,1 0 1 0 0,0 0 0 0 0,0 0-1 0 0,0 0 1 0 0,0 0 0 0 0,0 0-1 0 0,-1 0 1 0 0,1 0 0 0 0,0 0-1 0 0,0 0 1 0 0,0 0-1 0 0,0 0 1 0 0,36 14 52 0 0,169 43 215 0 0,53 17-31 0 0,-256-74-243 0 0,-1 0 1 0 0,0 1-1 0 0,1-1 0 0 0,-1 0 0 0 0,0 1 0 0 0,1 0 0 0 0,-1-1 0 0 0,0 1 0 0 0,0 0 0 0 0,0-1 1 0 0,0 1-1 0 0,0 0 0 0 0,0 0 0 0 0,0 0 0 0 0,0 0 0 0 0,0 0 0 0 0,0 0 0 0 0,0 0 0 0 0,0 0 0 0 0,-1 1 1 0 0,1-1-1 0 0,0 0 0 0 0,-1 0 0 0 0,1 1 0 0 0,-1-1 0 0 0,1 2 0 0 0,-2-1 0 0 0,1 0 1 0 0,0 0-1 0 0,-1-1 0 0 0,0 1 0 0 0,1 0 0 0 0,-1 0 1 0 0,0 0-1 0 0,0 0 0 0 0,0 0 0 0 0,0-1 0 0 0,0 1 1 0 0,0 0-1 0 0,-1-1 0 0 0,1 1 0 0 0,-3 1 0 0 0,-10 9 10 0 0,-1 0 0 0 0,1-2 0 0 0,-21 12 0 0 0,22-15-3 0 0,-25 18-11 0 0,-3 2-67 0 0,-60 29 0 0 0</inkml:trace>
 </inkml:ink>
 </file>
 
@@ -1796,15 +1799,15 @@
           <inkml:channelProperty channel="OE" name="resolution" value="1000" units="1/deg"/>
         </inkml:channelProperties>
       </inkml:inkSource>
-      <inkml:timestamp xml:id="ts0" timeString="2026-07-09T02:51:47.221"/>
+      <inkml:timestamp xml:id="ts0" timeString="2026-07-09T04:58:41.403"/>
     </inkml:context>
     <inkml:brush xml:id="br0">
-      <inkml:brushProperty name="width" value="0.1" units="cm"/>
-      <inkml:brushProperty name="height" value="0.1" units="cm"/>
-      <inkml:brushProperty name="color" value="#5B2D90"/>
+      <inkml:brushProperty name="width" value="0.2" units="cm"/>
+      <inkml:brushProperty name="height" value="0.2" units="cm"/>
+      <inkml:brushProperty name="color" value="#FFC114"/>
     </inkml:brush>
   </inkml:definitions>
-  <inkml:trace contextRef="#ctx0" brushRef="#br0">1 114 6373 0 0,'40'-112'2100'0'0,"-39"110"-1965"0"0,0 3-113 0 0,-1 1-1 0 0,1-1 1 0 0,0 1-1 0 0,0-1 1 0 0,-1 1-1 0 0,1-1 1 0 0,-1 1-1 0 0,1-1 1 0 0,-1 1-1 0 0,0-1 1 0 0,0 1-1 0 0,0 0 1 0 0,1-1-1 0 0,-2 1 1 0 0,1-1-1 0 0,0 3 1 0 0,0 56-7 0 0,2 5-21 0 0,7 0 39 0 0,0 3-665 0 0,-3-23-3232 0 0,-5-38 1200 0 0</inkml:trace>
+  <inkml:trace contextRef="#ctx0" brushRef="#br0">311 63 4760 0 0,'-39'-3'225'0'0,"26"2"-201"0"0,1 1-1 0 0,-1 0 0 0 0,0 1 1 0 0,1 0-1 0 0,-1 1 1 0 0,1 1-1 0 0,-1 0 0 0 0,1 1 1 0 0,0 0-1 0 0,0 1 1 0 0,1 0-1 0 0,-1 1 0 0 0,1 0 1 0 0,0 0-1 0 0,1 2 1 0 0,0-1-1 0 0,0 1 0 0 0,0 1 1 0 0,-16 18-1 0 0,24-24-17 0 0,-1 1 0 0 0,1-1 0 0 0,-1 0 1 0 0,1 1-1 0 0,0 0 0 0 0,1-1 0 0 0,-1 1 0 0 0,1 0 0 0 0,-1 0 0 0 0,1 0 0 0 0,1 0 1 0 0,-1 0-1 0 0,0 0 0 0 0,1 0 0 0 0,0 0 0 0 0,0 0 0 0 0,0 1 0 0 0,0-1 0 0 0,2 5 0 0 0,-1-5 18 0 0,1 1-1 0 0,0 0 1 0 0,1-1-1 0 0,-1 1 1 0 0,1-1-1 0 0,0 0 1 0 0,0 0-1 0 0,0 0 1 0 0,0 0-1 0 0,1 0 1 0 0,-1-1 0 0 0,1 0-1 0 0,7 5 1 0 0,4 2 45 0 0,1-1 0 0 0,0-1 0 0 0,1 0 0 0 0,0-1 0 0 0,0-1 0 0 0,1 0 0 0 0,26 4 0 0 0,-10-4 63 0 0,-1-1 0 0 0,1-1 1 0 0,0-2-1 0 0,53-4 0 0 0,-79 2-88 0 0,0-1-1 0 0,1 0 0 0 0,-1-1 1 0 0,0 1-1 0 0,0-2 0 0 0,0 1 1 0 0,0-1-1 0 0,0 0 0 0 0,-1-1 0 0 0,1 0 1 0 0,-1 0-1 0 0,0-1 0 0 0,0 1 1 0 0,0-2-1 0 0,-1 1 0 0 0,0-1 1 0 0,0 0-1 0 0,0 0 0 0 0,-1 0 1 0 0,0-1-1 0 0,0 0 0 0 0,0 0 1 0 0,-1 0-1 0 0,3-9 0 0 0,-5 11-37 0 0,0 1-1 0 0,-1-1 1 0 0,0 1-1 0 0,0-1 1 0 0,0 0-1 0 0,0 0 0 0 0,-1 1 1 0 0,0-1-1 0 0,0 0 1 0 0,0 0-1 0 0,0 0 0 0 0,-1 1 1 0 0,0-1-1 0 0,0 0 1 0 0,0 1-1 0 0,-1-1 1 0 0,-2-5-1 0 0,0 3 12 0 0,0-1-1 0 0,-1 2 1 0 0,1-1 0 0 0,-1 0-1 0 0,-1 1 1 0 0,0 0 0 0 0,1 0-1 0 0,-2 1 1 0 0,-8-7 0 0 0,-6-1 15 0 0,1 0 1 0 0,-2 2-1 0 0,1 1 0 0 0,-1 0 1 0 0,-1 2-1 0 0,-23-6 1 0 0,16 6-32 0 0,0 1 0 0 0,0 1 0 0 0,-1 2 1 0 0,-38-1-1 0 0,53 10 188 0 0,12-1-1065 0 0,33 7-5280 0 0</inkml:trace>
 </inkml:ink>
 </file>
 
@@ -1828,15 +1831,15 @@
           <inkml:channelProperty channel="OE" name="resolution" value="1000" units="1/deg"/>
         </inkml:channelProperties>
       </inkml:inkSource>
-      <inkml:timestamp xml:id="ts0" timeString="2026-07-09T02:54:05.523"/>
+      <inkml:timestamp xml:id="ts0" timeString="2026-07-09T04:58:42.175"/>
     </inkml:context>
     <inkml:brush xml:id="br0">
-      <inkml:brushProperty name="width" value="0.1" units="cm"/>
-      <inkml:brushProperty name="height" value="0.1" units="cm"/>
-      <inkml:brushProperty name="color" value="#33CCFF"/>
+      <inkml:brushProperty name="width" value="0.2" units="cm"/>
+      <inkml:brushProperty name="height" value="0.2" units="cm"/>
+      <inkml:brushProperty name="color" value="#FFC114"/>
     </inkml:brush>
   </inkml:definitions>
-  <inkml:trace contextRef="#ctx0" brushRef="#br0">49 176 6113 0 0,'-35'6'1438'0'0,"21"3"1189"0"0,24-4-1399 0 0,34-3-1024 0 0,367-14-151 0 0,-215 10-20 0 0,286-13 104 0 0,-479 15-123 0 0,55-3 228 0 0,-57 1 345 0 0,-7-4-202 0 0,-21-13-50 0 0,-47-26-212 0 0,65 39-14 0 0,-105-56 88 0 0,112 62-181 0 0,-35-24 209 0 0,36 23-172 0 0,135 31-1069 0 0,-86-21 997 0 0,205 54-190 0 0,-237-59 163 0 0,-11-3 23 0 0,-1 0 0 0 0,0 0 1 0 0,0 0-1 0 0,0 1 0 0 0,0-1 1 0 0,0 1-1 0 0,0 0 0 0 0,-1 0 1 0 0,1 1-1 0 0,-1-1 0 0 0,4 4 0 0 0,-6-5-5 0 0,-12 16-62 0 0,-3-6 82 0 0,0 0-1 0 0,-2-1 1 0 0,1 0-1 0 0,-1-1 1 0 0,-19 7-1 0 0,-95 33 0 0 0,42-17-4 0 0,66-23-109 0 0,-17 7-509 0 0,-67 18-1 0 0</inkml:trace>
+  <inkml:trace contextRef="#ctx0" brushRef="#br0">132 128 5368 0 0,'-13'-45'402'0'0,"12"44"-382"0"0,1 0 1 0 0,0 0 0 0 0,0 0-1 0 0,0 0 1 0 0,-1 0-1 0 0,1 0 1 0 0,0 0 0 0 0,-1 0-1 0 0,1 0 1 0 0,-1 0-1 0 0,1 0 1 0 0,-1 0 0 0 0,1 0-1 0 0,-1 0 1 0 0,0 1-1 0 0,0-1 1 0 0,1 0-1 0 0,-1 0 1 0 0,0 1 0 0 0,0-1-1 0 0,0 1 1 0 0,0-1-1 0 0,1 1 1 0 0,-1-1 0 0 0,0 1-1 0 0,0-1 1 0 0,0 1-1 0 0,0 0 1 0 0,0-1 0 0 0,0 1-1 0 0,0 0 1 0 0,0 0-1 0 0,-2 0 1 0 0,0 1-9 0 0,1-1 1 0 0,-1 1-1 0 0,0 0 0 0 0,0 1 1 0 0,1-1-1 0 0,-1 0 1 0 0,1 1-1 0 0,-1 0 0 0 0,1-1 1 0 0,0 1-1 0 0,-5 4 0 0 0,-1 2-11 0 0,0 1-1 0 0,0 0 1 0 0,1 0-1 0 0,0 1 1 0 0,-9 18-1 0 0,15-27 8 0 0,1 1 0 0 0,-1 0 0 0 0,1-1 0 0 0,-1 1 0 0 0,1-1 0 0 0,-1 1 0 0 0,1 0 0 0 0,0 0 0 0 0,0-1 0 0 0,0 1 0 0 0,0 0 0 0 0,0-1 0 0 0,0 1 0 0 0,0 0 0 0 0,1 0 0 0 0,-1-1 0 0 0,1 1 0 0 0,-1-1 0 0 0,1 1 0 0 0,0 0 0 0 0,-1-1 0 0 0,1 1 0 0 0,1 1 0 0 0,1 0 9 0 0,-1-1 1 0 0,1 1 0 0 0,0-1 0 0 0,-1 0-1 0 0,1 0 1 0 0,0 0 0 0 0,0 0 0 0 0,1 0-1 0 0,-1-1 1 0 0,6 3 0 0 0,7 1 50 0 0,0-1-1 0 0,1-1 1 0 0,26 3 0 0 0,-31-5-47 0 0,0 0 0 0 0,0-1 0 0 0,1-1 0 0 0,-1 0 1 0 0,0 0-1 0 0,0-1 0 0 0,-1 0 0 0 0,1-1 0 0 0,0-1 0 0 0,-1 0 1 0 0,0-1-1 0 0,0 0 0 0 0,18-10 0 0 0,-21 9 15 0 0,0 0 0 0 0,-1 0-1 0 0,0-1 1 0 0,0 0 0 0 0,0 0 0 0 0,-1 0-1 0 0,0-1 1 0 0,0 0 0 0 0,-1 0 0 0 0,0-1-1 0 0,-1 1 1 0 0,1-1 0 0 0,-2 0 0 0 0,1-1-1 0 0,-1 1 1 0 0,-1 0 0 0 0,3-14 0 0 0,-5 22-26 0 0,1-1 0 0 0,-1 1 0 0 0,0 0 0 0 0,1 0-1 0 0,-1-1 1 0 0,0 1 0 0 0,0 0 0 0 0,0 0 0 0 0,0-1 0 0 0,0 1 0 0 0,0 0 0 0 0,0 0 0 0 0,0-1 0 0 0,0 1 0 0 0,-1 0 0 0 0,1 0 0 0 0,0-1 0 0 0,-1 1 0 0 0,1 0 0 0 0,-1 0 0 0 0,1 0 0 0 0,-1 0-1 0 0,0 0 1 0 0,0 0 0 0 0,1 0 0 0 0,-1 0 0 0 0,0 0 0 0 0,0 0 0 0 0,0 0 0 0 0,0 0 0 0 0,0 0 0 0 0,0 1 0 0 0,0-1 0 0 0,-2-1 0 0 0,1 2-8 0 0,0 0 0 0 0,0 0 0 0 0,1 1 0 0 0,-1-1 0 0 0,0 0 0 0 0,0 0 0 0 0,1 1 0 0 0,-1-1 0 0 0,0 1 0 0 0,1 0 0 0 0,-1 0 1 0 0,0-1-1 0 0,1 1 0 0 0,-1 0 0 0 0,1 0 0 0 0,-1 0 0 0 0,1 1 0 0 0,0-1 0 0 0,-1 0 0 0 0,1 0 0 0 0,-2 3 0 0 0,3-2 0 0 0,-1-1-1 0 0,0 1 1 0 0,1 0 0 0 0,-1-1-1 0 0,1 1 1 0 0,-1 0 0 0 0,1 0-1 0 0,0 0 1 0 0,0 0-1 0 0,0-1 1 0 0,0 1 0 0 0,0 0-1 0 0,0 0 1 0 0,1 0 0 0 0,-1-1-1 0 0,0 1 1 0 0,1 0 0 0 0,0 0-1 0 0,-1-1 1 0 0,1 1-1 0 0,0 0 1 0 0,0-1 0 0 0,1 3-1 0 0,24 33 49 0 0,-9-22-85 0 0,2 1 1 0 0,0-2-1 0 0,1-1 1 0 0,0 0-1 0 0,1-1 1 0 0,0-2-1 0 0,1 0 1 0 0,0-1-1 0 0,1-1 1 0 0,31 6-1 0 0,0-10-3986 0 0</inkml:trace>
 </inkml:ink>
 </file>
 
@@ -1860,15 +1863,15 @@
           <inkml:channelProperty channel="OE" name="resolution" value="1000" units="1/deg"/>
         </inkml:channelProperties>
       </inkml:inkSource>
-      <inkml:timestamp xml:id="ts0" timeString="2026-07-09T02:54:06.587"/>
+      <inkml:timestamp xml:id="ts0" timeString="2026-07-09T04:58:42.690"/>
     </inkml:context>
     <inkml:brush xml:id="br0">
-      <inkml:brushProperty name="width" value="0.1" units="cm"/>
-      <inkml:brushProperty name="height" value="0.1" units="cm"/>
-      <inkml:brushProperty name="color" value="#33CCFF"/>
+      <inkml:brushProperty name="width" value="0.2" units="cm"/>
+      <inkml:brushProperty name="height" value="0.2" units="cm"/>
+      <inkml:brushProperty name="color" value="#FFC114"/>
     </inkml:brush>
   </inkml:definitions>
-  <inkml:trace contextRef="#ctx0" brushRef="#br0">38 0 6209 0 0,'-16'0'-58'0'0,"13"0"306"0"0,-9 4 213 0 0,12-4-432 0 0,0-1 0 0 0,0 1-1 0 0,-1 0 1 0 0,1 0 0 0 0,0 0-1 0 0,0 0 1 0 0,0 0 0 0 0,0 0-1 0 0,-1 0 1 0 0,1 0 0 0 0,0 0-1 0 0,0 0 1 0 0,0 0 0 0 0,0 0-1 0 0,-1 0 1 0 0,1 0 0 0 0,0 0-1 0 0,0 0 1 0 0,0 0 0 0 0,-1 0-1 0 0,1 0 1 0 0,0 0 0 0 0,0 0-1 0 0,0 0 1 0 0,0 1 0 0 0,-1-1-1 0 0,1 0 1 0 0,0 0 0 0 0,0 0-1 0 0,0 0 1 0 0,0 0 0 0 0,0 0-1 0 0,0 0 1 0 0,-1 1 0 0 0,1-1-1 0 0,0 0 1 0 0,0 0 0 0 0,0 0-1 0 0,0 0 1 0 0,0 1 0 0 0,0-1-1 0 0,0 0 1 0 0,0 0 0 0 0,0 0-1 0 0,0 0 1 0 0,0 1 0 0 0,0-1-1 0 0,0 0 1 0 0,0 0 0 0 0,0 0-1 0 0,0 0 1 0 0,0 1 0 0 0,0-1-1 0 0,0 0 1 0 0,0 0-1 0 0,0 0 1 0 0,0 1 0 0 0,0-1-1 0 0,0 0 1 0 0,0 0 0 0 0,0 0-1 0 0,16 4-17 0 0,-1 0 0 0 0,1-2-1 0 0,0 0 1 0 0,-1 0 0 0 0,32-3-1 0 0,-3 2 1 0 0,551 41 122 0 0,-534-35 234 0 0,-59-7-294 0 0,21 2 261 0 0,-23-2-343 0 0,12-6-436 0 0,-5-6-3902 0 0,-2 3 1385 0 0</inkml:trace>
+  <inkml:trace contextRef="#ctx0" brushRef="#br0">35 69 6033 0 0,'-3'-49'158'0'0,"1"34"125"0"0,-4 10-87 0 0,-6 23-137 0 0,9-12-61 0 0,1 1 1 0 0,0-1 0 0 0,1 1 0 0 0,-1 0 0 0 0,2 0 0 0 0,-1 0 0 0 0,1 0-1 0 0,0 0 1 0 0,1 10 0 0 0,11 66 19 0 0,-8-65-13 0 0,1 18 44 0 0,2 0 1 0 0,2-1-1 0 0,1 1 0 0 0,1-2 1 0 0,2 0-1 0 0,28 53 0 0 0,-36-81-20 0 0,0 0 0 0 0,0-1 0 0 0,0 1 0 0 0,0-2 0 0 0,1 1 0 0 0,0 0-1 0 0,0-1 1 0 0,0 0 0 0 0,0 0 0 0 0,1-1 0 0 0,-1 0 0 0 0,1 0 0 0 0,0-1 0 0 0,0 1-1 0 0,0-2 1 0 0,0 1 0 0 0,1-1 0 0 0,-1 0 0 0 0,10 0 0 0 0,1 0-176 0 0,1 0 0 0 0,-1-2 0 0 0,0 0 0 0 0,1-1 0 0 0,-1-1 0 0 0,29-8 0 0 0,-32 6-841 0 0,1-1 0 0 0,25-13 0 0 0,-7-3-826 0 0</inkml:trace>
 </inkml:ink>
 </file>
 
@@ -1892,15 +1895,15 @@
           <inkml:channelProperty channel="OE" name="resolution" value="1000" units="1/deg"/>
         </inkml:channelProperties>
       </inkml:inkSource>
-      <inkml:timestamp xml:id="ts0" timeString="2026-07-09T02:54:07.161"/>
+      <inkml:timestamp xml:id="ts0" timeString="2026-07-09T04:58:42.957"/>
     </inkml:context>
     <inkml:brush xml:id="br0">
-      <inkml:brushProperty name="width" value="0.1" units="cm"/>
-      <inkml:brushProperty name="height" value="0.1" units="cm"/>
-      <inkml:brushProperty name="color" value="#33CCFF"/>
+      <inkml:brushProperty name="width" value="0.2" units="cm"/>
+      <inkml:brushProperty name="height" value="0.2" units="cm"/>
+      <inkml:brushProperty name="color" value="#FFC114"/>
     </inkml:brush>
   </inkml:definitions>
-  <inkml:trace contextRef="#ctx0" brushRef="#br0">88 47 6681 0 0,'-35'-23'-557'0'0,"-18"-1"6113"0"0,63 27-5574 0 0,93 21 25 0 0,285 85-130 0 0,-386-109 113 0 0,0 1 1 0 0,0-1 0 0 0,-1 1 0 0 0,1 0-1 0 0,0 0 1 0 0,0 0 0 0 0,-1 0 0 0 0,1 0-1 0 0,0 0 1 0 0,-1 0 0 0 0,1 0 0 0 0,-1 1-1 0 0,0-1 1 0 0,1 1 0 0 0,-1-1 0 0 0,0 1-1 0 0,0-1 1 0 0,0 1 0 0 0,1 3 0 0 0,-1-3 4 0 0,-1-1 0 0 0,0 1 0 0 0,0 0 0 0 0,0-1 0 0 0,0 1 0 0 0,0 0 0 0 0,-1-1 0 0 0,1 1 0 0 0,0 0 0 0 0,-1-1 0 0 0,1 1 0 0 0,-1-1 0 0 0,0 1-1 0 0,0-1 1 0 0,1 1 0 0 0,-1-1 0 0 0,0 1 0 0 0,-1 0 0 0 0,-7 8-6 0 0,0-1-1 0 0,0 0 0 0 0,0-1 0 0 0,-19 13 0 0 0,22-16 8 0 0,-59 37-50 0 0,-138 67 1 0 0,98-56-38 0 0,100-50-126 0 0,1-1-1 0 0,-1 0 0 0 0,0 1 1 0 0,0-2-1 0 0,0 1 0 0 0,0-1 1 0 0,0 1-1 0 0,-8 0 0 0 0</inkml:trace>
+  <inkml:trace contextRef="#ctx0" brushRef="#br0">31 60 5112 0 0,'-20'-1'-265'0'0,"10"0"216"0"0,14-1 187 0 0,72-10-61 0 0,122-23-2713 0 0,-164 27 2115 0 0</inkml:trace>
 </inkml:ink>
 </file>
 
@@ -1924,15 +1927,15 @@
           <inkml:channelProperty channel="OE" name="resolution" value="1000" units="1/deg"/>
         </inkml:channelProperties>
       </inkml:inkSource>
-      <inkml:timestamp xml:id="ts0" timeString="2026-07-09T02:54:08.394"/>
+      <inkml:timestamp xml:id="ts0" timeString="2026-07-09T04:58:43.879"/>
     </inkml:context>
     <inkml:brush xml:id="br0">
-      <inkml:brushProperty name="width" value="0.1" units="cm"/>
-      <inkml:brushProperty name="height" value="0.1" units="cm"/>
-      <inkml:brushProperty name="color" value="#33CCFF"/>
+      <inkml:brushProperty name="width" value="0.2" units="cm"/>
+      <inkml:brushProperty name="height" value="0.2" units="cm"/>
+      <inkml:brushProperty name="color" value="#FFC114"/>
     </inkml:brush>
   </inkml:definitions>
-  <inkml:trace contextRef="#ctx0" brushRef="#br0">56 37 6773 0 0,'-16'3'-359'0'0,"12"-3"533"0"0,1 0-1 0 0,0 1 1 0 0,-1 0-1 0 0,1-1 1 0 0,0 1-1 0 0,0 0 0 0 0,0 0 1 0 0,0 1-1 0 0,-7 3 2205 0 0,375-17-1244 0 0,129 17-1057 0 0,-404-8-629 0 0,-68-31-6157 0 0,-17 26 4262 0 0</inkml:trace>
+  <inkml:trace contextRef="#ctx0" brushRef="#br0">28 26 3128 0 0,'0'0'2159'0'0,"-14"18"-1963"0"0,9 12-169 0 0,1 0 1 0 0,1 0-1 0 0,1 0 1 0 0,2 0 0 0 0,2 0-1 0 0,0 1 1 0 0,2-1 0 0 0,10 40-1 0 0,57 126 368 0 0,-35-94 1741 0 0,-47-107-1789 0 0,-15-17-277 0 0,18 11 7 0 0,1 0-1 0 0,1-1 1 0 0,0-1-1 0 0,0 1 1 0 0,1-1-1 0 0,1 1 1 0 0,0-2-1 0 0,-2-14 1 0 0,-11-110 165 0 0,11 76-141 0 0,4-1 0 0 0,7-93 1 0 0,3 85-135 0 0,-6 69 23 0 0,5-1 10 0 0,-2 2-4 0 0,-1 0 0 0 0,0 0 0 0 0,0 0 0 0 0,1 1 0 0 0,-1 0 0 0 0,1-1 0 0 0,-1 2 0 0 0,0-1 0 0 0,1 0 0 0 0,-1 1 0 0 0,0 0 0 0 0,0 0 0 0 0,9 3 0 0 0,52 24-18 0 0,-40-15 11 0 0,-1 0 0 0 0,0 2 0 0 0,-1 0 1 0 0,-1 2-1 0 0,0 1 0 0 0,-1 0 0 0 0,20 24 0 0 0,-40-41 10 0 0,1 1 0 0 0,-1-1 0 0 0,0 1 0 0 0,1-1 1 0 0,-1 1-1 0 0,0-1 0 0 0,0 1 0 0 0,0 0 0 0 0,-1-1 0 0 0,1 1 0 0 0,0 0 0 0 0,-1 0 0 0 0,1 0 0 0 0,-1 0 0 0 0,1 0 0 0 0,-1 0 0 0 0,0 0 0 0 0,0-1 1 0 0,0 1-1 0 0,0 0 0 0 0,0 0 0 0 0,0 0 0 0 0,-1 0 0 0 0,1 0 0 0 0,-2 3 0 0 0,0-2 1 0 0,0 0 1 0 0,0-1-1 0 0,0 1 0 0 0,0-1 1 0 0,-1 1-1 0 0,1-1 0 0 0,-1 0 1 0 0,1 0-1 0 0,-1 0 0 0 0,0 0 1 0 0,0-1-1 0 0,0 1 0 0 0,-5 1 1 0 0,-10 3 5 0 0,1-1 0 0 0,-1 0 0 0 0,-1-1 0 0 0,-20 1 1 0 0,6-1-36 0 0,19-1-37 0 0,0-2 1 0 0,1 1-1 0 0,-1-2 1 0 0,0 0-1 0 0,1 0 1 0 0,-21-5-1 0 0</inkml:trace>
 </inkml:ink>
 </file>
 
@@ -1956,15 +1959,15 @@
           <inkml:channelProperty channel="OE" name="resolution" value="1000" units="1/deg"/>
         </inkml:channelProperties>
       </inkml:inkSource>
-      <inkml:timestamp xml:id="ts0" timeString="2026-07-09T02:54:08.917"/>
+      <inkml:timestamp xml:id="ts0" timeString="2026-07-09T04:58:45.041"/>
     </inkml:context>
     <inkml:brush xml:id="br0">
-      <inkml:brushProperty name="width" value="0.1" units="cm"/>
-      <inkml:brushProperty name="height" value="0.1" units="cm"/>
-      <inkml:brushProperty name="color" value="#33CCFF"/>
+      <inkml:brushProperty name="width" value="0.2" units="cm"/>
+      <inkml:brushProperty name="height" value="0.2" units="cm"/>
+      <inkml:brushProperty name="color" value="#FFC114"/>
     </inkml:brush>
   </inkml:definitions>
-  <inkml:trace contextRef="#ctx0" brushRef="#br0">267 41 5741 0 0,'-54'-31'728'0'0,"53"30"-467"0"0,-32-7 4577 0 0,142 31-4783 0 0,-2 5-1 0 0,172 70 1 0 0,-277-97-60 0 0,40 19-115 0 0,-41-19 112 0 0,1 0 0 0 0,-1 0-1 0 0,1 0 1 0 0,-1 0 0 0 0,1 0 0 0 0,-1 1 0 0 0,0-1-1 0 0,1 0 1 0 0,-1 1 0 0 0,0-1 0 0 0,0 0 0 0 0,0 1 0 0 0,0 0-1 0 0,0-1 1 0 0,0 1 0 0 0,0-1 0 0 0,-1 1 0 0 0,1 0-1 0 0,-1 0 1 0 0,1 2 0 0 0,-3-1 4 0 0,0 0-1 0 0,0 1 1 0 0,0-1-1 0 0,-1 0 1 0 0,1 0-1 0 0,-1 0 1 0 0,0 0-1 0 0,0-1 1 0 0,0 1-1 0 0,0-1 1 0 0,-1 0-1 0 0,1 0 1 0 0,-7 3-1 0 0,-52 25-14 0 0,-1-4 0 0 0,-2-2 0 0 0,-112 26-1 0 0,91-27-12 0 0,-85 21-960 0 0,99-29-4649 0 0</inkml:trace>
+  <inkml:trace contextRef="#ctx0" brushRef="#br0">85 563 6261 0 0,'-10'-80'-246'0'0,"9"78"330"0"0,1 1-73 0 0,0 1 0 0 0,0-1 0 0 0,0 0 0 0 0,0 0 0 0 0,-1 0 0 0 0,1 1 0 0 0,0-1 0 0 0,-1 0 0 0 0,1 0 0 0 0,-1 1 0 0 0,1-1 0 0 0,-1 0 0 0 0,1 0 0 0 0,-1 1 0 0 0,1-1 0 0 0,-1 1 0 0 0,0-1 0 0 0,1 1 0 0 0,-1-1 0 0 0,0 1 0 0 0,1-1 0 0 0,-1 1 0 0 0,0-1 0 0 0,0 1 0 0 0,0 0 0 0 0,1-1 0 0 0,-2 1 0 0 0,-3 3-7 0 0,1-1 0 0 0,0 1 0 0 0,0 0 1 0 0,0 0-1 0 0,0 1 0 0 0,0-1 0 0 0,1 1 0 0 0,0 0 0 0 0,-1 0 0 0 0,2 0 0 0 0,-1 0 0 0 0,0 1 0 0 0,1-1 0 0 0,-1 1 0 0 0,1-1 1 0 0,-2 10-1 0 0,4-11 4 0 0,-1-1 1 0 0,1 1-1 0 0,1-1 1 0 0,-1 1 0 0 0,0 0-1 0 0,0-1 1 0 0,1 1-1 0 0,0-1 1 0 0,-1 0 0 0 0,1 1-1 0 0,0-1 1 0 0,0 0-1 0 0,0 1 1 0 0,1-1 0 0 0,-1 0-1 0 0,0 0 1 0 0,1 0 0 0 0,2 3-1 0 0,0-1 8 0 0,0-1 0 0 0,1 1-1 0 0,-1-1 1 0 0,1 0 0 0 0,0 0-1 0 0,0 0 1 0 0,0 0 0 0 0,5 1 0 0 0,3 1 10 0 0,1-1 0 0 0,-1-1 0 0 0,1 0 0 0 0,0 0 0 0 0,27 0 1 0 0,-32-3-2 0 0,0 0 1 0 0,-1 0-1 0 0,1-1 1 0 0,0 0 0 0 0,-1-1-1 0 0,1 0 1 0 0,-1 0-1 0 0,0-1 1 0 0,0 0 0 0 0,1 0-1 0 0,-2-1 1 0 0,1 0 0 0 0,0 0-1 0 0,-1-1 1 0 0,0 0-1 0 0,0 0 1 0 0,0-1 0 0 0,-1 0-1 0 0,0 0 1 0 0,0-1-1 0 0,-1 1 1 0 0,1-1 0 0 0,-1 0-1 0 0,-1-1 1 0 0,1 1-1 0 0,-1-1 1 0 0,-1 0 0 0 0,0 0-1 0 0,0 0 1 0 0,0-1-1 0 0,1-9 1 0 0,-4 18-22 0 0,0-1 0 0 0,0 1 0 0 0,0-1 1 0 0,0 0-1 0 0,0 1 0 0 0,0-1 0 0 0,0 0 0 0 0,0 1 0 0 0,0-1 0 0 0,0 1 1 0 0,0-1-1 0 0,-1 0 0 0 0,1 1 0 0 0,0-1 0 0 0,0 1 0 0 0,-1-1 1 0 0,1 0-1 0 0,0 1 0 0 0,-1-1 0 0 0,1 1 0 0 0,-1-1 0 0 0,1 1 0 0 0,-1 0 1 0 0,1-1-1 0 0,-1 1 0 0 0,1-1 0 0 0,-1 1 0 0 0,1 0 0 0 0,-1-1 0 0 0,1 1 1 0 0,-1 0-1 0 0,1 0 0 0 0,-1 0 0 0 0,0-1 0 0 0,1 1 0 0 0,-1 0 0 0 0,0 0 1 0 0,1 0-1 0 0,-1 0 0 0 0,0 0 0 0 0,0 0-2 0 0,0 0-1 0 0,0 0 1 0 0,0 0 0 0 0,0 0-1 0 0,0 0 1 0 0,0 0-1 0 0,0 0 1 0 0,1 0 0 0 0,-1 0-1 0 0,0 1 1 0 0,0-1 0 0 0,0 0-1 0 0,0 0 1 0 0,0 1 0 0 0,1-1-1 0 0,-1 1 1 0 0,0-1-1 0 0,0 1 1 0 0,1-1 0 0 0,-1 1-1 0 0,0 0 1 0 0,1-1 0 0 0,-1 1-1 0 0,1 0 1 0 0,-1-1-1 0 0,0 1 1 0 0,1 0 0 0 0,-1 1-1 0 0,0 2 5 0 0,1-1 0 0 0,0 1-1 0 0,0-1 1 0 0,0 1-1 0 0,0 0 1 0 0,1-1 0 0 0,0 1-1 0 0,-1-1 1 0 0,1 1-1 0 0,1-1 1 0 0,-1 1 0 0 0,0-1-1 0 0,1 0 1 0 0,-1 0-1 0 0,1 0 1 0 0,0 0-1 0 0,0 0 1 0 0,0 0 0 0 0,1 0-1 0 0,-1-1 1 0 0,1 1-1 0 0,0-1 1 0 0,-1 1 0 0 0,7 3-1 0 0,8 6 22 0 0,1 0 1 0 0,35 18-1 0 0,-48-28-23 0 0,6 4 23 0 0,1-1 0 0 0,0 0 0 0 0,0 0 0 0 0,1-2 0 0 0,-1 1 0 0 0,1-2 0 0 0,0 0 0 0 0,0 0 0 0 0,19-1 0 0 0,-27-1 6 0 0,1 0 0 0 0,-1-1 1 0 0,0 1-1 0 0,0-1 0 0 0,1-1 0 0 0,-1 1 0 0 0,0-1 1 0 0,0 0-1 0 0,0 0 0 0 0,-1 0 0 0 0,1 0 0 0 0,0-1 1 0 0,-1 0-1 0 0,0 0 0 0 0,0 0 0 0 0,0-1 0 0 0,0 0 1 0 0,0 1-1 0 0,-1-1 0 0 0,1 0 0 0 0,-1-1 0 0 0,0 1 1 0 0,0-1-1 0 0,-1 1 0 0 0,4-9 0 0 0,7-23 67 0 0,-1-1 0 0 0,-3 0-1 0 0,-1 0 1 0 0,6-70 0 0 0,-6-155 35 0 0,-8 225-127 0 0,0 35-30 0 0,-1 0-5 0 0,1 2 25 0 0,1 0 0 0 0,-1-1 0 0 0,0 1-1 0 0,0 0 1 0 0,0 0 0 0 0,0 0 0 0 0,0-1 0 0 0,0 1-1 0 0,0 0 1 0 0,0 0 0 0 0,0 0 0 0 0,0-1-1 0 0,0 1 1 0 0,0 0 0 0 0,0 0 0 0 0,0 0 0 0 0,0-1-1 0 0,0 1 1 0 0,0 0 0 0 0,0 0 0 0 0,0 0-1 0 0,0-1 1 0 0,-1 1 0 0 0,1 0 0 0 0,0 0 0 0 0,0 0-1 0 0,0 0 1 0 0,0-1 0 0 0,0 1 0 0 0,0 0-1 0 0,-1 0 1 0 0,1 0 0 0 0,0 0 0 0 0,0 0 0 0 0,0 0-1 0 0,0-1 1 0 0,-1 1 0 0 0,1 0 0 0 0,0 0-1 0 0,0 0 1 0 0,0 0 0 0 0,0 0 0 0 0,-1 0 0 0 0,1 0-1 0 0,0 0 1 0 0,0 0 0 0 0,0 0 0 0 0,-1 0-1 0 0,1 0 1 0 0,0 0 0 0 0,0 0 0 0 0,-1 0 0 0 0,-2 6-4 0 0,0-1-1 0 0,0 1 1 0 0,1 0 0 0 0,-1 0 0 0 0,1 1 0 0 0,1-1 0 0 0,-1 0 0 0 0,1 0 0 0 0,0 1 0 0 0,1-1 0 0 0,-1 13 0 0 0,-1 61-21 0 0,0-27 30 0 0,5 63-1 0 0,-2-102 8 0 0,0 0-1 0 0,2 0 1 0 0,0-1-1 0 0,0 1 1 0 0,1-1-1 0 0,1 0 1 0 0,0 0-1 0 0,1 0 1 0 0,12 19-1 0 0,-11-24-4 0 0,0 0-1 0 0,1-1 1 0 0,0 0-1 0 0,0 0 1 0 0,0-1 0 0 0,1 0-1 0 0,0 0 1 0 0,0-1-1 0 0,1 0 1 0 0,0-1-1 0 0,-1 0 1 0 0,1 0-1 0 0,15 3 1 0 0,6 0-312 0 0,-1-1 0 0 0,1-1 1 0 0,41 1-1 0 0,-38-5-1653 0 0,57-6-1 0 0,-33-5-909 0 0</inkml:trace>
 </inkml:ink>
 </file>
 
@@ -1988,15 +1991,15 @@
           <inkml:channelProperty channel="OE" name="resolution" value="1000" units="1/deg"/>
         </inkml:channelProperties>
       </inkml:inkSource>
-      <inkml:timestamp xml:id="ts0" timeString="2026-07-09T02:54:12.694"/>
+      <inkml:timestamp xml:id="ts0" timeString="2026-07-09T04:58:45.195"/>
     </inkml:context>
     <inkml:brush xml:id="br0">
-      <inkml:brushProperty name="width" value="0.1" units="cm"/>
-      <inkml:brushProperty name="height" value="0.1" units="cm"/>
-      <inkml:brushProperty name="color" value="#33CCFF"/>
+      <inkml:brushProperty name="width" value="0.2" units="cm"/>
+      <inkml:brushProperty name="height" value="0.2" units="cm"/>
+      <inkml:brushProperty name="color" value="#FFC114"/>
     </inkml:brush>
   </inkml:definitions>
-  <inkml:trace contextRef="#ctx0" brushRef="#br0">1 1855 6669 0 0,'17'-26'3823'0'0,"43"-36"-3760"0"0,-21 24 94 0 0,109-106-71 0 0,-66 68-48 0 0,-6 2-16 0 0,198-173-2 0 0,198-53-74 0 0,-315 207 40 0 0,-115 68 27 0 0,307-167-90 0 0,10 38 0 0 0,-245 111 40 0 0,143-34 1 0 0,541-83-38 0 0,150 76 25 0 0,-590 64 61 0 0,746-20 13 0 0,-38 82-36 0 0,-487 8 13 0 0,-517-43-15 0 0,431 62-63 0 0,-116 3 87 0 0,312 91-117 0 0,-532-122 16 0 0,241 98 1 0 0,33 31 8 0 0,157 119 40 0 0,-561-274 59 0 0,8 3-65 0 0,-2 1 0 0 0,0 1 1 0 0,50 42-1 0 0,67 50 117 0 0,-149-111-65 0 0,17 12 55 0 0,-11-9-48 0 0,-5-4 15 0 0,-6-3-1647 0 0,-16-13 342 0 0,5 3-1156 0 0,2 4-399 0 0</inkml:trace>
+  <inkml:trace contextRef="#ctx0" brushRef="#br0">200 151 6561 0 0,'-52'-5'-66'0'0,"20"3"377"0"0,0-2 0 0 0,-48-12 1 0 0,79 16-302 0 0,1 0-1 0 0,0 0 1 0 0,0-1 0 0 0,0 1 0 0 0,-1 0 0 0 0,1 0 0 0 0,0 0 0 0 0,0-1 0 0 0,-1 1-1 0 0,1 0 1 0 0,0 0 0 0 0,0-1 0 0 0,0 1 0 0 0,0 0 0 0 0,0 0 0 0 0,-1-1-1 0 0,1 1 1 0 0,0 0 0 0 0,0-1 0 0 0,0 1 0 0 0,0 0 0 0 0,0-1 0 0 0,0 1 0 0 0,0 0-1 0 0,0 0 1 0 0,0-1 0 0 0,0 1 0 0 0,0 0 0 0 0,0-1 0 0 0,0 1 0 0 0,0 0 0 0 0,1-1-1 0 0,-1 1 1 0 0,0 0 0 0 0,0 0 0 0 0,0-1 0 0 0,0 1 0 0 0,0 0 0 0 0,1 0-1 0 0,-1-1 1 0 0,0 1 0 0 0,0 0 0 0 0,1 0 0 0 0,-1-1 0 0 0,0 1 0 0 0,0 0 0 0 0,1 0-1 0 0,-1 0 1 0 0,0 0 0 0 0,1-1 0 0 0,27-10-27 0 0,0 1-1 0 0,1 2 1 0 0,1 0-1 0 0,50-5 1 0 0,0-1-624 0 0,89-18-2697 0 0,-92 17 1328 0 0</inkml:trace>
 </inkml:ink>
 </file>
 
@@ -2020,15 +2023,15 @@
           <inkml:channelProperty channel="OE" name="resolution" value="1000" units="1/deg"/>
         </inkml:channelProperties>
       </inkml:inkSource>
-      <inkml:timestamp xml:id="ts0" timeString="2026-07-09T02:54:13.979"/>
+      <inkml:timestamp xml:id="ts0" timeString="2026-07-09T04:58:54.838"/>
     </inkml:context>
     <inkml:brush xml:id="br0">
-      <inkml:brushProperty name="width" value="0.1" units="cm"/>
-      <inkml:brushProperty name="height" value="0.1" units="cm"/>
-      <inkml:brushProperty name="color" value="#33CCFF"/>
+      <inkml:brushProperty name="width" value="0.2" units="cm"/>
+      <inkml:brushProperty name="height" value="0.2" units="cm"/>
+      <inkml:brushProperty name="color" value="#FFC114"/>
     </inkml:brush>
   </inkml:definitions>
-  <inkml:trace contextRef="#ctx0" brushRef="#br0">531 27 6481 0 0,'-37'-26'4114'0'0,"35"37"-3190"0"0,7 23-881 0 0,10 36-259 0 0,-7-38 195 0 0,2 1 0 0 0,17 37 1 0 0,18 50-20 0 0,-42-112 35 0 0,21 48-82 0 0,-23-54 87 0 0,6 21 69 0 0,-6-22 192 0 0,-5 0-233 0 0,1 0 1 0 0,-1-1 0 0 0,0 1-1 0 0,0-1 1 0 0,1 0 0 0 0,-1 0-1 0 0,0 0 1 0 0,0-1 0 0 0,-4 0-1 0 0,-3 0 4 0 0,-180-5 173 0 0,-70-5 153 0 0,157-3-21 0 0,85 7-922 0 0,18 6 279 0 0,0 0 1 0 0,1 1 0 0 0,-1-1 0 0 0,0 0-1 0 0,0 0 1 0 0,1 0 0 0 0,-1 1 0 0 0,1-1-1 0 0,-1 0 1 0 0,1 0 0 0 0,-1 0 0 0 0,1 0-1 0 0,-1 0 1 0 0,1 0 0 0 0,0 0 0 0 0,0 0 0 0 0,-1 0-1 0 0,1 0 1 0 0,0-1 0 0 0,0 1 0 0 0,0 0-1 0 0,0 0 1 0 0,0 0 0 0 0,0 0 0 0 0,1-1-1 0 0</inkml:trace>
+  <inkml:trace contextRef="#ctx0" brushRef="#br0">1 2104 5000 0 0,'0'0'-278'0'0,"24"5"1908"0"0,247-212-727 0 0,-212 165-727 0 0,250-161 259 0 0,-280 187-404 0 0,384-195 339 0 0,-235 143-308 0 0,-105 42 10 0 0,84-43-1 0 0,-93 40-30 0 0,110-36 1 0 0,-68 29-22 0 0,231-88 56 0 0,164-39-21 0 0,-320 111-37 0 0,332-91-35 0 0,290-37 24 0 0,-620 143-12 0 0,505-92 18 0 0,0 20 8 0 0,339-28-58 0 0,-692 105 11 0 0,-287 29 25 0 0,1012-25-9 0 0,-410 47 19 0 0,-612-17-9 0 0,-3-1 8 0 0,919 74-2 0 0,-868-63-11 0 0,129 17 2 0 0,54 11-4 0 0,-24 0 1 0 0,-66-12-6 0 0,298 84 0 0 0,-177-5-22 0 0,-10-5 20 0 0,-255-88 43 0 0,89 28-34 0 0,-92-32-14 0 0,0 2 0 0 0,35 18-1 0 0,-27-11 35 0 0,203 80 94 0 0,-164-70 864 0 0,-76-28-659 0 0,-10-4-1084 0 0,-1 0 614 0 0,-3-2-1046 0 0,0 1-1 0 0,0-2 1 0 0,-15-8-1 0 0,12 2-1181 0 0</inkml:trace>
 </inkml:ink>
 </file>
 
@@ -2052,15 +2055,15 @@
           <inkml:channelProperty channel="OE" name="resolution" value="1000" units="1/deg"/>
         </inkml:channelProperties>
       </inkml:inkSource>
-      <inkml:timestamp xml:id="ts0" timeString="2026-07-09T02:55:58.393"/>
+      <inkml:timestamp xml:id="ts0" timeString="2026-07-09T04:58:55.885"/>
     </inkml:context>
     <inkml:brush xml:id="br0">
-      <inkml:brushProperty name="width" value="0.1" units="cm"/>
-      <inkml:brushProperty name="height" value="0.1" units="cm"/>
-      <inkml:brushProperty name="color" value="#33CCFF"/>
+      <inkml:brushProperty name="width" value="0.2" units="cm"/>
+      <inkml:brushProperty name="height" value="0.2" units="cm"/>
+      <inkml:brushProperty name="color" value="#FFC114"/>
     </inkml:brush>
   </inkml:definitions>
-  <inkml:trace contextRef="#ctx0" brushRef="#br0">9 126 1400 0 0,'-8'0'7463'0'0,"32"6"-7437"0"0,-19-4 22 0 0,3 0-10 0 0,0 0 1 0 0,0-1 0 0 0,0 0-1 0 0,13 1 1 0 0,-20-2-38 0 0,354 9 1106 0 0,-336-6-965 0 0,-16-4 4 0 0,-29-8 0 0 0,-8-1-152 0 0,1-2 1 0 0,-57-27 0 0 0,9 0-25 0 0,9 8 149 0 0,71 31-52 0 0,-14-12 74 0 0,13 11-109 0 0,9 4-24 0 0,283 69 149 0 0,-253-58-35 0 0,-36-14-69 0 0,-36 25 22 0 0,-31 11-11 0 0,-78 58 1 0 0,39-24 4 0 0,46-27-1006 0 0</inkml:trace>
+  <inkml:trace contextRef="#ctx0" brushRef="#br0">420 70 5685 0 0,'-5'-6'-103'0'0,"-1"1"0"0"0,0 0 0 0 0,-1 1 0 0 0,1-1 0 0 0,-1 1 1 0 0,0 0-1 0 0,0 1 0 0 0,-11-5 0 0 0,7 3 249 0 0,9 5-35 0 0,-2-3 175 0 0,1 0-1 0 0,-1 1 1 0 0,0 0-1 0 0,1 0 0 0 0,-1 0 1 0 0,0 0-1 0 0,0 1 0 0 0,-7-2 507 0 0,16 5-738 0 0,146 52 337 0 0,14 6-194 0 0,11 13 15 0 0,-150-62-163 0 0,25 10 29 0 0,-49-20-83 0 0,-2 0-21 0 0,-1 1 26 0 0,1-1-1 0 0,0 1 1 0 0,-1-1-1 0 0,1 0 1 0 0,-1 1-1 0 0,0-1 1 0 0,1 0-1 0 0,-1 0 1 0 0,0 1-1 0 0,0-1 1 0 0,0 0-1 0 0,1 0 1 0 0,-1 0-1 0 0,0 0 1 0 0,-2 1 0 0 0,2-1 1 0 0,-18 12 15 0 0,-1-2 0 0 0,0-1 0 0 0,0 0 0 0 0,-1-2 0 0 0,0 0 0 0 0,-44 9 0 0 0,37-9-2 0 0,-155 38 327 0 0,-210 25 0 0 0,347-64 225 0 0,43-7-312 0 0,-16-16-4265 0 0</inkml:trace>
 </inkml:ink>
 </file>
 
@@ -2084,15 +2087,15 @@
           <inkml:channelProperty channel="OE" name="resolution" value="1000" units="1/deg"/>
         </inkml:channelProperties>
       </inkml:inkSource>
-      <inkml:timestamp xml:id="ts0" timeString="2026-07-09T02:56:01.276"/>
+      <inkml:timestamp xml:id="ts0" timeString="2026-07-09T04:57:47.939"/>
     </inkml:context>
     <inkml:brush xml:id="br0">
-      <inkml:brushProperty name="width" value="0.1" units="cm"/>
-      <inkml:brushProperty name="height" value="0.1" units="cm"/>
-      <inkml:brushProperty name="color" value="#33CCFF"/>
+      <inkml:brushProperty name="width" value="0.2" units="cm"/>
+      <inkml:brushProperty name="height" value="0.2" units="cm"/>
+      <inkml:brushProperty name="color" value="#FFC114"/>
     </inkml:brush>
   </inkml:definitions>
-  <inkml:trace contextRef="#ctx0" brushRef="#br0">8 104 6633 0 0,'0'0'-429'0'0,"-2"0"-252"0"0,2 0 714 0 0,-1 0 0 0 0,1 0 0 0 0,0 0-1 0 0,0 0 1 0 0,-1 0 0 0 0,1 0 0 0 0,0 0-1 0 0,0 0 1 0 0,-1 0 0 0 0,1 0 0 0 0,0 0-1 0 0,0-1 1 0 0,0 1 0 0 0,-1 0 0 0 0,1 0 0 0 0,0 0-1 0 0,0 0 1 0 0,0 0 0 0 0,-1-1 0 0 0,1 1-1 0 0,0 0 1 0 0,0 0 0 0 0,0 0 0 0 0,0-1-1 0 0,0 1 1 0 0,0 0 0 0 0,-1 0 0 0 0,1-1 0 0 0,0 1-1 0 0,0 0 1 0 0,0 0 0 0 0,0 0 0 0 0,0-1-1 0 0,0 1 1 0 0,0 0 0 0 0,0 0 0 0 0,0-1-1 0 0,0 1 1 0 0,0-1 0 0 0,9-2 24 0 0,1 1-1 0 0,-1-1 1 0 0,1 2-1 0 0,-1-1 1 0 0,1 1 0 0 0,0 1-1 0 0,11 0 1 0 0,84 7 160 0 0,-55-3-135 0 0,95 4 489 0 0,-142-8-406 0 0,14-2 111 0 0,-17-1-268 0 0,-3-7 45 0 0,-19-10-19 0 0,1 8-42 0 0,-1 0 0 0 0,0 2 1 0 0,-1 0-1 0 0,-24-7 1 0 0,34 13 6 0 0,10 3 6 0 0,1 0-11 0 0,-7 0 19 0 0,7 0 49 0 0,11 3-53 0 0,24 4-11 0 0,0 2 1 0 0,0 2-1 0 0,-1 1 1 0 0,-1 1-1 0 0,0 1 1 0 0,45 28-1 0 0,-75-41 5 0 0,-1 1-1 0 0,1-1 1 0 0,-1 0-1 0 0,1 0 1 0 0,-1 1-1 0 0,1-1 1 0 0,-1 0 0 0 0,1 1-1 0 0,-1-1 1 0 0,1 0-1 0 0,-1 1 1 0 0,0-1-1 0 0,1 1 1 0 0,-1-1-1 0 0,0 1 1 0 0,1-1 0 0 0,-1 1-1 0 0,0-1 1 0 0,1 1-1 0 0,-1-1 1 0 0,0 1-1 0 0,0-1 1 0 0,0 1 0 0 0,0 0-1 0 0,0-1 1 0 0,1 1-1 0 0,-1-1 1 0 0,0 1-1 0 0,0-1 1 0 0,0 1-1 0 0,0 0 1 0 0,-1-1 0 0 0,1 1-1 0 0,0 0 1 0 0,-18 15 87 0 0,-43 10 52 0 0,50-22-118 0 0,-55 18 34 0 0,41-15-2697 0 0</inkml:trace>
+  <inkml:trace contextRef="#ctx0" brushRef="#br0">132 106 6117 0 0,'-13'-45'-1158'0'0,"6"31"1325"0"0,-13-14 398 0 0,19 26-365 0 0,-8-15 905 0 0,2 41-1058 0 0,-2 29 76 0 0,-3 63 0 0 0,-4 19 51 0 0,1-50 90 0 0,-8 167 0 0 0,23-251-255 0 0,0 1-1 0 0,0-1 0 0 0,0 0 0 0 0,1 1 1 0 0,-1-1-1 0 0,0 0 0 0 0,1 1 0 0 0,-1-1 0 0 0,1 0 1 0 0,-1 1-1 0 0,1-1 0 0 0,0 0 0 0 0,-1 0 1 0 0,1 1-1 0 0,0-1 0 0 0,0 0 0 0 0,0 0 1 0 0,0 0-1 0 0,0 0 0 0 0,0 0 0 0 0,0-1 0 0 0,0 1 1 0 0,0 0-1 0 0,1 0 0 0 0,-1-1 0 0 0,0 1 1 0 0,1 0-1 0 0,-1-1 0 0 0,0 0 0 0 0,1 1 1 0 0,-1-1-1 0 0,0 0 0 0 0,1 1 0 0 0,-1-1 0 0 0,0 0 1 0 0,1 0-1 0 0,-1 0 0 0 0,1 0 0 0 0,1-1 1 0 0,10 0 3 0 0,-1 0 0 0 0,1-1 0 0 0,20-7 1 0 0,-11 4 13 0 0,25-3 22 0 0,1 3 0 0 0,0 1-1 0 0,59 4 1 0 0,-86 0-18 0 0,2 2 40 0 0,-21-2-24 0 0,1 5 54 0 0,-7-11-1393 0 0,3 4 1047 0 0,0 0-1 0 0,0 0 0 0 0,0 0 1 0 0,0 0-1 0 0,0 0 0 0 0,0-1 0 0 0,1 1 1 0 0,-1 0-1 0 0,1 0 0 0 0,-1-1 0 0 0,1 1 1 0 0,0-4-1 0 0</inkml:trace>
 </inkml:ink>
 </file>
 
@@ -2148,7 +2151,7 @@
           <inkml:channelProperty channel="OE" name="resolution" value="1000" units="1/deg"/>
         </inkml:channelProperties>
       </inkml:inkSource>
-      <inkml:timestamp xml:id="ts0" timeString="2026-07-09T04:58:32.379"/>
+      <inkml:timestamp xml:id="ts0" timeString="2026-07-09T04:57:48.763"/>
     </inkml:context>
     <inkml:brush xml:id="br0">
       <inkml:brushProperty name="width" value="0.2" units="cm"/>
@@ -2156,7 +2159,7 @@
       <inkml:brushProperty name="color" value="#FFC114"/>
     </inkml:brush>
   </inkml:definitions>
-  <inkml:trace contextRef="#ctx0" brushRef="#br0">53 5 2484 0 0,'0'0'1367'0'0,"-4"-1"-1181"0"0,-1 0-461 0 0,-39-2 4882 0 0,61 13-4601 0 0,-12-8 18 0 0,0-1-1 0 0,0 0 1 0 0,0 0-1 0 0,1 0 0 0 0,-1 0 1 0 0,0-1-1 0 0,10 0 1 0 0,9 1 59 0 0,6 1-40 0 0,600 25 344 0 0,-594-25-374 0 0,225 21 90 0 0,-182-16 352 0 0,-76-7-373 0 0,60-2 107 0 0,50-6-101 0 0,-23 8 69 0 0,-87 0 12 0 0,18 3 262 0 0</inkml:trace>
+  <inkml:trace contextRef="#ctx0" brushRef="#br0">147 201 5733 0 0,'0'0'-273'0'0,"-17"-2"-326"0"0,8 0 325 0 0,10-1 250 0 0,72-15 206 0 0,-47 13-72 0 0,43-14 0 0 0,-62 16-79 0 0,0 0 0 0 0,0 0 0 0 0,0-1 0 0 0,0 0 0 0 0,-1 0 0 0 0,1 0-1 0 0,-1-1 1 0 0,0 0 0 0 0,-1 0 0 0 0,8-9 0 0 0,-11 12-16 0 0,-1 0 0 0 0,0 1 0 0 0,0-1-1 0 0,0 0 1 0 0,-1 0 0 0 0,1 0 0 0 0,0 0 0 0 0,-1 0-1 0 0,1 0 1 0 0,-1 0 0 0 0,1 0 0 0 0,-1 0 0 0 0,0 0-1 0 0,0 0 1 0 0,0 0 0 0 0,0 0 0 0 0,0 0 0 0 0,-1 0-1 0 0,1 0 1 0 0,-1 0 0 0 0,1 0 0 0 0,-1 0 0 0 0,0 0 0 0 0,1 0-1 0 0,-1 0 1 0 0,0 1 0 0 0,0-1 0 0 0,-1 0 0 0 0,1 0-1 0 0,0 1 1 0 0,0-1 0 0 0,-1 1 0 0 0,-1-2 0 0 0,-1 0 0 0 0,1 0 1 0 0,0 0 0 0 0,-1 0-1 0 0,1 0 1 0 0,-1 1 0 0 0,0 0-1 0 0,0 0 1 0 0,0 0 0 0 0,0 0-1 0 0,0 0 1 0 0,0 1 0 0 0,0 0-1 0 0,-1 0 1 0 0,1 0 0 0 0,-6 0-1 0 0,-5 2-4 0 0,1 0 0 0 0,-1 1 0 0 0,0 1-1 0 0,0 0 1 0 0,1 1 0 0 0,0 1 0 0 0,-1 0-1 0 0,2 1 1 0 0,-1 0 0 0 0,-17 12 0 0 0,22-12-11 0 0,0-1 1 0 0,0 2 0 0 0,1-1-1 0 0,0 1 1 0 0,1 0 0 0 0,-1 1-1 0 0,2 0 1 0 0,-1 0 0 0 0,1 0-1 0 0,0 1 1 0 0,0 0-1 0 0,1 0 1 0 0,1 1 0 0 0,0-1-1 0 0,0 1 1 0 0,-4 15 0 0 0,7-21 12 0 0,0 0 0 0 0,1 1 1 0 0,-1-1-1 0 0,1 0 1 0 0,0 0-1 0 0,0 0 1 0 0,0 0-1 0 0,0 1 0 0 0,1-1 1 0 0,0 0-1 0 0,0 0 1 0 0,0 0-1 0 0,0 0 1 0 0,1 0-1 0 0,-1 0 0 0 0,1-1 1 0 0,0 1-1 0 0,0 0 1 0 0,1-1-1 0 0,-1 1 1 0 0,1-1-1 0 0,0 0 1 0 0,-1 0-1 0 0,1 0 0 0 0,1 0 1 0 0,-1-1-1 0 0,0 1 1 0 0,1-1-1 0 0,-1 0 1 0 0,1 0-1 0 0,0 0 0 0 0,-1 0 1 0 0,1-1-1 0 0,8 3 1 0 0,12 3 43 0 0,1-2 1 0 0,1 0-1 0 0,-1-2 1 0 0,43 1-1 0 0,-27-1-20 0 0,152 4 219 0 0,-126-14-192 0 0,-72-19-3671 0 0</inkml:trace>
 </inkml:ink>
 </file>
 
@@ -2180,7 +2183,7 @@
           <inkml:channelProperty channel="OE" name="resolution" value="1000" units="1/deg"/>
         </inkml:channelProperties>
       </inkml:inkSource>
-      <inkml:timestamp xml:id="ts0" timeString="2026-07-09T04:58:33.128"/>
+      <inkml:timestamp xml:id="ts0" timeString="2026-07-09T04:57:49.623"/>
     </inkml:context>
     <inkml:brush xml:id="br0">
       <inkml:brushProperty name="width" value="0.2" units="cm"/>
@@ -2188,7 +2191,7 @@
       <inkml:brushProperty name="color" value="#FFC114"/>
     </inkml:brush>
   </inkml:definitions>
-  <inkml:trace contextRef="#ctx0" brushRef="#br0">158 65 5621 0 0,'-13'-6'-338'0'0,"-76"-42"1955"0"0,87 47-1392 0 0,-34-9 989 0 0,359 98-533 0 0,-202-60-586 0 0,-102-23-72 0 0,-10-4 6 0 0,0 1-1 0 0,-1 1 1 0 0,1 0-1 0 0,-1 0 0 0 0,14 7 1 0 0,-21-9 19 0 0,-1 1-44 0 0,-1 0 1 0 0,0-1-1 0 0,0 1 0 0 0,1 0 1 0 0,-1 0-1 0 0,-1-1 1 0 0,1 1-1 0 0,0 0 0 0 0,0-1 1 0 0,-1 1-1 0 0,1-1 0 0 0,0 0 1 0 0,-1 1-1 0 0,0-1 1 0 0,-2 1-1 0 0,-27 19 26 0 0,-463 232-410 0 0</inkml:trace>
+  <inkml:trace contextRef="#ctx0" brushRef="#br0">256 80 4708 0 0,'1'-2'-32'0'0,"0"-1"0"0"0,-1 1 0 0 0,1-1 0 0 0,-1 1 0 0 0,1-1 0 0 0,-1 1-1 0 0,0-1 1 0 0,0 1 0 0 0,0-1 0 0 0,0 1 0 0 0,0-1 0 0 0,-1 1 0 0 0,1-1-1 0 0,-1 1 1 0 0,0 0 0 0 0,0-1 0 0 0,1 1 0 0 0,-2 0 0 0 0,1-1 0 0 0,0 1-1 0 0,0 0 1 0 0,-1 0 0 0 0,1 0 0 0 0,-1 0 0 0 0,1 0 0 0 0,-1 0 0 0 0,0 1-1 0 0,0-1 1 0 0,0 0 0 0 0,0 1 0 0 0,0 0 0 0 0,-3-2 0 0 0,3 2 32 0 0,0 0-12 0 0,-5-2 8 0 0,5 2 6 0 0,-36 5 148 0 0,30-1-120 0 0,-1 0 1 0 0,1 0-1 0 0,1 1 1 0 0,-1 0-1 0 0,0 1 1 0 0,1-1-1 0 0,0 1 1 0 0,0 1-1 0 0,0 0 1 0 0,1 0-1 0 0,0 0 1 0 0,-11 14-1 0 0,5-3 37 0 0,0 1 0 0 0,2 0-1 0 0,0 0 1 0 0,-8 22 0 0 0,16-38-46 0 0,1 0 0 0 0,0 1 0 0 0,0-1 0 0 0,0 0 1 0 0,0 0-1 0 0,1 1 0 0 0,-1-1 0 0 0,1 0 0 0 0,-1 1 1 0 0,1-1-1 0 0,0 1 0 0 0,0-1 0 0 0,0 1 0 0 0,0-1 1 0 0,0 1-1 0 0,1-1 0 0 0,-1 0 0 0 0,1 1 0 0 0,0-1 0 0 0,-1 0 1 0 0,1 1-1 0 0,0-1 0 0 0,0 0 0 0 0,0 0 0 0 0,1 0 1 0 0,-1 0-1 0 0,1 0 0 0 0,-1 0 0 0 0,1 0 0 0 0,-1 0 0 0 0,1 0 1 0 0,0-1-1 0 0,0 1 0 0 0,0-1 0 0 0,0 1 0 0 0,0-1 1 0 0,0 0-1 0 0,0 0 0 0 0,1 0 0 0 0,-1 0 0 0 0,3 1 0 0 0,2-1 21 0 0,0 1-1 0 0,0-1 0 0 0,0 0 0 0 0,0 0 0 0 0,-1-1 1 0 0,1 0-1 0 0,0 0 0 0 0,0 0 0 0 0,0-1 0 0 0,0 0 0 0 0,0-1 1 0 0,0 0-1 0 0,12-4 0 0 0,-9 0 92 0 0,0-1 0 0 0,-1 1 0 0 0,1-2 0 0 0,-2 1 0 0 0,1-1 0 0 0,-1 0 0 0 0,0-1 1 0 0,0 0-1 0 0,-1 0 0 0 0,-1-1 0 0 0,1 0 0 0 0,-2 0 0 0 0,1-1 0 0 0,6-18 0 0 0,-12 28-32 0 0,0 1-98 0 0,1 0-1 0 0,-1 0 0 0 0,0 1 0 0 0,0-1 0 0 0,0 0 0 0 0,0 0 0 0 0,1 0 0 0 0,-1 0 0 0 0,0 0 0 0 0,0 0 1 0 0,0 0-1 0 0,1 1 0 0 0,-1-1 0 0 0,0 0 0 0 0,0 0 0 0 0,1 0 0 0 0,-1 0 0 0 0,0 0 0 0 0,0 0 0 0 0,0 0 1 0 0,1 0-1 0 0,-1 0 0 0 0,0 0 0 0 0,0 0 0 0 0,1 0 0 0 0,-1-1 0 0 0,0 1 0 0 0,0 0 0 0 0,0 0 0 0 0,1 0 1 0 0,-1 0-1 0 0,0 0 0 0 0,0 0 0 0 0,0 0 0 0 0,0-1 0 0 0,1 1 0 0 0,-1 0 0 0 0,0 0 0 0 0,0 0 0 0 0,0 0 1 0 0,0-1-1 0 0,0 1 0 0 0,1 0 0 0 0,-1 0 0 0 0,0 0 0 0 0,0-1 0 0 0,0 1 0 0 0,0 0 0 0 0,0 0 1 0 0,0 0-1 0 0,0-1 0 0 0,0 1 0 0 0,0 0 0 0 0,0 0 0 0 0,0 0 0 0 0,0-1 0 0 0,0 1 0 0 0,0 0 0 0 0,0 0 1 0 0,0-1-1 0 0,0 1 0 0 0,21 27-164 0 0,12 14-80 0 0,-28-37-19 0 0,0-1 1 0 0,0 0-1 0 0,1 0 1 0 0,-1 0-1 0 0,1-1 0 0 0,0 0 1 0 0,0 0-1 0 0,0 0 1 0 0,0-1-1 0 0,0 0 0 0 0,0 0 1 0 0,0 0-1 0 0,0-1 1 0 0,8 0-1 0 0,8-2-1778 0 0</inkml:trace>
 </inkml:ink>
 </file>
 
@@ -2212,7 +2215,7 @@
           <inkml:channelProperty channel="OE" name="resolution" value="1000" units="1/deg"/>
         </inkml:channelProperties>
       </inkml:inkSource>
-      <inkml:timestamp xml:id="ts0" timeString="2026-07-09T04:58:34.081"/>
+      <inkml:timestamp xml:id="ts0" timeString="2026-07-09T04:57:50.606"/>
     </inkml:context>
     <inkml:brush xml:id="br0">
       <inkml:brushProperty name="width" value="0.2" units="cm"/>
@@ -2220,7 +2223,7 @@
       <inkml:brushProperty name="color" value="#FFC114"/>
     </inkml:brush>
   </inkml:definitions>
-  <inkml:trace contextRef="#ctx0" brushRef="#br0">61 151 6373 0 0,'2'-50'-204'0'0,"-1"34"566"0"0,0 0-1 0 0,-1 0 0 0 0,0 0 0 0 0,-4-19 0 0 0,4 33-157 0 0,-5 5-196 0 0,0 2-4 0 0,0 0 0 0 0,0 1 0 0 0,1-1 0 0 0,0 1 0 0 0,0 0 0 0 0,0 0 1 0 0,0 1-1 0 0,1-1 0 0 0,0 1 0 0 0,1 0 0 0 0,-1 0 0 0 0,1 0 0 0 0,1 0 0 0 0,-1 0 1 0 0,1 0-1 0 0,0 11 0 0 0,0-9 2 0 0,0 0 0 0 0,1 0 1 0 0,0-1-1 0 0,1 1 0 0 0,0 0 0 0 0,0-1 1 0 0,0 1-1 0 0,1-1 0 0 0,1 1 0 0 0,0-1 1 0 0,0 0-1 0 0,0 0 0 0 0,1 0 0 0 0,7 10 1 0 0,-7-14 9 0 0,1 1 0 0 0,0-1-1 0 0,0 0 1 0 0,0-1 0 0 0,1 1 0 0 0,-1-1 0 0 0,1 0 0 0 0,0-1 0 0 0,-1 1 0 0 0,2-1-1 0 0,-1 0 1 0 0,0-1 0 0 0,0 1 0 0 0,0-1 0 0 0,1-1 0 0 0,-1 1 0 0 0,11-1 0 0 0,14-1-2 0 0,0 0 0 0 0,39-9 1 0 0,-55 8-41 0 0,-5 1-320 0 0,1-1 1 0 0,-1-1-1 0 0,1 0 0 0 0,-1 0 1 0 0,0-1-1 0 0,0 0 0 0 0,-1 0 0 0 0,1-1 1 0 0,-1-1-1 0 0,0 0 0 0 0,0 0 0 0 0,12-11 1 0 0,-4-3-1959 0 0</inkml:trace>
+  <inkml:trace contextRef="#ctx0" brushRef="#br0">12 124 5176 0 0,'0'0'-207'0'0,"-9"-2"-390"0"0,6 2 504 0 0,9-1-534 0 0,18 4 535 0 0,1 1 1 0 0,-1 2-1 0 0,46 15 1 0 0,-30-7 35 0 0,-15-5 37 0 0,0 1 0 0 0,36 19-1 0 0,-54-26 22 0 0,0 2-1 0 0,-1-1 1 0 0,0 1-1 0 0,0 0 1 0 0,0 0-1 0 0,0 1 1 0 0,-1-1-1 0 0,0 1 1 0 0,0 1-1 0 0,-1-1 1 0 0,1 1-1 0 0,-1-1 0 0 0,3 9 1 0 0,-6-13 16 0 0,0 0 0 0 0,0-1 0 0 0,-1 1 1 0 0,1 0-1 0 0,-1 0 0 0 0,1-1 0 0 0,-1 1 0 0 0,0 0 0 0 0,1 0 0 0 0,-1 0 1 0 0,0 0-1 0 0,0-1 0 0 0,0 1 0 0 0,0 0 0 0 0,-1 0 0 0 0,1 0 1 0 0,-1 0-1 0 0,1-1 0 0 0,-1 1 0 0 0,1 0 0 0 0,-1 0 0 0 0,0-1 0 0 0,0 1 1 0 0,0 0-1 0 0,0-1 0 0 0,0 1 0 0 0,-2 2 0 0 0,0-2 72 0 0,0 0 0 0 0,-1 0-1 0 0,1 0 1 0 0,0 0 0 0 0,0-1 0 0 0,-1 1-1 0 0,1-1 1 0 0,-1 0 0 0 0,1 0-1 0 0,-1 0 1 0 0,-5 1 0 0 0,7-2 394 0 0,-3-1-234 0 0,3 0-210 0 0,-1-1 1 0 0,0 1-1 0 0,0 0 0 0 0,0-1 1 0 0,1 0-1 0 0,-1 0 1 0 0,0 0-1 0 0,1 0 0 0 0,0 0 1 0 0,0 0-1 0 0,-1-1 1 0 0,1 1-1 0 0,1-1 0 0 0,-1 1 1 0 0,0-1-1 0 0,1 0 1 0 0,-1 0-1 0 0,1 1 0 0 0,0-1 1 0 0,0 0-1 0 0,0 0 1 0 0,0-1-1 0 0,0 1 0 0 0,1 0 1 0 0,-1 0-1 0 0,1 0 1 0 0,0 0-1 0 0,0 0 0 0 0,0-1 1 0 0,1 1-1 0 0,-1 0 1 0 0,1 0-1 0 0,0-3 0 0 0,4-11-24 0 0,0 1 0 0 0,1 1 0 0 0,1-1-1 0 0,0 1 1 0 0,1 0 0 0 0,1 0-1 0 0,0 1 1 0 0,1 0 0 0 0,15-16 0 0 0,10-17-33 0 0,-30 42 9 0 0,9-17 10 0 0,-13 21 16 0 0,-1 0-11 0 0,0 1 0 0 0,1 0 0 0 0,-1-1-1 0 0,0 1 1 0 0,0-1 0 0 0,1 1 0 0 0,-1-1 0 0 0,0 1 0 0 0,0-1 0 0 0,0 1 0 0 0,0-1-1 0 0,1 1 1 0 0,-1-1 0 0 0,0 1 0 0 0,0-1 0 0 0,0 1 0 0 0,0-1 0 0 0,0 1 0 0 0,0-1-1 0 0,0 1 1 0 0,0-1 0 0 0,-1 1 0 0 0,1-1 0 0 0,0 1 0 0 0,0 0 0 0 0,0-1-1 0 0,0 1 1 0 0,-1-1 0 0 0,1 0 0 0 0,0-18-4029 0 0,7 13 2656 0 0</inkml:trace>
 </inkml:ink>
 </file>
 
@@ -2244,7 +2247,7 @@
           <inkml:channelProperty channel="OE" name="resolution" value="1000" units="1/deg"/>
         </inkml:channelProperties>
       </inkml:inkSource>
-      <inkml:timestamp xml:id="ts0" timeString="2026-07-09T04:58:34.282"/>
+      <inkml:timestamp xml:id="ts0" timeString="2026-07-09T04:57:51.485"/>
     </inkml:context>
     <inkml:brush xml:id="br0">
       <inkml:brushProperty name="width" value="0.2" units="cm"/>
@@ -2252,7 +2255,7 @@
       <inkml:brushProperty name="color" value="#FFC114"/>
     </inkml:brush>
   </inkml:definitions>
-  <inkml:trace contextRef="#ctx0" brushRef="#br0">93 75 6401 0 0,'-38'-30'325'0'0,"32"27"-34"0"0,1-1-1 0 0,-1 0 0 0 0,1 0 1 0 0,0 0-1 0 0,-9-10 0 0 0,13 12-139 0 0,-12-7 83 0 0</inkml:trace>
+  <inkml:trace contextRef="#ctx0" brushRef="#br0">4 17 4120 0 0,'0'0'-72'0'0,"-2"-6"51"0"0,1 4-10 0 0,1 6-173 0 0,2 12 176 0 0,0 0 1 0 0,2 0-1 0 0,0-1 1 0 0,0 1-1 0 0,2-1 0 0 0,-1 0 1 0 0,2 0-1 0 0,0-1 1 0 0,12 18-1 0 0,-4 15 4369 0 0,-21-68-3399 0 0,5 12-872 0 0,-1 0-1 0 0,2 0 0 0 0,-1 0 1 0 0,1 0-1 0 0,0-1 0 0 0,1 1 0 0 0,0 0 1 0 0,1 0-1 0 0,0 0 0 0 0,0 0 1 0 0,1 0-1 0 0,0 1 0 0 0,5-11 1 0 0,-6 14-77 0 0,0 1 0 0 0,1-1 0 0 0,-1 1 0 0 0,1-1 0 0 0,0 1 0 0 0,1 0 0 0 0,-1 0 0 0 0,1 1 0 0 0,-1-1 0 0 0,1 1 0 0 0,0-1 0 0 0,1 1 0 0 0,-1 0 0 0 0,0 1 0 0 0,1-1 0 0 0,0 1 0 0 0,-1 0 0 0 0,1 0 0 0 0,0 0 0 0 0,0 1 0 0 0,0 0 0 0 0,0 0 0 0 0,1 0 0 0 0,5 0 1 0 0,-3 2-26 0 0,0-1 0 0 0,0 2 1 0 0,-1-1-1 0 0,1 1 1 0 0,-1 0-1 0 0,1 1 1 0 0,-1-1-1 0 0,0 2 1 0 0,0-1-1 0 0,0 1 0 0 0,0 0 1 0 0,-1 0-1 0 0,1 1 1 0 0,-1 0-1 0 0,0 0 1 0 0,-1 0-1 0 0,1 1 0 0 0,-1 0 1 0 0,0 0-1 0 0,-1 0 1 0 0,1 1-1 0 0,-1-1 1 0 0,4 11-1 0 0,-3-7-180 0 0,29 67 394 0 0,-32-70-665 0 0,0 0 1 0 0,0 0-1 0 0,-1 1 1 0 0,0-1-1 0 0,1 9 1 0 0</inkml:trace>
 </inkml:ink>
 </file>
 
@@ -2276,7 +2279,7 @@
           <inkml:channelProperty channel="OE" name="resolution" value="1000" units="1/deg"/>
         </inkml:channelProperties>
       </inkml:inkSource>
-      <inkml:timestamp xml:id="ts0" timeString="2026-07-09T04:58:35.270"/>
+      <inkml:timestamp xml:id="ts0" timeString="2026-07-09T04:57:52.234"/>
     </inkml:context>
     <inkml:brush xml:id="br0">
       <inkml:brushProperty name="width" value="0.2" units="cm"/>
@@ -2284,7 +2287,7 @@
       <inkml:brushProperty name="color" value="#FFC114"/>
     </inkml:brush>
   </inkml:definitions>
-  <inkml:trace contextRef="#ctx0" brushRef="#br0">10 74 6049 0 0,'0'0'-151'0'0,"0"0"101"0"0,0 0 71 0 0,-1-1 0 0 0,1 1-1 0 0,0 0 1 0 0,0 0 0 0 0,0-1 0 0 0,0 1-1 0 0,0 0 1 0 0,0 0 0 0 0,-1-1 0 0 0,1 1-1 0 0,0 0 1 0 0,0 0 0 0 0,0 0 0 0 0,-1 0 0 0 0,1-1-1 0 0,0 1 1 0 0,0 0 0 0 0,-1 0 0 0 0,1 0-1 0 0,0 0 1 0 0,0 0 0 0 0,-1 0 0 0 0,1 0-1 0 0,0 0 1 0 0,0-1 0 0 0,-1 1 0 0 0,1 0-1 0 0,0 0 1 0 0,0 0 0 0 0,-1 0 0 0 0,1 0 0 0 0,0 1-1 0 0,-1-1 1 0 0,1 0 0 0 0,0 0 0 0 0,0 0-1 0 0,-1 0 1 0 0,1 0 0 0 0,0 0 0 0 0,-1 12-19 0 0,1-1 0 0 0,1 0 0 0 0,0 0 0 0 0,1 1 0 0 0,0-1 0 0 0,1 0 1 0 0,0 0-1 0 0,0-1 0 0 0,6 12 0 0 0,7 31 21 0 0,12 65 14 0 0,-27-97 1984 0 0,-8-37-1581 0 0,-7-46-307 0 0,14 33-67 0 0,1 1 1 0 0,1-1-1 0 0,1 1 0 0 0,2 0 0 0 0,0 0 1 0 0,2 0-1 0 0,14-34 0 0 0,-20 59-73 0 0,0 0 1 0 0,0 0-1 0 0,1 0 0 0 0,-1 1 0 0 0,1-1 1 0 0,-1 0-1 0 0,1 1 0 0 0,0 0 0 0 0,0-1 1 0 0,0 1-1 0 0,0 0 0 0 0,1 0 0 0 0,-1 0 0 0 0,1 0 1 0 0,-1 0-1 0 0,1 1 0 0 0,-1-1 0 0 0,6-1 1 0 0,-6 2-8 0 0,2 3-26 0 0,3 1 32 0 0,0 1-1 0 0,-1 0 0 0 0,0 0 1 0 0,1 0-1 0 0,-2 1 0 0 0,1 0 1 0 0,0 0-1 0 0,-1 0 1 0 0,0 1-1 0 0,7 9 0 0 0,42 75-25 0 0,-6-10 11 0 0,-9-11 41 0 0,-21-33-174 0 0,-17-34-169 0 0</inkml:trace>
+  <inkml:trace contextRef="#ctx0" brushRef="#br0">9 35 5240 0 0,'-8'-34'-792'0'0,"32"172"543"0"0,1 9 158 0 0,-17-47 719 0 0</inkml:trace>
 </inkml:ink>
 </file>
 
@@ -2308,7 +2311,7 @@
           <inkml:channelProperty channel="OE" name="resolution" value="1000" units="1/deg"/>
         </inkml:channelProperties>
       </inkml:inkSource>
-      <inkml:timestamp xml:id="ts0" timeString="2026-07-09T04:58:36.250"/>
+      <inkml:timestamp xml:id="ts0" timeString="2026-07-09T04:57:52.766"/>
     </inkml:context>
     <inkml:brush xml:id="br0">
       <inkml:brushProperty name="width" value="0.2" units="cm"/>
@@ -2316,7 +2319,7 @@
       <inkml:brushProperty name="color" value="#FFC114"/>
     </inkml:brush>
   </inkml:definitions>
-  <inkml:trace contextRef="#ctx0" brushRef="#br0">22 121 6301 0 0,'5'-17'112'0'0,"-1"-1"0"0"0,-1 0 0 0 0,-1 0 1 0 0,1-32-1 0 0,-3 51-112 0 0,0 0 0 0 0,0 0 0 0 0,0-1 0 0 0,0 1 0 0 0,-1 0 0 0 0,1 0 1 0 0,0-1-1 0 0,0 1 0 0 0,0 0 0 0 0,-1 0 0 0 0,1-1 0 0 0,0 1 0 0 0,-1 0 0 0 0,1-1 0 0 0,-1 1 0 0 0,1 0 0 0 0,-1-1 1 0 0,1 1-1 0 0,-1-1 0 0 0,1 1 0 0 0,-1-1 0 0 0,0 1 0 0 0,0 0 0 0 0,0 0 0 0 0,0-1 0 0 0,0 1 0 0 0,0 0 0 0 0,0 0 0 0 0,0 0-1 0 0,0 0 1 0 0,0 0 0 0 0,0 0 0 0 0,1 0 0 0 0,-1 1 0 0 0,0-1 0 0 0,1 0 0 0 0,-1 0 0 0 0,1 1-1 0 0,-1-1 1 0 0,1 0 0 0 0,0 0 0 0 0,0 1 0 0 0,-1 1 0 0 0,-4 46 3 0 0,2 1 0 0 0,2 1 0 0 0,2-1 0 0 0,3-1 0 0 0,2 1 0 0 0,1 0 0 0 0,3-1 0 0 0,28 82 0 0 0,-21-84 30 0 0,14 50 1641 0 0,-36-102-1524 0 0,-5-8-83 0 0,0 0 0 0 0,1-1-1 0 0,0 0 1 0 0,1 0 0 0 0,1-1-1 0 0,0 0 1 0 0,1-1 0 0 0,0 1-1 0 0,2-1 1 0 0,0 0 0 0 0,-3-21 0 0 0,-3-37 103 0 0,-3-81 1 0 0,7-48 91 0 0,6 200-265 0 0,0 1 0 0 0,1 0 0 0 0,-1 0 0 0 0,0 0 0 0 0,1 0 0 0 0,-1 0 0 0 0,1 0 0 0 0,0 0 0 0 0,0 0 0 0 0,0 0 0 0 0,0 0 0 0 0,0 0 0 0 0,0 1 0 0 0,0-1 0 0 0,0 0 1 0 0,1 1-1 0 0,-1-1 0 0 0,1 1 0 0 0,1-3 0 0 0,2 2-2 0 0,-1-1 0 0 0,0 0 0 0 0,1 1 0 0 0,-1 0 1 0 0,1 0-1 0 0,0 0 0 0 0,9-2 0 0 0,4 1-16 0 0,0 0 0 0 0,1 1 0 0 0,23 1 0 0 0,-27 2 3 0 0,0 0 1 0 0,-1 0-1 0 0,1 1 1 0 0,-1 1 0 0 0,1 1-1 0 0,-1 0 1 0 0,0 1 0 0 0,-1 0-1 0 0,1 1 1 0 0,-1 1-1 0 0,0 0 1 0 0,0 0 0 0 0,-1 2-1 0 0,0-1 1 0 0,17 18 0 0 0,-28-26 15 0 0,0 1-1 0 0,0 0 1 0 0,0 0 0 0 0,0 0 0 0 0,-1 0 0 0 0,1 0 0 0 0,0 0 0 0 0,-1 0 0 0 0,1 0 0 0 0,-1 0 0 0 0,1 0 0 0 0,-1 0 0 0 0,1 0 0 0 0,-1 0 0 0 0,1 1 0 0 0,-1-1 0 0 0,0 0 0 0 0,0 0 0 0 0,0 0 0 0 0,0 1 0 0 0,0-1 0 0 0,0 0 0 0 0,0 0 0 0 0,0 0 0 0 0,0 1 0 0 0,-1-1 0 0 0,0 2-1 0 0,0 0 2 0 0,-1 0 0 0 0,1 0 0 0 0,-1 0-1 0 0,0 0 1 0 0,-1 0 0 0 0,1-1 0 0 0,0 1-1 0 0,-1-1 1 0 0,-4 4 0 0 0,-6 4 6 0 0,1-2 1 0 0,-2 0-1 0 0,-21 10 1 0 0,11-7 76 0 0,0-1 1 0 0,-1-1-1 0 0,0-1 1 0 0,-35 5-1 0 0,57-12-17 0 0,0-2-260 0 0,0 0 0 0 0,0 0-1 0 0,0 0 1 0 0,0 0 0 0 0,1-1 0 0 0,-1 1 0 0 0,0-1-1 0 0,-4-3 1 0 0,20-17-3765 0 0</inkml:trace>
+  <inkml:trace contextRef="#ctx0" brushRef="#br0">19 67 3508 0 0,'0'0'-49'0'0,"-16"-5"82"0"0,13 3-21 0 0,9-1-7 0 0,24-4-9 0 0,38-5-44 0 0,43 1-12 0 0,135 4-1 0 0,-243 7 57 0 0,6 0-82 0 0,0 0-1 0 0,0-1 1 0 0,1 0 0 0 0,-1-1-1 0 0,18-5 1 0 0,-12 3-1077 0 0,1 0 568 0 0</inkml:trace>
 </inkml:ink>
 </file>
 
@@ -2340,7 +2343,7 @@
           <inkml:channelProperty channel="OE" name="resolution" value="1000" units="1/deg"/>
         </inkml:channelProperties>
       </inkml:inkSource>
-      <inkml:timestamp xml:id="ts0" timeString="2026-07-09T04:58:37.607"/>
+      <inkml:timestamp xml:id="ts0" timeString="2026-07-09T04:57:53.926"/>
     </inkml:context>
     <inkml:brush xml:id="br0">
       <inkml:brushProperty name="width" value="0.2" units="cm"/>
@@ -2348,7 +2351,7 @@
       <inkml:brushProperty name="color" value="#FFC114"/>
     </inkml:brush>
   </inkml:definitions>
-  <inkml:trace contextRef="#ctx0" brushRef="#br0">10 538 6021 0 0,'3'-8'23'0'0,"0"-1"0"0"0,-1 0 1 0 0,0 0-1 0 0,0 0 1 0 0,-1 0-1 0 0,0-13 1 0 0,-1 21 142 0 0,-5-42 1041 0 0,4 41-994 0 0,-16 52-198 0 0,17-44-7 0 0,-1 1-1 0 0,1-1 1 0 0,0 1-1 0 0,1-1 1 0 0,0 0-1 0 0,0 1 1 0 0,0-1-1 0 0,0 0 1 0 0,1 0-1 0 0,0 1 0 0 0,1-1 1 0 0,-1-1-1 0 0,1 1 1 0 0,0 0-1 0 0,1-1 1 0 0,-1 1-1 0 0,1-1 1 0 0,0 0-1 0 0,1 0 1 0 0,-1-1-1 0 0,1 1 1 0 0,0-1-1 0 0,0 0 1 0 0,0 0-1 0 0,0-1 1 0 0,1 1-1 0 0,6 2 1 0 0,-6-3-1 0 0,-1-1 0 0 0,1 0 1 0 0,0 0-1 0 0,0 0 0 0 0,0 0 1 0 0,0-1-1 0 0,0 0 0 0 0,0-1 1 0 0,0 1-1 0 0,0-1 0 0 0,0 0 0 0 0,0-1 1 0 0,0 0-1 0 0,0 1 0 0 0,0-2 1 0 0,0 1-1 0 0,0-1 0 0 0,0 0 1 0 0,0 0-1 0 0,-1-1 0 0 0,1 1 0 0 0,-1-1 1 0 0,0-1-1 0 0,1 1 0 0 0,-2-1 1 0 0,1 1-1 0 0,0-2 0 0 0,-1 1 0 0 0,5-5 1 0 0,2-6 52 0 0,-1 1 0 0 0,-1-2 0 0 0,0 1 0 0 0,-1-2 0 0 0,0 1 0 0 0,-1-1 0 0 0,-1 0 0 0 0,5-24 0 0 0,-11 42-47 0 0,0-13 3 0 0,-5 15-12 0 0,-6 16 23 0 0,10-15-27 0 0,0 1 0 0 0,0-1 0 0 0,0 1 0 0 0,0-1 0 0 0,1 1 1 0 0,-1-1-1 0 0,1 1 0 0 0,0-1 0 0 0,1 1 0 0 0,-1-1 0 0 0,1 1 0 0 0,0-1 1 0 0,0 0-1 0 0,2 6 0 0 0,1 3 9 0 0,1-1-1 0 0,0-1 1 0 0,10 18-1 0 0,-10-21 3 0 0,0-1 0 0 0,1 0 0 0 0,0 0 0 0 0,0-1 0 0 0,1 1 0 0 0,-1-1 0 0 0,1-1-1 0 0,1 1 1 0 0,-1-1 0 0 0,1-1 0 0 0,0 1 0 0 0,0-1 0 0 0,0-1 0 0 0,1 1 0 0 0,-1-1-1 0 0,14 2 1 0 0,-17-4-2 0 0,0 0 0 0 0,0 0-1 0 0,1-1 1 0 0,-1 1 0 0 0,0-1-1 0 0,0-1 1 0 0,1 1 0 0 0,-1-1 0 0 0,0 0-1 0 0,0 0 1 0 0,0 0 0 0 0,0-1-1 0 0,0 0 1 0 0,0 0 0 0 0,0 0-1 0 0,0 0 1 0 0,-1-1 0 0 0,1 0-1 0 0,-1 0 1 0 0,0 0 0 0 0,0 0-1 0 0,0-1 1 0 0,0 0 0 0 0,-1 0-1 0 0,1 0 1 0 0,-1 0 0 0 0,0 0-1 0 0,0-1 1 0 0,2-5 0 0 0,3-7 6 0 0,-1 0 1 0 0,0-1 0 0 0,-2 0-1 0 0,0-1 1 0 0,3-23-1 0 0,6-98 25 0 0,-11 87-14 0 0,-2 13 125 0 0,-1 1 1 0 0,-7-39-1 0 0,0-31 485 0 0,7 107-611 0 0,-2 7-32 0 0,-1 3 5 0 0,0 1-1 0 0,1-1 0 0 0,0 1 1 0 0,0 0-1 0 0,1-1 0 0 0,0 1 1 0 0,1 0-1 0 0,0 11 0 0 0,8 84-11 0 0,-5-80 18 0 0,1 72 8 0 0,-4-66-4 0 0,1 0 0 0 0,2-1-1 0 0,8 40 1 0 0,-8-55-5 0 0,-1-3 9 0 0,1 0 0 0 0,1 0 0 0 0,0 0 1 0 0,0 0-1 0 0,6 9 0 0 0,-8-16-4 0 0,1 0 0 0 0,0 0 0 0 0,0-1 0 0 0,1 1 0 0 0,-1-1 0 0 0,1 0 0 0 0,0 0 0 0 0,-1 0 0 0 0,1 0 0 0 0,1-1 0 0 0,-1 0 0 0 0,0 1-1 0 0,0-2 1 0 0,1 1 0 0 0,6 1 0 0 0,8 2-54 0 0,1-2 0 0 0,-1 0 0 0 0,1-1 0 0 0,0-1 0 0 0,0-1 0 0 0,0 0 0 0 0,-1-2 0 0 0,30-6 0 0 0,-10 0-1441 0 0,0-2 0 0 0,0-2-1 0 0,43-19 1 0 0,-48 14-1070 0 0</inkml:trace>
+  <inkml:trace contextRef="#ctx0" brushRef="#br0">86 206 2600 0 0,'1'-17'1012'0'0,"-1"16"-972"0"0,0 1 0 0 0,0 0 0 0 0,1 0 0 0 0,-1-1 0 0 0,0 1-1 0 0,0 0 1 0 0,0 0 0 0 0,0-1 0 0 0,0 1 0 0 0,0 0 0 0 0,0 0 0 0 0,1-1 0 0 0,-1 1 0 0 0,0 0 0 0 0,0-1 0 0 0,0 1 0 0 0,0 0 0 0 0,0-1 0 0 0,0 1 0 0 0,0 0 0 0 0,0 0-1 0 0,-1-1 1 0 0,1 1 0 0 0,0 0 0 0 0,0-1 0 0 0,0 1 0 0 0,0 0 0 0 0,0 0 0 0 0,0-1 0 0 0,-1 1 0 0 0,1 0 0 0 0,0 0 0 0 0,0-1 0 0 0,0 1 0 0 0,0 0 0 0 0,-1 0-1 0 0,1 0 1 0 0,0-1 0 0 0,0 1 0 0 0,-1 0 0 0 0,1 0 0 0 0,0 0 0 0 0,0 0 0 0 0,-1 0 0 0 0,1 0 0 0 0,0-1 0 0 0,-1 1 0 0 0,1 0 0 0 0,0 0 0 0 0,-1 0 0 0 0,-4 6-37 0 0,1 1 1 0 0,-1 0 0 0 0,1 0 0 0 0,0 0-1 0 0,1 0 1 0 0,-1 0 0 0 0,2 1 0 0 0,-1-1 0 0 0,1 1-1 0 0,-2 11 1 0 0,-11 93-21 0 0,11-73-1 0 0,-16 143 18 0 0,17-142 722 0 0,5-34 517 0 0,4-22-793 0 0,59-199 360 0 0,8-34-450 0 0,-39 129-102 0 0,-33 112-248 0 0,0-2-4 0 0,1 2-2 0 0,-1 6-8 0 0,7-15-185 0 0,0 24-205 0 0,-1 1 360 0 0,0 0-1 0 0,0 0 0 0 0,-1 1 1 0 0,7 11-1 0 0,-4-5 5 0 0,126 188-105 0 0,-117-171 145 0 0,-2 1-1 0 0,-1 1 1 0 0,-1 0 0 0 0,14 60-1 0 0,-9-51-1241 0 0,-12-65-2119 0 0,-3 9 1253 0 0</inkml:trace>
 </inkml:ink>
 </file>
 
@@ -2372,7 +2375,7 @@
           <inkml:channelProperty channel="OE" name="resolution" value="1000" units="1/deg"/>
         </inkml:channelProperties>
       </inkml:inkSource>
-      <inkml:timestamp xml:id="ts0" timeString="2026-07-09T04:58:37.953"/>
+      <inkml:timestamp xml:id="ts0" timeString="2026-07-09T04:57:54.379"/>
     </inkml:context>
     <inkml:brush xml:id="br0">
       <inkml:brushProperty name="width" value="0.2" units="cm"/>
@@ -2380,7 +2383,7 @@
       <inkml:brushProperty name="color" value="#FFC114"/>
     </inkml:brush>
   </inkml:definitions>
-  <inkml:trace contextRef="#ctx0" brushRef="#br0">36 94 6289 0 0,'-19'-2'-42'0'0,"7"1"101"0"0,8 0 42 0 0,10-2 475 0 0,71-13-331 0 0,104-6-1 0 0,-93 13-1731 0 0,87-21 1 0 0,-158 25 15 0 0,-5 0 299 0 0</inkml:trace>
+  <inkml:trace contextRef="#ctx0" brushRef="#br0">23 72 5044 0 0,'0'0'-233'0'0,"-15"-4"-133"0"0,7 1 121 0 0,9 0-361 0 0,36-7 556 0 0,0 2 1 0 0,0 1 0 0 0,1 2 0 0 0,48-1 0 0 0,22-3-44 0 0,-21 4 214 0 0,-83 5-68 0 0,-1 0-205 0 0,0 0 1 0 0,0-1-1 0 0,0 0 0 0 0,0 0 0 0 0,0 0 1 0 0,0 0-1 0 0,0 0 0 0 0,5-4 1 0 0,-7 4-57 0 0</inkml:trace>
 </inkml:ink>
 </file>
 
@@ -2404,7 +2407,7 @@
           <inkml:channelProperty channel="OE" name="resolution" value="1000" units="1/deg"/>
         </inkml:channelProperties>
       </inkml:inkSource>
-      <inkml:timestamp xml:id="ts0" timeString="2026-07-09T04:58:39.964"/>
+      <inkml:timestamp xml:id="ts0" timeString="2026-07-09T04:57:56.226"/>
     </inkml:context>
     <inkml:brush xml:id="br0">
       <inkml:brushProperty name="width" value="0.2" units="cm"/>
@@ -2412,7 +2415,7 @@
       <inkml:brushProperty name="color" value="#FFC114"/>
     </inkml:brush>
   </inkml:definitions>
-  <inkml:trace contextRef="#ctx0" brushRef="#br0">11 29 3924 0 0,'-10'0'2228'0'0,"96"3"-1984"0"0,117-11 0 0 0,-38 0-143 0 0,-56 7-66 0 0,121-6 88 0 0,-122 5 707 0 0,-105 2-605 0 0,15-6-634 0 0</inkml:trace>
+  <inkml:trace contextRef="#ctx0" brushRef="#br0">232 378 2708 0 0,'0'0'1666'0'0,"-7"-2"-1606"0"0,-20-4 4 0 0,20 4-9 0 0,2 2-16 0 0,-7 1-26 0 0,-1 0 0 0 0,1 1 0 0 0,-1 0 0 0 0,1 0 0 0 0,0 2 0 0 0,-18 6 0 0 0,25-8-21 0 0,0 0 0 0 0,0 0-1 0 0,0 1 1 0 0,0-1 0 0 0,1 1 0 0 0,-1 0-1 0 0,1 0 1 0 0,0 1 0 0 0,0-1 0 0 0,0 1-1 0 0,0 0 1 0 0,1 0 0 0 0,-1 0 0 0 0,1 1-1 0 0,0-1 1 0 0,0 1 0 0 0,1-1 0 0 0,-3 8-1 0 0,4-8-3 0 0,0 1-1 0 0,0-1 0 0 0,0 1 0 0 0,1-1 0 0 0,0 1 0 0 0,-1-1 0 0 0,2 1 0 0 0,-1-1 1 0 0,1 1-1 0 0,-1-1 0 0 0,1 0 0 0 0,0 1 0 0 0,1-1 0 0 0,-1 0 0 0 0,1 1 0 0 0,0-1 1 0 0,0 0-1 0 0,0 0 0 0 0,1-1 0 0 0,-1 1 0 0 0,1 0 0 0 0,0-1 0 0 0,0 1 0 0 0,0-1 1 0 0,0 0-1 0 0,1 0 0 0 0,4 3 0 0 0,6 3 28 0 0,0-1 0 0 0,0 0 1 0 0,1-1-1 0 0,0 0 0 0 0,0-1 0 0 0,17 4 0 0 0,-30-10 34 0 0,0 1-1 0 0,0-1 0 0 0,0 0 1 0 0,0 0-1 0 0,0 0 0 0 0,0-1 1 0 0,0 1-1 0 0,0 0 0 0 0,0-1 1 0 0,0 1-1 0 0,0-1 0 0 0,0 0 1 0 0,0 0-1 0 0,0 1 0 0 0,-1-1 1 0 0,1 0-1 0 0,0-1 0 0 0,0 1 1 0 0,-1 0-1 0 0,1 0 0 0 0,-1-1 0 0 0,1 1 1 0 0,-1-1-1 0 0,0 1 0 0 0,0-1 1 0 0,1 0-1 0 0,-1 1 0 0 0,0-1 1 0 0,-1 0-1 0 0,1 0 0 0 0,0 0 1 0 0,0 0-1 0 0,-1 0 0 0 0,1-2 1 0 0,4-9 229 0 0,-1 0 0 0 0,-1-1 0 0 0,2-18 0 0 0,-1-17 281 0 0,-2 0 1 0 0,-2 0-1 0 0,-3 0 1 0 0,-1 0-1 0 0,-3 1 1 0 0,-18-69-1 0 0,18 73-79 0 0,6 35-412 0 0,-1-1 1 0 0,1 1-1 0 0,-1-1 0 0 0,-1 1 0 0 0,-4-12 1 0 0,6 19-90 0 0,0 2-116 0 0,0 1 103 0 0,1-1-1 0 0,-1 0 1 0 0,0 1 0 0 0,1-1 0 0 0,-1 0 0 0 0,1 1 0 0 0,-1-1 0 0 0,1 1 0 0 0,-1-1 0 0 0,1 1 0 0 0,-1-1-1 0 0,1 1 1 0 0,-1-1 0 0 0,1 1 0 0 0,-1 0 0 0 0,1-1 0 0 0,0 1 0 0 0,-1 0 0 0 0,1-1 0 0 0,0 1-1 0 0,0 0 1 0 0,-1-1 0 0 0,1 1 0 0 0,0 0 0 0 0,0-1 0 0 0,0 1 0 0 0,0 1 0 0 0,-2 37-375 0 0,8 39 16 0 0,1-17 209 0 0,3 0 1 0 0,2-1-1 0 0,3 0 1 0 0,37 95-1 0 0,-49-149 119 0 0,-1 0-1 0 0,1-1 1 0 0,1 1-1 0 0,-1-1 0 0 0,1 0 1 0 0,0 0-1 0 0,8 8 0 0 0,-9-11-186 0 0,0 0 1 0 0,0 0-1 0 0,-1 0 0 0 0,1-1 0 0 0,0 1 1 0 0,1-1-1 0 0,-1 1 0 0 0,0-1 0 0 0,0 0 1 0 0,0-1-1 0 0,1 1 0 0 0,-1 0 0 0 0,0-1 1 0 0,1 0-1 0 0,-1 0 0 0 0,5 0 0 0 0,11-2-2136 0 0</inkml:trace>
 </inkml:ink>
 </file>
 
@@ -2436,7 +2439,7 @@
           <inkml:channelProperty channel="OE" name="resolution" value="1000" units="1/deg"/>
         </inkml:channelProperties>
       </inkml:inkSource>
-      <inkml:timestamp xml:id="ts0" timeString="2026-07-09T04:58:40.570"/>
+      <inkml:timestamp xml:id="ts0" timeString="2026-07-09T04:57:57.069"/>
     </inkml:context>
     <inkml:brush xml:id="br0">
       <inkml:brushProperty name="width" value="0.2" units="cm"/>
@@ -2444,7 +2447,7 @@
       <inkml:brushProperty name="color" value="#FFC114"/>
     </inkml:brush>
   </inkml:definitions>
-  <inkml:trace contextRef="#ctx0" brushRef="#br0">87 12 5332 0 0,'0'0'-166'0'0,"-20"-3"21"0"0,-43-6 1422 0 0,63 10-1267 0 0,0-1-1 0 0,0 0 1 0 0,1 0-1 0 0,-1 0 1 0 0,0 0 0 0 0,0 0-1 0 0,0 0 1 0 0,0 1 0 0 0,0-1-1 0 0,0 0 1 0 0,0 0-1 0 0,0 0 1 0 0,0 0 0 0 0,0 0-1 0 0,0 1 1 0 0,0-1 0 0 0,0 0-1 0 0,0 0 1 0 0,0 0-1 0 0,0 0 1 0 0,0 0 0 0 0,0 1-1 0 0,0-1 1 0 0,0 0 0 0 0,0 0-1 0 0,0 0 1 0 0,0 0 0 0 0,0 0-1 0 0,-1 0 1 0 0,1 1-1 0 0,0-1 1 0 0,0 0 0 0 0,0 0-1 0 0,0 0 1 0 0,0 0 0 0 0,0 0-1 0 0,0 0 1 0 0,0 0-1 0 0,-1 0 1 0 0,1 1 0 0 0,0-1-1 0 0,0 0 1 0 0,0 0 0 0 0,0 0-1 0 0,0 0 1 0 0,-1 0-1 0 0,1 0 1 0 0,0 0 0 0 0,0 0-1 0 0,0 0 1 0 0,0 0 0 0 0,0 0-1 0 0,-1 0 1 0 0,1 0 0 0 0,0 0-1 0 0,0 0 1 0 0,0 0-1 0 0,0 0 1 0 0,36 14 52 0 0,169 43 215 0 0,53 17-31 0 0,-256-74-243 0 0,-1 0 1 0 0,0 1-1 0 0,1-1 0 0 0,-1 0 0 0 0,0 1 0 0 0,1 0 0 0 0,-1-1 0 0 0,0 1 0 0 0,0 0 0 0 0,0-1 1 0 0,0 1-1 0 0,0 0 0 0 0,0 0 0 0 0,0 0 0 0 0,0 0 0 0 0,0 0 0 0 0,0 0 0 0 0,0 0 0 0 0,0 0 0 0 0,-1 1 1 0 0,1-1-1 0 0,0 0 0 0 0,-1 0 0 0 0,1 1 0 0 0,-1-1 0 0 0,1 2 0 0 0,-2-1 0 0 0,1 0 1 0 0,0 0-1 0 0,-1-1 0 0 0,0 1 0 0 0,1 0 0 0 0,-1 0 1 0 0,0 0-1 0 0,0 0 0 0 0,0 0 0 0 0,0-1 0 0 0,0 1 1 0 0,0 0-1 0 0,-1-1 0 0 0,1 1 0 0 0,-3 1 0 0 0,-10 9 10 0 0,-1 0 0 0 0,1-2 0 0 0,-21 12 0 0 0,22-15-3 0 0,-25 18-11 0 0,-3 2-67 0 0,-60 29 0 0 0</inkml:trace>
+  <inkml:trace contextRef="#ctx0" brushRef="#br0">191 14 5444 0 0,'0'0'-294'0'0,"-7"-4"-574"0"0,3 3 849 0 0,0-1 0 0 0,0 0 0 0 0,0 1 0 0 0,0 0 0 0 0,-6-1 0 0 0,-1 5-9 0 0,0 1 0 0 0,1 1 1 0 0,0-1-1 0 0,0 2 1 0 0,0-1-1 0 0,1 2 0 0 0,0-1 1 0 0,-11 11-1 0 0,15-13 2 0 0,0 0 1 0 0,1 1-1 0 0,-1-1 0 0 0,1 1 1 0 0,0 0-1 0 0,1 1 0 0 0,-1-1 1 0 0,1 1-1 0 0,0-1 0 0 0,1 1 0 0 0,-1 0 1 0 0,1 0-1 0 0,0 0 0 0 0,1 0 1 0 0,-1 0-1 0 0,0 12 0 0 0,2-13 27 0 0,1 0-1 0 0,0 0 0 0 0,0-1 1 0 0,0 1-1 0 0,1 0 0 0 0,-1-1 1 0 0,1 1-1 0 0,0-1 0 0 0,1 1 1 0 0,-1-1-1 0 0,1 0 0 0 0,-1 0 1 0 0,1 0-1 0 0,1 0 0 0 0,-1 0 0 0 0,0-1 1 0 0,1 0-1 0 0,0 0 0 0 0,0 0 1 0 0,0 0-1 0 0,0 0 0 0 0,0-1 1 0 0,0 1-1 0 0,1-1 0 0 0,-1 0 1 0 0,1-1-1 0 0,0 1 0 0 0,-1-1 1 0 0,1 0-1 0 0,0 0 0 0 0,0 0 1 0 0,8-1-1 0 0,-10 0 13 0 0,1 0 0 0 0,-1-1 0 0 0,0 1-1 0 0,0-1 1 0 0,0 0 0 0 0,0 0 0 0 0,0 0 0 0 0,-1 0 0 0 0,1-1 0 0 0,0 1 0 0 0,0-1-1 0 0,-1 0 1 0 0,1 1 0 0 0,-1-1 0 0 0,0 0 0 0 0,1-1 0 0 0,-1 1 0 0 0,0 0 0 0 0,2-4 0 0 0,4-5 58 0 0,-1 0 0 0 0,-1 0 0 0 0,7-16 1 0 0,-5 10 84 0 0,21-64 2009 0 0,-29 80-2075 0 0,0-5 25 0 0,0 6-113 0 0,0 0 0 0 0,0 0-1 0 0,0 0 1 0 0,0 0 0 0 0,0 0 0 0 0,0 0 0 0 0,0 0 0 0 0,0 0 0 0 0,0 0-1 0 0,1 0 1 0 0,-1 0 0 0 0,0 0 0 0 0,0 0 0 0 0,0 0 0 0 0,0 0-1 0 0,0 0 1 0 0,2 11 5 0 0,0 1-1 0 0,0-1 1 0 0,2 0-1 0 0,-1 0 1 0 0,1-1-1 0 0,1 1 1 0 0,0-1-1 0 0,0 0 1 0 0,1 0-1 0 0,10 13 1 0 0,-12-18-206 0 0,0 1 0 0 0,1-1 1 0 0,-1 1-1 0 0,1-1 1 0 0,0-1-1 0 0,1 1 0 0 0,-1-1 1 0 0,1 0-1 0 0,0 0 1 0 0,0 0-1 0 0,0-1 0 0 0,1 0 1 0 0,-1 0-1 0 0,1-1 0 0 0,-1 0 1 0 0,1 0-1 0 0,0 0 1 0 0,12 0-1 0 0</inkml:trace>
 </inkml:ink>
 </file>
 
@@ -2500,7 +2503,7 @@
           <inkml:channelProperty channel="OE" name="resolution" value="1000" units="1/deg"/>
         </inkml:channelProperties>
       </inkml:inkSource>
-      <inkml:timestamp xml:id="ts0" timeString="2026-07-09T04:58:41.403"/>
+      <inkml:timestamp xml:id="ts0" timeString="2026-07-09T04:57:58.024"/>
     </inkml:context>
     <inkml:brush xml:id="br0">
       <inkml:brushProperty name="width" value="0.2" units="cm"/>
@@ -2508,7 +2511,7 @@
       <inkml:brushProperty name="color" value="#FFC114"/>
     </inkml:brush>
   </inkml:definitions>
-  <inkml:trace contextRef="#ctx0" brushRef="#br0">311 63 4760 0 0,'-39'-3'225'0'0,"26"2"-201"0"0,1 1-1 0 0,-1 0 0 0 0,0 1 1 0 0,1 0-1 0 0,-1 1 1 0 0,1 1-1 0 0,-1 0 0 0 0,1 1 1 0 0,0 0-1 0 0,0 1 1 0 0,1 0-1 0 0,-1 1 0 0 0,1 0 1 0 0,0 0-1 0 0,1 2 1 0 0,0-1-1 0 0,0 1 0 0 0,0 1 1 0 0,-16 18-1 0 0,24-24-17 0 0,-1 1 0 0 0,1-1 0 0 0,-1 0 1 0 0,1 1-1 0 0,0 0 0 0 0,1-1 0 0 0,-1 1 0 0 0,1 0 0 0 0,-1 0 0 0 0,1 0 0 0 0,1 0 1 0 0,-1 0-1 0 0,0 0 0 0 0,1 0 0 0 0,0 0 0 0 0,0 0 0 0 0,0 1 0 0 0,0-1 0 0 0,2 5 0 0 0,-1-5 18 0 0,1 1-1 0 0,0 0 1 0 0,1-1-1 0 0,-1 1 1 0 0,1-1-1 0 0,0 0 1 0 0,0 0-1 0 0,0 0 1 0 0,0 0-1 0 0,1 0 1 0 0,-1-1 0 0 0,1 0-1 0 0,7 5 1 0 0,4 2 45 0 0,1-1 0 0 0,0-1 0 0 0,1 0 0 0 0,0-1 0 0 0,0-1 0 0 0,1 0 0 0 0,26 4 0 0 0,-10-4 63 0 0,-1-1 0 0 0,1-1 1 0 0,0-2-1 0 0,53-4 0 0 0,-79 2-88 0 0,0-1-1 0 0,1 0 0 0 0,-1-1 1 0 0,0 1-1 0 0,0-2 0 0 0,0 1 1 0 0,0-1-1 0 0,0 0 0 0 0,-1-1 0 0 0,1 0 1 0 0,-1 0-1 0 0,0-1 0 0 0,0 1 1 0 0,0-2-1 0 0,-1 1 0 0 0,0-1 1 0 0,0 0-1 0 0,0 0 0 0 0,-1 0 1 0 0,0-1-1 0 0,0 0 0 0 0,0 0 1 0 0,-1 0-1 0 0,3-9 0 0 0,-5 11-37 0 0,0 1-1 0 0,-1-1 1 0 0,0 1-1 0 0,0-1 1 0 0,0 0-1 0 0,0 0 0 0 0,-1 1 1 0 0,0-1-1 0 0,0 0 1 0 0,0 0-1 0 0,0 0 0 0 0,-1 1 1 0 0,0-1-1 0 0,0 0 1 0 0,0 1-1 0 0,-1-1 1 0 0,-2-5-1 0 0,0 3 12 0 0,0-1-1 0 0,-1 2 1 0 0,1-1 0 0 0,-1 0-1 0 0,-1 1 1 0 0,0 0 0 0 0,1 0-1 0 0,-2 1 1 0 0,-8-7 0 0 0,-6-1 15 0 0,1 0 1 0 0,-2 2-1 0 0,1 1 0 0 0,-1 0 1 0 0,-1 2-1 0 0,-23-6 1 0 0,16 6-32 0 0,0 1 0 0 0,0 1 0 0 0,-1 2 1 0 0,-38-1-1 0 0,53 10 188 0 0,12-1-1065 0 0,33 7-5280 0 0</inkml:trace>
+  <inkml:trace contextRef="#ctx0" brushRef="#br0">11 143 3824 0 0,'-1'-2'-72'0'0,"-3"-4"38"0"0,3 4 91 0 0,1 2-51 0 0,0 0 1 0 0,0 0-1 0 0,0 0 0 0 0,0 0 0 0 0,0 0 1 0 0,0 0-1 0 0,0 0 0 0 0,0 0 0 0 0,0 0 1 0 0,0 0-1 0 0,0 0 0 0 0,0 0 0 0 0,0 0 1 0 0,0 0-1 0 0,0 0 0 0 0,0 0 0 0 0,-1 0 1 0 0,1 0-1 0 0,0 0 0 0 0,0 0 1 0 0,0 0-1 0 0,0 0 0 0 0,0 0 0 0 0,0 0 1 0 0,-2 13 308 0 0,0 29 136 0 0,12 14-456 0 0,19 63 1 0 0,5 33 1 0 0,-25-100 3151 0 0,-12-57-2882 0 0,-7-11-124 0 0,1-1 0 0 0,1 0 0 0 0,1 0 0 0 0,0-1 0 0 0,2 0 0 0 0,0 0 0 0 0,0 0 0 0 0,-2-34-1 0 0,-1-164 68 0 0,8 179-203 0 0,1 28-35 0 0,0 0-1 0 0,0 0 1 0 0,1 0-1 0 0,0 1 1 0 0,1-1-1 0 0,6-14 1 0 0,-4 9-70 0 0,-3 12 88 0 0,-1 0 0 0 0,0 0 0 0 0,1 0 0 0 0,-1 0 1 0 0,1 1-1 0 0,-1-1 0 0 0,1 0 0 0 0,0 1 0 0 0,0 0 0 0 0,-1-1 1 0 0,1 1-1 0 0,0 0 0 0 0,1 0 0 0 0,-1 0 0 0 0,0 0 0 0 0,0 0 0 0 0,0 0 1 0 0,0 1-1 0 0,1-1 0 0 0,-1 1 0 0 0,0-1 0 0 0,1 1 0 0 0,-1 0 1 0 0,3 0-1 0 0,6 0-31 0 0,0 0 1 0 0,0 1-1 0 0,20 3 0 0 0,-24-2-6 0 0,1 1 0 0 0,-1-1-1 0 0,0 1 1 0 0,0 0-1 0 0,0 1 1 0 0,0 0-1 0 0,0 0 1 0 0,-1 0 0 0 0,1 1-1 0 0,-1 0 1 0 0,-1 0-1 0 0,1 0 1 0 0,-1 1-1 0 0,0 0 1 0 0,0 0-1 0 0,0 0 1 0 0,-1 1 0 0 0,0 0-1 0 0,0 0 1 0 0,-1 0-1 0 0,0 0 1 0 0,4 13-1 0 0,-7-18 48 0 0,0-1 0 0 0,0 1-1 0 0,0-1 1 0 0,-1 0 0 0 0,1 1 0 0 0,0-1-1 0 0,-1 0 1 0 0,1 1 0 0 0,-1-1-1 0 0,0 0 1 0 0,1 0 0 0 0,-1 1 0 0 0,0-1-1 0 0,0 0 1 0 0,1 0 0 0 0,-1 0-1 0 0,0 0 1 0 0,0 0 0 0 0,0 0-1 0 0,-1 0 1 0 0,1 0 0 0 0,0-1 0 0 0,0 1-1 0 0,0 0 1 0 0,-1-1 0 0 0,1 1-1 0 0,0-1 1 0 0,-3 1 0 0 0,-37 13 14 0 0,20-9 50 0 0,0-2 1 0 0,-1 0-1 0 0,1-1 1 0 0,-1-1-1 0 0,-40-3 0 0 0,59 2-125 0 0,-11-18-3649 0 0</inkml:trace>
 </inkml:ink>
 </file>
 
@@ -2532,7 +2535,7 @@
           <inkml:channelProperty channel="OE" name="resolution" value="1000" units="1/deg"/>
         </inkml:channelProperties>
       </inkml:inkSource>
-      <inkml:timestamp xml:id="ts0" timeString="2026-07-09T04:58:42.175"/>
+      <inkml:timestamp xml:id="ts0" timeString="2026-07-09T04:57:58.664"/>
     </inkml:context>
     <inkml:brush xml:id="br0">
       <inkml:brushProperty name="width" value="0.2" units="cm"/>
@@ -2540,7 +2543,7 @@
       <inkml:brushProperty name="color" value="#FFC114"/>
     </inkml:brush>
   </inkml:definitions>
-  <inkml:trace contextRef="#ctx0" brushRef="#br0">132 128 5368 0 0,'-13'-45'402'0'0,"12"44"-382"0"0,1 0 1 0 0,0 0 0 0 0,0 0-1 0 0,0 0 1 0 0,-1 0-1 0 0,1 0 1 0 0,0 0 0 0 0,-1 0-1 0 0,1 0 1 0 0,-1 0-1 0 0,1 0 1 0 0,-1 0 0 0 0,1 0-1 0 0,-1 0 1 0 0,0 1-1 0 0,0-1 1 0 0,1 0-1 0 0,-1 0 1 0 0,0 1 0 0 0,0-1-1 0 0,0 1 1 0 0,0-1-1 0 0,1 1 1 0 0,-1-1 0 0 0,0 1-1 0 0,0-1 1 0 0,0 1-1 0 0,0 0 1 0 0,0-1 0 0 0,0 1-1 0 0,0 0 1 0 0,0 0-1 0 0,-2 0 1 0 0,0 1-9 0 0,1-1 1 0 0,-1 1-1 0 0,0 0 0 0 0,0 1 1 0 0,1-1-1 0 0,-1 0 1 0 0,1 1-1 0 0,-1 0 0 0 0,1-1 1 0 0,0 1-1 0 0,-5 4 0 0 0,-1 2-11 0 0,0 1-1 0 0,0 0 1 0 0,1 0-1 0 0,0 1 1 0 0,-9 18-1 0 0,15-27 8 0 0,1 1 0 0 0,-1 0 0 0 0,1-1 0 0 0,-1 1 0 0 0,1-1 0 0 0,-1 1 0 0 0,1 0 0 0 0,0 0 0 0 0,0-1 0 0 0,0 1 0 0 0,0 0 0 0 0,0-1 0 0 0,0 1 0 0 0,0 0 0 0 0,1 0 0 0 0,-1-1 0 0 0,1 1 0 0 0,-1-1 0 0 0,1 1 0 0 0,0 0 0 0 0,-1-1 0 0 0,1 1 0 0 0,1 1 0 0 0,1 0 9 0 0,-1-1 1 0 0,1 1 0 0 0,0-1 0 0 0,-1 0-1 0 0,1 0 1 0 0,0 0 0 0 0,0 0 0 0 0,1 0-1 0 0,-1-1 1 0 0,6 3 0 0 0,7 1 50 0 0,0-1-1 0 0,1-1 1 0 0,26 3 0 0 0,-31-5-47 0 0,0 0 0 0 0,0-1 0 0 0,1-1 0 0 0,-1 0 1 0 0,0 0-1 0 0,0-1 0 0 0,-1 0 0 0 0,1-1 0 0 0,0-1 0 0 0,-1 0 1 0 0,0-1-1 0 0,0 0 0 0 0,18-10 0 0 0,-21 9 15 0 0,0 0 0 0 0,-1 0-1 0 0,0-1 1 0 0,0 0 0 0 0,0 0 0 0 0,-1 0-1 0 0,0-1 1 0 0,0 0 0 0 0,-1 0 0 0 0,0-1-1 0 0,-1 1 1 0 0,1-1 0 0 0,-2 0 0 0 0,1-1-1 0 0,-1 1 1 0 0,-1 0 0 0 0,3-14 0 0 0,-5 22-26 0 0,1-1 0 0 0,-1 1 0 0 0,0 0 0 0 0,1 0-1 0 0,-1-1 1 0 0,0 1 0 0 0,0 0 0 0 0,0 0 0 0 0,0-1 0 0 0,0 1 0 0 0,0 0 0 0 0,0 0 0 0 0,0-1 0 0 0,0 1 0 0 0,-1 0 0 0 0,1 0 0 0 0,0-1 0 0 0,-1 1 0 0 0,1 0 0 0 0,-1 0 0 0 0,1 0 0 0 0,-1 0-1 0 0,0 0 1 0 0,0 0 0 0 0,1 0 0 0 0,-1 0 0 0 0,0 0 0 0 0,0 0 0 0 0,0 0 0 0 0,0 0 0 0 0,0 0 0 0 0,0 1 0 0 0,0-1 0 0 0,-2-1 0 0 0,1 2-8 0 0,0 0 0 0 0,0 0 0 0 0,1 1 0 0 0,-1-1 0 0 0,0 0 0 0 0,0 0 0 0 0,1 1 0 0 0,-1-1 0 0 0,0 1 0 0 0,1 0 0 0 0,-1 0 1 0 0,0-1-1 0 0,1 1 0 0 0,-1 0 0 0 0,1 0 0 0 0,-1 0 0 0 0,1 1 0 0 0,0-1 0 0 0,-1 0 0 0 0,1 0 0 0 0,-2 3 0 0 0,3-2 0 0 0,-1-1-1 0 0,0 1 1 0 0,1 0 0 0 0,-1-1-1 0 0,1 1 1 0 0,-1 0 0 0 0,1 0-1 0 0,0 0 1 0 0,0 0-1 0 0,0-1 1 0 0,0 1 0 0 0,0 0-1 0 0,0 0 1 0 0,1 0 0 0 0,-1-1-1 0 0,0 1 1 0 0,1 0 0 0 0,0 0-1 0 0,-1-1 1 0 0,1 1-1 0 0,0 0 1 0 0,0-1 0 0 0,1 3-1 0 0,24 33 49 0 0,-9-22-85 0 0,2 1 1 0 0,0-2-1 0 0,1-1 1 0 0,0 0-1 0 0,1-1 1 0 0,0-2-1 0 0,1 0 1 0 0,0-1-1 0 0,1-1 1 0 0,31 6-1 0 0,0-10-3986 0 0</inkml:trace>
+  <inkml:trace contextRef="#ctx0" brushRef="#br0">9 50 6001 0 0,'0'0'-152'0'0,"-8"-48"504"0"0,8 46-356 0 0,0 36-267 0 0,5 208 65 0 0,-3-175 185 0 0,-2-43-7 0 0,1 0 0 0 0,0 1 0 0 0,2-1 0 0 0,10 37 0 0 0,-12-57 33 0 0,1-1 0 0 0,0 0 0 0 0,0 0 1 0 0,0 1-1 0 0,1-1 0 0 0,-1-1 1 0 0,1 1-1 0 0,-1 0 0 0 0,1-1 1 0 0,0 1-1 0 0,0-1 0 0 0,0 0 1 0 0,1 0-1 0 0,-1 0 0 0 0,0 0 1 0 0,1 0-1 0 0,0-1 0 0 0,-1 0 1 0 0,1 0-1 0 0,-1 0 0 0 0,1 0 1 0 0,0 0-1 0 0,0-1 0 0 0,6 1 1 0 0,3 0-63 0 0,1-1 0 0 0,0 0 1 0 0,0-1-1 0 0,-1 0 0 0 0,24-5 1 0 0,4-6-2287 0 0,-30 9 1190 0 0</inkml:trace>
 </inkml:ink>
 </file>
 
@@ -2564,7 +2567,7 @@
           <inkml:channelProperty channel="OE" name="resolution" value="1000" units="1/deg"/>
         </inkml:channelProperties>
       </inkml:inkSource>
-      <inkml:timestamp xml:id="ts0" timeString="2026-07-09T04:58:42.690"/>
+      <inkml:timestamp xml:id="ts0" timeString="2026-07-09T04:57:59.055"/>
     </inkml:context>
     <inkml:brush xml:id="br0">
       <inkml:brushProperty name="width" value="0.2" units="cm"/>
@@ -2572,7 +2575,7 @@
       <inkml:brushProperty name="color" value="#FFC114"/>
     </inkml:brush>
   </inkml:definitions>
-  <inkml:trace contextRef="#ctx0" brushRef="#br0">35 69 6033 0 0,'-3'-49'158'0'0,"1"34"125"0"0,-4 10-87 0 0,-6 23-137 0 0,9-12-61 0 0,1 1 1 0 0,0-1 0 0 0,1 1 0 0 0,-1 0 0 0 0,2 0 0 0 0,-1 0 0 0 0,1 0-1 0 0,0 0 1 0 0,1 10 0 0 0,11 66 19 0 0,-8-65-13 0 0,1 18 44 0 0,2 0 1 0 0,2-1-1 0 0,1 1 0 0 0,1-2 1 0 0,2 0-1 0 0,28 53 0 0 0,-36-81-20 0 0,0 0 0 0 0,0-1 0 0 0,0 1 0 0 0,0-2 0 0 0,1 1 0 0 0,0 0-1 0 0,0-1 1 0 0,0 0 0 0 0,0 0 0 0 0,1-1 0 0 0,-1 0 0 0 0,1 0 0 0 0,0-1 0 0 0,0 1-1 0 0,0-2 1 0 0,0 1 0 0 0,1-1 0 0 0,-1 0 0 0 0,10 0 0 0 0,1 0-176 0 0,1 0 0 0 0,-1-2 0 0 0,0 0 0 0 0,1-1 0 0 0,-1-1 0 0 0,29-8 0 0 0,-32 6-841 0 0,1-1 0 0 0,25-13 0 0 0,-7-3-826 0 0</inkml:trace>
+  <inkml:trace contextRef="#ctx0" brushRef="#br0">19 65 4008 0 0,'-16'-3'152'0'0,"14"0"67"0"0,8-1-90 0 0,23-5-54 0 0,36-4-35 0 0,99-16-2198 0 0,-147 26 1549 0 0</inkml:trace>
 </inkml:ink>
 </file>
 
@@ -2596,7 +2599,7 @@
           <inkml:channelProperty channel="OE" name="resolution" value="1000" units="1/deg"/>
         </inkml:channelProperties>
       </inkml:inkSource>
-      <inkml:timestamp xml:id="ts0" timeString="2026-07-09T04:58:42.957"/>
+      <inkml:timestamp xml:id="ts0" timeString="2026-07-09T04:59:04.221"/>
     </inkml:context>
     <inkml:brush xml:id="br0">
       <inkml:brushProperty name="width" value="0.2" units="cm"/>
@@ -2604,7 +2607,7 @@
       <inkml:brushProperty name="color" value="#FFC114"/>
     </inkml:brush>
   </inkml:definitions>
-  <inkml:trace contextRef="#ctx0" brushRef="#br0">31 60 5112 0 0,'-20'-1'-265'0'0,"10"0"216"0"0,14-1 187 0 0,72-10-61 0 0,122-23-2713 0 0,-164 27 2115 0 0</inkml:trace>
+  <inkml:trace contextRef="#ctx0" brushRef="#br0">14326 11 5693 0 0,'0'0'-267'0'0,"-3"-3"-409"0"0,1 2 591 0 0,1 0-1 0 0,0 0 1 0 0,0 0-1 0 0,-1 1 1 0 0,1-1-1 0 0,-1 0 0 0 0,1 1 1 0 0,-1-1-1 0 0,1 1 1 0 0,-1 0-1 0 0,-2-1 1 0 0,-1 4 64 0 0,1-1-1 0 0,-1 1 1 0 0,1 0 0 0 0,-1 1 0 0 0,1-1 0 0 0,0 1 0 0 0,1 0 0 0 0,-1 0 0 0 0,0 0 0 0 0,-5 9 0 0 0,-60 131-57 0 0,44-66 78 0 0,17-48 32 0 0,-2 0 1 0 0,-26 52 0 0 0,-35 66 179 0 0,31-82-5 0 0,-69 102 284 0 0,84-135-350 0 0,-1-2 0 0 0,-2-1 1 0 0,0-1-1 0 0,-54 41 0 0 0,-133 70 197 0 0,79-54-190 0 0,-88 34-41 0 0,53-32-137 0 0,38-23 73 0 0,-9 6-4 0 0,-116 59 80 0 0,136-73-82 0 0,-97 55 89 0 0,137-69 36 0 0,-219 106 211 0 0,117-65-52 0 0,90-52-127 0 0,-1-3-1 0 0,-181 29 0 0 0,32-29 15 0 0,-33 6-56 0 0,104-17-63 0 0,88-8-63 0 0,-126 7 80 0 0,164-15-91 0 0,-85 15 0 0 0,77-9-22 0 0,-104 12 48 0 0,-450 58 264 0 0,54-1-119 0 0,213-40-35 0 0,113-14-97 0 0,-80 0-1 0 0,207-17-7 0 0,-73 6-8 0 0,-240 8 76 0 0,-108-12-33 0 0,-164-11 8 0 0,-12 5 153 0 0,641-2-200 0 0,-435-10 169 0 0,407 5-170 0 0,-161-9 62 0 0,-246-47-1 0 0,338 42-104 0 0,0 1 52 0 0,-292-53 37 0 0,181 32-36 0 0,-42-19 18 0 0,155 27-54 0 0,-366-75 29 0 0,290 58-63 0 0,143 30 40 0 0,1-4 1 0 0,0-3-1 0 0,-83-39 1 0 0,41 14 17 0 0,75 32-19 0 0,-95-50 1 0 0,114 49-18 0 0,-46-17 0 0 0,-40-22 1 0 0,67 29-1 0 0,-117-73 1 0 0,121 70-16 0 0,45 31 6 0 0,-2-3 0 0 0,1 2-4 0 0,-3-5 4 0 0,6 6-2 0 0,0 0 1 0 0,0 0-1 0 0,0 0 1 0 0,0 0-1 0 0,-1 0 1 0 0,1 0 0 0 0,0 0-1 0 0,-1 1 1 0 0,1-1-1 0 0,-1 0 1 0 0,1 1-1 0 0,-1-1 1 0 0,1 1 0 0 0,-1-1-1 0 0,1 1 1 0 0,-1 0-1 0 0,1 0 1 0 0,-1-1-1 0 0,1 1 1 0 0,-1 0 0 0 0,1 1-1 0 0,-1-1 1 0 0,0 0-1 0 0,1 0 1 0 0,-1 1-1 0 0,1-1 1 0 0,-1 1 0 0 0,1-1-1 0 0,-1 1 1 0 0,1-1-1 0 0,0 1 1 0 0,-1 0-1 0 0,1 0 1 0 0,0 0 0 0 0,0 0-1 0 0,-1 0 1 0 0,1 0-1 0 0,0 0 1 0 0,0 0-1 0 0,0 0 1 0 0,0 1 0 0 0,0-1-1 0 0,0 0 1 0 0,1 1-1 0 0,-1-1 1 0 0,-1 3-1 0 0,-5 10 2 0 0,1 1-1 0 0,0 0 0 0 0,-8 29 0 0 0,6-19-24 0 0,0 2 33 0 0,1 0 0 0 0,1 0 0 0 0,1 0 0 0 0,2 1 1 0 0,-1 50-1 0 0,9-7 63 0 0,-5-70-29 0 0,1 2 6 0 0,0 2-65 0 0,1-7 298 0 0,-2 1-275 0 0,5-77 17 0 0,24-123 0 0 0,4 55-23 0 0,-32 142 5 0 0,1-4-21 0 0,-1 0 0 0 0,2 0 0 0 0,-1 0 0 0 0,1 0 0 0 0,7-14 0 0 0,-9 22 11 0 0,37-18-39 0 0,25 13 27 0 0,9 2 30 0 0,0-2 1 0 0,96-21-1 0 0,-66 9 29 0 0,-35 7-4 0 0,-65 10-43 0 0,20-1-23 0 0,-11 0 40 0 0,-8 0 5 0 0,-8 6-38 0 0,-43 31-1061 0 0,9-18-4030 0 0</inkml:trace>
 </inkml:ink>
 </file>
 
@@ -2628,7 +2631,7 @@
           <inkml:channelProperty channel="OE" name="resolution" value="1000" units="1/deg"/>
         </inkml:channelProperties>
       </inkml:inkSource>
-      <inkml:timestamp xml:id="ts0" timeString="2026-07-09T04:58:43.879"/>
+      <inkml:timestamp xml:id="ts0" timeString="2026-07-09T04:59:17.541"/>
     </inkml:context>
     <inkml:brush xml:id="br0">
       <inkml:brushProperty name="width" value="0.2" units="cm"/>
@@ -2636,7 +2639,7 @@
       <inkml:brushProperty name="color" value="#FFC114"/>
     </inkml:brush>
   </inkml:definitions>
-  <inkml:trace contextRef="#ctx0" brushRef="#br0">28 26 3128 0 0,'0'0'2159'0'0,"-14"18"-1963"0"0,9 12-169 0 0,1 0 1 0 0,1 0-1 0 0,1 0 1 0 0,2 0 0 0 0,2 0-1 0 0,0 1 1 0 0,2-1 0 0 0,10 40-1 0 0,57 126 368 0 0,-35-94 1741 0 0,-47-107-1789 0 0,-15-17-277 0 0,18 11 7 0 0,1 0-1 0 0,1-1 1 0 0,0-1-1 0 0,0 1 1 0 0,1-1-1 0 0,1 1 1 0 0,0-2-1 0 0,-2-14 1 0 0,-11-110 165 0 0,11 76-141 0 0,4-1 0 0 0,7-93 1 0 0,3 85-135 0 0,-6 69 23 0 0,5-1 10 0 0,-2 2-4 0 0,-1 0 0 0 0,0 0 0 0 0,0 0 0 0 0,1 1 0 0 0,-1 0 0 0 0,1-1 0 0 0,-1 2 0 0 0,0-1 0 0 0,1 0 0 0 0,-1 1 0 0 0,0 0 0 0 0,0 0 0 0 0,9 3 0 0 0,52 24-18 0 0,-40-15 11 0 0,-1 0 0 0 0,0 2 0 0 0,-1 0 1 0 0,-1 2-1 0 0,0 1 0 0 0,-1 0 0 0 0,20 24 0 0 0,-40-41 10 0 0,1 1 0 0 0,-1-1 0 0 0,0 1 0 0 0,1-1 1 0 0,-1 1-1 0 0,0-1 0 0 0,0 1 0 0 0,0 0 0 0 0,-1-1 0 0 0,1 1 0 0 0,0 0 0 0 0,-1 0 0 0 0,1 0 0 0 0,-1 0 0 0 0,1 0 0 0 0,-1 0 0 0 0,0 0 0 0 0,0-1 1 0 0,0 1-1 0 0,0 0 0 0 0,0 0 0 0 0,0 0 0 0 0,-1 0 0 0 0,1 0 0 0 0,-2 3 0 0 0,0-2 1 0 0,0 0 1 0 0,0-1-1 0 0,0 1 0 0 0,0-1 1 0 0,-1 1-1 0 0,1-1 0 0 0,-1 0 1 0 0,1 0-1 0 0,-1 0 0 0 0,0 0 1 0 0,0-1-1 0 0,0 1 0 0 0,-5 1 1 0 0,-10 3 5 0 0,1-1 0 0 0,-1 0 0 0 0,-1-1 0 0 0,-20 1 1 0 0,6-1-36 0 0,19-1-37 0 0,0-2 1 0 0,1 1-1 0 0,-1-2 1 0 0,0 0-1 0 0,1 0 1 0 0,-21-5-1 0 0</inkml:trace>
+  <inkml:trace contextRef="#ctx0" brushRef="#br0">1 1020 972 0 0,'0'0'3444'0'0,"1"-4"-3366"0"0,1-1-37 0 0,1 0-1 0 0,-1 0 1 0 0,1 0 0 0 0,0 1 0 0 0,1 0-1 0 0,-1-1 1 0 0,1 1 0 0 0,0 0 0 0 0,0 1-1 0 0,0-1 1 0 0,0 1 0 0 0,1 0 0 0 0,9-5-1 0 0,203-121 530 0 0,-143 88-461 0 0,305-135 283 0 0,-344 161-356 0 0,-29 13-35 0 0,515-201 292 0 0,-397 161-235 0 0,494-155 272 0 0,-453 155-258 0 0,2 7 1 0 0,1 7-1 0 0,205-6 0 0 0,-91 24-39 0 0,253 30 89 0 0,-131 27-31 0 0,-320-38-61 0 0,310 46 117 0 0,-73 37 6 0 0,-188-51-118 0 0,-104-32-25 0 0,10 2 23 0 0,77 33-1 0 0,-58-4 131 0 0,-50-34-119 0 0,-1 0 0 0 0,1-1 1 0 0,0 1-1 0 0,0-1 0 0 0,16 6 1 0 0,9 13 111 0 0,-11 1-418 0 0,-25-27-110 0 0,2 2 253 0 0,0-1 0 0 0,0 1-1 0 0,0-1 1 0 0,0 1 0 0 0,0-1 0 0 0,0 0-1 0 0,0 1 1 0 0,0-1 0 0 0,1 0 0 0 0,-1 0 0 0 0,0 1-1 0 0,0-1 1 0 0,1 0 0 0 0,-1 0 0 0 0,0 0 0 0 0,1 0-1 0 0,-1 0 1 0 0,1 0 0 0 0,-1 0 0 0 0,1 0-1 0 0,0-1 1 0 0,0 1 0 0 0,-1 0 0 0 0,1 0 0 0 0,0 0-1 0 0,0 0 1 0 0,0 0 0 0 0,0-2 0 0 0,3-11-2347 0 0</inkml:trace>
 </inkml:ink>
 </file>
 
@@ -2660,7 +2663,7 @@
           <inkml:channelProperty channel="OE" name="resolution" value="1000" units="1/deg"/>
         </inkml:channelProperties>
       </inkml:inkSource>
-      <inkml:timestamp xml:id="ts0" timeString="2026-07-09T04:58:45.041"/>
+      <inkml:timestamp xml:id="ts0" timeString="2026-07-09T04:59:18.403"/>
     </inkml:context>
     <inkml:brush xml:id="br0">
       <inkml:brushProperty name="width" value="0.2" units="cm"/>
@@ -2668,7 +2671,7 @@
       <inkml:brushProperty name="color" value="#FFC114"/>
     </inkml:brush>
   </inkml:definitions>
-  <inkml:trace contextRef="#ctx0" brushRef="#br0">85 563 6261 0 0,'-10'-80'-246'0'0,"9"78"330"0"0,1 1-73 0 0,0 1 0 0 0,0-1 0 0 0,0 0 0 0 0,0 0 0 0 0,-1 0 0 0 0,1 1 0 0 0,0-1 0 0 0,-1 0 0 0 0,1 0 0 0 0,-1 1 0 0 0,1-1 0 0 0,-1 0 0 0 0,1 0 0 0 0,-1 1 0 0 0,1-1 0 0 0,-1 1 0 0 0,0-1 0 0 0,1 1 0 0 0,-1-1 0 0 0,0 1 0 0 0,1-1 0 0 0,-1 1 0 0 0,0-1 0 0 0,0 1 0 0 0,0 0 0 0 0,1-1 0 0 0,-2 1 0 0 0,-3 3-7 0 0,1-1 0 0 0,0 1 0 0 0,0 0 1 0 0,0 0-1 0 0,0 1 0 0 0,0-1 0 0 0,1 1 0 0 0,0 0 0 0 0,-1 0 0 0 0,2 0 0 0 0,-1 0 0 0 0,0 1 0 0 0,1-1 0 0 0,-1 1 0 0 0,1-1 1 0 0,-2 10-1 0 0,4-11 4 0 0,-1-1 1 0 0,1 1-1 0 0,1-1 1 0 0,-1 1 0 0 0,0 0-1 0 0,0-1 1 0 0,1 1-1 0 0,0-1 1 0 0,-1 0 0 0 0,1 1-1 0 0,0-1 1 0 0,0 0-1 0 0,0 1 1 0 0,1-1 0 0 0,-1 0-1 0 0,0 0 1 0 0,1 0 0 0 0,2 3-1 0 0,0-1 8 0 0,0-1 0 0 0,1 1-1 0 0,-1-1 1 0 0,1 0 0 0 0,0 0-1 0 0,0 0 1 0 0,0 0 0 0 0,5 1 0 0 0,3 1 10 0 0,1-1 0 0 0,-1-1 0 0 0,1 0 0 0 0,0 0 0 0 0,27 0 1 0 0,-32-3-2 0 0,0 0 1 0 0,-1 0-1 0 0,1-1 1 0 0,0 0 0 0 0,-1-1-1 0 0,1 0 1 0 0,-1 0-1 0 0,0-1 1 0 0,0 0 0 0 0,1 0-1 0 0,-2-1 1 0 0,1 0 0 0 0,0 0-1 0 0,-1-1 1 0 0,0 0-1 0 0,0 0 1 0 0,0-1 0 0 0,-1 0-1 0 0,0 0 1 0 0,0-1-1 0 0,-1 1 1 0 0,1-1 0 0 0,-1 0-1 0 0,-1-1 1 0 0,1 1-1 0 0,-1-1 1 0 0,-1 0 0 0 0,0 0-1 0 0,0 0 1 0 0,0-1-1 0 0,1-9 1 0 0,-4 18-22 0 0,0-1 0 0 0,0 1 0 0 0,0-1 1 0 0,0 0-1 0 0,0 1 0 0 0,0-1 0 0 0,0 0 0 0 0,0 1 0 0 0,0-1 0 0 0,0 1 1 0 0,0-1-1 0 0,-1 0 0 0 0,1 1 0 0 0,0-1 0 0 0,0 1 0 0 0,-1-1 1 0 0,1 0-1 0 0,0 1 0 0 0,-1-1 0 0 0,1 1 0 0 0,-1-1 0 0 0,1 1 0 0 0,-1 0 1 0 0,1-1-1 0 0,-1 1 0 0 0,1-1 0 0 0,-1 1 0 0 0,1 0 0 0 0,-1-1 0 0 0,1 1 1 0 0,-1 0-1 0 0,1 0 0 0 0,-1 0 0 0 0,0-1 0 0 0,1 1 0 0 0,-1 0 0 0 0,0 0 1 0 0,1 0-1 0 0,-1 0 0 0 0,0 0 0 0 0,0 0-2 0 0,0 0-1 0 0,0 0 1 0 0,0 0 0 0 0,0 0-1 0 0,0 0 1 0 0,0 0-1 0 0,0 0 1 0 0,1 0 0 0 0,-1 0-1 0 0,0 1 1 0 0,0-1 0 0 0,0 0-1 0 0,0 0 1 0 0,0 1 0 0 0,1-1-1 0 0,-1 1 1 0 0,0-1-1 0 0,0 1 1 0 0,1-1 0 0 0,-1 1-1 0 0,0 0 1 0 0,1-1 0 0 0,-1 1-1 0 0,1 0 1 0 0,-1-1-1 0 0,0 1 1 0 0,1 0 0 0 0,-1 1-1 0 0,0 2 5 0 0,1-1 0 0 0,0 1-1 0 0,0-1 1 0 0,0 1-1 0 0,0 0 1 0 0,1-1 0 0 0,0 1-1 0 0,-1-1 1 0 0,1 1-1 0 0,1-1 1 0 0,-1 1 0 0 0,0-1-1 0 0,1 0 1 0 0,-1 0-1 0 0,1 0 1 0 0,0 0-1 0 0,0 0 1 0 0,0 0 0 0 0,1 0-1 0 0,-1-1 1 0 0,1 1-1 0 0,0-1 1 0 0,-1 1 0 0 0,7 3-1 0 0,8 6 22 0 0,1 0 1 0 0,35 18-1 0 0,-48-28-23 0 0,6 4 23 0 0,1-1 0 0 0,0 0 0 0 0,0 0 0 0 0,1-2 0 0 0,-1 1 0 0 0,1-2 0 0 0,0 0 0 0 0,0 0 0 0 0,19-1 0 0 0,-27-1 6 0 0,1 0 0 0 0,-1-1 1 0 0,0 1-1 0 0,0-1 0 0 0,1-1 0 0 0,-1 1 0 0 0,0-1 1 0 0,0 0-1 0 0,0 0 0 0 0,-1 0 0 0 0,1 0 0 0 0,0-1 1 0 0,-1 0-1 0 0,0 0 0 0 0,0 0 0 0 0,0-1 0 0 0,0 0 1 0 0,0 1-1 0 0,-1-1 0 0 0,1 0 0 0 0,-1-1 0 0 0,0 1 1 0 0,0-1-1 0 0,-1 1 0 0 0,4-9 0 0 0,7-23 67 0 0,-1-1 0 0 0,-3 0-1 0 0,-1 0 1 0 0,6-70 0 0 0,-6-155 35 0 0,-8 225-127 0 0,0 35-30 0 0,-1 0-5 0 0,1 2 25 0 0,1 0 0 0 0,-1-1 0 0 0,0 1-1 0 0,0 0 1 0 0,0 0 0 0 0,0 0 0 0 0,0-1 0 0 0,0 1-1 0 0,0 0 1 0 0,0 0 0 0 0,0 0 0 0 0,0-1-1 0 0,0 1 1 0 0,0 0 0 0 0,0 0 0 0 0,0 0 0 0 0,0-1-1 0 0,0 1 1 0 0,0 0 0 0 0,0 0 0 0 0,0 0-1 0 0,0-1 1 0 0,-1 1 0 0 0,1 0 0 0 0,0 0 0 0 0,0 0-1 0 0,0 0 1 0 0,0-1 0 0 0,0 1 0 0 0,0 0-1 0 0,-1 0 1 0 0,1 0 0 0 0,0 0 0 0 0,0 0 0 0 0,0 0-1 0 0,0-1 1 0 0,-1 1 0 0 0,1 0 0 0 0,0 0-1 0 0,0 0 1 0 0,0 0 0 0 0,0 0 0 0 0,-1 0 0 0 0,1 0-1 0 0,0 0 1 0 0,0 0 0 0 0,0 0 0 0 0,-1 0-1 0 0,1 0 1 0 0,0 0 0 0 0,0 0 0 0 0,-1 0 0 0 0,-2 6-4 0 0,0-1-1 0 0,0 1 1 0 0,1 0 0 0 0,-1 0 0 0 0,1 1 0 0 0,1-1 0 0 0,-1 0 0 0 0,1 0 0 0 0,0 1 0 0 0,1-1 0 0 0,-1 13 0 0 0,-1 61-21 0 0,0-27 30 0 0,5 63-1 0 0,-2-102 8 0 0,0 0-1 0 0,2 0 1 0 0,0-1-1 0 0,0 1 1 0 0,1-1-1 0 0,1 0 1 0 0,0 0-1 0 0,1 0 1 0 0,12 19-1 0 0,-11-24-4 0 0,0 0-1 0 0,1-1 1 0 0,0 0-1 0 0,0 0 1 0 0,0-1 0 0 0,1 0-1 0 0,0 0 1 0 0,0-1-1 0 0,1 0 1 0 0,0-1-1 0 0,-1 0 1 0 0,1 0-1 0 0,15 3 1 0 0,6 0-312 0 0,-1-1 0 0 0,1-1 1 0 0,41 1-1 0 0,-38-5-1653 0 0,57-6-1 0 0,-33-5-909 0 0</inkml:trace>
+  <inkml:trace contextRef="#ctx0" brushRef="#br0">224 22 5953 0 0,'-31'-17'772'0'0,"27"16"-642"0"0,-9-2 291 0 0,3 2-283 0 0,10 1-149 0 0,-1 0 11 0 0,1 0 0 0 0,0 0 1 0 0,-1 1-1 0 0,1-1 0 0 0,-1 0 0 0 0,1 0 0 0 0,0 0 0 0 0,-1 0 0 0 0,1 0 0 0 0,0 1 0 0 0,0-1 0 0 0,-1 0 0 0 0,1 0 0 0 0,0 1 0 0 0,-1-1 0 0 0,1 0 0 0 0,0 0 0 0 0,0 1 0 0 0,0-1 0 0 0,-1 0 0 0 0,1 1 0 0 0,0-1 0 0 0,0 0 0 0 0,0 1 1 0 0,0-1-1 0 0,0 0 0 0 0,-1 1 0 0 0,1-1 0 0 0,0 0 0 0 0,0 1 0 0 0,0-1 0 0 0,0 1 0 0 0,0-1 0 0 0,0 0 0 0 0,0 1 0 0 0,0-1 0 0 0,0 0 0 0 0,1 1 0 0 0,-1-1 0 0 0,0 0 0 0 0,0 1 0 0 0,0-1 0 0 0,0 0 0 0 0,1 1 0 0 0,8 25 4 0 0,-3-11-3 0 0,2 16 9 0 0,2 0 1 0 0,2 0-1 0 0,1-1 0 0 0,1-1 1 0 0,1 0-1 0 0,1-1 0 0 0,32 40 1 0 0,-40-58 3 0 0,0 0-1 0 0,-1 0 1 0 0,0 1 0 0 0,-1 0 0 0 0,0 0 0 0 0,0 0 0 0 0,3 14-1 0 0,-9-22-2 0 0,0-1-1 0 0,0 0 1 0 0,0 1 0 0 0,-1-1-1 0 0,0 1 1 0 0,1-1-1 0 0,-1 0 1 0 0,0 0-1 0 0,0 1 1 0 0,0-1-1 0 0,0 0 1 0 0,-1 0 0 0 0,1 0-1 0 0,0 0 1 0 0,-1 0-1 0 0,0 0 1 0 0,1-1-1 0 0,-1 1 1 0 0,0 0-1 0 0,0-1 1 0 0,-3 3-1 0 0,-46 29 113 0 0,48-31-116 0 0,-47 25 120 0 0,-1-3-1 0 0,-1-2 0 0 0,-61 16 1 0 0,105-35-281 0 0,-5 1 34 0 0</inkml:trace>
 </inkml:ink>
 </file>
 
@@ -2692,7 +2695,7 @@
           <inkml:channelProperty channel="OE" name="resolution" value="1000" units="1/deg"/>
         </inkml:channelProperties>
       </inkml:inkSource>
-      <inkml:timestamp xml:id="ts0" timeString="2026-07-09T04:58:45.195"/>
+      <inkml:timestamp xml:id="ts0" timeString="2026-07-09T04:59:21.995"/>
     </inkml:context>
     <inkml:brush xml:id="br0">
       <inkml:brushProperty name="width" value="0.2" units="cm"/>
@@ -2700,103 +2703,7 @@
       <inkml:brushProperty name="color" value="#FFC114"/>
     </inkml:brush>
   </inkml:definitions>
-  <inkml:trace contextRef="#ctx0" brushRef="#br0">200 151 6561 0 0,'-52'-5'-66'0'0,"20"3"377"0"0,0-2 0 0 0,-48-12 1 0 0,79 16-302 0 0,1 0-1 0 0,0 0 1 0 0,0-1 0 0 0,0 1 0 0 0,-1 0 0 0 0,1 0 0 0 0,0 0 0 0 0,0-1 0 0 0,-1 1-1 0 0,1 0 1 0 0,0 0 0 0 0,0-1 0 0 0,0 1 0 0 0,0 0 0 0 0,0 0 0 0 0,-1-1-1 0 0,1 1 1 0 0,0 0 0 0 0,0-1 0 0 0,0 1 0 0 0,0 0 0 0 0,0-1 0 0 0,0 1 0 0 0,0 0-1 0 0,0 0 1 0 0,0-1 0 0 0,0 1 0 0 0,0 0 0 0 0,0-1 0 0 0,0 1 0 0 0,0 0 0 0 0,1-1-1 0 0,-1 1 1 0 0,0 0 0 0 0,0 0 0 0 0,0-1 0 0 0,0 1 0 0 0,0 0 0 0 0,1 0-1 0 0,-1-1 1 0 0,0 1 0 0 0,0 0 0 0 0,1 0 0 0 0,-1-1 0 0 0,0 1 0 0 0,0 0 0 0 0,1 0-1 0 0,-1 0 1 0 0,0 0 0 0 0,1-1 0 0 0,27-10-27 0 0,0 1-1 0 0,1 2 1 0 0,1 0-1 0 0,50-5 1 0 0,0-1-624 0 0,89-18-2697 0 0,-92 17 1328 0 0</inkml:trace>
-</inkml:ink>
-</file>
-
-<file path=ppt/ink/ink77.xml><?xml version="1.0" encoding="utf-8"?>
-<inkml:ink xmlns:inkml="http://www.w3.org/2003/InkML">
-  <inkml:definitions>
-    <inkml:context xml:id="ctx0">
-      <inkml:inkSource xml:id="inkSrc0">
-        <inkml:traceFormat>
-          <inkml:channel name="X" type="integer" min="-2.14748E9" max="2.14748E9" units="cm"/>
-          <inkml:channel name="Y" type="integer" min="-2.14748E9" max="2.14748E9" units="cm"/>
-          <inkml:channel name="F" type="integer" max="32767" units="dev"/>
-          <inkml:channel name="OA" type="integer" max="360" units="deg"/>
-          <inkml:channel name="OE" type="integer" max="90" units="deg"/>
-        </inkml:traceFormat>
-        <inkml:channelProperties>
-          <inkml:channelProperty channel="X" name="resolution" value="1000" units="1/cm"/>
-          <inkml:channelProperty channel="Y" name="resolution" value="1000" units="1/cm"/>
-          <inkml:channelProperty channel="F" name="resolution" value="0" units="1/dev"/>
-          <inkml:channelProperty channel="OA" name="resolution" value="1000" units="1/deg"/>
-          <inkml:channelProperty channel="OE" name="resolution" value="1000" units="1/deg"/>
-        </inkml:channelProperties>
-      </inkml:inkSource>
-      <inkml:timestamp xml:id="ts0" timeString="2026-07-09T04:58:54.838"/>
-    </inkml:context>
-    <inkml:brush xml:id="br0">
-      <inkml:brushProperty name="width" value="0.2" units="cm"/>
-      <inkml:brushProperty name="height" value="0.2" units="cm"/>
-      <inkml:brushProperty name="color" value="#FFC114"/>
-    </inkml:brush>
-  </inkml:definitions>
-  <inkml:trace contextRef="#ctx0" brushRef="#br0">1 2104 5000 0 0,'0'0'-278'0'0,"24"5"1908"0"0,247-212-727 0 0,-212 165-727 0 0,250-161 259 0 0,-280 187-404 0 0,384-195 339 0 0,-235 143-308 0 0,-105 42 10 0 0,84-43-1 0 0,-93 40-30 0 0,110-36 1 0 0,-68 29-22 0 0,231-88 56 0 0,164-39-21 0 0,-320 111-37 0 0,332-91-35 0 0,290-37 24 0 0,-620 143-12 0 0,505-92 18 0 0,0 20 8 0 0,339-28-58 0 0,-692 105 11 0 0,-287 29 25 0 0,1012-25-9 0 0,-410 47 19 0 0,-612-17-9 0 0,-3-1 8 0 0,919 74-2 0 0,-868-63-11 0 0,129 17 2 0 0,54 11-4 0 0,-24 0 1 0 0,-66-12-6 0 0,298 84 0 0 0,-177-5-22 0 0,-10-5 20 0 0,-255-88 43 0 0,89 28-34 0 0,-92-32-14 0 0,0 2 0 0 0,35 18-1 0 0,-27-11 35 0 0,203 80 94 0 0,-164-70 864 0 0,-76-28-659 0 0,-10-4-1084 0 0,-1 0 614 0 0,-3-2-1046 0 0,0 1-1 0 0,0-2 1 0 0,-15-8-1 0 0,12 2-1181 0 0</inkml:trace>
-</inkml:ink>
-</file>
-
-<file path=ppt/ink/ink78.xml><?xml version="1.0" encoding="utf-8"?>
-<inkml:ink xmlns:inkml="http://www.w3.org/2003/InkML">
-  <inkml:definitions>
-    <inkml:context xml:id="ctx0">
-      <inkml:inkSource xml:id="inkSrc0">
-        <inkml:traceFormat>
-          <inkml:channel name="X" type="integer" min="-2.14748E9" max="2.14748E9" units="cm"/>
-          <inkml:channel name="Y" type="integer" min="-2.14748E9" max="2.14748E9" units="cm"/>
-          <inkml:channel name="F" type="integer" max="32767" units="dev"/>
-          <inkml:channel name="OA" type="integer" max="360" units="deg"/>
-          <inkml:channel name="OE" type="integer" max="90" units="deg"/>
-        </inkml:traceFormat>
-        <inkml:channelProperties>
-          <inkml:channelProperty channel="X" name="resolution" value="1000" units="1/cm"/>
-          <inkml:channelProperty channel="Y" name="resolution" value="1000" units="1/cm"/>
-          <inkml:channelProperty channel="F" name="resolution" value="0" units="1/dev"/>
-          <inkml:channelProperty channel="OA" name="resolution" value="1000" units="1/deg"/>
-          <inkml:channelProperty channel="OE" name="resolution" value="1000" units="1/deg"/>
-        </inkml:channelProperties>
-      </inkml:inkSource>
-      <inkml:timestamp xml:id="ts0" timeString="2026-07-09T04:58:55.885"/>
-    </inkml:context>
-    <inkml:brush xml:id="br0">
-      <inkml:brushProperty name="width" value="0.2" units="cm"/>
-      <inkml:brushProperty name="height" value="0.2" units="cm"/>
-      <inkml:brushProperty name="color" value="#FFC114"/>
-    </inkml:brush>
-  </inkml:definitions>
-  <inkml:trace contextRef="#ctx0" brushRef="#br0">420 70 5685 0 0,'-5'-6'-103'0'0,"-1"1"0"0"0,0 0 0 0 0,-1 1 0 0 0,1-1 0 0 0,-1 1 1 0 0,0 0-1 0 0,0 1 0 0 0,-11-5 0 0 0,7 3 249 0 0,9 5-35 0 0,-2-3 175 0 0,1 0-1 0 0,-1 1 1 0 0,0 0-1 0 0,1 0 0 0 0,-1 0 1 0 0,0 0-1 0 0,0 1 0 0 0,-7-2 507 0 0,16 5-738 0 0,146 52 337 0 0,14 6-194 0 0,11 13 15 0 0,-150-62-163 0 0,25 10 29 0 0,-49-20-83 0 0,-2 0-21 0 0,-1 1 26 0 0,1-1-1 0 0,0 1 1 0 0,-1-1-1 0 0,1 0 1 0 0,-1 1-1 0 0,0-1 1 0 0,1 0-1 0 0,-1 0 1 0 0,0 1-1 0 0,0-1 1 0 0,0 0-1 0 0,1 0 1 0 0,-1 0-1 0 0,0 0 1 0 0,-2 1 0 0 0,2-1 1 0 0,-18 12 15 0 0,-1-2 0 0 0,0-1 0 0 0,0 0 0 0 0,-1-2 0 0 0,0 0 0 0 0,-44 9 0 0 0,37-9-2 0 0,-155 38 327 0 0,-210 25 0 0 0,347-64 225 0 0,43-7-312 0 0,-16-16-4265 0 0</inkml:trace>
-</inkml:ink>
-</file>
-
-<file path=ppt/ink/ink79.xml><?xml version="1.0" encoding="utf-8"?>
-<inkml:ink xmlns:inkml="http://www.w3.org/2003/InkML">
-  <inkml:definitions>
-    <inkml:context xml:id="ctx0">
-      <inkml:inkSource xml:id="inkSrc0">
-        <inkml:traceFormat>
-          <inkml:channel name="X" type="integer" min="-2.14748E9" max="2.14748E9" units="cm"/>
-          <inkml:channel name="Y" type="integer" min="-2.14748E9" max="2.14748E9" units="cm"/>
-          <inkml:channel name="F" type="integer" max="32767" units="dev"/>
-          <inkml:channel name="OA" type="integer" max="360" units="deg"/>
-          <inkml:channel name="OE" type="integer" max="90" units="deg"/>
-        </inkml:traceFormat>
-        <inkml:channelProperties>
-          <inkml:channelProperty channel="X" name="resolution" value="1000" units="1/cm"/>
-          <inkml:channelProperty channel="Y" name="resolution" value="1000" units="1/cm"/>
-          <inkml:channelProperty channel="F" name="resolution" value="0" units="1/dev"/>
-          <inkml:channelProperty channel="OA" name="resolution" value="1000" units="1/deg"/>
-          <inkml:channelProperty channel="OE" name="resolution" value="1000" units="1/deg"/>
-        </inkml:channelProperties>
-      </inkml:inkSource>
-      <inkml:timestamp xml:id="ts0" timeString="2026-07-09T04:57:47.939"/>
-    </inkml:context>
-    <inkml:brush xml:id="br0">
-      <inkml:brushProperty name="width" value="0.2" units="cm"/>
-      <inkml:brushProperty name="height" value="0.2" units="cm"/>
-      <inkml:brushProperty name="color" value="#FFC114"/>
-    </inkml:brush>
-  </inkml:definitions>
-  <inkml:trace contextRef="#ctx0" brushRef="#br0">132 106 6117 0 0,'-13'-45'-1158'0'0,"6"31"1325"0"0,-13-14 398 0 0,19 26-365 0 0,-8-15 905 0 0,2 41-1058 0 0,-2 29 76 0 0,-3 63 0 0 0,-4 19 51 0 0,1-50 90 0 0,-8 167 0 0 0,23-251-255 0 0,0 1-1 0 0,0-1 0 0 0,0 0 0 0 0,1 1 1 0 0,-1-1-1 0 0,0 0 0 0 0,1 1 0 0 0,-1-1 0 0 0,1 0 1 0 0,-1 1-1 0 0,1-1 0 0 0,0 0 0 0 0,-1 0 1 0 0,1 1-1 0 0,0-1 0 0 0,0 0 0 0 0,0 0 1 0 0,0 0-1 0 0,0 0 0 0 0,0 0 0 0 0,0-1 0 0 0,0 1 1 0 0,0 0-1 0 0,1 0 0 0 0,-1-1 0 0 0,0 1 1 0 0,1 0-1 0 0,-1-1 0 0 0,0 0 0 0 0,1 1 1 0 0,-1-1-1 0 0,0 0 0 0 0,1 1 0 0 0,-1-1 0 0 0,0 0 1 0 0,1 0-1 0 0,-1 0 0 0 0,1 0 0 0 0,1-1 1 0 0,10 0 3 0 0,-1 0 0 0 0,1-1 0 0 0,20-7 1 0 0,-11 4 13 0 0,25-3 22 0 0,1 3 0 0 0,0 1-1 0 0,59 4 1 0 0,-86 0-18 0 0,2 2 40 0 0,-21-2-24 0 0,1 5 54 0 0,-7-11-1393 0 0,3 4 1047 0 0,0 0-1 0 0,0 0 0 0 0,0 0 1 0 0,0 0-1 0 0,0 0 0 0 0,0-1 0 0 0,1 1 1 0 0,-1 0-1 0 0,1 0 0 0 0,-1-1 0 0 0,1 1 1 0 0,0-4-1 0 0</inkml:trace>
+  <inkml:trace contextRef="#ctx0" brushRef="#br0">5380 712 5300 0 0,'0'0'-140'0'0,"-27"3"1701"0"0,10 3-1518 0 0,0 2 0 0 0,0 0 0 0 0,1 1 1 0 0,0 0-1 0 0,1 2 0 0 0,-23 18 0 0 0,22-15-13 0 0,0-2-1 0 0,-1-1 1 0 0,-32 17 0 0 0,-22 10 191 0 0,47-25-118 0 0,-1 0 1 0 0,-33 12-1 0 0,-9-2 76 0 0,-15 6 51 0 0,-126 27 0 0 0,-97 14-135 0 0,208-50-95 0 0,-159 24 50 0 0,-261-7 124 0 0,316-30 128 0 0,141-4-228 0 0,-8-3-8 0 0,-129-3 193 0 0,-112-34 135 0 0,-172-47 481 0 0,269 43-739 0 0,-13-2-53 0 0,-31 2 149 0 0,163 26 122 0 0,-141-42 0 0 0,-47-55 214 0 0,242 92-501 0 0,0-3 0 0 0,2-1 0 0 0,1-2 0 0 0,1-1 1 0 0,1-2-1 0 0,1-2 0 0 0,-53-63 0 0 0,16 14-73 0 0,-121-105 0 0 0,142 152-14 0 0,8 6 12 0 0,35 25 8 0 0,5 1-2 0 0,-29-20-12 0 0,30 21 8 0 0,-1-1-1 0 0,0 1 0 0 0,1 0 0 0 0,-1-1 1 0 0,0 1-1 0 0,1 0 0 0 0,-1-1 1 0 0,0 1-1 0 0,1 0 0 0 0,-1 0 1 0 0,0 0-1 0 0,0 0 0 0 0,1-1 1 0 0,-1 1-1 0 0,0 0 0 0 0,0 0 1 0 0,1 0-1 0 0,-1 1 0 0 0,0-1 1 0 0,0 0-1 0 0,1 0 0 0 0,-1 0 1 0 0,0 0-1 0 0,0 1 0 0 0,1-1 1 0 0,-1 0-1 0 0,-1 2 0 0 0,-4 19-103 0 0,2-1 96 0 0,-2 11 2 0 0,-3 51-1 0 0,7-54 20 0 0,-1 0 0 0 0,-9 36 0 0 0,10-22 288 0 0,42-264-225 0 0,-27 128-58 0 0,-8 56-40 0 0,9-42-118 0 0,-13 78 123 0 0,-1 1 18 0 0,1 0 0 0 0,-1 0 0 0 0,1 0 0 0 0,0 0 0 0 0,-1 0 0 0 0,1 0 0 0 0,0 0 0 0 0,0 0 1 0 0,0 0-1 0 0,0 0 0 0 0,0 1 0 0 0,0-1 0 0 0,0 0 0 0 0,0 0 0 0 0,2 0 0 0 0,121-12-13 0 0,378-20 27 0 0,-493 32-25 0 0,0 2 0 0 0,0-1-1 0 0,0 1 1 0 0,-1 0 0 0 0,17 6-1 0 0,-21-4 210 0 0</inkml:trace>
 </inkml:ink>
 </file>
 
@@ -2832,326 +2739,6 @@
 </inkml:ink>
 </file>
 
-<file path=ppt/ink/ink80.xml><?xml version="1.0" encoding="utf-8"?>
-<inkml:ink xmlns:inkml="http://www.w3.org/2003/InkML">
-  <inkml:definitions>
-    <inkml:context xml:id="ctx0">
-      <inkml:inkSource xml:id="inkSrc0">
-        <inkml:traceFormat>
-          <inkml:channel name="X" type="integer" min="-2.14748E9" max="2.14748E9" units="cm"/>
-          <inkml:channel name="Y" type="integer" min="-2.14748E9" max="2.14748E9" units="cm"/>
-          <inkml:channel name="F" type="integer" max="32767" units="dev"/>
-          <inkml:channel name="OA" type="integer" max="360" units="deg"/>
-          <inkml:channel name="OE" type="integer" max="90" units="deg"/>
-        </inkml:traceFormat>
-        <inkml:channelProperties>
-          <inkml:channelProperty channel="X" name="resolution" value="1000" units="1/cm"/>
-          <inkml:channelProperty channel="Y" name="resolution" value="1000" units="1/cm"/>
-          <inkml:channelProperty channel="F" name="resolution" value="0" units="1/dev"/>
-          <inkml:channelProperty channel="OA" name="resolution" value="1000" units="1/deg"/>
-          <inkml:channelProperty channel="OE" name="resolution" value="1000" units="1/deg"/>
-        </inkml:channelProperties>
-      </inkml:inkSource>
-      <inkml:timestamp xml:id="ts0" timeString="2026-07-09T04:57:48.763"/>
-    </inkml:context>
-    <inkml:brush xml:id="br0">
-      <inkml:brushProperty name="width" value="0.2" units="cm"/>
-      <inkml:brushProperty name="height" value="0.2" units="cm"/>
-      <inkml:brushProperty name="color" value="#FFC114"/>
-    </inkml:brush>
-  </inkml:definitions>
-  <inkml:trace contextRef="#ctx0" brushRef="#br0">147 201 5733 0 0,'0'0'-273'0'0,"-17"-2"-326"0"0,8 0 325 0 0,10-1 250 0 0,72-15 206 0 0,-47 13-72 0 0,43-14 0 0 0,-62 16-79 0 0,0 0 0 0 0,0 0 0 0 0,0-1 0 0 0,0 0 0 0 0,-1 0 0 0 0,1 0-1 0 0,-1-1 1 0 0,0 0 0 0 0,-1 0 0 0 0,8-9 0 0 0,-11 12-16 0 0,-1 0 0 0 0,0 1 0 0 0,0-1-1 0 0,0 0 1 0 0,-1 0 0 0 0,1 0 0 0 0,0 0 0 0 0,-1 0-1 0 0,1 0 1 0 0,-1 0 0 0 0,1 0 0 0 0,-1 0 0 0 0,0 0-1 0 0,0 0 1 0 0,0 0 0 0 0,0 0 0 0 0,0 0 0 0 0,-1 0-1 0 0,1 0 1 0 0,-1 0 0 0 0,1 0 0 0 0,-1 0 0 0 0,0 0 0 0 0,1 0-1 0 0,-1 0 1 0 0,0 1 0 0 0,0-1 0 0 0,-1 0 0 0 0,1 0-1 0 0,0 1 1 0 0,0-1 0 0 0,-1 1 0 0 0,-1-2 0 0 0,-1 0 0 0 0,1 0 1 0 0,0 0 0 0 0,-1 0-1 0 0,1 0 1 0 0,-1 1 0 0 0,0 0-1 0 0,0 0 1 0 0,0 0 0 0 0,0 0-1 0 0,0 0 1 0 0,0 1 0 0 0,0 0-1 0 0,-1 0 1 0 0,1 0 0 0 0,-6 0-1 0 0,-5 2-4 0 0,1 0 0 0 0,-1 1 0 0 0,0 1-1 0 0,0 0 1 0 0,1 1 0 0 0,0 1 0 0 0,-1 0-1 0 0,2 1 1 0 0,-1 0 0 0 0,-17 12 0 0 0,22-12-11 0 0,0-1 1 0 0,0 2 0 0 0,1-1-1 0 0,0 1 1 0 0,1 0 0 0 0,-1 1-1 0 0,2 0 1 0 0,-1 0 0 0 0,1 0-1 0 0,0 1 1 0 0,0 0-1 0 0,1 0 1 0 0,1 1 0 0 0,0-1-1 0 0,0 1 1 0 0,-4 15 0 0 0,7-21 12 0 0,0 0 0 0 0,1 1 1 0 0,-1-1-1 0 0,1 0 1 0 0,0 0-1 0 0,0 0 1 0 0,0 0-1 0 0,0 1 0 0 0,1-1 1 0 0,0 0-1 0 0,0 0 1 0 0,0 0-1 0 0,0 0 1 0 0,1 0-1 0 0,-1 0 0 0 0,1-1 1 0 0,0 1-1 0 0,0 0 1 0 0,1-1-1 0 0,-1 1 1 0 0,1-1-1 0 0,0 0 1 0 0,-1 0-1 0 0,1 0 0 0 0,1 0 1 0 0,-1-1-1 0 0,0 1 1 0 0,1-1-1 0 0,-1 0 1 0 0,1 0-1 0 0,0 0 0 0 0,-1 0 1 0 0,1-1-1 0 0,8 3 1 0 0,12 3 43 0 0,1-2 1 0 0,1 0-1 0 0,-1-2 1 0 0,43 1-1 0 0,-27-1-20 0 0,152 4 219 0 0,-126-14-192 0 0,-72-19-3671 0 0</inkml:trace>
-</inkml:ink>
-</file>
-
-<file path=ppt/ink/ink81.xml><?xml version="1.0" encoding="utf-8"?>
-<inkml:ink xmlns:inkml="http://www.w3.org/2003/InkML">
-  <inkml:definitions>
-    <inkml:context xml:id="ctx0">
-      <inkml:inkSource xml:id="inkSrc0">
-        <inkml:traceFormat>
-          <inkml:channel name="X" type="integer" min="-2.14748E9" max="2.14748E9" units="cm"/>
-          <inkml:channel name="Y" type="integer" min="-2.14748E9" max="2.14748E9" units="cm"/>
-          <inkml:channel name="F" type="integer" max="32767" units="dev"/>
-          <inkml:channel name="OA" type="integer" max="360" units="deg"/>
-          <inkml:channel name="OE" type="integer" max="90" units="deg"/>
-        </inkml:traceFormat>
-        <inkml:channelProperties>
-          <inkml:channelProperty channel="X" name="resolution" value="1000" units="1/cm"/>
-          <inkml:channelProperty channel="Y" name="resolution" value="1000" units="1/cm"/>
-          <inkml:channelProperty channel="F" name="resolution" value="0" units="1/dev"/>
-          <inkml:channelProperty channel="OA" name="resolution" value="1000" units="1/deg"/>
-          <inkml:channelProperty channel="OE" name="resolution" value="1000" units="1/deg"/>
-        </inkml:channelProperties>
-      </inkml:inkSource>
-      <inkml:timestamp xml:id="ts0" timeString="2026-07-09T04:57:49.623"/>
-    </inkml:context>
-    <inkml:brush xml:id="br0">
-      <inkml:brushProperty name="width" value="0.2" units="cm"/>
-      <inkml:brushProperty name="height" value="0.2" units="cm"/>
-      <inkml:brushProperty name="color" value="#FFC114"/>
-    </inkml:brush>
-  </inkml:definitions>
-  <inkml:trace contextRef="#ctx0" brushRef="#br0">256 80 4708 0 0,'1'-2'-32'0'0,"0"-1"0"0"0,-1 1 0 0 0,1-1 0 0 0,-1 1 0 0 0,1-1 0 0 0,-1 1-1 0 0,0-1 1 0 0,0 1 0 0 0,0-1 0 0 0,0 1 0 0 0,0-1 0 0 0,-1 1 0 0 0,1-1-1 0 0,-1 1 1 0 0,0 0 0 0 0,0-1 0 0 0,1 1 0 0 0,-2 0 0 0 0,1-1 0 0 0,0 1-1 0 0,0 0 1 0 0,-1 0 0 0 0,1 0 0 0 0,-1 0 0 0 0,1 0 0 0 0,-1 0 0 0 0,0 1-1 0 0,0-1 1 0 0,0 0 0 0 0,0 1 0 0 0,0 0 0 0 0,-3-2 0 0 0,3 2 32 0 0,0 0-12 0 0,-5-2 8 0 0,5 2 6 0 0,-36 5 148 0 0,30-1-120 0 0,-1 0 1 0 0,1 0-1 0 0,1 1 1 0 0,-1 0-1 0 0,0 1 1 0 0,1-1-1 0 0,0 1 1 0 0,0 1-1 0 0,0 0 1 0 0,1 0-1 0 0,0 0 1 0 0,-11 14-1 0 0,5-3 37 0 0,0 1 0 0 0,2 0-1 0 0,0 0 1 0 0,-8 22 0 0 0,16-38-46 0 0,1 0 0 0 0,0 1 0 0 0,0-1 0 0 0,0 0 1 0 0,0 0-1 0 0,1 1 0 0 0,-1-1 0 0 0,1 0 0 0 0,-1 1 1 0 0,1-1-1 0 0,0 1 0 0 0,0-1 0 0 0,0 1 0 0 0,0-1 1 0 0,0 1-1 0 0,1-1 0 0 0,-1 0 0 0 0,1 1 0 0 0,0-1 0 0 0,-1 0 1 0 0,1 1-1 0 0,0-1 0 0 0,0 0 0 0 0,0 0 0 0 0,1 0 1 0 0,-1 0-1 0 0,1 0 0 0 0,-1 0 0 0 0,1 0 0 0 0,-1 0 0 0 0,1 0 1 0 0,0-1-1 0 0,0 1 0 0 0,0-1 0 0 0,0 1 0 0 0,0-1 1 0 0,0 0-1 0 0,0 0 0 0 0,1 0 0 0 0,-1 0 0 0 0,3 1 0 0 0,2-1 21 0 0,0 1-1 0 0,0-1 0 0 0,0 0 0 0 0,0 0 0 0 0,-1-1 1 0 0,1 0-1 0 0,0 0 0 0 0,0 0 0 0 0,0-1 0 0 0,0 0 0 0 0,0-1 1 0 0,0 0-1 0 0,12-4 0 0 0,-9 0 92 0 0,0-1 0 0 0,-1 1 0 0 0,1-2 0 0 0,-2 1 0 0 0,1-1 0 0 0,-1 0 0 0 0,0-1 1 0 0,0 0-1 0 0,-1 0 0 0 0,-1-1 0 0 0,1 0 0 0 0,-2 0 0 0 0,1-1 0 0 0,6-18 0 0 0,-12 28-32 0 0,0 1-98 0 0,1 0-1 0 0,-1 0 0 0 0,0 1 0 0 0,0-1 0 0 0,0 0 0 0 0,0 0 0 0 0,1 0 0 0 0,-1 0 0 0 0,0 0 0 0 0,0 0 1 0 0,0 0-1 0 0,1 1 0 0 0,-1-1 0 0 0,0 0 0 0 0,0 0 0 0 0,1 0 0 0 0,-1 0 0 0 0,0 0 0 0 0,0 0 0 0 0,0 0 1 0 0,1 0-1 0 0,-1 0 0 0 0,0 0 0 0 0,0 0 0 0 0,1 0 0 0 0,-1-1 0 0 0,0 1 0 0 0,0 0 0 0 0,0 0 0 0 0,1 0 1 0 0,-1 0-1 0 0,0 0 0 0 0,0 0 0 0 0,0 0 0 0 0,0-1 0 0 0,1 1 0 0 0,-1 0 0 0 0,0 0 0 0 0,0 0 0 0 0,0 0 1 0 0,0-1-1 0 0,0 1 0 0 0,1 0 0 0 0,-1 0 0 0 0,0 0 0 0 0,0-1 0 0 0,0 1 0 0 0,0 0 0 0 0,0 0 1 0 0,0 0-1 0 0,0-1 0 0 0,0 1 0 0 0,0 0 0 0 0,0 0 0 0 0,0 0 0 0 0,0-1 0 0 0,0 1 0 0 0,0 0 0 0 0,0 0 1 0 0,0-1-1 0 0,0 1 0 0 0,21 27-164 0 0,12 14-80 0 0,-28-37-19 0 0,0-1 1 0 0,0 0-1 0 0,1 0 1 0 0,-1 0-1 0 0,1-1 0 0 0,0 0 1 0 0,0 0-1 0 0,0 0 1 0 0,0-1-1 0 0,0 0 0 0 0,0 0 1 0 0,0 0-1 0 0,0-1 1 0 0,8 0-1 0 0,8-2-1778 0 0</inkml:trace>
-</inkml:ink>
-</file>
-
-<file path=ppt/ink/ink82.xml><?xml version="1.0" encoding="utf-8"?>
-<inkml:ink xmlns:inkml="http://www.w3.org/2003/InkML">
-  <inkml:definitions>
-    <inkml:context xml:id="ctx0">
-      <inkml:inkSource xml:id="inkSrc0">
-        <inkml:traceFormat>
-          <inkml:channel name="X" type="integer" min="-2.14748E9" max="2.14748E9" units="cm"/>
-          <inkml:channel name="Y" type="integer" min="-2.14748E9" max="2.14748E9" units="cm"/>
-          <inkml:channel name="F" type="integer" max="32767" units="dev"/>
-          <inkml:channel name="OA" type="integer" max="360" units="deg"/>
-          <inkml:channel name="OE" type="integer" max="90" units="deg"/>
-        </inkml:traceFormat>
-        <inkml:channelProperties>
-          <inkml:channelProperty channel="X" name="resolution" value="1000" units="1/cm"/>
-          <inkml:channelProperty channel="Y" name="resolution" value="1000" units="1/cm"/>
-          <inkml:channelProperty channel="F" name="resolution" value="0" units="1/dev"/>
-          <inkml:channelProperty channel="OA" name="resolution" value="1000" units="1/deg"/>
-          <inkml:channelProperty channel="OE" name="resolution" value="1000" units="1/deg"/>
-        </inkml:channelProperties>
-      </inkml:inkSource>
-      <inkml:timestamp xml:id="ts0" timeString="2026-07-09T04:57:50.606"/>
-    </inkml:context>
-    <inkml:brush xml:id="br0">
-      <inkml:brushProperty name="width" value="0.2" units="cm"/>
-      <inkml:brushProperty name="height" value="0.2" units="cm"/>
-      <inkml:brushProperty name="color" value="#FFC114"/>
-    </inkml:brush>
-  </inkml:definitions>
-  <inkml:trace contextRef="#ctx0" brushRef="#br0">12 124 5176 0 0,'0'0'-207'0'0,"-9"-2"-390"0"0,6 2 504 0 0,9-1-534 0 0,18 4 535 0 0,1 1 1 0 0,-1 2-1 0 0,46 15 1 0 0,-30-7 35 0 0,-15-5 37 0 0,0 1 0 0 0,36 19-1 0 0,-54-26 22 0 0,0 2-1 0 0,-1-1 1 0 0,0 1-1 0 0,0 0 1 0 0,0 0-1 0 0,0 1 1 0 0,-1-1-1 0 0,0 1 1 0 0,0 1-1 0 0,-1-1 1 0 0,1 1-1 0 0,-1-1 0 0 0,3 9 1 0 0,-6-13 16 0 0,0 0 0 0 0,0-1 0 0 0,-1 1 1 0 0,1 0-1 0 0,-1 0 0 0 0,1-1 0 0 0,-1 1 0 0 0,0 0 0 0 0,1 0 0 0 0,-1 0 1 0 0,0 0-1 0 0,0-1 0 0 0,0 1 0 0 0,0 0 0 0 0,-1 0 0 0 0,1 0 1 0 0,-1 0-1 0 0,1-1 0 0 0,-1 1 0 0 0,1 0 0 0 0,-1 0 0 0 0,0-1 0 0 0,0 1 1 0 0,0 0-1 0 0,0-1 0 0 0,0 1 0 0 0,-2 2 0 0 0,0-2 72 0 0,0 0 0 0 0,-1 0-1 0 0,1 0 1 0 0,0 0 0 0 0,0-1 0 0 0,-1 1-1 0 0,1-1 1 0 0,-1 0 0 0 0,1 0-1 0 0,-1 0 1 0 0,-5 1 0 0 0,7-2 394 0 0,-3-1-234 0 0,3 0-210 0 0,-1-1 1 0 0,0 1-1 0 0,0 0 0 0 0,0-1 1 0 0,1 0-1 0 0,-1 0 1 0 0,0 0-1 0 0,1 0 0 0 0,0 0 1 0 0,0 0-1 0 0,-1-1 1 0 0,1 1-1 0 0,1-1 0 0 0,-1 1 1 0 0,0-1-1 0 0,1 0 1 0 0,-1 0-1 0 0,1 1 0 0 0,0-1 1 0 0,0 0-1 0 0,0 0 1 0 0,0-1-1 0 0,0 1 0 0 0,1 0 1 0 0,-1 0-1 0 0,1 0 1 0 0,0 0-1 0 0,0 0 0 0 0,0-1 1 0 0,1 1-1 0 0,-1 0 1 0 0,1 0-1 0 0,0-3 0 0 0,4-11-24 0 0,0 1 0 0 0,1 1 0 0 0,1-1-1 0 0,0 1 1 0 0,1 0 0 0 0,1 0-1 0 0,0 1 1 0 0,1 0 0 0 0,15-16 0 0 0,10-17-33 0 0,-30 42 9 0 0,9-17 10 0 0,-13 21 16 0 0,-1 0-11 0 0,0 1 0 0 0,1 0 0 0 0,-1-1-1 0 0,0 1 1 0 0,0-1 0 0 0,1 1 0 0 0,-1-1 0 0 0,0 1 0 0 0,0-1 0 0 0,0 1 0 0 0,0-1-1 0 0,1 1 1 0 0,-1-1 0 0 0,0 1 0 0 0,0-1 0 0 0,0 1 0 0 0,0-1 0 0 0,0 1 0 0 0,0-1-1 0 0,0 1 1 0 0,0-1 0 0 0,-1 1 0 0 0,1-1 0 0 0,0 1 0 0 0,0 0 0 0 0,0-1-1 0 0,0 1 1 0 0,-1-1 0 0 0,1 0 0 0 0,0-18-4029 0 0,7 13 2656 0 0</inkml:trace>
-</inkml:ink>
-</file>
-
-<file path=ppt/ink/ink83.xml><?xml version="1.0" encoding="utf-8"?>
-<inkml:ink xmlns:inkml="http://www.w3.org/2003/InkML">
-  <inkml:definitions>
-    <inkml:context xml:id="ctx0">
-      <inkml:inkSource xml:id="inkSrc0">
-        <inkml:traceFormat>
-          <inkml:channel name="X" type="integer" min="-2.14748E9" max="2.14748E9" units="cm"/>
-          <inkml:channel name="Y" type="integer" min="-2.14748E9" max="2.14748E9" units="cm"/>
-          <inkml:channel name="F" type="integer" max="32767" units="dev"/>
-          <inkml:channel name="OA" type="integer" max="360" units="deg"/>
-          <inkml:channel name="OE" type="integer" max="90" units="deg"/>
-        </inkml:traceFormat>
-        <inkml:channelProperties>
-          <inkml:channelProperty channel="X" name="resolution" value="1000" units="1/cm"/>
-          <inkml:channelProperty channel="Y" name="resolution" value="1000" units="1/cm"/>
-          <inkml:channelProperty channel="F" name="resolution" value="0" units="1/dev"/>
-          <inkml:channelProperty channel="OA" name="resolution" value="1000" units="1/deg"/>
-          <inkml:channelProperty channel="OE" name="resolution" value="1000" units="1/deg"/>
-        </inkml:channelProperties>
-      </inkml:inkSource>
-      <inkml:timestamp xml:id="ts0" timeString="2026-07-09T04:57:51.485"/>
-    </inkml:context>
-    <inkml:brush xml:id="br0">
-      <inkml:brushProperty name="width" value="0.2" units="cm"/>
-      <inkml:brushProperty name="height" value="0.2" units="cm"/>
-      <inkml:brushProperty name="color" value="#FFC114"/>
-    </inkml:brush>
-  </inkml:definitions>
-  <inkml:trace contextRef="#ctx0" brushRef="#br0">4 17 4120 0 0,'0'0'-72'0'0,"-2"-6"51"0"0,1 4-10 0 0,1 6-173 0 0,2 12 176 0 0,0 0 1 0 0,2 0-1 0 0,0-1 1 0 0,0 1-1 0 0,2-1 0 0 0,-1 0 1 0 0,2 0-1 0 0,0-1 1 0 0,12 18-1 0 0,-4 15 4369 0 0,-21-68-3399 0 0,5 12-872 0 0,-1 0-1 0 0,2 0 0 0 0,-1 0 1 0 0,1 0-1 0 0,0-1 0 0 0,1 1 0 0 0,0 0 1 0 0,1 0-1 0 0,0 0 0 0 0,0 0 1 0 0,1 0-1 0 0,0 1 0 0 0,5-11 1 0 0,-6 14-77 0 0,0 1 0 0 0,1-1 0 0 0,-1 1 0 0 0,1-1 0 0 0,0 1 0 0 0,1 0 0 0 0,-1 0 0 0 0,1 1 0 0 0,-1-1 0 0 0,1 1 0 0 0,0-1 0 0 0,1 1 0 0 0,-1 0 0 0 0,0 1 0 0 0,1-1 0 0 0,0 1 0 0 0,-1 0 0 0 0,1 0 0 0 0,0 0 0 0 0,0 1 0 0 0,0 0 0 0 0,0 0 0 0 0,1 0 0 0 0,5 0 1 0 0,-3 2-26 0 0,0-1 0 0 0,0 2 1 0 0,-1-1-1 0 0,1 1 1 0 0,-1 0-1 0 0,1 1 1 0 0,-1-1-1 0 0,0 2 1 0 0,0-1-1 0 0,0 1 0 0 0,0 0 1 0 0,-1 0-1 0 0,1 1 1 0 0,-1 0-1 0 0,0 0 1 0 0,-1 0-1 0 0,1 1 0 0 0,-1 0 1 0 0,0 0-1 0 0,-1 0 1 0 0,1 1-1 0 0,-1-1 1 0 0,4 11-1 0 0,-3-7-180 0 0,29 67 394 0 0,-32-70-665 0 0,0 0 1 0 0,0 0-1 0 0,-1 1 1 0 0,0-1-1 0 0,1 9 1 0 0</inkml:trace>
-</inkml:ink>
-</file>
-
-<file path=ppt/ink/ink84.xml><?xml version="1.0" encoding="utf-8"?>
-<inkml:ink xmlns:inkml="http://www.w3.org/2003/InkML">
-  <inkml:definitions>
-    <inkml:context xml:id="ctx0">
-      <inkml:inkSource xml:id="inkSrc0">
-        <inkml:traceFormat>
-          <inkml:channel name="X" type="integer" min="-2.14748E9" max="2.14748E9" units="cm"/>
-          <inkml:channel name="Y" type="integer" min="-2.14748E9" max="2.14748E9" units="cm"/>
-          <inkml:channel name="F" type="integer" max="32767" units="dev"/>
-          <inkml:channel name="OA" type="integer" max="360" units="deg"/>
-          <inkml:channel name="OE" type="integer" max="90" units="deg"/>
-        </inkml:traceFormat>
-        <inkml:channelProperties>
-          <inkml:channelProperty channel="X" name="resolution" value="1000" units="1/cm"/>
-          <inkml:channelProperty channel="Y" name="resolution" value="1000" units="1/cm"/>
-          <inkml:channelProperty channel="F" name="resolution" value="0" units="1/dev"/>
-          <inkml:channelProperty channel="OA" name="resolution" value="1000" units="1/deg"/>
-          <inkml:channelProperty channel="OE" name="resolution" value="1000" units="1/deg"/>
-        </inkml:channelProperties>
-      </inkml:inkSource>
-      <inkml:timestamp xml:id="ts0" timeString="2026-07-09T04:57:52.234"/>
-    </inkml:context>
-    <inkml:brush xml:id="br0">
-      <inkml:brushProperty name="width" value="0.2" units="cm"/>
-      <inkml:brushProperty name="height" value="0.2" units="cm"/>
-      <inkml:brushProperty name="color" value="#FFC114"/>
-    </inkml:brush>
-  </inkml:definitions>
-  <inkml:trace contextRef="#ctx0" brushRef="#br0">9 35 5240 0 0,'-8'-34'-792'0'0,"32"172"543"0"0,1 9 158 0 0,-17-47 719 0 0</inkml:trace>
-</inkml:ink>
-</file>
-
-<file path=ppt/ink/ink85.xml><?xml version="1.0" encoding="utf-8"?>
-<inkml:ink xmlns:inkml="http://www.w3.org/2003/InkML">
-  <inkml:definitions>
-    <inkml:context xml:id="ctx0">
-      <inkml:inkSource xml:id="inkSrc0">
-        <inkml:traceFormat>
-          <inkml:channel name="X" type="integer" min="-2.14748E9" max="2.14748E9" units="cm"/>
-          <inkml:channel name="Y" type="integer" min="-2.14748E9" max="2.14748E9" units="cm"/>
-          <inkml:channel name="F" type="integer" max="32767" units="dev"/>
-          <inkml:channel name="OA" type="integer" max="360" units="deg"/>
-          <inkml:channel name="OE" type="integer" max="90" units="deg"/>
-        </inkml:traceFormat>
-        <inkml:channelProperties>
-          <inkml:channelProperty channel="X" name="resolution" value="1000" units="1/cm"/>
-          <inkml:channelProperty channel="Y" name="resolution" value="1000" units="1/cm"/>
-          <inkml:channelProperty channel="F" name="resolution" value="0" units="1/dev"/>
-          <inkml:channelProperty channel="OA" name="resolution" value="1000" units="1/deg"/>
-          <inkml:channelProperty channel="OE" name="resolution" value="1000" units="1/deg"/>
-        </inkml:channelProperties>
-      </inkml:inkSource>
-      <inkml:timestamp xml:id="ts0" timeString="2026-07-09T04:57:52.766"/>
-    </inkml:context>
-    <inkml:brush xml:id="br0">
-      <inkml:brushProperty name="width" value="0.2" units="cm"/>
-      <inkml:brushProperty name="height" value="0.2" units="cm"/>
-      <inkml:brushProperty name="color" value="#FFC114"/>
-    </inkml:brush>
-  </inkml:definitions>
-  <inkml:trace contextRef="#ctx0" brushRef="#br0">19 67 3508 0 0,'0'0'-49'0'0,"-16"-5"82"0"0,13 3-21 0 0,9-1-7 0 0,24-4-9 0 0,38-5-44 0 0,43 1-12 0 0,135 4-1 0 0,-243 7 57 0 0,6 0-82 0 0,0 0-1 0 0,0-1 1 0 0,1 0 0 0 0,-1-1-1 0 0,18-5 1 0 0,-12 3-1077 0 0,1 0 568 0 0</inkml:trace>
-</inkml:ink>
-</file>
-
-<file path=ppt/ink/ink86.xml><?xml version="1.0" encoding="utf-8"?>
-<inkml:ink xmlns:inkml="http://www.w3.org/2003/InkML">
-  <inkml:definitions>
-    <inkml:context xml:id="ctx0">
-      <inkml:inkSource xml:id="inkSrc0">
-        <inkml:traceFormat>
-          <inkml:channel name="X" type="integer" min="-2.14748E9" max="2.14748E9" units="cm"/>
-          <inkml:channel name="Y" type="integer" min="-2.14748E9" max="2.14748E9" units="cm"/>
-          <inkml:channel name="F" type="integer" max="32767" units="dev"/>
-          <inkml:channel name="OA" type="integer" max="360" units="deg"/>
-          <inkml:channel name="OE" type="integer" max="90" units="deg"/>
-        </inkml:traceFormat>
-        <inkml:channelProperties>
-          <inkml:channelProperty channel="X" name="resolution" value="1000" units="1/cm"/>
-          <inkml:channelProperty channel="Y" name="resolution" value="1000" units="1/cm"/>
-          <inkml:channelProperty channel="F" name="resolution" value="0" units="1/dev"/>
-          <inkml:channelProperty channel="OA" name="resolution" value="1000" units="1/deg"/>
-          <inkml:channelProperty channel="OE" name="resolution" value="1000" units="1/deg"/>
-        </inkml:channelProperties>
-      </inkml:inkSource>
-      <inkml:timestamp xml:id="ts0" timeString="2026-07-09T04:57:53.926"/>
-    </inkml:context>
-    <inkml:brush xml:id="br0">
-      <inkml:brushProperty name="width" value="0.2" units="cm"/>
-      <inkml:brushProperty name="height" value="0.2" units="cm"/>
-      <inkml:brushProperty name="color" value="#FFC114"/>
-    </inkml:brush>
-  </inkml:definitions>
-  <inkml:trace contextRef="#ctx0" brushRef="#br0">86 206 2600 0 0,'1'-17'1012'0'0,"-1"16"-972"0"0,0 1 0 0 0,0 0 0 0 0,1 0 0 0 0,-1-1 0 0 0,0 1-1 0 0,0 0 1 0 0,0 0 0 0 0,0-1 0 0 0,0 1 0 0 0,0 0 0 0 0,0 0 0 0 0,1-1 0 0 0,-1 1 0 0 0,0 0 0 0 0,0-1 0 0 0,0 1 0 0 0,0 0 0 0 0,0-1 0 0 0,0 1 0 0 0,0 0 0 0 0,0 0-1 0 0,-1-1 1 0 0,1 1 0 0 0,0 0 0 0 0,0-1 0 0 0,0 1 0 0 0,0 0 0 0 0,0 0 0 0 0,0-1 0 0 0,-1 1 0 0 0,1 0 0 0 0,0 0 0 0 0,0-1 0 0 0,0 1 0 0 0,0 0 0 0 0,-1 0-1 0 0,1 0 1 0 0,0-1 0 0 0,0 1 0 0 0,-1 0 0 0 0,1 0 0 0 0,0 0 0 0 0,0 0 0 0 0,-1 0 0 0 0,1 0 0 0 0,0-1 0 0 0,-1 1 0 0 0,1 0 0 0 0,0 0 0 0 0,-1 0 0 0 0,-4 6-37 0 0,1 1 1 0 0,-1 0 0 0 0,1 0 0 0 0,0 0-1 0 0,1 0 1 0 0,-1 0 0 0 0,2 1 0 0 0,-1-1 0 0 0,1 1-1 0 0,-2 11 1 0 0,-11 93-21 0 0,11-73-1 0 0,-16 143 18 0 0,17-142 722 0 0,5-34 517 0 0,4-22-793 0 0,59-199 360 0 0,8-34-450 0 0,-39 129-102 0 0,-33 112-248 0 0,0-2-4 0 0,1 2-2 0 0,-1 6-8 0 0,7-15-185 0 0,0 24-205 0 0,-1 1 360 0 0,0 0-1 0 0,0 0 0 0 0,-1 1 1 0 0,7 11-1 0 0,-4-5 5 0 0,126 188-105 0 0,-117-171 145 0 0,-2 1-1 0 0,-1 1 1 0 0,-1 0 0 0 0,14 60-1 0 0,-9-51-1241 0 0,-12-65-2119 0 0,-3 9 1253 0 0</inkml:trace>
-</inkml:ink>
-</file>
-
-<file path=ppt/ink/ink87.xml><?xml version="1.0" encoding="utf-8"?>
-<inkml:ink xmlns:inkml="http://www.w3.org/2003/InkML">
-  <inkml:definitions>
-    <inkml:context xml:id="ctx0">
-      <inkml:inkSource xml:id="inkSrc0">
-        <inkml:traceFormat>
-          <inkml:channel name="X" type="integer" min="-2.14748E9" max="2.14748E9" units="cm"/>
-          <inkml:channel name="Y" type="integer" min="-2.14748E9" max="2.14748E9" units="cm"/>
-          <inkml:channel name="F" type="integer" max="32767" units="dev"/>
-          <inkml:channel name="OA" type="integer" max="360" units="deg"/>
-          <inkml:channel name="OE" type="integer" max="90" units="deg"/>
-        </inkml:traceFormat>
-        <inkml:channelProperties>
-          <inkml:channelProperty channel="X" name="resolution" value="1000" units="1/cm"/>
-          <inkml:channelProperty channel="Y" name="resolution" value="1000" units="1/cm"/>
-          <inkml:channelProperty channel="F" name="resolution" value="0" units="1/dev"/>
-          <inkml:channelProperty channel="OA" name="resolution" value="1000" units="1/deg"/>
-          <inkml:channelProperty channel="OE" name="resolution" value="1000" units="1/deg"/>
-        </inkml:channelProperties>
-      </inkml:inkSource>
-      <inkml:timestamp xml:id="ts0" timeString="2026-07-09T04:57:54.379"/>
-    </inkml:context>
-    <inkml:brush xml:id="br0">
-      <inkml:brushProperty name="width" value="0.2" units="cm"/>
-      <inkml:brushProperty name="height" value="0.2" units="cm"/>
-      <inkml:brushProperty name="color" value="#FFC114"/>
-    </inkml:brush>
-  </inkml:definitions>
-  <inkml:trace contextRef="#ctx0" brushRef="#br0">23 72 5044 0 0,'0'0'-233'0'0,"-15"-4"-133"0"0,7 1 121 0 0,9 0-361 0 0,36-7 556 0 0,0 2 1 0 0,0 1 0 0 0,1 2 0 0 0,48-1 0 0 0,22-3-44 0 0,-21 4 214 0 0,-83 5-68 0 0,-1 0-205 0 0,0 0 1 0 0,0-1-1 0 0,0 0 0 0 0,0 0 0 0 0,0 0 1 0 0,0 0-1 0 0,0 0 0 0 0,5-4 1 0 0,-7 4-57 0 0</inkml:trace>
-</inkml:ink>
-</file>
-
-<file path=ppt/ink/ink88.xml><?xml version="1.0" encoding="utf-8"?>
-<inkml:ink xmlns:inkml="http://www.w3.org/2003/InkML">
-  <inkml:definitions>
-    <inkml:context xml:id="ctx0">
-      <inkml:inkSource xml:id="inkSrc0">
-        <inkml:traceFormat>
-          <inkml:channel name="X" type="integer" min="-2.14748E9" max="2.14748E9" units="cm"/>
-          <inkml:channel name="Y" type="integer" min="-2.14748E9" max="2.14748E9" units="cm"/>
-          <inkml:channel name="F" type="integer" max="32767" units="dev"/>
-          <inkml:channel name="OA" type="integer" max="360" units="deg"/>
-          <inkml:channel name="OE" type="integer" max="90" units="deg"/>
-        </inkml:traceFormat>
-        <inkml:channelProperties>
-          <inkml:channelProperty channel="X" name="resolution" value="1000" units="1/cm"/>
-          <inkml:channelProperty channel="Y" name="resolution" value="1000" units="1/cm"/>
-          <inkml:channelProperty channel="F" name="resolution" value="0" units="1/dev"/>
-          <inkml:channelProperty channel="OA" name="resolution" value="1000" units="1/deg"/>
-          <inkml:channelProperty channel="OE" name="resolution" value="1000" units="1/deg"/>
-        </inkml:channelProperties>
-      </inkml:inkSource>
-      <inkml:timestamp xml:id="ts0" timeString="2026-07-09T04:57:56.226"/>
-    </inkml:context>
-    <inkml:brush xml:id="br0">
-      <inkml:brushProperty name="width" value="0.2" units="cm"/>
-      <inkml:brushProperty name="height" value="0.2" units="cm"/>
-      <inkml:brushProperty name="color" value="#FFC114"/>
-    </inkml:brush>
-  </inkml:definitions>
-  <inkml:trace contextRef="#ctx0" brushRef="#br0">232 378 2708 0 0,'0'0'1666'0'0,"-7"-2"-1606"0"0,-20-4 4 0 0,20 4-9 0 0,2 2-16 0 0,-7 1-26 0 0,-1 0 0 0 0,1 1 0 0 0,-1 0 0 0 0,1 0 0 0 0,0 2 0 0 0,-18 6 0 0 0,25-8-21 0 0,0 0 0 0 0,0 0-1 0 0,0 1 1 0 0,0-1 0 0 0,1 1 0 0 0,-1 0-1 0 0,1 0 1 0 0,0 1 0 0 0,0-1 0 0 0,0 1-1 0 0,0 0 1 0 0,1 0 0 0 0,-1 0 0 0 0,1 1-1 0 0,0-1 1 0 0,0 1 0 0 0,1-1 0 0 0,-3 8-1 0 0,4-8-3 0 0,0 1-1 0 0,0-1 0 0 0,0 1 0 0 0,1-1 0 0 0,0 1 0 0 0,-1-1 0 0 0,2 1 0 0 0,-1-1 1 0 0,1 1-1 0 0,-1-1 0 0 0,1 0 0 0 0,0 1 0 0 0,1-1 0 0 0,-1 0 0 0 0,1 1 0 0 0,0-1 1 0 0,0 0-1 0 0,0 0 0 0 0,1-1 0 0 0,-1 1 0 0 0,1 0 0 0 0,0-1 0 0 0,0 1 0 0 0,0-1 1 0 0,0 0-1 0 0,1 0 0 0 0,4 3 0 0 0,6 3 28 0 0,0-1 0 0 0,0 0 1 0 0,1-1-1 0 0,0 0 0 0 0,0-1 0 0 0,17 4 0 0 0,-30-10 34 0 0,0 1-1 0 0,0-1 0 0 0,0 0 1 0 0,0 0-1 0 0,0 0 0 0 0,0-1 1 0 0,0 1-1 0 0,0 0 0 0 0,0-1 1 0 0,0 1-1 0 0,0-1 0 0 0,0 0 1 0 0,0 0-1 0 0,0 1 0 0 0,-1-1 1 0 0,1 0-1 0 0,0-1 0 0 0,0 1 1 0 0,-1 0-1 0 0,1 0 0 0 0,-1-1 0 0 0,1 1 1 0 0,-1-1-1 0 0,0 1 0 0 0,0-1 1 0 0,1 0-1 0 0,-1 1 0 0 0,0-1 1 0 0,-1 0-1 0 0,1 0 0 0 0,0 0 1 0 0,0 0-1 0 0,-1 0 0 0 0,1-2 1 0 0,4-9 229 0 0,-1 0 0 0 0,-1-1 0 0 0,2-18 0 0 0,-1-17 281 0 0,-2 0 1 0 0,-2 0-1 0 0,-3 0 1 0 0,-1 0-1 0 0,-3 1 1 0 0,-18-69-1 0 0,18 73-79 0 0,6 35-412 0 0,-1-1 1 0 0,1 1-1 0 0,-1-1 0 0 0,-1 1 0 0 0,-4-12 1 0 0,6 19-90 0 0,0 2-116 0 0,0 1 103 0 0,1-1-1 0 0,-1 0 1 0 0,0 1 0 0 0,1-1 0 0 0,-1 0 0 0 0,1 1 0 0 0,-1-1 0 0 0,1 1 0 0 0,-1-1 0 0 0,1 1 0 0 0,-1-1-1 0 0,1 1 1 0 0,-1-1 0 0 0,1 1 0 0 0,-1 0 0 0 0,1-1 0 0 0,0 1 0 0 0,-1 0 0 0 0,1-1 0 0 0,0 1-1 0 0,0 0 1 0 0,-1-1 0 0 0,1 1 0 0 0,0 0 0 0 0,0-1 0 0 0,0 1 0 0 0,0 1 0 0 0,-2 37-375 0 0,8 39 16 0 0,1-17 209 0 0,3 0 1 0 0,2-1-1 0 0,3 0 1 0 0,37 95-1 0 0,-49-149 119 0 0,-1 0-1 0 0,1-1 1 0 0,1 1-1 0 0,-1-1 0 0 0,1 0 1 0 0,0 0-1 0 0,8 8 0 0 0,-9-11-186 0 0,0 0 1 0 0,0 0-1 0 0,-1 0 0 0 0,1-1 0 0 0,0 1 1 0 0,1-1-1 0 0,-1 1 0 0 0,0-1 0 0 0,0 0 1 0 0,0-1-1 0 0,1 1 0 0 0,-1 0 0 0 0,0-1 1 0 0,1 0-1 0 0,-1 0 0 0 0,5 0 0 0 0,11-2-2136 0 0</inkml:trace>
-</inkml:ink>
-</file>
-
-<file path=ppt/ink/ink89.xml><?xml version="1.0" encoding="utf-8"?>
-<inkml:ink xmlns:inkml="http://www.w3.org/2003/InkML">
-  <inkml:definitions>
-    <inkml:context xml:id="ctx0">
-      <inkml:inkSource xml:id="inkSrc0">
-        <inkml:traceFormat>
-          <inkml:channel name="X" type="integer" min="-2.14748E9" max="2.14748E9" units="cm"/>
-          <inkml:channel name="Y" type="integer" min="-2.14748E9" max="2.14748E9" units="cm"/>
-          <inkml:channel name="F" type="integer" max="32767" units="dev"/>
-          <inkml:channel name="OA" type="integer" max="360" units="deg"/>
-          <inkml:channel name="OE" type="integer" max="90" units="deg"/>
-        </inkml:traceFormat>
-        <inkml:channelProperties>
-          <inkml:channelProperty channel="X" name="resolution" value="1000" units="1/cm"/>
-          <inkml:channelProperty channel="Y" name="resolution" value="1000" units="1/cm"/>
-          <inkml:channelProperty channel="F" name="resolution" value="0" units="1/dev"/>
-          <inkml:channelProperty channel="OA" name="resolution" value="1000" units="1/deg"/>
-          <inkml:channelProperty channel="OE" name="resolution" value="1000" units="1/deg"/>
-        </inkml:channelProperties>
-      </inkml:inkSource>
-      <inkml:timestamp xml:id="ts0" timeString="2026-07-09T04:57:57.069"/>
-    </inkml:context>
-    <inkml:brush xml:id="br0">
-      <inkml:brushProperty name="width" value="0.2" units="cm"/>
-      <inkml:brushProperty name="height" value="0.2" units="cm"/>
-      <inkml:brushProperty name="color" value="#FFC114"/>
-    </inkml:brush>
-  </inkml:definitions>
-  <inkml:trace contextRef="#ctx0" brushRef="#br0">191 14 5444 0 0,'0'0'-294'0'0,"-7"-4"-574"0"0,3 3 849 0 0,0-1 0 0 0,0 0 0 0 0,0 1 0 0 0,0 0 0 0 0,-6-1 0 0 0,-1 5-9 0 0,0 1 0 0 0,1 1 1 0 0,0-1-1 0 0,0 2 1 0 0,0-1-1 0 0,1 2 0 0 0,0-1 1 0 0,-11 11-1 0 0,15-13 2 0 0,0 0 1 0 0,1 1-1 0 0,-1-1 0 0 0,1 1 1 0 0,0 0-1 0 0,1 1 0 0 0,-1-1 1 0 0,1 1-1 0 0,0-1 0 0 0,1 1 0 0 0,-1 0 1 0 0,1 0-1 0 0,0 0 0 0 0,1 0 1 0 0,-1 0-1 0 0,0 12 0 0 0,2-13 27 0 0,1 0-1 0 0,0 0 0 0 0,0-1 1 0 0,0 1-1 0 0,1 0 0 0 0,-1-1 1 0 0,1 1-1 0 0,0-1 0 0 0,1 1 1 0 0,-1-1-1 0 0,1 0 0 0 0,-1 0 1 0 0,1 0-1 0 0,1 0 0 0 0,-1 0 0 0 0,0-1 1 0 0,1 0-1 0 0,0 0 0 0 0,0 0 1 0 0,0 0-1 0 0,0 0 0 0 0,0-1 1 0 0,0 1-1 0 0,1-1 0 0 0,-1 0 1 0 0,1-1-1 0 0,0 1 0 0 0,-1-1 1 0 0,1 0-1 0 0,0 0 0 0 0,0 0 1 0 0,8-1-1 0 0,-10 0 13 0 0,1 0 0 0 0,-1-1 0 0 0,0 1-1 0 0,0-1 1 0 0,0 0 0 0 0,0 0 0 0 0,0 0 0 0 0,-1 0 0 0 0,1-1 0 0 0,0 1 0 0 0,0-1-1 0 0,-1 0 1 0 0,1 1 0 0 0,-1-1 0 0 0,0 0 0 0 0,1-1 0 0 0,-1 1 0 0 0,0 0 0 0 0,2-4 0 0 0,4-5 58 0 0,-1 0 0 0 0,-1 0 0 0 0,7-16 1 0 0,-5 10 84 0 0,21-64 2009 0 0,-29 80-2075 0 0,0-5 25 0 0,0 6-113 0 0,0 0 0 0 0,0 0-1 0 0,0 0 1 0 0,0 0 0 0 0,0 0 0 0 0,0 0 0 0 0,0 0 0 0 0,0 0 0 0 0,0 0-1 0 0,1 0 1 0 0,-1 0 0 0 0,0 0 0 0 0,0 0 0 0 0,0 0 0 0 0,0 0-1 0 0,0 0 1 0 0,2 11 5 0 0,0 1-1 0 0,0-1 1 0 0,2 0-1 0 0,-1 0 1 0 0,1-1-1 0 0,1 1 1 0 0,0-1-1 0 0,0 0 1 0 0,1 0-1 0 0,10 13 1 0 0,-12-18-206 0 0,0 1 0 0 0,1-1 1 0 0,-1 1-1 0 0,1-1 1 0 0,0-1-1 0 0,1 1 0 0 0,-1-1 1 0 0,1 0-1 0 0,0 0 1 0 0,0 0-1 0 0,0-1 0 0 0,1 0 1 0 0,-1 0-1 0 0,1-1 0 0 0,-1 0 1 0 0,1 0-1 0 0,0 0 1 0 0,12 0-1 0 0</inkml:trace>
-</inkml:ink>
-</file>
-
 <file path=ppt/ink/ink9.xml><?xml version="1.0" encoding="utf-8"?>
 <inkml:ink xmlns:inkml="http://www.w3.org/2003/InkML">
   <inkml:definitions>
@@ -3181,230 +2768,6 @@
     </inkml:brush>
   </inkml:definitions>
   <inkml:trace contextRef="#ctx0" brushRef="#br0">1 151 6733 0 0,'10'-52'-590'0'0,"-5"33"1124"0"0,-2-1 0 0 0,3-38 0 0 0,-6 57-438 0 0,0 6-82 0 0,11 397 148 0 0,-11-244-66 0 0,0-154-52 0 0,0-1 0 0 0,0 0 1 0 0,0 0-1 0 0,1 1 1 0 0,-1-1-1 0 0,1 0 0 0 0,-1 0 1 0 0,1 0-1 0 0,0 1 0 0 0,3 4 1 0 0,0-7-11 0 0,1-1 0 0 0,0 0 0 0 0,0 1 0 0 0,-1-1-1 0 0,1-1 1 0 0,0 1 0 0 0,0-1 0 0 0,-1 0 0 0 0,9-2 0 0 0,-11 3-28 0 0,460-87 457 0 0,-403 83-395 0 0,-47 4-4647 0 0</inkml:trace>
-</inkml:ink>
-</file>
-
-<file path=ppt/ink/ink90.xml><?xml version="1.0" encoding="utf-8"?>
-<inkml:ink xmlns:inkml="http://www.w3.org/2003/InkML">
-  <inkml:definitions>
-    <inkml:context xml:id="ctx0">
-      <inkml:inkSource xml:id="inkSrc0">
-        <inkml:traceFormat>
-          <inkml:channel name="X" type="integer" min="-2.14748E9" max="2.14748E9" units="cm"/>
-          <inkml:channel name="Y" type="integer" min="-2.14748E9" max="2.14748E9" units="cm"/>
-          <inkml:channel name="F" type="integer" max="32767" units="dev"/>
-          <inkml:channel name="OA" type="integer" max="360" units="deg"/>
-          <inkml:channel name="OE" type="integer" max="90" units="deg"/>
-        </inkml:traceFormat>
-        <inkml:channelProperties>
-          <inkml:channelProperty channel="X" name="resolution" value="1000" units="1/cm"/>
-          <inkml:channelProperty channel="Y" name="resolution" value="1000" units="1/cm"/>
-          <inkml:channelProperty channel="F" name="resolution" value="0" units="1/dev"/>
-          <inkml:channelProperty channel="OA" name="resolution" value="1000" units="1/deg"/>
-          <inkml:channelProperty channel="OE" name="resolution" value="1000" units="1/deg"/>
-        </inkml:channelProperties>
-      </inkml:inkSource>
-      <inkml:timestamp xml:id="ts0" timeString="2026-07-09T04:57:58.024"/>
-    </inkml:context>
-    <inkml:brush xml:id="br0">
-      <inkml:brushProperty name="width" value="0.2" units="cm"/>
-      <inkml:brushProperty name="height" value="0.2" units="cm"/>
-      <inkml:brushProperty name="color" value="#FFC114"/>
-    </inkml:brush>
-  </inkml:definitions>
-  <inkml:trace contextRef="#ctx0" brushRef="#br0">11 143 3824 0 0,'-1'-2'-72'0'0,"-3"-4"38"0"0,3 4 91 0 0,1 2-51 0 0,0 0 1 0 0,0 0-1 0 0,0 0 0 0 0,0 0 0 0 0,0 0 1 0 0,0 0-1 0 0,0 0 0 0 0,0 0 0 0 0,0 0 1 0 0,0 0-1 0 0,0 0 0 0 0,0 0 0 0 0,0 0 1 0 0,0 0-1 0 0,0 0 0 0 0,0 0 0 0 0,-1 0 1 0 0,1 0-1 0 0,0 0 0 0 0,0 0 1 0 0,0 0-1 0 0,0 0 0 0 0,0 0 0 0 0,0 0 1 0 0,-2 13 308 0 0,0 29 136 0 0,12 14-456 0 0,19 63 1 0 0,5 33 1 0 0,-25-100 3151 0 0,-12-57-2882 0 0,-7-11-124 0 0,1-1 0 0 0,1 0 0 0 0,1 0 0 0 0,0-1 0 0 0,2 0 0 0 0,0 0 0 0 0,0 0 0 0 0,-2-34-1 0 0,-1-164 68 0 0,8 179-203 0 0,1 28-35 0 0,0 0-1 0 0,0 0 1 0 0,1 0-1 0 0,0 1 1 0 0,1-1-1 0 0,6-14 1 0 0,-4 9-70 0 0,-3 12 88 0 0,-1 0 0 0 0,0 0 0 0 0,1 0 0 0 0,-1 0 1 0 0,1 1-1 0 0,-1-1 0 0 0,1 0 0 0 0,0 1 0 0 0,0 0 0 0 0,-1-1 1 0 0,1 1-1 0 0,0 0 0 0 0,1 0 0 0 0,-1 0 0 0 0,0 0 0 0 0,0 0 0 0 0,0 0 1 0 0,0 1-1 0 0,1-1 0 0 0,-1 1 0 0 0,0-1 0 0 0,1 1 0 0 0,-1 0 1 0 0,3 0-1 0 0,6 0-31 0 0,0 0 1 0 0,0 1-1 0 0,20 3 0 0 0,-24-2-6 0 0,1 1 0 0 0,-1-1-1 0 0,0 1 1 0 0,0 0-1 0 0,0 1 1 0 0,0 0-1 0 0,0 0 1 0 0,-1 0 0 0 0,1 1-1 0 0,-1 0 1 0 0,-1 0-1 0 0,1 0 1 0 0,-1 1-1 0 0,0 0 1 0 0,0 0-1 0 0,0 0 1 0 0,-1 1 0 0 0,0 0-1 0 0,0 0 1 0 0,-1 0-1 0 0,0 0 1 0 0,4 13-1 0 0,-7-18 48 0 0,0-1 0 0 0,0 1-1 0 0,0-1 1 0 0,-1 0 0 0 0,1 1 0 0 0,0-1-1 0 0,-1 0 1 0 0,1 1 0 0 0,-1-1-1 0 0,0 0 1 0 0,1 0 0 0 0,-1 1 0 0 0,0-1-1 0 0,0 0 1 0 0,1 0 0 0 0,-1 0-1 0 0,0 0 1 0 0,0 0 0 0 0,0 0-1 0 0,-1 0 1 0 0,1 0 0 0 0,0-1 0 0 0,0 1-1 0 0,0 0 1 0 0,-1-1 0 0 0,1 1-1 0 0,0-1 1 0 0,-3 1 0 0 0,-37 13 14 0 0,20-9 50 0 0,0-2 1 0 0,-1 0-1 0 0,1-1 1 0 0,-1-1-1 0 0,-40-3 0 0 0,59 2-125 0 0,-11-18-3649 0 0</inkml:trace>
-</inkml:ink>
-</file>
-
-<file path=ppt/ink/ink91.xml><?xml version="1.0" encoding="utf-8"?>
-<inkml:ink xmlns:inkml="http://www.w3.org/2003/InkML">
-  <inkml:definitions>
-    <inkml:context xml:id="ctx0">
-      <inkml:inkSource xml:id="inkSrc0">
-        <inkml:traceFormat>
-          <inkml:channel name="X" type="integer" min="-2.14748E9" max="2.14748E9" units="cm"/>
-          <inkml:channel name="Y" type="integer" min="-2.14748E9" max="2.14748E9" units="cm"/>
-          <inkml:channel name="F" type="integer" max="32767" units="dev"/>
-          <inkml:channel name="OA" type="integer" max="360" units="deg"/>
-          <inkml:channel name="OE" type="integer" max="90" units="deg"/>
-        </inkml:traceFormat>
-        <inkml:channelProperties>
-          <inkml:channelProperty channel="X" name="resolution" value="1000" units="1/cm"/>
-          <inkml:channelProperty channel="Y" name="resolution" value="1000" units="1/cm"/>
-          <inkml:channelProperty channel="F" name="resolution" value="0" units="1/dev"/>
-          <inkml:channelProperty channel="OA" name="resolution" value="1000" units="1/deg"/>
-          <inkml:channelProperty channel="OE" name="resolution" value="1000" units="1/deg"/>
-        </inkml:channelProperties>
-      </inkml:inkSource>
-      <inkml:timestamp xml:id="ts0" timeString="2026-07-09T04:57:58.664"/>
-    </inkml:context>
-    <inkml:brush xml:id="br0">
-      <inkml:brushProperty name="width" value="0.2" units="cm"/>
-      <inkml:brushProperty name="height" value="0.2" units="cm"/>
-      <inkml:brushProperty name="color" value="#FFC114"/>
-    </inkml:brush>
-  </inkml:definitions>
-  <inkml:trace contextRef="#ctx0" brushRef="#br0">9 50 6001 0 0,'0'0'-152'0'0,"-8"-48"504"0"0,8 46-356 0 0,0 36-267 0 0,5 208 65 0 0,-3-175 185 0 0,-2-43-7 0 0,1 0 0 0 0,0 1 0 0 0,2-1 0 0 0,10 37 0 0 0,-12-57 33 0 0,1-1 0 0 0,0 0 0 0 0,0 0 1 0 0,0 1-1 0 0,1-1 0 0 0,-1-1 1 0 0,1 1-1 0 0,-1 0 0 0 0,1-1 1 0 0,0 1-1 0 0,0-1 0 0 0,0 0 1 0 0,1 0-1 0 0,-1 0 0 0 0,0 0 1 0 0,1 0-1 0 0,0-1 0 0 0,-1 0 1 0 0,1 0-1 0 0,-1 0 0 0 0,1 0 1 0 0,0 0-1 0 0,0-1 0 0 0,6 1 1 0 0,3 0-63 0 0,1-1 0 0 0,0 0 1 0 0,0-1-1 0 0,-1 0 0 0 0,24-5 1 0 0,4-6-2287 0 0,-30 9 1190 0 0</inkml:trace>
-</inkml:ink>
-</file>
-
-<file path=ppt/ink/ink92.xml><?xml version="1.0" encoding="utf-8"?>
-<inkml:ink xmlns:inkml="http://www.w3.org/2003/InkML">
-  <inkml:definitions>
-    <inkml:context xml:id="ctx0">
-      <inkml:inkSource xml:id="inkSrc0">
-        <inkml:traceFormat>
-          <inkml:channel name="X" type="integer" min="-2.14748E9" max="2.14748E9" units="cm"/>
-          <inkml:channel name="Y" type="integer" min="-2.14748E9" max="2.14748E9" units="cm"/>
-          <inkml:channel name="F" type="integer" max="32767" units="dev"/>
-          <inkml:channel name="OA" type="integer" max="360" units="deg"/>
-          <inkml:channel name="OE" type="integer" max="90" units="deg"/>
-        </inkml:traceFormat>
-        <inkml:channelProperties>
-          <inkml:channelProperty channel="X" name="resolution" value="1000" units="1/cm"/>
-          <inkml:channelProperty channel="Y" name="resolution" value="1000" units="1/cm"/>
-          <inkml:channelProperty channel="F" name="resolution" value="0" units="1/dev"/>
-          <inkml:channelProperty channel="OA" name="resolution" value="1000" units="1/deg"/>
-          <inkml:channelProperty channel="OE" name="resolution" value="1000" units="1/deg"/>
-        </inkml:channelProperties>
-      </inkml:inkSource>
-      <inkml:timestamp xml:id="ts0" timeString="2026-07-09T04:57:59.055"/>
-    </inkml:context>
-    <inkml:brush xml:id="br0">
-      <inkml:brushProperty name="width" value="0.2" units="cm"/>
-      <inkml:brushProperty name="height" value="0.2" units="cm"/>
-      <inkml:brushProperty name="color" value="#FFC114"/>
-    </inkml:brush>
-  </inkml:definitions>
-  <inkml:trace contextRef="#ctx0" brushRef="#br0">19 65 4008 0 0,'-16'-3'152'0'0,"14"0"67"0"0,8-1-90 0 0,23-5-54 0 0,36-4-35 0 0,99-16-2198 0 0,-147 26 1549 0 0</inkml:trace>
-</inkml:ink>
-</file>
-
-<file path=ppt/ink/ink93.xml><?xml version="1.0" encoding="utf-8"?>
-<inkml:ink xmlns:inkml="http://www.w3.org/2003/InkML">
-  <inkml:definitions>
-    <inkml:context xml:id="ctx0">
-      <inkml:inkSource xml:id="inkSrc0">
-        <inkml:traceFormat>
-          <inkml:channel name="X" type="integer" min="-2.14748E9" max="2.14748E9" units="cm"/>
-          <inkml:channel name="Y" type="integer" min="-2.14748E9" max="2.14748E9" units="cm"/>
-          <inkml:channel name="F" type="integer" max="32767" units="dev"/>
-          <inkml:channel name="OA" type="integer" max="360" units="deg"/>
-          <inkml:channel name="OE" type="integer" max="90" units="deg"/>
-        </inkml:traceFormat>
-        <inkml:channelProperties>
-          <inkml:channelProperty channel="X" name="resolution" value="1000" units="1/cm"/>
-          <inkml:channelProperty channel="Y" name="resolution" value="1000" units="1/cm"/>
-          <inkml:channelProperty channel="F" name="resolution" value="0" units="1/dev"/>
-          <inkml:channelProperty channel="OA" name="resolution" value="1000" units="1/deg"/>
-          <inkml:channelProperty channel="OE" name="resolution" value="1000" units="1/deg"/>
-        </inkml:channelProperties>
-      </inkml:inkSource>
-      <inkml:timestamp xml:id="ts0" timeString="2026-07-09T04:59:04.221"/>
-    </inkml:context>
-    <inkml:brush xml:id="br0">
-      <inkml:brushProperty name="width" value="0.2" units="cm"/>
-      <inkml:brushProperty name="height" value="0.2" units="cm"/>
-      <inkml:brushProperty name="color" value="#FFC114"/>
-    </inkml:brush>
-  </inkml:definitions>
-  <inkml:trace contextRef="#ctx0" brushRef="#br0">14326 11 5693 0 0,'0'0'-267'0'0,"-3"-3"-409"0"0,1 2 591 0 0,1 0-1 0 0,0 0 1 0 0,0 0-1 0 0,-1 1 1 0 0,1-1-1 0 0,-1 0 0 0 0,1 1 1 0 0,-1-1-1 0 0,1 1 1 0 0,-1 0-1 0 0,-2-1 1 0 0,-1 4 64 0 0,1-1-1 0 0,-1 1 1 0 0,1 0 0 0 0,-1 1 0 0 0,1-1 0 0 0,0 1 0 0 0,1 0 0 0 0,-1 0 0 0 0,0 0 0 0 0,-5 9 0 0 0,-60 131-57 0 0,44-66 78 0 0,17-48 32 0 0,-2 0 1 0 0,-26 52 0 0 0,-35 66 179 0 0,31-82-5 0 0,-69 102 284 0 0,84-135-350 0 0,-1-2 0 0 0,-2-1 1 0 0,0-1-1 0 0,-54 41 0 0 0,-133 70 197 0 0,79-54-190 0 0,-88 34-41 0 0,53-32-137 0 0,38-23 73 0 0,-9 6-4 0 0,-116 59 80 0 0,136-73-82 0 0,-97 55 89 0 0,137-69 36 0 0,-219 106 211 0 0,117-65-52 0 0,90-52-127 0 0,-1-3-1 0 0,-181 29 0 0 0,32-29 15 0 0,-33 6-56 0 0,104-17-63 0 0,88-8-63 0 0,-126 7 80 0 0,164-15-91 0 0,-85 15 0 0 0,77-9-22 0 0,-104 12 48 0 0,-450 58 264 0 0,54-1-119 0 0,213-40-35 0 0,113-14-97 0 0,-80 0-1 0 0,207-17-7 0 0,-73 6-8 0 0,-240 8 76 0 0,-108-12-33 0 0,-164-11 8 0 0,-12 5 153 0 0,641-2-200 0 0,-435-10 169 0 0,407 5-170 0 0,-161-9 62 0 0,-246-47-1 0 0,338 42-104 0 0,0 1 52 0 0,-292-53 37 0 0,181 32-36 0 0,-42-19 18 0 0,155 27-54 0 0,-366-75 29 0 0,290 58-63 0 0,143 30 40 0 0,1-4 1 0 0,0-3-1 0 0,-83-39 1 0 0,41 14 17 0 0,75 32-19 0 0,-95-50 1 0 0,114 49-18 0 0,-46-17 0 0 0,-40-22 1 0 0,67 29-1 0 0,-117-73 1 0 0,121 70-16 0 0,45 31 6 0 0,-2-3 0 0 0,1 2-4 0 0,-3-5 4 0 0,6 6-2 0 0,0 0 1 0 0,0 0-1 0 0,0 0 1 0 0,0 0-1 0 0,-1 0 1 0 0,1 0 0 0 0,0 0-1 0 0,-1 1 1 0 0,1-1-1 0 0,-1 0 1 0 0,1 1-1 0 0,-1-1 1 0 0,1 1 0 0 0,-1-1-1 0 0,1 1 1 0 0,-1 0-1 0 0,1 0 1 0 0,-1-1-1 0 0,1 1 1 0 0,-1 0 0 0 0,1 1-1 0 0,-1-1 1 0 0,0 0-1 0 0,1 0 1 0 0,-1 1-1 0 0,1-1 1 0 0,-1 1 0 0 0,1-1-1 0 0,-1 1 1 0 0,1-1-1 0 0,0 1 1 0 0,-1 0-1 0 0,1 0 1 0 0,0 0 0 0 0,0 0-1 0 0,-1 0 1 0 0,1 0-1 0 0,0 0 1 0 0,0 0-1 0 0,0 0 1 0 0,0 1 0 0 0,0-1-1 0 0,0 0 1 0 0,1 1-1 0 0,-1-1 1 0 0,-1 3-1 0 0,-5 10 2 0 0,1 1-1 0 0,0 0 0 0 0,-8 29 0 0 0,6-19-24 0 0,0 2 33 0 0,1 0 0 0 0,1 0 0 0 0,1 0 0 0 0,2 1 1 0 0,-1 50-1 0 0,9-7 63 0 0,-5-70-29 0 0,1 2 6 0 0,0 2-65 0 0,1-7 298 0 0,-2 1-275 0 0,5-77 17 0 0,24-123 0 0 0,4 55-23 0 0,-32 142 5 0 0,1-4-21 0 0,-1 0 0 0 0,2 0 0 0 0,-1 0 0 0 0,1 0 0 0 0,7-14 0 0 0,-9 22 11 0 0,37-18-39 0 0,25 13 27 0 0,9 2 30 0 0,0-2 1 0 0,96-21-1 0 0,-66 9 29 0 0,-35 7-4 0 0,-65 10-43 0 0,20-1-23 0 0,-11 0 40 0 0,-8 0 5 0 0,-8 6-38 0 0,-43 31-1061 0 0,9-18-4030 0 0</inkml:trace>
-</inkml:ink>
-</file>
-
-<file path=ppt/ink/ink94.xml><?xml version="1.0" encoding="utf-8"?>
-<inkml:ink xmlns:inkml="http://www.w3.org/2003/InkML">
-  <inkml:definitions>
-    <inkml:context xml:id="ctx0">
-      <inkml:inkSource xml:id="inkSrc0">
-        <inkml:traceFormat>
-          <inkml:channel name="X" type="integer" min="-2.14748E9" max="2.14748E9" units="cm"/>
-          <inkml:channel name="Y" type="integer" min="-2.14748E9" max="2.14748E9" units="cm"/>
-          <inkml:channel name="F" type="integer" max="32767" units="dev"/>
-          <inkml:channel name="OA" type="integer" max="360" units="deg"/>
-          <inkml:channel name="OE" type="integer" max="90" units="deg"/>
-        </inkml:traceFormat>
-        <inkml:channelProperties>
-          <inkml:channelProperty channel="X" name="resolution" value="1000" units="1/cm"/>
-          <inkml:channelProperty channel="Y" name="resolution" value="1000" units="1/cm"/>
-          <inkml:channelProperty channel="F" name="resolution" value="0" units="1/dev"/>
-          <inkml:channelProperty channel="OA" name="resolution" value="1000" units="1/deg"/>
-          <inkml:channelProperty channel="OE" name="resolution" value="1000" units="1/deg"/>
-        </inkml:channelProperties>
-      </inkml:inkSource>
-      <inkml:timestamp xml:id="ts0" timeString="2026-07-09T04:59:17.541"/>
-    </inkml:context>
-    <inkml:brush xml:id="br0">
-      <inkml:brushProperty name="width" value="0.2" units="cm"/>
-      <inkml:brushProperty name="height" value="0.2" units="cm"/>
-      <inkml:brushProperty name="color" value="#FFC114"/>
-    </inkml:brush>
-  </inkml:definitions>
-  <inkml:trace contextRef="#ctx0" brushRef="#br0">1 1020 972 0 0,'0'0'3444'0'0,"1"-4"-3366"0"0,1-1-37 0 0,1 0-1 0 0,-1 0 1 0 0,1 0 0 0 0,0 1 0 0 0,1 0-1 0 0,-1-1 1 0 0,1 1 0 0 0,0 0 0 0 0,0 1-1 0 0,0-1 1 0 0,0 1 0 0 0,1 0 0 0 0,9-5-1 0 0,203-121 530 0 0,-143 88-461 0 0,305-135 283 0 0,-344 161-356 0 0,-29 13-35 0 0,515-201 292 0 0,-397 161-235 0 0,494-155 272 0 0,-453 155-258 0 0,2 7 1 0 0,1 7-1 0 0,205-6 0 0 0,-91 24-39 0 0,253 30 89 0 0,-131 27-31 0 0,-320-38-61 0 0,310 46 117 0 0,-73 37 6 0 0,-188-51-118 0 0,-104-32-25 0 0,10 2 23 0 0,77 33-1 0 0,-58-4 131 0 0,-50-34-119 0 0,-1 0 0 0 0,1-1 1 0 0,0 1-1 0 0,0-1 0 0 0,16 6 1 0 0,9 13 111 0 0,-11 1-418 0 0,-25-27-110 0 0,2 2 253 0 0,0-1 0 0 0,0 1-1 0 0,0-1 1 0 0,0 1 0 0 0,0-1 0 0 0,0 0-1 0 0,0 1 1 0 0,0-1 0 0 0,1 0 0 0 0,-1 0 0 0 0,0 1-1 0 0,0-1 1 0 0,1 0 0 0 0,-1 0 0 0 0,0 0 0 0 0,1 0-1 0 0,-1 0 1 0 0,1 0 0 0 0,-1 0 0 0 0,1 0-1 0 0,0-1 1 0 0,0 1 0 0 0,-1 0 0 0 0,1 0 0 0 0,0 0-1 0 0,0 0 1 0 0,0 0 0 0 0,0-2 0 0 0,3-11-2347 0 0</inkml:trace>
-</inkml:ink>
-</file>
-
-<file path=ppt/ink/ink95.xml><?xml version="1.0" encoding="utf-8"?>
-<inkml:ink xmlns:inkml="http://www.w3.org/2003/InkML">
-  <inkml:definitions>
-    <inkml:context xml:id="ctx0">
-      <inkml:inkSource xml:id="inkSrc0">
-        <inkml:traceFormat>
-          <inkml:channel name="X" type="integer" min="-2.14748E9" max="2.14748E9" units="cm"/>
-          <inkml:channel name="Y" type="integer" min="-2.14748E9" max="2.14748E9" units="cm"/>
-          <inkml:channel name="F" type="integer" max="32767" units="dev"/>
-          <inkml:channel name="OA" type="integer" max="360" units="deg"/>
-          <inkml:channel name="OE" type="integer" max="90" units="deg"/>
-        </inkml:traceFormat>
-        <inkml:channelProperties>
-          <inkml:channelProperty channel="X" name="resolution" value="1000" units="1/cm"/>
-          <inkml:channelProperty channel="Y" name="resolution" value="1000" units="1/cm"/>
-          <inkml:channelProperty channel="F" name="resolution" value="0" units="1/dev"/>
-          <inkml:channelProperty channel="OA" name="resolution" value="1000" units="1/deg"/>
-          <inkml:channelProperty channel="OE" name="resolution" value="1000" units="1/deg"/>
-        </inkml:channelProperties>
-      </inkml:inkSource>
-      <inkml:timestamp xml:id="ts0" timeString="2026-07-09T04:59:18.403"/>
-    </inkml:context>
-    <inkml:brush xml:id="br0">
-      <inkml:brushProperty name="width" value="0.2" units="cm"/>
-      <inkml:brushProperty name="height" value="0.2" units="cm"/>
-      <inkml:brushProperty name="color" value="#FFC114"/>
-    </inkml:brush>
-  </inkml:definitions>
-  <inkml:trace contextRef="#ctx0" brushRef="#br0">224 22 5953 0 0,'-31'-17'772'0'0,"27"16"-642"0"0,-9-2 291 0 0,3 2-283 0 0,10 1-149 0 0,-1 0 11 0 0,1 0 0 0 0,0 0 1 0 0,-1 1-1 0 0,1-1 0 0 0,-1 0 0 0 0,1 0 0 0 0,0 0 0 0 0,-1 0 0 0 0,1 0 0 0 0,0 1 0 0 0,0-1 0 0 0,-1 0 0 0 0,1 0 0 0 0,0 1 0 0 0,-1-1 0 0 0,1 0 0 0 0,0 0 0 0 0,0 1 0 0 0,0-1 0 0 0,-1 0 0 0 0,1 1 0 0 0,0-1 0 0 0,0 0 0 0 0,0 1 1 0 0,0-1-1 0 0,0 0 0 0 0,-1 1 0 0 0,1-1 0 0 0,0 0 0 0 0,0 1 0 0 0,0-1 0 0 0,0 1 0 0 0,0-1 0 0 0,0 0 0 0 0,0 1 0 0 0,0-1 0 0 0,0 0 0 0 0,1 1 0 0 0,-1-1 0 0 0,0 0 0 0 0,0 1 0 0 0,0-1 0 0 0,0 0 0 0 0,1 1 0 0 0,8 25 4 0 0,-3-11-3 0 0,2 16 9 0 0,2 0 1 0 0,2 0-1 0 0,1-1 0 0 0,1-1 1 0 0,1 0-1 0 0,1-1 0 0 0,32 40 1 0 0,-40-58 3 0 0,0 0-1 0 0,-1 0 1 0 0,0 1 0 0 0,-1 0 0 0 0,0 0 0 0 0,0 0 0 0 0,3 14-1 0 0,-9-22-2 0 0,0-1-1 0 0,0 0 1 0 0,0 1 0 0 0,-1-1-1 0 0,0 1 1 0 0,1-1-1 0 0,-1 0 1 0 0,0 0-1 0 0,0 1 1 0 0,0-1-1 0 0,0 0 1 0 0,-1 0 0 0 0,1 0-1 0 0,0 0 1 0 0,-1 0-1 0 0,0 0 1 0 0,1-1-1 0 0,-1 1 1 0 0,0 0-1 0 0,0-1 1 0 0,-3 3-1 0 0,-46 29 113 0 0,48-31-116 0 0,-47 25 120 0 0,-1-3-1 0 0,-1-2 0 0 0,-61 16 1 0 0,105-35-281 0 0,-5 1 34 0 0</inkml:trace>
-</inkml:ink>
-</file>
-
-<file path=ppt/ink/ink96.xml><?xml version="1.0" encoding="utf-8"?>
-<inkml:ink xmlns:inkml="http://www.w3.org/2003/InkML">
-  <inkml:definitions>
-    <inkml:context xml:id="ctx0">
-      <inkml:inkSource xml:id="inkSrc0">
-        <inkml:traceFormat>
-          <inkml:channel name="X" type="integer" min="-2.14748E9" max="2.14748E9" units="cm"/>
-          <inkml:channel name="Y" type="integer" min="-2.14748E9" max="2.14748E9" units="cm"/>
-          <inkml:channel name="F" type="integer" max="32767" units="dev"/>
-          <inkml:channel name="OA" type="integer" max="360" units="deg"/>
-          <inkml:channel name="OE" type="integer" max="90" units="deg"/>
-        </inkml:traceFormat>
-        <inkml:channelProperties>
-          <inkml:channelProperty channel="X" name="resolution" value="1000" units="1/cm"/>
-          <inkml:channelProperty channel="Y" name="resolution" value="1000" units="1/cm"/>
-          <inkml:channelProperty channel="F" name="resolution" value="0" units="1/dev"/>
-          <inkml:channelProperty channel="OA" name="resolution" value="1000" units="1/deg"/>
-          <inkml:channelProperty channel="OE" name="resolution" value="1000" units="1/deg"/>
-        </inkml:channelProperties>
-      </inkml:inkSource>
-      <inkml:timestamp xml:id="ts0" timeString="2026-07-09T04:59:21.995"/>
-    </inkml:context>
-    <inkml:brush xml:id="br0">
-      <inkml:brushProperty name="width" value="0.2" units="cm"/>
-      <inkml:brushProperty name="height" value="0.2" units="cm"/>
-      <inkml:brushProperty name="color" value="#FFC114"/>
-    </inkml:brush>
-  </inkml:definitions>
-  <inkml:trace contextRef="#ctx0" brushRef="#br0">5380 712 5300 0 0,'0'0'-140'0'0,"-27"3"1701"0"0,10 3-1518 0 0,0 2 0 0 0,0 0 0 0 0,1 1 1 0 0,0 0-1 0 0,1 2 0 0 0,-23 18 0 0 0,22-15-13 0 0,0-2-1 0 0,-1-1 1 0 0,-32 17 0 0 0,-22 10 191 0 0,47-25-118 0 0,-1 0 1 0 0,-33 12-1 0 0,-9-2 76 0 0,-15 6 51 0 0,-126 27 0 0 0,-97 14-135 0 0,208-50-95 0 0,-159 24 50 0 0,-261-7 124 0 0,316-30 128 0 0,141-4-228 0 0,-8-3-8 0 0,-129-3 193 0 0,-112-34 135 0 0,-172-47 481 0 0,269 43-739 0 0,-13-2-53 0 0,-31 2 149 0 0,163 26 122 0 0,-141-42 0 0 0,-47-55 214 0 0,242 92-501 0 0,0-3 0 0 0,2-1 0 0 0,1-2 0 0 0,1-1 1 0 0,1-2-1 0 0,1-2 0 0 0,-53-63 0 0 0,16 14-73 0 0,-121-105 0 0 0,142 152-14 0 0,8 6 12 0 0,35 25 8 0 0,5 1-2 0 0,-29-20-12 0 0,30 21 8 0 0,-1-1-1 0 0,0 1 0 0 0,1 0 0 0 0,-1-1 1 0 0,0 1-1 0 0,1 0 0 0 0,-1-1 1 0 0,0 1-1 0 0,1 0 0 0 0,-1 0 1 0 0,0 0-1 0 0,0 0 0 0 0,1-1 1 0 0,-1 1-1 0 0,0 0 0 0 0,0 0 1 0 0,1 0-1 0 0,-1 1 0 0 0,0-1 1 0 0,0 0-1 0 0,1 0 0 0 0,-1 0 1 0 0,0 0-1 0 0,0 1 0 0 0,1-1 1 0 0,-1 0-1 0 0,-1 2 0 0 0,-4 19-103 0 0,2-1 96 0 0,-2 11 2 0 0,-3 51-1 0 0,7-54 20 0 0,-1 0 0 0 0,-9 36 0 0 0,10-22 288 0 0,42-264-225 0 0,-27 128-58 0 0,-8 56-40 0 0,9-42-118 0 0,-13 78 123 0 0,-1 1 18 0 0,1 0 0 0 0,-1 0 0 0 0,1 0 0 0 0,0 0 0 0 0,-1 0 0 0 0,1 0 0 0 0,0 0 0 0 0,0 0 1 0 0,0 0-1 0 0,0 0 0 0 0,0 1 0 0 0,0-1 0 0 0,0 0 0 0 0,0 0 0 0 0,2 0 0 0 0,121-12-13 0 0,378-20 27 0 0,-493 32-25 0 0,0 2 0 0 0,0-1-1 0 0,0 1 1 0 0,-1 0 0 0 0,17 6-1 0 0,-21-4 210 0 0</inkml:trace>
 </inkml:ink>
 </file>
 
@@ -3490,7 +2853,7 @@
           <a:p>
             <a:fld id="{CB233BD1-3BA8-448D-9D08-7846095EA517}" type="datetimeFigureOut">
               <a:rPr lang="en-US" smtClean="0"/>
-              <a:t>7/13/2026</a:t>
+              <a:t>9/5/2026</a:t>
             </a:fld>
             <a:endParaRPr lang="en-US"/>
           </a:p>
@@ -3904,7 +3267,7 @@
           <a:p>
             <a:fld id="{6383FAE1-13DE-4511-8C1B-C8AFB720664C}" type="datetimeFigureOut">
               <a:rPr lang="en-US" smtClean="0"/>
-              <a:t>7/13/2026</a:t>
+              <a:t>9/5/2026</a:t>
             </a:fld>
             <a:endParaRPr lang="en-US"/>
           </a:p>
@@ -4102,7 +3465,7 @@
           <a:p>
             <a:fld id="{6383FAE1-13DE-4511-8C1B-C8AFB720664C}" type="datetimeFigureOut">
               <a:rPr lang="en-US" smtClean="0"/>
-              <a:t>7/13/2026</a:t>
+              <a:t>9/5/2026</a:t>
             </a:fld>
             <a:endParaRPr lang="en-US"/>
           </a:p>
@@ -4310,7 +3673,7 @@
           <a:p>
             <a:fld id="{6383FAE1-13DE-4511-8C1B-C8AFB720664C}" type="datetimeFigureOut">
               <a:rPr lang="en-US" smtClean="0"/>
-              <a:t>7/13/2026</a:t>
+              <a:t>9/5/2026</a:t>
             </a:fld>
             <a:endParaRPr lang="en-US"/>
           </a:p>
@@ -4508,7 +3871,7 @@
           <a:p>
             <a:fld id="{6383FAE1-13DE-4511-8C1B-C8AFB720664C}" type="datetimeFigureOut">
               <a:rPr lang="en-US" smtClean="0"/>
-              <a:t>7/13/2026</a:t>
+              <a:t>9/5/2026</a:t>
             </a:fld>
             <a:endParaRPr lang="en-US"/>
           </a:p>
@@ -4783,7 +4146,7 @@
           <a:p>
             <a:fld id="{6383FAE1-13DE-4511-8C1B-C8AFB720664C}" type="datetimeFigureOut">
               <a:rPr lang="en-US" smtClean="0"/>
-              <a:t>7/13/2026</a:t>
+              <a:t>9/5/2026</a:t>
             </a:fld>
             <a:endParaRPr lang="en-US"/>
           </a:p>
@@ -5048,7 +4411,7 @@
           <a:p>
             <a:fld id="{6383FAE1-13DE-4511-8C1B-C8AFB720664C}" type="datetimeFigureOut">
               <a:rPr lang="en-US" smtClean="0"/>
-              <a:t>7/13/2026</a:t>
+              <a:t>9/5/2026</a:t>
             </a:fld>
             <a:endParaRPr lang="en-US"/>
           </a:p>
@@ -5460,7 +4823,7 @@
           <a:p>
             <a:fld id="{6383FAE1-13DE-4511-8C1B-C8AFB720664C}" type="datetimeFigureOut">
               <a:rPr lang="en-US" smtClean="0"/>
-              <a:t>7/13/2026</a:t>
+              <a:t>9/5/2026</a:t>
             </a:fld>
             <a:endParaRPr lang="en-US"/>
           </a:p>
@@ -5601,7 +4964,7 @@
           <a:p>
             <a:fld id="{6383FAE1-13DE-4511-8C1B-C8AFB720664C}" type="datetimeFigureOut">
               <a:rPr lang="en-US" smtClean="0"/>
-              <a:t>7/13/2026</a:t>
+              <a:t>9/5/2026</a:t>
             </a:fld>
             <a:endParaRPr lang="en-US"/>
           </a:p>
@@ -5714,7 +5077,7 @@
           <a:p>
             <a:fld id="{6383FAE1-13DE-4511-8C1B-C8AFB720664C}" type="datetimeFigureOut">
               <a:rPr lang="en-US" smtClean="0"/>
-              <a:t>7/13/2026</a:t>
+              <a:t>9/5/2026</a:t>
             </a:fld>
             <a:endParaRPr lang="en-US"/>
           </a:p>
@@ -6025,7 +5388,7 @@
           <a:p>
             <a:fld id="{6383FAE1-13DE-4511-8C1B-C8AFB720664C}" type="datetimeFigureOut">
               <a:rPr lang="en-US" smtClean="0"/>
-              <a:t>7/13/2026</a:t>
+              <a:t>9/5/2026</a:t>
             </a:fld>
             <a:endParaRPr lang="en-US"/>
           </a:p>
@@ -6316,7 +5679,7 @@
           <a:p>
             <a:fld id="{6383FAE1-13DE-4511-8C1B-C8AFB720664C}" type="datetimeFigureOut">
               <a:rPr lang="en-US" smtClean="0"/>
-              <a:t>7/13/2026</a:t>
+              <a:t>9/5/2026</a:t>
             </a:fld>
             <a:endParaRPr lang="en-US"/>
           </a:p>
@@ -6560,7 +5923,7 @@
           <a:p>
             <a:fld id="{6383FAE1-13DE-4511-8C1B-C8AFB720664C}" type="datetimeFigureOut">
               <a:rPr lang="en-US" smtClean="0"/>
-              <a:t>7/13/2026</a:t>
+              <a:t>9/5/2026</a:t>
             </a:fld>
             <a:endParaRPr lang="en-US"/>
           </a:p>
@@ -8739,7 +8102,7 @@
                   </a:schemeClr>
                 </a:solidFill>
               </a:rPr>
-              <a:t>Another way of looking at agent</a:t>
+              <a:t>Summary</a:t>
             </a:r>
           </a:p>
           <a:p>
@@ -8845,8 +8208,8 @@
         </p:nvSpPr>
         <p:spPr>
           <a:xfrm>
-            <a:off x="123444" y="146304"/>
-            <a:ext cx="10309860" cy="1569660"/>
+            <a:off x="562356" y="1984248"/>
+            <a:ext cx="10309860" cy="923330"/>
           </a:xfrm>
           <a:prstGeom prst="rect">
             <a:avLst/>
@@ -8859,20 +8222,19 @@
           </a:bodyPr>
           <a:lstStyle/>
           <a:p>
-            <a:r>
-              <a:rPr lang="en-US" sz="2400" b="1" dirty="0">
-                <a:solidFill>
-                  <a:schemeClr val="accent6">
-                    <a:lumMod val="60000"/>
-                    <a:lumOff val="40000"/>
-                  </a:schemeClr>
-                </a:solidFill>
-              </a:rPr>
-              <a:t>🪙 Running Example (FinTech)</a:t>
-            </a:r>
-          </a:p>
-          <a:p>
-            <a:endParaRPr lang="en-US" sz="2400" b="1" dirty="0">
+            <a:pPr algn="ctr"/>
+            <a:r>
+              <a:rPr lang="en-US" sz="5400" b="1" dirty="0">
+                <a:solidFill>
+                  <a:schemeClr val="accent6">
+                    <a:lumMod val="60000"/>
+                    <a:lumOff val="40000"/>
+                  </a:schemeClr>
+                </a:solidFill>
+              </a:rPr>
+              <a:t>Example 1 </a:t>
+            </a:r>
+            <a:endParaRPr lang="en-US" sz="5400" dirty="0">
               <a:solidFill>
                 <a:schemeClr val="accent6">
                   <a:lumMod val="60000"/>
@@ -8880,32 +8242,6 @@
                 </a:schemeClr>
               </a:solidFill>
             </a:endParaRPr>
-          </a:p>
-          <a:p>
-            <a:r>
-              <a:rPr lang="en-US" sz="2400" b="1" dirty="0">
-                <a:solidFill>
-                  <a:schemeClr val="accent6">
-                    <a:lumMod val="60000"/>
-                    <a:lumOff val="40000"/>
-                  </a:schemeClr>
-                </a:solidFill>
-              </a:rPr>
-              <a:t>🎯 User Query:</a:t>
-            </a:r>
-          </a:p>
-          <a:p>
-            <a:r>
-              <a:rPr lang="en-US" sz="2400" dirty="0">
-                <a:solidFill>
-                  <a:schemeClr val="accent6">
-                    <a:lumMod val="60000"/>
-                    <a:lumOff val="40000"/>
-                  </a:schemeClr>
-                </a:solidFill>
-              </a:rPr>
-              <a:t>“Analyze my spending this month and tell me if I can invest ₹10,000 in stocks.”</a:t>
-            </a:r>
           </a:p>
         </p:txBody>
       </p:sp>
@@ -8923,6 +8259,120 @@
 </file>
 
 <file path=ppt/slides/slide13.xml><?xml version="1.0" encoding="utf-8"?>
+<p:sld xmlns:a="http://schemas.openxmlformats.org/drawingml/2006/main" xmlns:r="http://schemas.openxmlformats.org/officeDocument/2006/relationships" xmlns:p="http://schemas.openxmlformats.org/presentationml/2006/main">
+  <p:cSld>
+    <p:spTree>
+      <p:nvGrpSpPr>
+        <p:cNvPr id="1" name="">
+          <a:extLst>
+            <a:ext uri="{FF2B5EF4-FFF2-40B4-BE49-F238E27FC236}">
+              <a16:creationId xmlns:a16="http://schemas.microsoft.com/office/drawing/2014/main" id="{CCEFF43F-1997-1C24-7B3F-06916F688677}"/>
+            </a:ext>
+          </a:extLst>
+        </p:cNvPr>
+        <p:cNvGrpSpPr/>
+        <p:nvPr/>
+      </p:nvGrpSpPr>
+      <p:grpSpPr>
+        <a:xfrm>
+          <a:off x="0" y="0"/>
+          <a:ext cx="0" cy="0"/>
+          <a:chOff x="0" y="0"/>
+          <a:chExt cx="0" cy="0"/>
+        </a:xfrm>
+      </p:grpSpPr>
+      <p:sp>
+        <p:nvSpPr>
+          <p:cNvPr id="5" name="TextBox 4">
+            <a:extLst>
+              <a:ext uri="{FF2B5EF4-FFF2-40B4-BE49-F238E27FC236}">
+                <a16:creationId xmlns:a16="http://schemas.microsoft.com/office/drawing/2014/main" id="{9F3C8905-562D-0643-2816-BC33631484CF}"/>
+              </a:ext>
+            </a:extLst>
+          </p:cNvPr>
+          <p:cNvSpPr txBox="1"/>
+          <p:nvPr/>
+        </p:nvSpPr>
+        <p:spPr>
+          <a:xfrm>
+            <a:off x="123444" y="146304"/>
+            <a:ext cx="10309860" cy="1569660"/>
+          </a:xfrm>
+          <a:prstGeom prst="rect">
+            <a:avLst/>
+          </a:prstGeom>
+          <a:noFill/>
+        </p:spPr>
+        <p:txBody>
+          <a:bodyPr wrap="square">
+            <a:spAutoFit/>
+          </a:bodyPr>
+          <a:lstStyle/>
+          <a:p>
+            <a:r>
+              <a:rPr lang="en-US" sz="2400" b="1" dirty="0">
+                <a:solidFill>
+                  <a:schemeClr val="accent6">
+                    <a:lumMod val="60000"/>
+                    <a:lumOff val="40000"/>
+                  </a:schemeClr>
+                </a:solidFill>
+              </a:rPr>
+              <a:t>🪙 Running Example (FinTech)</a:t>
+            </a:r>
+          </a:p>
+          <a:p>
+            <a:endParaRPr lang="en-US" sz="2400" b="1" dirty="0">
+              <a:solidFill>
+                <a:schemeClr val="accent6">
+                  <a:lumMod val="60000"/>
+                  <a:lumOff val="40000"/>
+                </a:schemeClr>
+              </a:solidFill>
+            </a:endParaRPr>
+          </a:p>
+          <a:p>
+            <a:r>
+              <a:rPr lang="en-US" sz="2400" b="1" dirty="0">
+                <a:solidFill>
+                  <a:schemeClr val="accent6">
+                    <a:lumMod val="60000"/>
+                    <a:lumOff val="40000"/>
+                  </a:schemeClr>
+                </a:solidFill>
+              </a:rPr>
+              <a:t>🎯 User Query:</a:t>
+            </a:r>
+          </a:p>
+          <a:p>
+            <a:r>
+              <a:rPr lang="en-US" sz="2400" dirty="0">
+                <a:solidFill>
+                  <a:schemeClr val="accent6">
+                    <a:lumMod val="60000"/>
+                    <a:lumOff val="40000"/>
+                  </a:schemeClr>
+                </a:solidFill>
+              </a:rPr>
+              <a:t>“Analyze my spending this month and tell me if I can invest ₹10,000 in stocks.”</a:t>
+            </a:r>
+          </a:p>
+        </p:txBody>
+      </p:sp>
+    </p:spTree>
+    <p:extLst>
+      <p:ext uri="{BB962C8B-B14F-4D97-AF65-F5344CB8AC3E}">
+        <p14:creationId xmlns:p14="http://schemas.microsoft.com/office/powerpoint/2010/main" val="3228215313"/>
+      </p:ext>
+    </p:extLst>
+  </p:cSld>
+  <p:clrMapOvr>
+    <a:masterClrMapping/>
+  </p:clrMapOvr>
+</p:sld>
+</file>
+
+<file path=ppt/slides/slide14.xml><?xml version="1.0" encoding="utf-8"?>
 <p:sld xmlns:a="http://schemas.openxmlformats.org/drawingml/2006/main" xmlns:r="http://schemas.openxmlformats.org/officeDocument/2006/relationships" xmlns:p="http://schemas.openxmlformats.org/presentationml/2006/main">
   <p:cSld>
     <p:spTree>
@@ -9218,7 +8668,7 @@
 </p:sld>
 </file>
 
-<file path=ppt/slides/slide14.xml><?xml version="1.0" encoding="utf-8"?>
+<file path=ppt/slides/slide15.xml><?xml version="1.0" encoding="utf-8"?>
 <p:sld xmlns:a="http://schemas.openxmlformats.org/drawingml/2006/main" xmlns:r="http://schemas.openxmlformats.org/officeDocument/2006/relationships" xmlns:p="http://schemas.openxmlformats.org/presentationml/2006/main">
   <p:cSld>
     <p:spTree>
@@ -9526,7 +8976,7 @@
 </p:sld>
 </file>
 
-<file path=ppt/slides/slide15.xml><?xml version="1.0" encoding="utf-8"?>
+<file path=ppt/slides/slide16.xml><?xml version="1.0" encoding="utf-8"?>
 <p:sld xmlns:a="http://schemas.openxmlformats.org/drawingml/2006/main" xmlns:r="http://schemas.openxmlformats.org/officeDocument/2006/relationships" xmlns:p="http://schemas.openxmlformats.org/presentationml/2006/main">
   <p:cSld>
     <p:spTree>
@@ -9884,7 +9334,7 @@
 </p:sld>
 </file>
 
-<file path=ppt/slides/slide16.xml><?xml version="1.0" encoding="utf-8"?>
+<file path=ppt/slides/slide17.xml><?xml version="1.0" encoding="utf-8"?>
 <p:sld xmlns:a="http://schemas.openxmlformats.org/drawingml/2006/main" xmlns:r="http://schemas.openxmlformats.org/officeDocument/2006/relationships" xmlns:p="http://schemas.openxmlformats.org/presentationml/2006/main">
   <p:cSld>
     <p:spTree>
@@ -10177,7 +9627,94 @@
 </p:sld>
 </file>
 
-<file path=ppt/slides/slide17.xml><?xml version="1.0" encoding="utf-8"?>
+<file path=ppt/slides/slide18.xml><?xml version="1.0" encoding="utf-8"?>
+<p:sld xmlns:a="http://schemas.openxmlformats.org/drawingml/2006/main" xmlns:r="http://schemas.openxmlformats.org/officeDocument/2006/relationships" xmlns:p="http://schemas.openxmlformats.org/presentationml/2006/main">
+  <p:cSld>
+    <p:spTree>
+      <p:nvGrpSpPr>
+        <p:cNvPr id="1" name="">
+          <a:extLst>
+            <a:ext uri="{FF2B5EF4-FFF2-40B4-BE49-F238E27FC236}">
+              <a16:creationId xmlns:a16="http://schemas.microsoft.com/office/drawing/2014/main" id="{1062CE75-2097-73D3-C724-70714FB4D66A}"/>
+            </a:ext>
+          </a:extLst>
+        </p:cNvPr>
+        <p:cNvGrpSpPr/>
+        <p:nvPr/>
+      </p:nvGrpSpPr>
+      <p:grpSpPr>
+        <a:xfrm>
+          <a:off x="0" y="0"/>
+          <a:ext cx="0" cy="0"/>
+          <a:chOff x="0" y="0"/>
+          <a:chExt cx="0" cy="0"/>
+        </a:xfrm>
+      </p:grpSpPr>
+      <p:sp>
+        <p:nvSpPr>
+          <p:cNvPr id="5" name="TextBox 4">
+            <a:extLst>
+              <a:ext uri="{FF2B5EF4-FFF2-40B4-BE49-F238E27FC236}">
+                <a16:creationId xmlns:a16="http://schemas.microsoft.com/office/drawing/2014/main" id="{1C9E7423-7811-06B4-2FD9-8E108721BD68}"/>
+              </a:ext>
+            </a:extLst>
+          </p:cNvPr>
+          <p:cNvSpPr txBox="1"/>
+          <p:nvPr/>
+        </p:nvSpPr>
+        <p:spPr>
+          <a:xfrm>
+            <a:off x="562356" y="1984248"/>
+            <a:ext cx="10309860" cy="923330"/>
+          </a:xfrm>
+          <a:prstGeom prst="rect">
+            <a:avLst/>
+          </a:prstGeom>
+          <a:noFill/>
+        </p:spPr>
+        <p:txBody>
+          <a:bodyPr wrap="square">
+            <a:spAutoFit/>
+          </a:bodyPr>
+          <a:lstStyle/>
+          <a:p>
+            <a:pPr algn="ctr"/>
+            <a:r>
+              <a:rPr lang="en-US" sz="5400" b="1" dirty="0">
+                <a:solidFill>
+                  <a:schemeClr val="accent6">
+                    <a:lumMod val="60000"/>
+                    <a:lumOff val="40000"/>
+                  </a:schemeClr>
+                </a:solidFill>
+              </a:rPr>
+              <a:t>Example 2 </a:t>
+            </a:r>
+            <a:endParaRPr lang="en-US" sz="5400" dirty="0">
+              <a:solidFill>
+                <a:schemeClr val="accent6">
+                  <a:lumMod val="60000"/>
+                  <a:lumOff val="40000"/>
+                </a:schemeClr>
+              </a:solidFill>
+            </a:endParaRPr>
+          </a:p>
+        </p:txBody>
+      </p:sp>
+    </p:spTree>
+    <p:extLst>
+      <p:ext uri="{BB962C8B-B14F-4D97-AF65-F5344CB8AC3E}">
+        <p14:creationId xmlns:p14="http://schemas.microsoft.com/office/powerpoint/2010/main" val="3513782787"/>
+      </p:ext>
+    </p:extLst>
+  </p:cSld>
+  <p:clrMapOvr>
+    <a:masterClrMapping/>
+  </p:clrMapOvr>
+</p:sld>
+</file>
+
+<file path=ppt/slides/slide19.xml><?xml version="1.0" encoding="utf-8"?>
 <p:sld xmlns:a="http://schemas.openxmlformats.org/drawingml/2006/main" xmlns:r="http://schemas.openxmlformats.org/officeDocument/2006/relationships" xmlns:p="http://schemas.openxmlformats.org/presentationml/2006/main">
   <p:cSld>
     <p:spTree>
@@ -10203,7 +9740,7 @@
         <p:spPr>
           <a:xfrm>
             <a:off x="197050" y="719400"/>
-            <a:ext cx="11797900" cy="3416320"/>
+            <a:ext cx="11797900" cy="3785652"/>
           </a:xfrm>
           <a:prstGeom prst="rect">
             <a:avLst/>
@@ -10253,7 +9790,7 @@
           </a:p>
           <a:p>
             <a:r>
-              <a:rPr lang="en-US" sz="2400" b="1" dirty="0">
+              <a:rPr lang="en-US" sz="2400" b="1" u="sng" dirty="0">
                 <a:solidFill>
                   <a:schemeClr val="accent6">
                     <a:lumMod val="60000"/>
@@ -10263,7 +9800,7 @@
               </a:rPr>
               <a:t>Traditional workflow automation</a:t>
             </a:r>
-            <a:endParaRPr lang="en-US" sz="2400" dirty="0">
+            <a:endParaRPr lang="en-US" sz="2400" u="sng" dirty="0">
               <a:solidFill>
                 <a:schemeClr val="accent6">
                   <a:lumMod val="60000"/>
@@ -10282,7 +9819,55 @@
                   </a:schemeClr>
                 </a:solidFill>
               </a:rPr>
-              <a:t>A traditional automation system follows a predetermined sequence: it can take inputs such as dates, location, and budget, and make calls to predefined APIs in a fixed order. However, if any unexpected situations arise, such as flights being sold out, or the specified hotels being unavailable, it cannot adapt.</a:t>
+              <a:t>A traditional automation system follows a predetermined sequence: </a:t>
+            </a:r>
+          </a:p>
+          <a:p>
+            <a:r>
+              <a:rPr lang="en-US" sz="2400" dirty="0">
+                <a:solidFill>
+                  <a:schemeClr val="accent6">
+                    <a:lumMod val="60000"/>
+                    <a:lumOff val="40000"/>
+                  </a:schemeClr>
+                </a:solidFill>
+              </a:rPr>
+              <a:t>It takes inputs such as </a:t>
+            </a:r>
+            <a:r>
+              <a:rPr lang="en-US" sz="2400" b="1" i="1" dirty="0">
+                <a:solidFill>
+                  <a:schemeClr val="accent6">
+                    <a:lumMod val="60000"/>
+                    <a:lumOff val="40000"/>
+                  </a:schemeClr>
+                </a:solidFill>
+              </a:rPr>
+              <a:t>dates, location, and budget</a:t>
+            </a:r>
+            <a:r>
+              <a:rPr lang="en-US" sz="2400" dirty="0">
+                <a:solidFill>
+                  <a:schemeClr val="accent6">
+                    <a:lumMod val="60000"/>
+                    <a:lumOff val="40000"/>
+                  </a:schemeClr>
+                </a:solidFill>
+              </a:rPr>
+              <a:t>, and make calls to predefined APIs in a fixed order. </a:t>
+            </a:r>
+          </a:p>
+          <a:p>
+            <a:r>
+              <a:rPr lang="en-US" sz="2400" dirty="0">
+                <a:solidFill>
+                  <a:schemeClr val="accent6">
+                    <a:lumMod val="60000"/>
+                    <a:lumOff val="40000"/>
+                  </a:schemeClr>
+                </a:solidFill>
+              </a:rPr>
+              <a:t>However, if any unexpected situations arise, such as flights being sold out, or the specified hotels being unavailable, it cannot adapt.</a:t>
             </a:r>
           </a:p>
         </p:txBody>
@@ -10762,7 +10347,7 @@
                   </a:schemeClr>
                 </a:solidFill>
               </a:rPr>
-              <a:t>Example: booking vacations</a:t>
+              <a:t>Example: Booking vacations</a:t>
             </a:r>
             <a:endParaRPr lang="en-US" sz="2400" dirty="0">
               <a:solidFill>
@@ -10788,7 +10373,453 @@
 </p:sld>
 </file>
 
-<file path=ppt/slides/slide18.xml><?xml version="1.0" encoding="utf-8"?>
+<file path=ppt/slides/slide2.xml><?xml version="1.0" encoding="utf-8"?>
+<p:sld xmlns:a="http://schemas.openxmlformats.org/drawingml/2006/main" xmlns:r="http://schemas.openxmlformats.org/officeDocument/2006/relationships" xmlns:p="http://schemas.openxmlformats.org/presentationml/2006/main">
+  <p:cSld>
+    <p:spTree>
+      <p:nvGrpSpPr>
+        <p:cNvPr id="1" name="">
+          <a:extLst>
+            <a:ext uri="{FF2B5EF4-FFF2-40B4-BE49-F238E27FC236}">
+              <a16:creationId xmlns:a16="http://schemas.microsoft.com/office/drawing/2014/main" id="{529EBDA7-B44E-B824-B04A-1C6D1FB40ED7}"/>
+            </a:ext>
+          </a:extLst>
+        </p:cNvPr>
+        <p:cNvGrpSpPr/>
+        <p:nvPr/>
+      </p:nvGrpSpPr>
+      <p:grpSpPr>
+        <a:xfrm>
+          <a:off x="0" y="0"/>
+          <a:ext cx="0" cy="0"/>
+          <a:chOff x="0" y="0"/>
+          <a:chExt cx="0" cy="0"/>
+        </a:xfrm>
+      </p:grpSpPr>
+      <p:sp>
+        <p:nvSpPr>
+          <p:cNvPr id="9" name="TextBox 8">
+            <a:extLst>
+              <a:ext uri="{FF2B5EF4-FFF2-40B4-BE49-F238E27FC236}">
+                <a16:creationId xmlns:a16="http://schemas.microsoft.com/office/drawing/2014/main" id="{E018E7A2-ACBA-1394-8855-0E8750AA2C1F}"/>
+              </a:ext>
+            </a:extLst>
+          </p:cNvPr>
+          <p:cNvSpPr txBox="1"/>
+          <p:nvPr/>
+        </p:nvSpPr>
+        <p:spPr>
+          <a:xfrm>
+            <a:off x="292608" y="528288"/>
+            <a:ext cx="11899392" cy="2677656"/>
+          </a:xfrm>
+          <a:prstGeom prst="rect">
+            <a:avLst/>
+          </a:prstGeom>
+          <a:noFill/>
+        </p:spPr>
+        <p:txBody>
+          <a:bodyPr wrap="square">
+            <a:spAutoFit/>
+          </a:bodyPr>
+          <a:lstStyle/>
+          <a:p>
+            <a:pPr>
+              <a:buNone/>
+            </a:pPr>
+            <a:r>
+              <a:rPr lang="en-US" sz="2400" dirty="0">
+                <a:solidFill>
+                  <a:schemeClr val="accent6">
+                    <a:lumMod val="60000"/>
+                    <a:lumOff val="40000"/>
+                  </a:schemeClr>
+                </a:solidFill>
+              </a:rPr>
+              <a:t>An </a:t>
+            </a:r>
+            <a:r>
+              <a:rPr lang="en-US" sz="2400" b="1" dirty="0">
+                <a:solidFill>
+                  <a:schemeClr val="accent6">
+                    <a:lumMod val="60000"/>
+                    <a:lumOff val="40000"/>
+                  </a:schemeClr>
+                </a:solidFill>
+              </a:rPr>
+              <a:t>AI Agent</a:t>
+            </a:r>
+            <a:r>
+              <a:rPr lang="en-US" sz="2400" dirty="0">
+                <a:solidFill>
+                  <a:schemeClr val="accent6">
+                    <a:lumMod val="60000"/>
+                    <a:lumOff val="40000"/>
+                  </a:schemeClr>
+                </a:solidFill>
+              </a:rPr>
+              <a:t> is an autonomous software system designed to </a:t>
+            </a:r>
+          </a:p>
+          <a:p>
+            <a:pPr marL="457200" indent="-457200">
+              <a:buFont typeface="+mj-lt"/>
+              <a:buAutoNum type="arabicPeriod"/>
+            </a:pPr>
+            <a:r>
+              <a:rPr lang="en-US" sz="2400" dirty="0">
+                <a:solidFill>
+                  <a:schemeClr val="accent6">
+                    <a:lumMod val="60000"/>
+                    <a:lumOff val="40000"/>
+                  </a:schemeClr>
+                </a:solidFill>
+              </a:rPr>
+              <a:t>perceive its environment, </a:t>
+            </a:r>
+          </a:p>
+          <a:p>
+            <a:pPr marL="457200" indent="-457200">
+              <a:buFont typeface="+mj-lt"/>
+              <a:buAutoNum type="arabicPeriod"/>
+            </a:pPr>
+            <a:r>
+              <a:rPr lang="en-US" sz="2400" dirty="0">
+                <a:solidFill>
+                  <a:schemeClr val="accent6">
+                    <a:lumMod val="60000"/>
+                    <a:lumOff val="40000"/>
+                  </a:schemeClr>
+                </a:solidFill>
+              </a:rPr>
+              <a:t>make independent decisions, and </a:t>
+            </a:r>
+          </a:p>
+          <a:p>
+            <a:pPr marL="457200" indent="-457200">
+              <a:buFont typeface="+mj-lt"/>
+              <a:buAutoNum type="arabicPeriod"/>
+            </a:pPr>
+            <a:r>
+              <a:rPr lang="en-US" sz="2400" dirty="0">
+                <a:solidFill>
+                  <a:schemeClr val="accent6">
+                    <a:lumMod val="60000"/>
+                    <a:lumOff val="40000"/>
+                  </a:schemeClr>
+                </a:solidFill>
+              </a:rPr>
+              <a:t>use tools to achieve a specific goal.</a:t>
+            </a:r>
+          </a:p>
+          <a:p>
+            <a:pPr>
+              <a:buNone/>
+            </a:pPr>
+            <a:r>
+              <a:rPr lang="en-US" sz="2400" dirty="0">
+                <a:solidFill>
+                  <a:schemeClr val="accent6">
+                    <a:lumMod val="60000"/>
+                    <a:lumOff val="40000"/>
+                  </a:schemeClr>
+                </a:solidFill>
+              </a:rPr>
+              <a:t>AI agent operates on a </a:t>
+            </a:r>
+            <a:r>
+              <a:rPr lang="en-US" sz="2400" b="1" dirty="0">
+                <a:solidFill>
+                  <a:schemeClr val="accent6">
+                    <a:lumMod val="60000"/>
+                    <a:lumOff val="40000"/>
+                  </a:schemeClr>
+                </a:solidFill>
+              </a:rPr>
+              <a:t>"Think-Plan-Act" loop</a:t>
+            </a:r>
+            <a:r>
+              <a:rPr lang="en-US" sz="2400" dirty="0">
+                <a:solidFill>
+                  <a:schemeClr val="accent6">
+                    <a:lumMod val="60000"/>
+                    <a:lumOff val="40000"/>
+                  </a:schemeClr>
+                </a:solidFill>
+              </a:rPr>
+              <a:t>.</a:t>
+            </a:r>
+          </a:p>
+          <a:p>
+            <a:pPr>
+              <a:buNone/>
+            </a:pPr>
+            <a:endParaRPr lang="en-US" sz="2400" dirty="0">
+              <a:solidFill>
+                <a:schemeClr val="accent6">
+                  <a:lumMod val="60000"/>
+                  <a:lumOff val="40000"/>
+                </a:schemeClr>
+              </a:solidFill>
+            </a:endParaRPr>
+          </a:p>
+          <a:p>
+            <a:pPr>
+              <a:buNone/>
+            </a:pPr>
+            <a:r>
+              <a:rPr lang="en-US" sz="2400" dirty="0">
+                <a:solidFill>
+                  <a:schemeClr val="accent6">
+                    <a:lumMod val="60000"/>
+                    <a:lumOff val="40000"/>
+                  </a:schemeClr>
+                </a:solidFill>
+              </a:rPr>
+              <a:t>Architecture of a single AI agent</a:t>
+            </a:r>
+          </a:p>
+        </p:txBody>
+      </p:sp>
+      <p:sp>
+        <p:nvSpPr>
+          <p:cNvPr id="2" name="Rectangle 1">
+            <a:extLst>
+              <a:ext uri="{FF2B5EF4-FFF2-40B4-BE49-F238E27FC236}">
+                <a16:creationId xmlns:a16="http://schemas.microsoft.com/office/drawing/2014/main" id="{5181AFBC-CFD4-FAE6-78FB-5444EC7382A7}"/>
+              </a:ext>
+            </a:extLst>
+          </p:cNvPr>
+          <p:cNvSpPr/>
+          <p:nvPr/>
+        </p:nvSpPr>
+        <p:spPr>
+          <a:xfrm>
+            <a:off x="2935224" y="3429000"/>
+            <a:ext cx="5266944" cy="2705424"/>
+          </a:xfrm>
+          <a:prstGeom prst="rect">
+            <a:avLst/>
+          </a:prstGeom>
+        </p:spPr>
+        <p:style>
+          <a:lnRef idx="2">
+            <a:schemeClr val="accent1">
+              <a:shade val="15000"/>
+            </a:schemeClr>
+          </a:lnRef>
+          <a:fillRef idx="1">
+            <a:schemeClr val="accent1"/>
+          </a:fillRef>
+          <a:effectRef idx="0">
+            <a:schemeClr val="accent1"/>
+          </a:effectRef>
+          <a:fontRef idx="minor">
+            <a:schemeClr val="lt1"/>
+          </a:fontRef>
+        </p:style>
+        <p:txBody>
+          <a:bodyPr rtlCol="0" anchor="t"/>
+          <a:lstStyle/>
+          <a:p>
+            <a:pPr algn="ctr"/>
+            <a:r>
+              <a:rPr lang="en-US" dirty="0"/>
+              <a:t>AI Agent</a:t>
+            </a:r>
+          </a:p>
+        </p:txBody>
+      </p:sp>
+      <p:sp>
+        <p:nvSpPr>
+          <p:cNvPr id="3" name="Oval 2">
+            <a:extLst>
+              <a:ext uri="{FF2B5EF4-FFF2-40B4-BE49-F238E27FC236}">
+                <a16:creationId xmlns:a16="http://schemas.microsoft.com/office/drawing/2014/main" id="{18C7C3BF-7B99-7282-7262-4AC206BD3DAC}"/>
+              </a:ext>
+            </a:extLst>
+          </p:cNvPr>
+          <p:cNvSpPr/>
+          <p:nvPr/>
+        </p:nvSpPr>
+        <p:spPr>
+          <a:xfrm>
+            <a:off x="3065781" y="4872552"/>
+            <a:ext cx="966724" cy="732120"/>
+          </a:xfrm>
+          <a:prstGeom prst="ellipse">
+            <a:avLst/>
+          </a:prstGeom>
+          <a:solidFill>
+            <a:schemeClr val="accent2">
+              <a:lumMod val="75000"/>
+            </a:schemeClr>
+          </a:solidFill>
+        </p:spPr>
+        <p:style>
+          <a:lnRef idx="2">
+            <a:schemeClr val="accent1">
+              <a:shade val="15000"/>
+            </a:schemeClr>
+          </a:lnRef>
+          <a:fillRef idx="1">
+            <a:schemeClr val="accent1"/>
+          </a:fillRef>
+          <a:effectRef idx="0">
+            <a:schemeClr val="accent1"/>
+          </a:effectRef>
+          <a:fontRef idx="minor">
+            <a:schemeClr val="lt1"/>
+          </a:fontRef>
+        </p:style>
+        <p:txBody>
+          <a:bodyPr rtlCol="0" anchor="ctr"/>
+          <a:lstStyle/>
+          <a:p>
+            <a:pPr algn="ctr"/>
+            <a:r>
+              <a:rPr lang="en-US" dirty="0"/>
+              <a:t>LLM</a:t>
+            </a:r>
+          </a:p>
+        </p:txBody>
+      </p:sp>
+      <p:sp>
+        <p:nvSpPr>
+          <p:cNvPr id="15" name="Oval 14">
+            <a:extLst>
+              <a:ext uri="{FF2B5EF4-FFF2-40B4-BE49-F238E27FC236}">
+                <a16:creationId xmlns:a16="http://schemas.microsoft.com/office/drawing/2014/main" id="{7EFE5BEB-850F-7F50-6FE1-0696184AF3CE}"/>
+              </a:ext>
+            </a:extLst>
+          </p:cNvPr>
+          <p:cNvSpPr/>
+          <p:nvPr/>
+        </p:nvSpPr>
+        <p:spPr>
+          <a:xfrm>
+            <a:off x="5954522" y="4695326"/>
+            <a:ext cx="2051812" cy="1216452"/>
+          </a:xfrm>
+          <a:prstGeom prst="ellipse">
+            <a:avLst/>
+          </a:prstGeom>
+          <a:solidFill>
+            <a:schemeClr val="accent2">
+              <a:lumMod val="75000"/>
+            </a:schemeClr>
+          </a:solidFill>
+        </p:spPr>
+        <p:style>
+          <a:lnRef idx="2">
+            <a:schemeClr val="accent1">
+              <a:shade val="15000"/>
+            </a:schemeClr>
+          </a:lnRef>
+          <a:fillRef idx="1">
+            <a:schemeClr val="accent1"/>
+          </a:fillRef>
+          <a:effectRef idx="0">
+            <a:schemeClr val="accent1"/>
+          </a:effectRef>
+          <a:fontRef idx="minor">
+            <a:schemeClr val="lt1"/>
+          </a:fontRef>
+        </p:style>
+        <p:txBody>
+          <a:bodyPr rtlCol="0" anchor="ctr"/>
+          <a:lstStyle/>
+          <a:p>
+            <a:pPr algn="ctr"/>
+            <a:r>
+              <a:rPr lang="en-US" dirty="0"/>
+              <a:t>Tools:</a:t>
+            </a:r>
+          </a:p>
+          <a:p>
+            <a:pPr algn="ctr"/>
+            <a:r>
+              <a:rPr lang="en-US" dirty="0"/>
+              <a:t>Web-search,</a:t>
+            </a:r>
+          </a:p>
+          <a:p>
+            <a:pPr algn="ctr"/>
+            <a:r>
+              <a:rPr lang="en-US" dirty="0"/>
+              <a:t>Calculator, etc.</a:t>
+            </a:r>
+          </a:p>
+        </p:txBody>
+      </p:sp>
+      <p:sp>
+        <p:nvSpPr>
+          <p:cNvPr id="17" name="Oval 16">
+            <a:extLst>
+              <a:ext uri="{FF2B5EF4-FFF2-40B4-BE49-F238E27FC236}">
+                <a16:creationId xmlns:a16="http://schemas.microsoft.com/office/drawing/2014/main" id="{CFF36849-3913-0948-3394-AC539C130CB3}"/>
+              </a:ext>
+            </a:extLst>
+          </p:cNvPr>
+          <p:cNvSpPr/>
+          <p:nvPr/>
+        </p:nvSpPr>
+        <p:spPr>
+          <a:xfrm>
+            <a:off x="4230878" y="4908227"/>
+            <a:ext cx="1527810" cy="732120"/>
+          </a:xfrm>
+          <a:prstGeom prst="ellipse">
+            <a:avLst/>
+          </a:prstGeom>
+          <a:solidFill>
+            <a:schemeClr val="accent2">
+              <a:lumMod val="75000"/>
+            </a:schemeClr>
+          </a:solidFill>
+        </p:spPr>
+        <p:style>
+          <a:lnRef idx="2">
+            <a:schemeClr val="accent1">
+              <a:shade val="15000"/>
+            </a:schemeClr>
+          </a:lnRef>
+          <a:fillRef idx="1">
+            <a:schemeClr val="accent1"/>
+          </a:fillRef>
+          <a:effectRef idx="0">
+            <a:schemeClr val="accent1"/>
+          </a:effectRef>
+          <a:fontRef idx="minor">
+            <a:schemeClr val="lt1"/>
+          </a:fontRef>
+        </p:style>
+        <p:txBody>
+          <a:bodyPr rtlCol="0" anchor="ctr"/>
+          <a:lstStyle/>
+          <a:p>
+            <a:pPr algn="ctr"/>
+            <a:r>
+              <a:rPr lang="en-US" dirty="0"/>
+              <a:t>Memory</a:t>
+            </a:r>
+          </a:p>
+        </p:txBody>
+      </p:sp>
+    </p:spTree>
+    <p:extLst>
+      <p:ext uri="{BB962C8B-B14F-4D97-AF65-F5344CB8AC3E}">
+        <p14:creationId xmlns:p14="http://schemas.microsoft.com/office/powerpoint/2010/main" val="3632060079"/>
+      </p:ext>
+    </p:extLst>
+  </p:cSld>
+  <p:clrMapOvr>
+    <a:masterClrMapping/>
+  </p:clrMapOvr>
+</p:sld>
+</file>
+
+<file path=ppt/slides/slide20.xml><?xml version="1.0" encoding="utf-8"?>
 <p:sld xmlns:a="http://schemas.openxmlformats.org/drawingml/2006/main" xmlns:r="http://schemas.openxmlformats.org/officeDocument/2006/relationships" xmlns:p="http://schemas.openxmlformats.org/presentationml/2006/main">
   <p:cSld>
     <p:spTree>
@@ -10925,7 +10956,7 @@
                   </a:schemeClr>
                 </a:solidFill>
               </a:rPr>
-              <a:t>Example: booking vacations</a:t>
+              <a:t>Example: Booking vacations</a:t>
             </a:r>
             <a:endParaRPr lang="en-US" sz="2400" dirty="0">
               <a:solidFill>
@@ -12952,7 +12983,7 @@
 </p:sld>
 </file>
 
-<file path=ppt/slides/slide19.xml><?xml version="1.0" encoding="utf-8"?>
+<file path=ppt/slides/slide21.xml><?xml version="1.0" encoding="utf-8"?>
 <p:sld xmlns:a="http://schemas.openxmlformats.org/drawingml/2006/main" xmlns:r="http://schemas.openxmlformats.org/officeDocument/2006/relationships" xmlns:p="http://schemas.openxmlformats.org/presentationml/2006/main">
   <p:cSld>
     <p:spTree>
@@ -13308,7 +13339,7 @@
 </p:sld>
 </file>
 
-<file path=ppt/slides/slide2.xml><?xml version="1.0" encoding="utf-8"?>
+<file path=ppt/slides/slide22.xml><?xml version="1.0" encoding="utf-8"?>
 <p:sld xmlns:a="http://schemas.openxmlformats.org/drawingml/2006/main" xmlns:r="http://schemas.openxmlformats.org/officeDocument/2006/relationships" xmlns:p="http://schemas.openxmlformats.org/presentationml/2006/main">
   <p:cSld>
     <p:spTree>
@@ -13316,7 +13347,7 @@
         <p:cNvPr id="1" name="">
           <a:extLst>
             <a:ext uri="{FF2B5EF4-FFF2-40B4-BE49-F238E27FC236}">
-              <a16:creationId xmlns:a16="http://schemas.microsoft.com/office/drawing/2014/main" id="{529EBDA7-B44E-B824-B04A-1C6D1FB40ED7}"/>
+              <a16:creationId xmlns:a16="http://schemas.microsoft.com/office/drawing/2014/main" id="{850B02FC-43FF-B01F-7F4A-DA127C794EEB}"/>
             </a:ext>
           </a:extLst>
         </p:cNvPr>
@@ -13333,10 +13364,10 @@
       </p:grpSpPr>
       <p:sp>
         <p:nvSpPr>
-          <p:cNvPr id="9" name="TextBox 8">
+          <p:cNvPr id="5" name="TextBox 4">
             <a:extLst>
               <a:ext uri="{FF2B5EF4-FFF2-40B4-BE49-F238E27FC236}">
-                <a16:creationId xmlns:a16="http://schemas.microsoft.com/office/drawing/2014/main" id="{E018E7A2-ACBA-1394-8855-0E8750AA2C1F}"/>
+                <a16:creationId xmlns:a16="http://schemas.microsoft.com/office/drawing/2014/main" id="{92BFCB20-0CE5-0BC5-4B11-59C01F10AC95}"/>
               </a:ext>
             </a:extLst>
           </p:cNvPr>
@@ -13345,8 +13376,8 @@
         </p:nvSpPr>
         <p:spPr>
           <a:xfrm>
-            <a:off x="292608" y="528288"/>
-            <a:ext cx="11899392" cy="2677656"/>
+            <a:off x="562356" y="1984248"/>
+            <a:ext cx="10309860" cy="923330"/>
           </a:xfrm>
           <a:prstGeom prst="rect">
             <a:avLst/>
@@ -13359,137 +13390,19 @@
           </a:bodyPr>
           <a:lstStyle/>
           <a:p>
-            <a:pPr>
-              <a:buNone/>
-            </a:pPr>
-            <a:r>
-              <a:rPr lang="en-US" sz="2400" dirty="0">
-                <a:solidFill>
-                  <a:schemeClr val="accent6">
-                    <a:lumMod val="60000"/>
-                    <a:lumOff val="40000"/>
-                  </a:schemeClr>
-                </a:solidFill>
-              </a:rPr>
-              <a:t>An </a:t>
-            </a:r>
-            <a:r>
-              <a:rPr lang="en-US" sz="2400" b="1" dirty="0">
-                <a:solidFill>
-                  <a:schemeClr val="accent6">
-                    <a:lumMod val="60000"/>
-                    <a:lumOff val="40000"/>
-                  </a:schemeClr>
-                </a:solidFill>
-              </a:rPr>
-              <a:t>AI Agent</a:t>
-            </a:r>
-            <a:r>
-              <a:rPr lang="en-US" sz="2400" dirty="0">
-                <a:solidFill>
-                  <a:schemeClr val="accent6">
-                    <a:lumMod val="60000"/>
-                    <a:lumOff val="40000"/>
-                  </a:schemeClr>
-                </a:solidFill>
-              </a:rPr>
-              <a:t> is an autonomous software system designed to </a:t>
-            </a:r>
-          </a:p>
-          <a:p>
-            <a:pPr marL="342900" indent="-342900">
-              <a:buFont typeface="Arial" panose="020B0604020202020204" pitchFamily="34" charset="0"/>
-              <a:buChar char="•"/>
-            </a:pPr>
-            <a:r>
-              <a:rPr lang="en-US" sz="2400" dirty="0">
-                <a:solidFill>
-                  <a:schemeClr val="accent6">
-                    <a:lumMod val="60000"/>
-                    <a:lumOff val="40000"/>
-                  </a:schemeClr>
-                </a:solidFill>
-              </a:rPr>
-              <a:t>perceive its environment, </a:t>
-            </a:r>
-          </a:p>
-          <a:p>
-            <a:pPr marL="342900" indent="-342900">
-              <a:buFont typeface="Arial" panose="020B0604020202020204" pitchFamily="34" charset="0"/>
-              <a:buChar char="•"/>
-            </a:pPr>
-            <a:r>
-              <a:rPr lang="en-US" sz="2400" dirty="0">
-                <a:solidFill>
-                  <a:schemeClr val="accent6">
-                    <a:lumMod val="60000"/>
-                    <a:lumOff val="40000"/>
-                  </a:schemeClr>
-                </a:solidFill>
-              </a:rPr>
-              <a:t>make independent decisions, and </a:t>
-            </a:r>
-          </a:p>
-          <a:p>
-            <a:pPr marL="342900" indent="-342900">
-              <a:buFont typeface="Arial" panose="020B0604020202020204" pitchFamily="34" charset="0"/>
-              <a:buChar char="•"/>
-            </a:pPr>
-            <a:r>
-              <a:rPr lang="en-US" sz="2400" dirty="0">
-                <a:solidFill>
-                  <a:schemeClr val="accent6">
-                    <a:lumMod val="60000"/>
-                    <a:lumOff val="40000"/>
-                  </a:schemeClr>
-                </a:solidFill>
-              </a:rPr>
-              <a:t>use tools to achieve a specific goal.</a:t>
-            </a:r>
-          </a:p>
-          <a:p>
-            <a:pPr>
-              <a:buNone/>
-            </a:pPr>
-            <a:r>
-              <a:rPr lang="en-US" sz="2400" dirty="0">
-                <a:solidFill>
-                  <a:schemeClr val="accent6">
-                    <a:lumMod val="60000"/>
-                    <a:lumOff val="40000"/>
-                  </a:schemeClr>
-                </a:solidFill>
-              </a:rPr>
-              <a:t>AI agent operates on a </a:t>
-            </a:r>
-            <a:r>
-              <a:rPr lang="en-US" sz="2400" b="1" dirty="0">
-                <a:solidFill>
-                  <a:schemeClr val="accent6">
-                    <a:lumMod val="60000"/>
-                    <a:lumOff val="40000"/>
-                  </a:schemeClr>
-                </a:solidFill>
-              </a:rPr>
-              <a:t>"Think-Plan-Act" loop</a:t>
-            </a:r>
-            <a:r>
-              <a:rPr lang="en-US" sz="2400" dirty="0">
-                <a:solidFill>
-                  <a:schemeClr val="accent6">
-                    <a:lumMod val="60000"/>
-                    <a:lumOff val="40000"/>
-                  </a:schemeClr>
-                </a:solidFill>
-              </a:rPr>
-              <a:t>.</a:t>
-            </a:r>
-          </a:p>
-          <a:p>
-            <a:pPr>
-              <a:buNone/>
-            </a:pPr>
-            <a:endParaRPr lang="en-US" sz="2400" dirty="0">
+            <a:pPr algn="ctr"/>
+            <a:r>
+              <a:rPr lang="en-US" sz="5400" b="1" dirty="0">
+                <a:solidFill>
+                  <a:schemeClr val="accent6">
+                    <a:lumMod val="60000"/>
+                    <a:lumOff val="40000"/>
+                  </a:schemeClr>
+                </a:solidFill>
+              </a:rPr>
+              <a:t>Some More Examples</a:t>
+            </a:r>
+            <a:endParaRPr lang="en-US" sz="5400" dirty="0">
               <a:solidFill>
                 <a:schemeClr val="accent6">
                   <a:lumMod val="60000"/>
@@ -13498,253 +13411,12 @@
               </a:solidFill>
             </a:endParaRPr>
           </a:p>
-          <a:p>
-            <a:pPr>
-              <a:buNone/>
-            </a:pPr>
-            <a:r>
-              <a:rPr lang="en-US" sz="2400" dirty="0">
-                <a:solidFill>
-                  <a:schemeClr val="accent6">
-                    <a:lumMod val="60000"/>
-                    <a:lumOff val="40000"/>
-                  </a:schemeClr>
-                </a:solidFill>
-              </a:rPr>
-              <a:t>Architecture of a single AI agent</a:t>
-            </a:r>
-          </a:p>
-        </p:txBody>
-      </p:sp>
-      <p:sp>
-        <p:nvSpPr>
-          <p:cNvPr id="2" name="Rectangle 1">
-            <a:extLst>
-              <a:ext uri="{FF2B5EF4-FFF2-40B4-BE49-F238E27FC236}">
-                <a16:creationId xmlns:a16="http://schemas.microsoft.com/office/drawing/2014/main" id="{5181AFBC-CFD4-FAE6-78FB-5444EC7382A7}"/>
-              </a:ext>
-            </a:extLst>
-          </p:cNvPr>
-          <p:cNvSpPr/>
-          <p:nvPr/>
-        </p:nvSpPr>
-        <p:spPr>
-          <a:xfrm>
-            <a:off x="2935224" y="3429000"/>
-            <a:ext cx="5266944" cy="2705424"/>
-          </a:xfrm>
-          <a:prstGeom prst="rect">
-            <a:avLst/>
-          </a:prstGeom>
-        </p:spPr>
-        <p:style>
-          <a:lnRef idx="2">
-            <a:schemeClr val="accent1">
-              <a:shade val="15000"/>
-            </a:schemeClr>
-          </a:lnRef>
-          <a:fillRef idx="1">
-            <a:schemeClr val="accent1"/>
-          </a:fillRef>
-          <a:effectRef idx="0">
-            <a:schemeClr val="accent1"/>
-          </a:effectRef>
-          <a:fontRef idx="minor">
-            <a:schemeClr val="lt1"/>
-          </a:fontRef>
-        </p:style>
-        <p:txBody>
-          <a:bodyPr rtlCol="0" anchor="t"/>
-          <a:lstStyle/>
-          <a:p>
-            <a:pPr algn="ctr"/>
-            <a:r>
-              <a:rPr lang="en-US" dirty="0"/>
-              <a:t>AI Agent</a:t>
-            </a:r>
-          </a:p>
-        </p:txBody>
-      </p:sp>
-      <p:sp>
-        <p:nvSpPr>
-          <p:cNvPr id="3" name="Oval 2">
-            <a:extLst>
-              <a:ext uri="{FF2B5EF4-FFF2-40B4-BE49-F238E27FC236}">
-                <a16:creationId xmlns:a16="http://schemas.microsoft.com/office/drawing/2014/main" id="{18C7C3BF-7B99-7282-7262-4AC206BD3DAC}"/>
-              </a:ext>
-            </a:extLst>
-          </p:cNvPr>
-          <p:cNvSpPr/>
-          <p:nvPr/>
-        </p:nvSpPr>
-        <p:spPr>
-          <a:xfrm>
-            <a:off x="3065781" y="4872552"/>
-            <a:ext cx="966724" cy="732120"/>
-          </a:xfrm>
-          <a:prstGeom prst="ellipse">
-            <a:avLst/>
-          </a:prstGeom>
-          <a:solidFill>
-            <a:schemeClr val="accent2">
-              <a:lumMod val="75000"/>
-            </a:schemeClr>
-          </a:solidFill>
-        </p:spPr>
-        <p:style>
-          <a:lnRef idx="2">
-            <a:schemeClr val="accent1">
-              <a:shade val="15000"/>
-            </a:schemeClr>
-          </a:lnRef>
-          <a:fillRef idx="1">
-            <a:schemeClr val="accent1"/>
-          </a:fillRef>
-          <a:effectRef idx="0">
-            <a:schemeClr val="accent1"/>
-          </a:effectRef>
-          <a:fontRef idx="minor">
-            <a:schemeClr val="lt1"/>
-          </a:fontRef>
-        </p:style>
-        <p:txBody>
-          <a:bodyPr rtlCol="0" anchor="ctr"/>
-          <a:lstStyle/>
-          <a:p>
-            <a:pPr algn="ctr"/>
-            <a:r>
-              <a:rPr lang="en-US" dirty="0"/>
-              <a:t>LLM</a:t>
-            </a:r>
-          </a:p>
-        </p:txBody>
-      </p:sp>
-      <p:sp>
-        <p:nvSpPr>
-          <p:cNvPr id="15" name="Oval 14">
-            <a:extLst>
-              <a:ext uri="{FF2B5EF4-FFF2-40B4-BE49-F238E27FC236}">
-                <a16:creationId xmlns:a16="http://schemas.microsoft.com/office/drawing/2014/main" id="{7EFE5BEB-850F-7F50-6FE1-0696184AF3CE}"/>
-              </a:ext>
-            </a:extLst>
-          </p:cNvPr>
-          <p:cNvSpPr/>
-          <p:nvPr/>
-        </p:nvSpPr>
-        <p:spPr>
-          <a:xfrm>
-            <a:off x="5954522" y="4695326"/>
-            <a:ext cx="2051812" cy="1216452"/>
-          </a:xfrm>
-          <a:prstGeom prst="ellipse">
-            <a:avLst/>
-          </a:prstGeom>
-          <a:solidFill>
-            <a:schemeClr val="accent2">
-              <a:lumMod val="75000"/>
-            </a:schemeClr>
-          </a:solidFill>
-        </p:spPr>
-        <p:style>
-          <a:lnRef idx="2">
-            <a:schemeClr val="accent1">
-              <a:shade val="15000"/>
-            </a:schemeClr>
-          </a:lnRef>
-          <a:fillRef idx="1">
-            <a:schemeClr val="accent1"/>
-          </a:fillRef>
-          <a:effectRef idx="0">
-            <a:schemeClr val="accent1"/>
-          </a:effectRef>
-          <a:fontRef idx="minor">
-            <a:schemeClr val="lt1"/>
-          </a:fontRef>
-        </p:style>
-        <p:txBody>
-          <a:bodyPr rtlCol="0" anchor="ctr"/>
-          <a:lstStyle/>
-          <a:p>
-            <a:pPr algn="ctr"/>
-            <a:r>
-              <a:rPr lang="en-US" dirty="0"/>
-              <a:t>Tools:</a:t>
-            </a:r>
-          </a:p>
-          <a:p>
-            <a:pPr algn="ctr"/>
-            <a:r>
-              <a:rPr lang="en-US" dirty="0"/>
-              <a:t>Web-search,</a:t>
-            </a:r>
-          </a:p>
-          <a:p>
-            <a:pPr algn="ctr"/>
-            <a:r>
-              <a:rPr lang="en-US" dirty="0"/>
-              <a:t>Calculator, etc.</a:t>
-            </a:r>
-          </a:p>
-        </p:txBody>
-      </p:sp>
-      <p:sp>
-        <p:nvSpPr>
-          <p:cNvPr id="17" name="Oval 16">
-            <a:extLst>
-              <a:ext uri="{FF2B5EF4-FFF2-40B4-BE49-F238E27FC236}">
-                <a16:creationId xmlns:a16="http://schemas.microsoft.com/office/drawing/2014/main" id="{CFF36849-3913-0948-3394-AC539C130CB3}"/>
-              </a:ext>
-            </a:extLst>
-          </p:cNvPr>
-          <p:cNvSpPr/>
-          <p:nvPr/>
-        </p:nvSpPr>
-        <p:spPr>
-          <a:xfrm>
-            <a:off x="4230878" y="4908227"/>
-            <a:ext cx="1527810" cy="732120"/>
-          </a:xfrm>
-          <a:prstGeom prst="ellipse">
-            <a:avLst/>
-          </a:prstGeom>
-          <a:solidFill>
-            <a:schemeClr val="accent2">
-              <a:lumMod val="75000"/>
-            </a:schemeClr>
-          </a:solidFill>
-        </p:spPr>
-        <p:style>
-          <a:lnRef idx="2">
-            <a:schemeClr val="accent1">
-              <a:shade val="15000"/>
-            </a:schemeClr>
-          </a:lnRef>
-          <a:fillRef idx="1">
-            <a:schemeClr val="accent1"/>
-          </a:fillRef>
-          <a:effectRef idx="0">
-            <a:schemeClr val="accent1"/>
-          </a:effectRef>
-          <a:fontRef idx="minor">
-            <a:schemeClr val="lt1"/>
-          </a:fontRef>
-        </p:style>
-        <p:txBody>
-          <a:bodyPr rtlCol="0" anchor="ctr"/>
-          <a:lstStyle/>
-          <a:p>
-            <a:pPr algn="ctr"/>
-            <a:r>
-              <a:rPr lang="en-US" dirty="0"/>
-              <a:t>Memory</a:t>
-            </a:r>
-          </a:p>
         </p:txBody>
       </p:sp>
     </p:spTree>
     <p:extLst>
       <p:ext uri="{BB962C8B-B14F-4D97-AF65-F5344CB8AC3E}">
-        <p14:creationId xmlns:p14="http://schemas.microsoft.com/office/powerpoint/2010/main" val="3632060079"/>
+        <p14:creationId xmlns:p14="http://schemas.microsoft.com/office/powerpoint/2010/main" val="2728030826"/>
       </p:ext>
     </p:extLst>
   </p:cSld>
@@ -13754,7 +13426,7 @@
 </p:sld>
 </file>
 
-<file path=ppt/slides/slide20.xml><?xml version="1.0" encoding="utf-8"?>
+<file path=ppt/slides/slide23.xml><?xml version="1.0" encoding="utf-8"?>
 <p:sld xmlns:a="http://schemas.openxmlformats.org/drawingml/2006/main" xmlns:r="http://schemas.openxmlformats.org/officeDocument/2006/relationships" xmlns:p="http://schemas.openxmlformats.org/presentationml/2006/main">
   <p:cSld>
     <p:spTree>
@@ -13988,7 +13660,7 @@
 </p:sld>
 </file>
 
-<file path=ppt/slides/slide21.xml><?xml version="1.0" encoding="utf-8"?>
+<file path=ppt/slides/slide24.xml><?xml version="1.0" encoding="utf-8"?>
 <p:sld xmlns:a="http://schemas.openxmlformats.org/drawingml/2006/main" xmlns:r="http://schemas.openxmlformats.org/officeDocument/2006/relationships" xmlns:p="http://schemas.openxmlformats.org/presentationml/2006/main">
   <p:cSld>
     <p:spTree>
@@ -14051,7 +13723,7 @@
                   </a:schemeClr>
                 </a:solidFill>
               </a:rPr>
-              <a:t>Complicated tasks:</a:t>
+              <a:t>Complicated tasks performed by Agents:</a:t>
             </a:r>
           </a:p>
           <a:p>
@@ -14068,6 +13740,10 @@
             </a:endParaRPr>
           </a:p>
           <a:p>
+            <a:pPr marL="342900" indent="-342900">
+              <a:buFont typeface="Arial" panose="020B0604020202020204" pitchFamily="34" charset="0"/>
+              <a:buChar char="•"/>
+            </a:pPr>
             <a:r>
               <a:rPr lang="en-US" sz="2400" dirty="0">
                 <a:solidFill>
@@ -14081,6 +13757,10 @@
             </a:r>
           </a:p>
           <a:p>
+            <a:pPr marL="342900" indent="-342900">
+              <a:buFont typeface="Arial" panose="020B0604020202020204" pitchFamily="34" charset="0"/>
+              <a:buChar char="•"/>
+            </a:pPr>
             <a:endParaRPr lang="en-US" sz="2400" dirty="0">
               <a:solidFill>
                 <a:schemeClr val="accent6">
@@ -14091,6 +13771,10 @@
             </a:endParaRPr>
           </a:p>
           <a:p>
+            <a:pPr marL="342900" indent="-342900">
+              <a:buFont typeface="Arial" panose="020B0604020202020204" pitchFamily="34" charset="0"/>
+              <a:buChar char="•"/>
+            </a:pPr>
             <a:r>
               <a:rPr lang="en-US" sz="2400" dirty="0">
                 <a:solidFill>
@@ -14104,6 +13788,10 @@
             </a:r>
           </a:p>
           <a:p>
+            <a:pPr marL="342900" indent="-342900">
+              <a:buFont typeface="Arial" panose="020B0604020202020204" pitchFamily="34" charset="0"/>
+              <a:buChar char="•"/>
+            </a:pPr>
             <a:endParaRPr lang="en-US" sz="2400" dirty="0">
               <a:solidFill>
                 <a:schemeClr val="accent6">
@@ -14114,6 +13802,10 @@
             </a:endParaRPr>
           </a:p>
           <a:p>
+            <a:pPr marL="342900" indent="-342900">
+              <a:buFont typeface="Arial" panose="020B0604020202020204" pitchFamily="34" charset="0"/>
+              <a:buChar char="•"/>
+            </a:pPr>
             <a:r>
               <a:rPr lang="en-US" sz="2400" dirty="0">
                 <a:solidFill>
@@ -14127,6 +13819,10 @@
             </a:r>
           </a:p>
           <a:p>
+            <a:pPr marL="342900" indent="-342900">
+              <a:buFont typeface="Arial" panose="020B0604020202020204" pitchFamily="34" charset="0"/>
+              <a:buChar char="•"/>
+            </a:pPr>
             <a:endParaRPr lang="en-US" sz="2400" dirty="0">
               <a:solidFill>
                 <a:schemeClr val="accent6">
@@ -14137,6 +13833,10 @@
             </a:endParaRPr>
           </a:p>
           <a:p>
+            <a:pPr marL="342900" indent="-342900">
+              <a:buFont typeface="Arial" panose="020B0604020202020204" pitchFamily="34" charset="0"/>
+              <a:buChar char="•"/>
+            </a:pPr>
             <a:r>
               <a:rPr lang="en-US" sz="2400" dirty="0">
                 <a:solidFill>
@@ -14186,7 +13886,7 @@
 </p:sld>
 </file>
 
-<file path=ppt/slides/slide22.xml><?xml version="1.0" encoding="utf-8"?>
+<file path=ppt/slides/slide25.xml><?xml version="1.0" encoding="utf-8"?>
 <p:sld xmlns:a="http://schemas.openxmlformats.org/drawingml/2006/main" xmlns:r="http://schemas.openxmlformats.org/officeDocument/2006/relationships" xmlns:p="http://schemas.openxmlformats.org/presentationml/2006/main">
   <p:cSld>
     <p:spTree>
@@ -14318,7 +14018,7 @@
                   </a:schemeClr>
                 </a:solidFill>
               </a:rPr>
-              <a:t>A transaction comes in — $85,000 to a new payee at 2am from a device never used before. </a:t>
+              <a:t>A transaction comes in — $85,000 to a new payee at 2 AM from a device never used before. </a:t>
             </a:r>
           </a:p>
           <a:p>
@@ -14493,7 +14193,7 @@
 </p:sld>
 </file>
 
-<file path=ppt/slides/slide23.xml><?xml version="1.0" encoding="utf-8"?>
+<file path=ppt/slides/slide26.xml><?xml version="1.0" encoding="utf-8"?>
 <p:sld xmlns:a="http://schemas.openxmlformats.org/drawingml/2006/main" xmlns:r="http://schemas.openxmlformats.org/officeDocument/2006/relationships" xmlns:p="http://schemas.openxmlformats.org/presentationml/2006/main">
   <p:cSld>
     <p:spTree>
@@ -14747,7 +14447,7 @@
 </p:sld>
 </file>
 
-<file path=ppt/slides/slide24.xml><?xml version="1.0" encoding="utf-8"?>
+<file path=ppt/slides/slide27.xml><?xml version="1.0" encoding="utf-8"?>
 <p:sld xmlns:a="http://schemas.openxmlformats.org/drawingml/2006/main" xmlns:r="http://schemas.openxmlformats.org/officeDocument/2006/relationships" xmlns:p="http://schemas.openxmlformats.org/presentationml/2006/main">
   <p:cSld>
     <p:spTree>
@@ -14971,7 +14671,7 @@
 </p:sld>
 </file>
 
-<file path=ppt/slides/slide25.xml><?xml version="1.0" encoding="utf-8"?>
+<file path=ppt/slides/slide28.xml><?xml version="1.0" encoding="utf-8"?>
 <p:sld xmlns:a="http://schemas.openxmlformats.org/drawingml/2006/main" xmlns:r="http://schemas.openxmlformats.org/officeDocument/2006/relationships" xmlns:p="http://schemas.openxmlformats.org/presentationml/2006/main">
   <p:cSld>
     <p:spTree>
@@ -15220,7 +14920,7 @@
 </p:sld>
 </file>
 
-<file path=ppt/slides/slide26.xml><?xml version="1.0" encoding="utf-8"?>
+<file path=ppt/slides/slide29.xml><?xml version="1.0" encoding="utf-8"?>
 <p:sld xmlns:a="http://schemas.openxmlformats.org/drawingml/2006/main" xmlns:r="http://schemas.openxmlformats.org/officeDocument/2006/relationships" xmlns:p="http://schemas.openxmlformats.org/presentationml/2006/main">
   <p:cSld>
     <p:spTree>
@@ -15243,335 +14943,10 @@
           <a:chExt cx="0" cy="0"/>
         </a:xfrm>
       </p:grpSpPr>
-      <p:sp>
-        <p:nvSpPr>
-          <p:cNvPr id="4" name="TextBox 3">
-            <a:extLst>
-              <a:ext uri="{FF2B5EF4-FFF2-40B4-BE49-F238E27FC236}">
-                <a16:creationId xmlns:a16="http://schemas.microsoft.com/office/drawing/2014/main" id="{6BEECD77-6CD6-DD29-7B94-62FE97DBCE59}"/>
-              </a:ext>
-            </a:extLst>
-          </p:cNvPr>
-          <p:cNvSpPr txBox="1"/>
-          <p:nvPr/>
-        </p:nvSpPr>
-        <p:spPr>
-          <a:xfrm>
-            <a:off x="274320" y="933117"/>
-            <a:ext cx="11658600" cy="1477328"/>
-          </a:xfrm>
-          <a:prstGeom prst="rect">
-            <a:avLst/>
-          </a:prstGeom>
-          <a:noFill/>
-        </p:spPr>
-        <p:txBody>
-          <a:bodyPr wrap="square">
-            <a:spAutoFit/>
-          </a:bodyPr>
-          <a:lstStyle/>
-          <a:p>
-            <a:pPr marL="0" indent="0">
-              <a:buNone/>
-            </a:pPr>
-            <a:r>
-              <a:rPr lang="en-US" dirty="0" err="1">
-                <a:solidFill>
-                  <a:schemeClr val="accent6">
-                    <a:lumMod val="60000"/>
-                    <a:lumOff val="40000"/>
-                  </a:schemeClr>
-                </a:solidFill>
-              </a:rPr>
-              <a:t>Ffnbksdfd</a:t>
-            </a:r>
-            <a:endParaRPr lang="en-US" dirty="0">
-              <a:solidFill>
-                <a:schemeClr val="accent6">
-                  <a:lumMod val="60000"/>
-                  <a:lumOff val="40000"/>
-                </a:schemeClr>
-              </a:solidFill>
-            </a:endParaRPr>
-          </a:p>
-          <a:p>
-            <a:pPr marL="0" indent="0">
-              <a:buNone/>
-            </a:pPr>
-            <a:r>
-              <a:rPr lang="en-US" dirty="0" err="1">
-                <a:solidFill>
-                  <a:schemeClr val="accent6">
-                    <a:lumMod val="60000"/>
-                    <a:lumOff val="40000"/>
-                  </a:schemeClr>
-                </a:solidFill>
-              </a:rPr>
-              <a:t>Fdslj;f</a:t>
-            </a:r>
-            <a:endParaRPr lang="en-US" dirty="0">
-              <a:solidFill>
-                <a:schemeClr val="accent6">
-                  <a:lumMod val="60000"/>
-                  <a:lumOff val="40000"/>
-                </a:schemeClr>
-              </a:solidFill>
-            </a:endParaRPr>
-          </a:p>
-          <a:p>
-            <a:pPr marL="0" indent="0">
-              <a:buNone/>
-            </a:pPr>
-            <a:endParaRPr lang="en-US" dirty="0">
-              <a:solidFill>
-                <a:schemeClr val="accent6">
-                  <a:lumMod val="60000"/>
-                  <a:lumOff val="40000"/>
-                </a:schemeClr>
-              </a:solidFill>
-            </a:endParaRPr>
-          </a:p>
-          <a:p>
-            <a:pPr marL="0" indent="0">
-              <a:buNone/>
-            </a:pPr>
-            <a:r>
-              <a:rPr lang="en-US" dirty="0" err="1">
-                <a:solidFill>
-                  <a:schemeClr val="accent6">
-                    <a:lumMod val="60000"/>
-                    <a:lumOff val="40000"/>
-                  </a:schemeClr>
-                </a:solidFill>
-              </a:rPr>
-              <a:t>Fl;ds</a:t>
-            </a:r>
-            <a:endParaRPr lang="en-US" dirty="0">
-              <a:solidFill>
-                <a:schemeClr val="accent6">
-                  <a:lumMod val="60000"/>
-                  <a:lumOff val="40000"/>
-                </a:schemeClr>
-              </a:solidFill>
-            </a:endParaRPr>
-          </a:p>
-          <a:p>
-            <a:pPr marL="0" indent="0">
-              <a:buNone/>
-            </a:pPr>
-            <a:endParaRPr lang="en-US" dirty="0">
-              <a:solidFill>
-                <a:schemeClr val="accent6">
-                  <a:lumMod val="60000"/>
-                  <a:lumOff val="40000"/>
-                </a:schemeClr>
-              </a:solidFill>
-            </a:endParaRPr>
-          </a:p>
-        </p:txBody>
-      </p:sp>
     </p:spTree>
     <p:extLst>
       <p:ext uri="{BB962C8B-B14F-4D97-AF65-F5344CB8AC3E}">
         <p14:creationId xmlns:p14="http://schemas.microsoft.com/office/powerpoint/2010/main" val="1608578028"/>
-      </p:ext>
-    </p:extLst>
-  </p:cSld>
-  <p:clrMapOvr>
-    <a:masterClrMapping/>
-  </p:clrMapOvr>
-</p:sld>
-</file>
-
-<file path=ppt/slides/slide27.xml><?xml version="1.0" encoding="utf-8"?>
-<p:sld xmlns:a="http://schemas.openxmlformats.org/drawingml/2006/main" xmlns:r="http://schemas.openxmlformats.org/officeDocument/2006/relationships" xmlns:p="http://schemas.openxmlformats.org/presentationml/2006/main">
-  <p:cSld>
-    <p:spTree>
-      <p:nvGrpSpPr>
-        <p:cNvPr id="1" name="">
-          <a:extLst>
-            <a:ext uri="{FF2B5EF4-FFF2-40B4-BE49-F238E27FC236}">
-              <a16:creationId xmlns:a16="http://schemas.microsoft.com/office/drawing/2014/main" id="{609C902D-FED6-06DD-5FBA-2A3A8469E3EC}"/>
-            </a:ext>
-          </a:extLst>
-        </p:cNvPr>
-        <p:cNvGrpSpPr/>
-        <p:nvPr/>
-      </p:nvGrpSpPr>
-      <p:grpSpPr>
-        <a:xfrm>
-          <a:off x="0" y="0"/>
-          <a:ext cx="0" cy="0"/>
-          <a:chOff x="0" y="0"/>
-          <a:chExt cx="0" cy="0"/>
-        </a:xfrm>
-      </p:grpSpPr>
-      <p:sp>
-        <p:nvSpPr>
-          <p:cNvPr id="2" name="Title 1">
-            <a:extLst>
-              <a:ext uri="{FF2B5EF4-FFF2-40B4-BE49-F238E27FC236}">
-                <a16:creationId xmlns:a16="http://schemas.microsoft.com/office/drawing/2014/main" id="{820738CA-A675-3C98-CA54-11053793EBFA}"/>
-              </a:ext>
-            </a:extLst>
-          </p:cNvPr>
-          <p:cNvSpPr>
-            <a:spLocks noGrp="1"/>
-          </p:cNvSpPr>
-          <p:nvPr>
-            <p:ph type="title"/>
-          </p:nvPr>
-        </p:nvSpPr>
-        <p:spPr>
-          <a:xfrm>
-            <a:off x="274320" y="136525"/>
-            <a:ext cx="11466576" cy="832739"/>
-          </a:xfrm>
-        </p:spPr>
-        <p:txBody>
-          <a:bodyPr>
-            <a:normAutofit/>
-          </a:bodyPr>
-          <a:lstStyle/>
-          <a:p>
-            <a:r>
-              <a:rPr lang="en-US" sz="3600" dirty="0"/>
-              <a:t>EXTRA</a:t>
-            </a:r>
-          </a:p>
-        </p:txBody>
-      </p:sp>
-      <p:sp>
-        <p:nvSpPr>
-          <p:cNvPr id="4" name="TextBox 3">
-            <a:extLst>
-              <a:ext uri="{FF2B5EF4-FFF2-40B4-BE49-F238E27FC236}">
-                <a16:creationId xmlns:a16="http://schemas.microsoft.com/office/drawing/2014/main" id="{ADEF9D1D-5D0D-5F47-A816-0026075E66B4}"/>
-              </a:ext>
-            </a:extLst>
-          </p:cNvPr>
-          <p:cNvSpPr txBox="1"/>
-          <p:nvPr/>
-        </p:nvSpPr>
-        <p:spPr>
-          <a:xfrm>
-            <a:off x="274320" y="933117"/>
-            <a:ext cx="11658600" cy="1477328"/>
-          </a:xfrm>
-          <a:prstGeom prst="rect">
-            <a:avLst/>
-          </a:prstGeom>
-          <a:noFill/>
-        </p:spPr>
-        <p:txBody>
-          <a:bodyPr wrap="square">
-            <a:spAutoFit/>
-          </a:bodyPr>
-          <a:lstStyle/>
-          <a:p>
-            <a:pPr marL="0" indent="0">
-              <a:buNone/>
-            </a:pPr>
-            <a:r>
-              <a:rPr lang="en-US" dirty="0" err="1">
-                <a:solidFill>
-                  <a:schemeClr val="accent6">
-                    <a:lumMod val="60000"/>
-                    <a:lumOff val="40000"/>
-                  </a:schemeClr>
-                </a:solidFill>
-              </a:rPr>
-              <a:t>Ffnbksdfd</a:t>
-            </a:r>
-            <a:endParaRPr lang="en-US" dirty="0">
-              <a:solidFill>
-                <a:schemeClr val="accent6">
-                  <a:lumMod val="60000"/>
-                  <a:lumOff val="40000"/>
-                </a:schemeClr>
-              </a:solidFill>
-            </a:endParaRPr>
-          </a:p>
-          <a:p>
-            <a:pPr marL="0" indent="0">
-              <a:buNone/>
-            </a:pPr>
-            <a:r>
-              <a:rPr lang="en-US" dirty="0" err="1">
-                <a:solidFill>
-                  <a:schemeClr val="accent6">
-                    <a:lumMod val="60000"/>
-                    <a:lumOff val="40000"/>
-                  </a:schemeClr>
-                </a:solidFill>
-              </a:rPr>
-              <a:t>Fdslj;f</a:t>
-            </a:r>
-            <a:endParaRPr lang="en-US" dirty="0">
-              <a:solidFill>
-                <a:schemeClr val="accent6">
-                  <a:lumMod val="60000"/>
-                  <a:lumOff val="40000"/>
-                </a:schemeClr>
-              </a:solidFill>
-            </a:endParaRPr>
-          </a:p>
-          <a:p>
-            <a:pPr marL="0" indent="0">
-              <a:buNone/>
-            </a:pPr>
-            <a:endParaRPr lang="en-US" dirty="0">
-              <a:solidFill>
-                <a:schemeClr val="accent6">
-                  <a:lumMod val="60000"/>
-                  <a:lumOff val="40000"/>
-                </a:schemeClr>
-              </a:solidFill>
-            </a:endParaRPr>
-          </a:p>
-          <a:p>
-            <a:pPr marL="0" indent="0">
-              <a:buNone/>
-            </a:pPr>
-            <a:r>
-              <a:rPr lang="en-US" dirty="0" err="1">
-                <a:solidFill>
-                  <a:schemeClr val="accent6">
-                    <a:lumMod val="60000"/>
-                    <a:lumOff val="40000"/>
-                  </a:schemeClr>
-                </a:solidFill>
-              </a:rPr>
-              <a:t>Fl;ds</a:t>
-            </a:r>
-            <a:endParaRPr lang="en-US" dirty="0">
-              <a:solidFill>
-                <a:schemeClr val="accent6">
-                  <a:lumMod val="60000"/>
-                  <a:lumOff val="40000"/>
-                </a:schemeClr>
-              </a:solidFill>
-            </a:endParaRPr>
-          </a:p>
-          <a:p>
-            <a:pPr marL="0" indent="0">
-              <a:buNone/>
-            </a:pPr>
-            <a:endParaRPr lang="en-US" dirty="0">
-              <a:solidFill>
-                <a:schemeClr val="accent6">
-                  <a:lumMod val="60000"/>
-                  <a:lumOff val="40000"/>
-                </a:schemeClr>
-              </a:solidFill>
-            </a:endParaRPr>
-          </a:p>
-        </p:txBody>
-      </p:sp>
-    </p:spTree>
-    <p:extLst>
-      <p:ext uri="{BB962C8B-B14F-4D97-AF65-F5344CB8AC3E}">
-        <p14:creationId xmlns:p14="http://schemas.microsoft.com/office/powerpoint/2010/main" val="575370538"/>
       </p:ext>
     </p:extLst>
   </p:cSld>
@@ -15636,7 +15011,7 @@
               <a:buNone/>
             </a:pPr>
             <a:r>
-              <a:rPr lang="en-US" sz="2400" b="1" dirty="0">
+              <a:rPr lang="en-US" sz="2400" b="1" u="sng" dirty="0">
                 <a:solidFill>
                   <a:schemeClr val="accent6">
                     <a:lumMod val="60000"/>
@@ -15857,7 +15232,7 @@
           <a:lstStyle/>
           <a:p>
             <a:r>
-              <a:rPr lang="en-US" sz="2400" b="1" dirty="0">
+              <a:rPr lang="en-US" sz="2400" b="1" u="sng" dirty="0">
                 <a:solidFill>
                   <a:schemeClr val="accent6">
                     <a:lumMod val="60000"/>
@@ -16035,6 +15410,42 @@
     <p:extLst>
       <p:ext uri="{BB962C8B-B14F-4D97-AF65-F5344CB8AC3E}">
         <p14:creationId xmlns:p14="http://schemas.microsoft.com/office/powerpoint/2010/main" val="645590201"/>
+      </p:ext>
+    </p:extLst>
+  </p:cSld>
+  <p:clrMapOvr>
+    <a:masterClrMapping/>
+  </p:clrMapOvr>
+</p:sld>
+</file>
+
+<file path=ppt/slides/slide30.xml><?xml version="1.0" encoding="utf-8"?>
+<p:sld xmlns:a="http://schemas.openxmlformats.org/drawingml/2006/main" xmlns:r="http://schemas.openxmlformats.org/officeDocument/2006/relationships" xmlns:p="http://schemas.openxmlformats.org/presentationml/2006/main">
+  <p:cSld>
+    <p:spTree>
+      <p:nvGrpSpPr>
+        <p:cNvPr id="1" name="">
+          <a:extLst>
+            <a:ext uri="{FF2B5EF4-FFF2-40B4-BE49-F238E27FC236}">
+              <a16:creationId xmlns:a16="http://schemas.microsoft.com/office/drawing/2014/main" id="{609C902D-FED6-06DD-5FBA-2A3A8469E3EC}"/>
+            </a:ext>
+          </a:extLst>
+        </p:cNvPr>
+        <p:cNvGrpSpPr/>
+        <p:nvPr/>
+      </p:nvGrpSpPr>
+      <p:grpSpPr>
+        <a:xfrm>
+          <a:off x="0" y="0"/>
+          <a:ext cx="0" cy="0"/>
+          <a:chOff x="0" y="0"/>
+          <a:chExt cx="0" cy="0"/>
+        </a:xfrm>
+      </p:grpSpPr>
+    </p:spTree>
+    <p:extLst>
+      <p:ext uri="{BB962C8B-B14F-4D97-AF65-F5344CB8AC3E}">
+        <p14:creationId xmlns:p14="http://schemas.microsoft.com/office/powerpoint/2010/main" val="575370538"/>
       </p:ext>
     </p:extLst>
   </p:cSld>
@@ -16099,7 +15510,7 @@
               <a:buNone/>
             </a:pPr>
             <a:r>
-              <a:rPr lang="en-US" sz="2400" b="1" dirty="0">
+              <a:rPr lang="en-US" sz="2400" b="1" u="sng" dirty="0">
                 <a:solidFill>
                   <a:schemeClr val="accent6">
                     <a:lumMod val="60000"/>
@@ -16114,62 +15525,7 @@
             <a:pPr>
               <a:buNone/>
             </a:pPr>
-            <a:r>
-              <a:rPr lang="en-US" sz="2400" dirty="0">
-                <a:solidFill>
-                  <a:schemeClr val="accent6">
-                    <a:lumMod val="60000"/>
-                    <a:lumOff val="40000"/>
-                  </a:schemeClr>
-                </a:solidFill>
-              </a:rPr>
-              <a:t>The primary role of memory in an AI agent is to retain, recall, and build on information over time.</a:t>
-            </a:r>
-          </a:p>
-          <a:p>
-            <a:pPr>
-              <a:buNone/>
-            </a:pPr>
-            <a:r>
-              <a:rPr lang="en-US" sz="2400" dirty="0">
-                <a:solidFill>
-                  <a:schemeClr val="accent6">
-                    <a:lumMod val="60000"/>
-                    <a:lumOff val="40000"/>
-                  </a:schemeClr>
-                </a:solidFill>
-              </a:rPr>
-              <a:t>Memory helps </a:t>
-            </a:r>
-          </a:p>
-          <a:p>
-            <a:pPr marL="342900" indent="-342900">
-              <a:buFont typeface="Arial" panose="020B0604020202020204" pitchFamily="34" charset="0"/>
-              <a:buChar char="•"/>
-            </a:pPr>
-            <a:r>
-              <a:rPr lang="en-US" sz="2400" dirty="0">
-                <a:solidFill>
-                  <a:schemeClr val="accent6">
-                    <a:lumMod val="60000"/>
-                    <a:lumOff val="40000"/>
-                  </a:schemeClr>
-                </a:solidFill>
-              </a:rPr>
-              <a:t>Maintaining </a:t>
-            </a:r>
-            <a:r>
-              <a:rPr lang="en-US" sz="2400" b="1" dirty="0">
-                <a:solidFill>
-                  <a:schemeClr val="accent6">
-                    <a:lumMod val="60000"/>
-                    <a:lumOff val="40000"/>
-                  </a:schemeClr>
-                </a:solidFill>
-              </a:rPr>
-              <a:t>conversational continuity</a:t>
-            </a:r>
-            <a:endParaRPr lang="en-US" sz="2400" dirty="0">
+            <a:endParaRPr lang="en-US" sz="2400" b="1" u="sng" dirty="0">
               <a:solidFill>
                 <a:schemeClr val="accent6">
                   <a:lumMod val="60000"/>
@@ -16179,9 +15535,8 @@
             </a:endParaRPr>
           </a:p>
           <a:p>
-            <a:pPr marL="342900" indent="-342900">
-              <a:buFont typeface="Arial" panose="020B0604020202020204" pitchFamily="34" charset="0"/>
-              <a:buChar char="•"/>
+            <a:pPr>
+              <a:buNone/>
             </a:pPr>
             <a:r>
               <a:rPr lang="en-US" sz="2400" dirty="0">
@@ -16192,19 +15547,10 @@
                   </a:schemeClr>
                 </a:solidFill>
               </a:rPr>
-              <a:t>in executing complex </a:t>
-            </a:r>
-            <a:r>
-              <a:rPr lang="en-US" sz="2400" b="1" dirty="0">
-                <a:solidFill>
-                  <a:schemeClr val="accent6">
-                    <a:lumMod val="60000"/>
-                    <a:lumOff val="40000"/>
-                  </a:schemeClr>
-                </a:solidFill>
-              </a:rPr>
-              <a:t>multi-step planning</a:t>
-            </a:r>
+              <a:t>To retain, recall, and build on information over time.</a:t>
+            </a:r>
+          </a:p>
+          <a:p>
             <a:r>
               <a:rPr lang="en-US" sz="2400" dirty="0">
                 <a:solidFill>
@@ -16214,46 +15560,7 @@
                   </a:schemeClr>
                 </a:solidFill>
               </a:rPr>
-              <a:t>, and</a:t>
-            </a:r>
-          </a:p>
-          <a:p>
-            <a:pPr marL="342900" indent="-342900">
-              <a:buFont typeface="Arial" panose="020B0604020202020204" pitchFamily="34" charset="0"/>
-              <a:buChar char="•"/>
-            </a:pPr>
-            <a:r>
-              <a:rPr lang="en-US" sz="2400" dirty="0">
-                <a:solidFill>
-                  <a:schemeClr val="accent6">
-                    <a:lumMod val="60000"/>
-                    <a:lumOff val="40000"/>
-                  </a:schemeClr>
-                </a:solidFill>
-              </a:rPr>
-              <a:t>in delivering highly </a:t>
-            </a:r>
-            <a:r>
-              <a:rPr lang="en-US" sz="2400" b="1" dirty="0">
-                <a:solidFill>
-                  <a:schemeClr val="accent6">
-                    <a:lumMod val="60000"/>
-                    <a:lumOff val="40000"/>
-                  </a:schemeClr>
-                </a:solidFill>
-              </a:rPr>
-              <a:t>personalized user experiences</a:t>
-            </a:r>
-            <a:r>
-              <a:rPr lang="en-US" sz="2400" dirty="0">
-                <a:solidFill>
-                  <a:schemeClr val="accent6">
-                    <a:lumMod val="60000"/>
-                    <a:lumOff val="40000"/>
-                  </a:schemeClr>
-                </a:solidFill>
-              </a:rPr>
-              <a:t>.</a:t>
+              <a:t>Without memory, an AI agent would not remember previous conversations.</a:t>
             </a:r>
           </a:p>
           <a:p>
@@ -16295,7 +15602,121 @@
                   </a:schemeClr>
                 </a:solidFill>
               </a:rPr>
-              <a:t>Without memory, an AI agent would not remember previous conversations.</a:t>
+              <a:t>Memory helps in</a:t>
+            </a:r>
+          </a:p>
+          <a:p>
+            <a:pPr marL="342900" indent="-342900">
+              <a:buFont typeface="Arial" panose="020B0604020202020204" pitchFamily="34" charset="0"/>
+              <a:buChar char="•"/>
+            </a:pPr>
+            <a:r>
+              <a:rPr lang="en-US" sz="2400" dirty="0">
+                <a:solidFill>
+                  <a:schemeClr val="accent6">
+                    <a:lumMod val="60000"/>
+                    <a:lumOff val="40000"/>
+                  </a:schemeClr>
+                </a:solidFill>
+              </a:rPr>
+              <a:t>maintaining </a:t>
+            </a:r>
+            <a:r>
+              <a:rPr lang="en-US" sz="2400" b="1" dirty="0">
+                <a:solidFill>
+                  <a:schemeClr val="accent6">
+                    <a:lumMod val="60000"/>
+                    <a:lumOff val="40000"/>
+                  </a:schemeClr>
+                </a:solidFill>
+              </a:rPr>
+              <a:t>conversational continuity</a:t>
+            </a:r>
+            <a:endParaRPr lang="en-US" sz="2400" dirty="0">
+              <a:solidFill>
+                <a:schemeClr val="accent6">
+                  <a:lumMod val="60000"/>
+                  <a:lumOff val="40000"/>
+                </a:schemeClr>
+              </a:solidFill>
+            </a:endParaRPr>
+          </a:p>
+          <a:p>
+            <a:pPr marL="342900" indent="-342900">
+              <a:buFont typeface="Arial" panose="020B0604020202020204" pitchFamily="34" charset="0"/>
+              <a:buChar char="•"/>
+            </a:pPr>
+            <a:r>
+              <a:rPr lang="en-US" sz="2400" dirty="0">
+                <a:solidFill>
+                  <a:schemeClr val="accent6">
+                    <a:lumMod val="60000"/>
+                    <a:lumOff val="40000"/>
+                  </a:schemeClr>
+                </a:solidFill>
+              </a:rPr>
+              <a:t>executing complex </a:t>
+            </a:r>
+            <a:r>
+              <a:rPr lang="en-US" sz="2400" b="1" dirty="0">
+                <a:solidFill>
+                  <a:schemeClr val="accent6">
+                    <a:lumMod val="60000"/>
+                    <a:lumOff val="40000"/>
+                  </a:schemeClr>
+                </a:solidFill>
+              </a:rPr>
+              <a:t>multi-step planning</a:t>
+            </a:r>
+            <a:r>
+              <a:rPr lang="en-US" sz="2400" dirty="0">
+                <a:solidFill>
+                  <a:schemeClr val="accent6">
+                    <a:lumMod val="60000"/>
+                    <a:lumOff val="40000"/>
+                  </a:schemeClr>
+                </a:solidFill>
+              </a:rPr>
+              <a:t>, and</a:t>
+            </a:r>
+          </a:p>
+          <a:p>
+            <a:pPr marL="342900" indent="-342900">
+              <a:buFont typeface="Arial" panose="020B0604020202020204" pitchFamily="34" charset="0"/>
+              <a:buChar char="•"/>
+            </a:pPr>
+            <a:r>
+              <a:rPr lang="en-US" sz="2400" dirty="0">
+                <a:solidFill>
+                  <a:schemeClr val="accent6">
+                    <a:lumMod val="60000"/>
+                    <a:lumOff val="40000"/>
+                  </a:schemeClr>
+                </a:solidFill>
+              </a:rPr>
+              <a:t>delivering highly </a:t>
+            </a:r>
+            <a:r>
+              <a:rPr lang="en-US" sz="2400" b="1" dirty="0">
+                <a:solidFill>
+                  <a:schemeClr val="accent6">
+                    <a:lumMod val="60000"/>
+                    <a:lumOff val="40000"/>
+                  </a:schemeClr>
+                </a:solidFill>
+              </a:rPr>
+              <a:t>personalized user experiences</a:t>
+            </a:r>
+            <a:r>
+              <a:rPr lang="en-US" sz="2400" dirty="0">
+                <a:solidFill>
+                  <a:schemeClr val="accent6">
+                    <a:lumMod val="60000"/>
+                    <a:lumOff val="40000"/>
+                  </a:schemeClr>
+                </a:solidFill>
+              </a:rPr>
+              <a:t>.</a:t>
             </a:r>
           </a:p>
         </p:txBody>
@@ -16381,7 +15802,7 @@
         <p:spPr>
           <a:xfrm>
             <a:off x="292608" y="204276"/>
-            <a:ext cx="6894576" cy="5632311"/>
+            <a:ext cx="6894576" cy="6370975"/>
           </a:xfrm>
           <a:prstGeom prst="rect">
             <a:avLst/>
@@ -16395,7 +15816,7 @@
           <a:lstStyle/>
           <a:p>
             <a:r>
-              <a:rPr lang="en-US" sz="2400" b="1" dirty="0">
+              <a:rPr lang="en-US" sz="2400" b="1" u="sng" dirty="0">
                 <a:solidFill>
                   <a:schemeClr val="accent6">
                     <a:lumMod val="60000"/>
@@ -16432,7 +15853,29 @@
                   </a:schemeClr>
                 </a:solidFill>
               </a:rPr>
-              <a:t>A tool is a function the agent is allowed to call. </a:t>
+              <a:t>A tool is a </a:t>
+            </a:r>
+            <a:r>
+              <a:rPr lang="en-US" sz="2400" b="1" i="1" dirty="0">
+                <a:solidFill>
+                  <a:schemeClr val="accent6">
+                    <a:lumMod val="60000"/>
+                    <a:lumOff val="40000"/>
+                  </a:schemeClr>
+                </a:solidFill>
+              </a:rPr>
+              <a:t>function</a:t>
+            </a:r>
+            <a:r>
+              <a:rPr lang="en-US" sz="2400" dirty="0">
+                <a:solidFill>
+                  <a:schemeClr val="accent6">
+                    <a:lumMod val="60000"/>
+                    <a:lumOff val="40000"/>
+                  </a:schemeClr>
+                </a:solidFill>
+              </a:rPr>
+              <a:t> the agent is allowed to call. </a:t>
             </a:r>
           </a:p>
           <a:p>
@@ -16559,6 +16002,40 @@
                 </a:solidFill>
               </a:rPr>
               <a:t>Read data from cloud, storage, etc.</a:t>
+            </a:r>
+          </a:p>
+          <a:p>
+            <a:pPr marL="342900" indent="-342900">
+              <a:buFont typeface="Arial" panose="020B0604020202020204" pitchFamily="34" charset="0"/>
+              <a:buChar char="•"/>
+            </a:pPr>
+            <a:r>
+              <a:rPr lang="en-US" sz="2400" dirty="0">
+                <a:solidFill>
+                  <a:schemeClr val="accent6">
+                    <a:lumMod val="60000"/>
+                    <a:lumOff val="40000"/>
+                  </a:schemeClr>
+                </a:solidFill>
+              </a:rPr>
+              <a:t>Book a ticket</a:t>
+            </a:r>
+          </a:p>
+          <a:p>
+            <a:pPr marL="342900" indent="-342900">
+              <a:buFont typeface="Arial" panose="020B0604020202020204" pitchFamily="34" charset="0"/>
+              <a:buChar char="•"/>
+            </a:pPr>
+            <a:r>
+              <a:rPr lang="en-US" sz="2400" dirty="0">
+                <a:solidFill>
+                  <a:schemeClr val="accent6">
+                    <a:lumMod val="60000"/>
+                    <a:lumOff val="40000"/>
+                  </a:schemeClr>
+                </a:solidFill>
+              </a:rPr>
+              <a:t>Send email </a:t>
             </a:r>
           </a:p>
         </p:txBody>
@@ -16643,8 +16120,8 @@
         </p:nvSpPr>
         <p:spPr>
           <a:xfrm>
-            <a:off x="219971" y="225779"/>
-            <a:ext cx="10292080" cy="3416320"/>
+            <a:off x="4684386" y="98464"/>
+            <a:ext cx="2930533" cy="461665"/>
           </a:xfrm>
           <a:prstGeom prst="rect">
             <a:avLst/>
@@ -16670,184 +16147,6 @@
                 </a:solidFill>
               </a:rPr>
               <a:t>LLM vs AI Agent:</a:t>
-            </a:r>
-          </a:p>
-          <a:p>
-            <a:pPr>
-              <a:buNone/>
-            </a:pPr>
-            <a:r>
-              <a:rPr lang="en-US" sz="2400" dirty="0">
-                <a:solidFill>
-                  <a:schemeClr val="accent6">
-                    <a:lumMod val="60000"/>
-                    <a:lumOff val="40000"/>
-                  </a:schemeClr>
-                </a:solidFill>
-              </a:rPr>
-              <a:t>A regular AI model (like a chatbot) takes your input, thinks once, and gives you an answer. That's it — one shot, done.</a:t>
-            </a:r>
-          </a:p>
-          <a:p>
-            <a:pPr>
-              <a:buNone/>
-            </a:pPr>
-            <a:endParaRPr lang="en-US" sz="2400" dirty="0">
-              <a:solidFill>
-                <a:schemeClr val="accent6">
-                  <a:lumMod val="60000"/>
-                  <a:lumOff val="40000"/>
-                </a:schemeClr>
-              </a:solidFill>
-            </a:endParaRPr>
-          </a:p>
-          <a:p>
-            <a:pPr>
-              <a:buNone/>
-            </a:pPr>
-            <a:r>
-              <a:rPr lang="en-US" sz="2400" dirty="0">
-                <a:solidFill>
-                  <a:schemeClr val="accent6">
-                    <a:lumMod val="60000"/>
-                    <a:lumOff val="40000"/>
-                  </a:schemeClr>
-                </a:solidFill>
-              </a:rPr>
-              <a:t>An AI agent is different.</a:t>
-            </a:r>
-          </a:p>
-          <a:p>
-            <a:pPr>
-              <a:buNone/>
-            </a:pPr>
-            <a:r>
-              <a:rPr lang="en-US" sz="2400" dirty="0">
-                <a:solidFill>
-                  <a:schemeClr val="accent6">
-                    <a:lumMod val="60000"/>
-                    <a:lumOff val="40000"/>
-                  </a:schemeClr>
-                </a:solidFill>
-              </a:rPr>
-              <a:t>It can </a:t>
-            </a:r>
-            <a:r>
-              <a:rPr lang="en-US" sz="2400" b="1" dirty="0">
-                <a:solidFill>
-                  <a:schemeClr val="accent6">
-                    <a:lumMod val="60000"/>
-                    <a:lumOff val="40000"/>
-                  </a:schemeClr>
-                </a:solidFill>
-              </a:rPr>
-              <a:t>plan</a:t>
-            </a:r>
-            <a:r>
-              <a:rPr lang="en-US" sz="2400" dirty="0">
-                <a:solidFill>
-                  <a:schemeClr val="accent6">
-                    <a:lumMod val="60000"/>
-                    <a:lumOff val="40000"/>
-                  </a:schemeClr>
-                </a:solidFill>
-              </a:rPr>
-              <a:t>, </a:t>
-            </a:r>
-            <a:r>
-              <a:rPr lang="en-US" sz="2400" b="1" dirty="0">
-                <a:solidFill>
-                  <a:schemeClr val="accent6">
-                    <a:lumMod val="60000"/>
-                    <a:lumOff val="40000"/>
-                  </a:schemeClr>
-                </a:solidFill>
-              </a:rPr>
-              <a:t>take actions</a:t>
-            </a:r>
-            <a:r>
-              <a:rPr lang="en-US" sz="2400" dirty="0">
-                <a:solidFill>
-                  <a:schemeClr val="accent6">
-                    <a:lumMod val="60000"/>
-                    <a:lumOff val="40000"/>
-                  </a:schemeClr>
-                </a:solidFill>
-              </a:rPr>
-              <a:t>, </a:t>
-            </a:r>
-            <a:r>
-              <a:rPr lang="en-US" sz="2400" b="1" dirty="0">
-                <a:solidFill>
-                  <a:schemeClr val="accent6">
-                    <a:lumMod val="60000"/>
-                    <a:lumOff val="40000"/>
-                  </a:schemeClr>
-                </a:solidFill>
-              </a:rPr>
-              <a:t>observe the results</a:t>
-            </a:r>
-            <a:r>
-              <a:rPr lang="en-US" sz="2400" dirty="0">
-                <a:solidFill>
-                  <a:schemeClr val="accent6">
-                    <a:lumMod val="60000"/>
-                    <a:lumOff val="40000"/>
-                  </a:schemeClr>
-                </a:solidFill>
-              </a:rPr>
-              <a:t>, and </a:t>
-            </a:r>
-            <a:r>
-              <a:rPr lang="en-US" sz="2400" b="1" dirty="0">
-                <a:solidFill>
-                  <a:schemeClr val="accent6">
-                    <a:lumMod val="60000"/>
-                    <a:lumOff val="40000"/>
-                  </a:schemeClr>
-                </a:solidFill>
-              </a:rPr>
-              <a:t>keep going</a:t>
-            </a:r>
-            <a:r>
-              <a:rPr lang="en-US" sz="2400" dirty="0">
-                <a:solidFill>
-                  <a:schemeClr val="accent6">
-                    <a:lumMod val="60000"/>
-                    <a:lumOff val="40000"/>
-                  </a:schemeClr>
-                </a:solidFill>
-              </a:rPr>
-              <a:t> until a goal is achieved.</a:t>
-            </a:r>
-          </a:p>
-          <a:p>
-            <a:pPr>
-              <a:buNone/>
-            </a:pPr>
-            <a:endParaRPr lang="en-US" sz="2400" dirty="0">
-              <a:solidFill>
-                <a:schemeClr val="accent6">
-                  <a:lumMod val="60000"/>
-                  <a:lumOff val="40000"/>
-                </a:schemeClr>
-              </a:solidFill>
-            </a:endParaRPr>
-          </a:p>
-          <a:p>
-            <a:pPr>
-              <a:buNone/>
-            </a:pPr>
-            <a:r>
-              <a:rPr lang="en-US" sz="2400" dirty="0">
-                <a:solidFill>
-                  <a:schemeClr val="accent6">
-                    <a:lumMod val="60000"/>
-                    <a:lumOff val="40000"/>
-                  </a:schemeClr>
-                </a:solidFill>
-              </a:rPr>
-              <a:t>The workflow of an agent:</a:t>
             </a:r>
           </a:p>
         </p:txBody>
@@ -16866,7 +16165,7 @@
         </p:nvSpPr>
         <p:spPr>
           <a:xfrm>
-            <a:off x="1188720" y="3739896"/>
+            <a:off x="1143000" y="4261104"/>
             <a:ext cx="1883664" cy="886968"/>
           </a:xfrm>
           <a:prstGeom prst="rect">
@@ -16922,7 +16221,7 @@
         </p:nvSpPr>
         <p:spPr>
           <a:xfrm>
-            <a:off x="3843020" y="3739896"/>
+            <a:off x="3797300" y="4261104"/>
             <a:ext cx="1883664" cy="886968"/>
           </a:xfrm>
           <a:prstGeom prst="rect">
@@ -16978,7 +16277,7 @@
         </p:nvSpPr>
         <p:spPr>
           <a:xfrm>
-            <a:off x="6497319" y="3739896"/>
+            <a:off x="6451599" y="4261104"/>
             <a:ext cx="2326641" cy="886968"/>
           </a:xfrm>
           <a:prstGeom prst="rect">
@@ -17034,7 +16333,7 @@
         </p:nvSpPr>
         <p:spPr>
           <a:xfrm>
-            <a:off x="8823960" y="3825064"/>
+            <a:off x="8778240" y="4346272"/>
             <a:ext cx="1688091" cy="369332"/>
           </a:xfrm>
           <a:prstGeom prst="rect">
@@ -17076,7 +16375,7 @@
         </p:nvSpPr>
         <p:spPr>
           <a:xfrm>
-            <a:off x="10850379" y="4046747"/>
+            <a:off x="10804659" y="4567955"/>
             <a:ext cx="1025089" cy="369332"/>
           </a:xfrm>
           <a:prstGeom prst="rect">
@@ -17118,7 +16417,7 @@
         </p:nvSpPr>
         <p:spPr>
           <a:xfrm>
-            <a:off x="9920759" y="5058796"/>
+            <a:off x="9875039" y="5580004"/>
             <a:ext cx="1034257" cy="369332"/>
           </a:xfrm>
           <a:prstGeom prst="rect">
@@ -17160,7 +16459,7 @@
         </p:nvGrpSpPr>
         <p:grpSpPr>
           <a:xfrm>
-            <a:off x="3196224" y="4086216"/>
+            <a:off x="3150504" y="4607424"/>
             <a:ext cx="399240" cy="171000"/>
             <a:chOff x="3196224" y="4086216"/>
             <a:chExt cx="399240" cy="171000"/>
@@ -17283,7 +16582,7 @@
         </p:nvGrpSpPr>
         <p:grpSpPr>
           <a:xfrm>
-            <a:off x="5834304" y="4085496"/>
+            <a:off x="5788584" y="4606704"/>
             <a:ext cx="494280" cy="181800"/>
             <a:chOff x="5834304" y="4085496"/>
             <a:chExt cx="494280" cy="181800"/>
@@ -17406,7 +16705,7 @@
         </p:nvGrpSpPr>
         <p:grpSpPr>
           <a:xfrm>
-            <a:off x="10225944" y="4184856"/>
+            <a:off x="10180224" y="4706064"/>
             <a:ext cx="632160" cy="163440"/>
             <a:chOff x="10225944" y="4184856"/>
             <a:chExt cx="632160" cy="163440"/>
@@ -17515,8 +16814,8 @@
           </mc:Fallback>
         </mc:AlternateContent>
       </p:grpSp>
-      <mc:AlternateContent xmlns:mc="http://schemas.openxmlformats.org/markup-compatibility/2006" xmlns:p14="http://schemas.microsoft.com/office/powerpoint/2010/main">
-        <mc:Choice Requires="p14">
+      <mc:AlternateContent xmlns:mc="http://schemas.openxmlformats.org/markup-compatibility/2006">
+        <mc:Choice xmlns:p14="http://schemas.microsoft.com/office/powerpoint/2010/main" Requires="p14">
           <p:contentPart p14:bwMode="auto" r:id="rId14">
             <p14:nvContentPartPr>
               <p14:cNvPr id="26" name="Ink 25">
@@ -17530,12 +16829,12 @@
               <p14:nvPr/>
             </p14:nvContentPartPr>
             <p14:xfrm>
-              <a:off x="2884104" y="4738176"/>
+              <a:off x="2838384" y="5259384"/>
               <a:ext cx="6814440" cy="1148760"/>
             </p14:xfrm>
           </p:contentPart>
         </mc:Choice>
-        <mc:Fallback xmlns="">
+        <mc:Fallback>
           <p:pic>
             <p:nvPicPr>
               <p:cNvPr id="26" name="Ink 25">
@@ -17556,8 +16855,8 @@
             </p:blipFill>
             <p:spPr>
               <a:xfrm>
-                <a:off x="2848104" y="4702176"/>
-                <a:ext cx="6886080" cy="1220400"/>
+                <a:off x="2802384" y="5223395"/>
+                <a:ext cx="6886080" cy="1220378"/>
               </a:xfrm>
               <a:prstGeom prst="rect">
                 <a:avLst/>
@@ -17566,6 +16865,344 @@
           </p:pic>
         </mc:Fallback>
       </mc:AlternateContent>
+      <p:sp>
+        <p:nvSpPr>
+          <p:cNvPr id="6" name="TextBox 5">
+            <a:extLst>
+              <a:ext uri="{FF2B5EF4-FFF2-40B4-BE49-F238E27FC236}">
+                <a16:creationId xmlns:a16="http://schemas.microsoft.com/office/drawing/2014/main" id="{9F79E9BB-D5B1-F1F8-32B2-C9A821D89EBB}"/>
+              </a:ext>
+            </a:extLst>
+          </p:cNvPr>
+          <p:cNvSpPr txBox="1"/>
+          <p:nvPr/>
+        </p:nvSpPr>
+        <p:spPr>
+          <a:xfrm>
+            <a:off x="88314" y="560129"/>
+            <a:ext cx="4886022" cy="2677656"/>
+          </a:xfrm>
+          <a:prstGeom prst="rect">
+            <a:avLst/>
+          </a:prstGeom>
+          <a:noFill/>
+        </p:spPr>
+        <p:txBody>
+          <a:bodyPr wrap="square">
+            <a:spAutoFit/>
+          </a:bodyPr>
+          <a:lstStyle/>
+          <a:p>
+            <a:pPr>
+              <a:buNone/>
+            </a:pPr>
+            <a:r>
+              <a:rPr lang="en-US" sz="2400" dirty="0">
+                <a:solidFill>
+                  <a:schemeClr val="accent6">
+                    <a:lumMod val="60000"/>
+                    <a:lumOff val="40000"/>
+                  </a:schemeClr>
+                </a:solidFill>
+              </a:rPr>
+              <a:t>A regular AI model (like a chatbot) takes your input, thinks once, and gives you an answer. That's it — one shot, done.</a:t>
+            </a:r>
+          </a:p>
+          <a:p>
+            <a:pPr>
+              <a:buNone/>
+            </a:pPr>
+            <a:endParaRPr lang="en-US" sz="2400" dirty="0">
+              <a:solidFill>
+                <a:schemeClr val="accent6">
+                  <a:lumMod val="60000"/>
+                  <a:lumOff val="40000"/>
+                </a:schemeClr>
+              </a:solidFill>
+            </a:endParaRPr>
+          </a:p>
+          <a:p>
+            <a:pPr>
+              <a:buNone/>
+            </a:pPr>
+            <a:r>
+              <a:rPr lang="en-US" sz="2400" dirty="0">
+                <a:solidFill>
+                  <a:schemeClr val="accent6">
+                    <a:lumMod val="60000"/>
+                    <a:lumOff val="40000"/>
+                  </a:schemeClr>
+                </a:solidFill>
+              </a:rPr>
+              <a:t>Example: </a:t>
+            </a:r>
+            <a:r>
+              <a:rPr lang="en-US" sz="2400" i="1" dirty="0">
+                <a:solidFill>
+                  <a:schemeClr val="accent6">
+                    <a:lumMod val="60000"/>
+                    <a:lumOff val="40000"/>
+                  </a:schemeClr>
+                </a:solidFill>
+              </a:rPr>
+              <a:t>“How to go on metro from Gurgaon to Noida”</a:t>
+            </a:r>
+          </a:p>
+        </p:txBody>
+      </p:sp>
+      <p:sp>
+        <p:nvSpPr>
+          <p:cNvPr id="10" name="TextBox 9">
+            <a:extLst>
+              <a:ext uri="{FF2B5EF4-FFF2-40B4-BE49-F238E27FC236}">
+                <a16:creationId xmlns:a16="http://schemas.microsoft.com/office/drawing/2014/main" id="{3B99C29E-F622-613B-5644-662BD354222B}"/>
+              </a:ext>
+            </a:extLst>
+          </p:cNvPr>
+          <p:cNvSpPr txBox="1"/>
+          <p:nvPr/>
+        </p:nvSpPr>
+        <p:spPr>
+          <a:xfrm>
+            <a:off x="6560290" y="572736"/>
+            <a:ext cx="5269458" cy="2677656"/>
+          </a:xfrm>
+          <a:prstGeom prst="rect">
+            <a:avLst/>
+          </a:prstGeom>
+          <a:noFill/>
+        </p:spPr>
+        <p:txBody>
+          <a:bodyPr wrap="square">
+            <a:spAutoFit/>
+          </a:bodyPr>
+          <a:lstStyle/>
+          <a:p>
+            <a:pPr>
+              <a:buNone/>
+            </a:pPr>
+            <a:r>
+              <a:rPr lang="en-US" sz="2400" dirty="0">
+                <a:solidFill>
+                  <a:schemeClr val="accent6">
+                    <a:lumMod val="60000"/>
+                    <a:lumOff val="40000"/>
+                  </a:schemeClr>
+                </a:solidFill>
+              </a:rPr>
+              <a:t>An AI agent can </a:t>
+            </a:r>
+            <a:r>
+              <a:rPr lang="en-US" sz="2400" b="1" dirty="0">
+                <a:solidFill>
+                  <a:schemeClr val="accent6">
+                    <a:lumMod val="60000"/>
+                    <a:lumOff val="40000"/>
+                  </a:schemeClr>
+                </a:solidFill>
+              </a:rPr>
+              <a:t>plan</a:t>
+            </a:r>
+            <a:r>
+              <a:rPr lang="en-US" sz="2400" dirty="0">
+                <a:solidFill>
+                  <a:schemeClr val="accent6">
+                    <a:lumMod val="60000"/>
+                    <a:lumOff val="40000"/>
+                  </a:schemeClr>
+                </a:solidFill>
+              </a:rPr>
+              <a:t>, </a:t>
+            </a:r>
+            <a:r>
+              <a:rPr lang="en-US" sz="2400" b="1" dirty="0">
+                <a:solidFill>
+                  <a:schemeClr val="accent6">
+                    <a:lumMod val="60000"/>
+                    <a:lumOff val="40000"/>
+                  </a:schemeClr>
+                </a:solidFill>
+              </a:rPr>
+              <a:t>take actions</a:t>
+            </a:r>
+            <a:r>
+              <a:rPr lang="en-US" sz="2400" dirty="0">
+                <a:solidFill>
+                  <a:schemeClr val="accent6">
+                    <a:lumMod val="60000"/>
+                    <a:lumOff val="40000"/>
+                  </a:schemeClr>
+                </a:solidFill>
+              </a:rPr>
+              <a:t>, </a:t>
+            </a:r>
+            <a:r>
+              <a:rPr lang="en-US" sz="2400" b="1" dirty="0">
+                <a:solidFill>
+                  <a:schemeClr val="accent6">
+                    <a:lumMod val="60000"/>
+                    <a:lumOff val="40000"/>
+                  </a:schemeClr>
+                </a:solidFill>
+              </a:rPr>
+              <a:t>observe the results</a:t>
+            </a:r>
+            <a:r>
+              <a:rPr lang="en-US" sz="2400" dirty="0">
+                <a:solidFill>
+                  <a:schemeClr val="accent6">
+                    <a:lumMod val="60000"/>
+                    <a:lumOff val="40000"/>
+                  </a:schemeClr>
+                </a:solidFill>
+              </a:rPr>
+              <a:t>, and </a:t>
+            </a:r>
+            <a:r>
+              <a:rPr lang="en-US" sz="2400" b="1" dirty="0">
+                <a:solidFill>
+                  <a:schemeClr val="accent6">
+                    <a:lumMod val="60000"/>
+                    <a:lumOff val="40000"/>
+                  </a:schemeClr>
+                </a:solidFill>
+              </a:rPr>
+              <a:t>keep going</a:t>
+            </a:r>
+            <a:r>
+              <a:rPr lang="en-US" sz="2400" dirty="0">
+                <a:solidFill>
+                  <a:schemeClr val="accent6">
+                    <a:lumMod val="60000"/>
+                    <a:lumOff val="40000"/>
+                  </a:schemeClr>
+                </a:solidFill>
+              </a:rPr>
+              <a:t> until a goal is achieved.</a:t>
+            </a:r>
+          </a:p>
+          <a:p>
+            <a:pPr>
+              <a:buNone/>
+            </a:pPr>
+            <a:endParaRPr lang="en-US" sz="2400" dirty="0">
+              <a:solidFill>
+                <a:schemeClr val="accent6">
+                  <a:lumMod val="60000"/>
+                  <a:lumOff val="40000"/>
+                </a:schemeClr>
+              </a:solidFill>
+            </a:endParaRPr>
+          </a:p>
+          <a:p>
+            <a:pPr>
+              <a:buNone/>
+            </a:pPr>
+            <a:endParaRPr lang="en-US" sz="2400" dirty="0">
+              <a:solidFill>
+                <a:schemeClr val="accent6">
+                  <a:lumMod val="60000"/>
+                  <a:lumOff val="40000"/>
+                </a:schemeClr>
+              </a:solidFill>
+            </a:endParaRPr>
+          </a:p>
+          <a:p>
+            <a:pPr>
+              <a:buNone/>
+            </a:pPr>
+            <a:r>
+              <a:rPr lang="en-US" sz="2400" dirty="0">
+                <a:solidFill>
+                  <a:schemeClr val="accent6">
+                    <a:lumMod val="60000"/>
+                    <a:lumOff val="40000"/>
+                  </a:schemeClr>
+                </a:solidFill>
+              </a:rPr>
+              <a:t>Example: </a:t>
+            </a:r>
+            <a:r>
+              <a:rPr lang="en-US" sz="2400" i="1" dirty="0">
+                <a:solidFill>
+                  <a:schemeClr val="accent6">
+                    <a:lumMod val="60000"/>
+                    <a:lumOff val="40000"/>
+                  </a:schemeClr>
+                </a:solidFill>
+              </a:rPr>
+              <a:t>“Book a ticket to Noida with 1</a:t>
+            </a:r>
+            <a:r>
+              <a:rPr lang="en-US" sz="2400" i="1" baseline="30000" dirty="0">
+                <a:solidFill>
+                  <a:schemeClr val="accent6">
+                    <a:lumMod val="60000"/>
+                    <a:lumOff val="40000"/>
+                  </a:schemeClr>
+                </a:solidFill>
+              </a:rPr>
+              <a:t>st</a:t>
+            </a:r>
+            <a:r>
+              <a:rPr lang="en-US" sz="2400" i="1" dirty="0">
+                <a:solidFill>
+                  <a:schemeClr val="accent6">
+                    <a:lumMod val="60000"/>
+                    <a:lumOff val="40000"/>
+                  </a:schemeClr>
+                </a:solidFill>
+              </a:rPr>
+              <a:t> class AC”</a:t>
+            </a:r>
+          </a:p>
+        </p:txBody>
+      </p:sp>
+      <p:sp>
+        <p:nvSpPr>
+          <p:cNvPr id="20" name="TextBox 19">
+            <a:extLst>
+              <a:ext uri="{FF2B5EF4-FFF2-40B4-BE49-F238E27FC236}">
+                <a16:creationId xmlns:a16="http://schemas.microsoft.com/office/drawing/2014/main" id="{DB8D8DAF-6EC6-2045-3640-27718EFEE326}"/>
+              </a:ext>
+            </a:extLst>
+          </p:cNvPr>
+          <p:cNvSpPr txBox="1"/>
+          <p:nvPr/>
+        </p:nvSpPr>
+        <p:spPr>
+          <a:xfrm>
+            <a:off x="304020" y="3527549"/>
+            <a:ext cx="6190488" cy="461665"/>
+          </a:xfrm>
+          <a:prstGeom prst="rect">
+            <a:avLst/>
+          </a:prstGeom>
+          <a:noFill/>
+        </p:spPr>
+        <p:txBody>
+          <a:bodyPr wrap="square">
+            <a:spAutoFit/>
+          </a:bodyPr>
+          <a:lstStyle/>
+          <a:p>
+            <a:pPr>
+              <a:buNone/>
+            </a:pPr>
+            <a:r>
+              <a:rPr lang="en-US" sz="2400" dirty="0">
+                <a:solidFill>
+                  <a:schemeClr val="accent6">
+                    <a:lumMod val="60000"/>
+                    <a:lumOff val="40000"/>
+                  </a:schemeClr>
+                </a:solidFill>
+              </a:rPr>
+              <a:t>The workflow of an agent:</a:t>
+            </a:r>
+          </a:p>
+        </p:txBody>
+      </p:sp>
     </p:spTree>
     <p:extLst>
       <p:ext uri="{BB962C8B-B14F-4D97-AF65-F5344CB8AC3E}">
@@ -19181,1110 +18818,6 @@
           </a:p>
         </p:txBody>
       </p:sp>
-      <p:grpSp>
-        <p:nvGrpSpPr>
-          <p:cNvPr id="16" name="Group 15">
-            <a:extLst>
-              <a:ext uri="{FF2B5EF4-FFF2-40B4-BE49-F238E27FC236}">
-                <a16:creationId xmlns:a16="http://schemas.microsoft.com/office/drawing/2014/main" id="{AC2192ED-7DC2-AA4D-EBCF-01BF2B450628}"/>
-              </a:ext>
-            </a:extLst>
-          </p:cNvPr>
-          <p:cNvGrpSpPr/>
-          <p:nvPr/>
-        </p:nvGrpSpPr>
-        <p:grpSpPr>
-          <a:xfrm>
-            <a:off x="8079624" y="3717576"/>
-            <a:ext cx="559080" cy="181080"/>
-            <a:chOff x="8079624" y="3717576"/>
-            <a:chExt cx="559080" cy="181080"/>
-          </a:xfrm>
-        </p:grpSpPr>
-        <mc:AlternateContent xmlns:mc="http://schemas.openxmlformats.org/markup-compatibility/2006" xmlns:p14="http://schemas.microsoft.com/office/powerpoint/2010/main">
-          <mc:Choice Requires="p14">
-            <p:contentPart p14:bwMode="auto" r:id="rId2">
-              <p14:nvContentPartPr>
-                <p14:cNvPr id="2" name="Ink 1">
-                  <a:extLst>
-                    <a:ext uri="{FF2B5EF4-FFF2-40B4-BE49-F238E27FC236}">
-                      <a16:creationId xmlns:a16="http://schemas.microsoft.com/office/drawing/2014/main" id="{5994BAE7-770B-3A03-1765-DF5F772A8454}"/>
-                    </a:ext>
-                  </a:extLst>
-                </p14:cNvPr>
-                <p14:cNvContentPartPr/>
-                <p14:nvPr/>
-              </p14:nvContentPartPr>
-              <p14:xfrm>
-                <a:off x="8079624" y="3729816"/>
-                <a:ext cx="280080" cy="25200"/>
-              </p14:xfrm>
-            </p:contentPart>
-          </mc:Choice>
-          <mc:Fallback xmlns="">
-            <p:pic>
-              <p:nvPicPr>
-                <p:cNvPr id="2" name="Ink 1">
-                  <a:extLst>
-                    <a:ext uri="{FF2B5EF4-FFF2-40B4-BE49-F238E27FC236}">
-                      <a16:creationId xmlns:a16="http://schemas.microsoft.com/office/drawing/2014/main" id="{5994BAE7-770B-3A03-1765-DF5F772A8454}"/>
-                    </a:ext>
-                  </a:extLst>
-                </p:cNvPr>
-                <p:cNvPicPr/>
-                <p:nvPr/>
-              </p:nvPicPr>
-              <p:blipFill>
-                <a:blip r:embed="rId4"/>
-                <a:stretch>
-                  <a:fillRect/>
-                </a:stretch>
-              </p:blipFill>
-              <p:spPr>
-                <a:xfrm>
-                  <a:off x="8061624" y="3712176"/>
-                  <a:ext cx="315720" cy="60840"/>
-                </a:xfrm>
-                <a:prstGeom prst="rect">
-                  <a:avLst/>
-                </a:prstGeom>
-              </p:spPr>
-            </p:pic>
-          </mc:Fallback>
-        </mc:AlternateContent>
-        <mc:AlternateContent xmlns:mc="http://schemas.openxmlformats.org/markup-compatibility/2006" xmlns:p14="http://schemas.microsoft.com/office/powerpoint/2010/main">
-          <mc:Choice Requires="p14">
-            <p:contentPart p14:bwMode="auto" r:id="rId5">
-              <p14:nvContentPartPr>
-                <p14:cNvPr id="3" name="Ink 2">
-                  <a:extLst>
-                    <a:ext uri="{FF2B5EF4-FFF2-40B4-BE49-F238E27FC236}">
-                      <a16:creationId xmlns:a16="http://schemas.microsoft.com/office/drawing/2014/main" id="{2AA1A7B9-3423-3153-741E-67D88E93A361}"/>
-                    </a:ext>
-                  </a:extLst>
-                </p14:cNvPr>
-                <p14:cNvContentPartPr/>
-                <p14:nvPr/>
-              </p14:nvContentPartPr>
-              <p14:xfrm>
-                <a:off x="8190504" y="3782016"/>
-                <a:ext cx="49680" cy="112680"/>
-              </p14:xfrm>
-            </p:contentPart>
-          </mc:Choice>
-          <mc:Fallback xmlns="">
-            <p:pic>
-              <p:nvPicPr>
-                <p:cNvPr id="3" name="Ink 2">
-                  <a:extLst>
-                    <a:ext uri="{FF2B5EF4-FFF2-40B4-BE49-F238E27FC236}">
-                      <a16:creationId xmlns:a16="http://schemas.microsoft.com/office/drawing/2014/main" id="{2AA1A7B9-3423-3153-741E-67D88E93A361}"/>
-                    </a:ext>
-                  </a:extLst>
-                </p:cNvPr>
-                <p:cNvPicPr/>
-                <p:nvPr/>
-              </p:nvPicPr>
-              <p:blipFill>
-                <a:blip r:embed="rId6"/>
-                <a:stretch>
-                  <a:fillRect/>
-                </a:stretch>
-              </p:blipFill>
-              <p:spPr>
-                <a:xfrm>
-                  <a:off x="8172504" y="3764016"/>
-                  <a:ext cx="85320" cy="148320"/>
-                </a:xfrm>
-                <a:prstGeom prst="rect">
-                  <a:avLst/>
-                </a:prstGeom>
-              </p:spPr>
-            </p:pic>
-          </mc:Fallback>
-        </mc:AlternateContent>
-        <mc:AlternateContent xmlns:mc="http://schemas.openxmlformats.org/markup-compatibility/2006" xmlns:p14="http://schemas.microsoft.com/office/powerpoint/2010/main">
-          <mc:Choice Requires="p14">
-            <p:contentPart p14:bwMode="auto" r:id="rId7">
-              <p14:nvContentPartPr>
-                <p14:cNvPr id="5" name="Ink 4">
-                  <a:extLst>
-                    <a:ext uri="{FF2B5EF4-FFF2-40B4-BE49-F238E27FC236}">
-                      <a16:creationId xmlns:a16="http://schemas.microsoft.com/office/drawing/2014/main" id="{A6BA7692-AC90-ADD7-403C-97B6B69D941B}"/>
-                    </a:ext>
-                  </a:extLst>
-                </p14:cNvPr>
-                <p14:cNvContentPartPr/>
-                <p14:nvPr/>
-              </p14:nvContentPartPr>
-              <p14:xfrm>
-                <a:off x="8350344" y="3815136"/>
-                <a:ext cx="82440" cy="68760"/>
-              </p14:xfrm>
-            </p:contentPart>
-          </mc:Choice>
-          <mc:Fallback xmlns="">
-            <p:pic>
-              <p:nvPicPr>
-                <p:cNvPr id="5" name="Ink 4">
-                  <a:extLst>
-                    <a:ext uri="{FF2B5EF4-FFF2-40B4-BE49-F238E27FC236}">
-                      <a16:creationId xmlns:a16="http://schemas.microsoft.com/office/drawing/2014/main" id="{A6BA7692-AC90-ADD7-403C-97B6B69D941B}"/>
-                    </a:ext>
-                  </a:extLst>
-                </p:cNvPr>
-                <p:cNvPicPr/>
-                <p:nvPr/>
-              </p:nvPicPr>
-              <p:blipFill>
-                <a:blip r:embed="rId8"/>
-                <a:stretch>
-                  <a:fillRect/>
-                </a:stretch>
-              </p:blipFill>
-              <p:spPr>
-                <a:xfrm>
-                  <a:off x="8332344" y="3797496"/>
-                  <a:ext cx="118080" cy="104400"/>
-                </a:xfrm>
-                <a:prstGeom prst="rect">
-                  <a:avLst/>
-                </a:prstGeom>
-              </p:spPr>
-            </p:pic>
-          </mc:Fallback>
-        </mc:AlternateContent>
-        <mc:AlternateContent xmlns:mc="http://schemas.openxmlformats.org/markup-compatibility/2006" xmlns:p14="http://schemas.microsoft.com/office/powerpoint/2010/main">
-          <mc:Choice Requires="p14">
-            <p:contentPart p14:bwMode="auto" r:id="rId9">
-              <p14:nvContentPartPr>
-                <p14:cNvPr id="7" name="Ink 6">
-                  <a:extLst>
-                    <a:ext uri="{FF2B5EF4-FFF2-40B4-BE49-F238E27FC236}">
-                      <a16:creationId xmlns:a16="http://schemas.microsoft.com/office/drawing/2014/main" id="{B8562691-23A5-0CF3-075D-F7B0AC07622F}"/>
-                    </a:ext>
-                  </a:extLst>
-                </p14:cNvPr>
-                <p14:cNvContentPartPr/>
-                <p14:nvPr/>
-              </p14:nvContentPartPr>
-              <p14:xfrm>
-                <a:off x="8486424" y="3824136"/>
-                <a:ext cx="88560" cy="70560"/>
-              </p14:xfrm>
-            </p:contentPart>
-          </mc:Choice>
-          <mc:Fallback xmlns="">
-            <p:pic>
-              <p:nvPicPr>
-                <p:cNvPr id="7" name="Ink 6">
-                  <a:extLst>
-                    <a:ext uri="{FF2B5EF4-FFF2-40B4-BE49-F238E27FC236}">
-                      <a16:creationId xmlns:a16="http://schemas.microsoft.com/office/drawing/2014/main" id="{B8562691-23A5-0CF3-075D-F7B0AC07622F}"/>
-                    </a:ext>
-                  </a:extLst>
-                </p:cNvPr>
-                <p:cNvPicPr/>
-                <p:nvPr/>
-              </p:nvPicPr>
-              <p:blipFill>
-                <a:blip r:embed="rId10"/>
-                <a:stretch>
-                  <a:fillRect/>
-                </a:stretch>
-              </p:blipFill>
-              <p:spPr>
-                <a:xfrm>
-                  <a:off x="8468424" y="3806496"/>
-                  <a:ext cx="124200" cy="106200"/>
-                </a:xfrm>
-                <a:prstGeom prst="rect">
-                  <a:avLst/>
-                </a:prstGeom>
-              </p:spPr>
-            </p:pic>
-          </mc:Fallback>
-        </mc:AlternateContent>
-        <mc:AlternateContent xmlns:mc="http://schemas.openxmlformats.org/markup-compatibility/2006" xmlns:p14="http://schemas.microsoft.com/office/powerpoint/2010/main">
-          <mc:Choice Requires="p14">
-            <p:contentPart p14:bwMode="auto" r:id="rId11">
-              <p14:nvContentPartPr>
-                <p14:cNvPr id="8" name="Ink 7">
-                  <a:extLst>
-                    <a:ext uri="{FF2B5EF4-FFF2-40B4-BE49-F238E27FC236}">
-                      <a16:creationId xmlns:a16="http://schemas.microsoft.com/office/drawing/2014/main" id="{892249E4-AE02-B37B-2BEE-3F8B68C2B085}"/>
-                    </a:ext>
-                  </a:extLst>
-                </p14:cNvPr>
-                <p14:cNvContentPartPr/>
-                <p14:nvPr/>
-              </p14:nvContentPartPr>
-              <p14:xfrm>
-                <a:off x="8616744" y="3717576"/>
-                <a:ext cx="21960" cy="181080"/>
-              </p14:xfrm>
-            </p:contentPart>
-          </mc:Choice>
-          <mc:Fallback xmlns="">
-            <p:pic>
-              <p:nvPicPr>
-                <p:cNvPr id="8" name="Ink 7">
-                  <a:extLst>
-                    <a:ext uri="{FF2B5EF4-FFF2-40B4-BE49-F238E27FC236}">
-                      <a16:creationId xmlns:a16="http://schemas.microsoft.com/office/drawing/2014/main" id="{892249E4-AE02-B37B-2BEE-3F8B68C2B085}"/>
-                    </a:ext>
-                  </a:extLst>
-                </p:cNvPr>
-                <p:cNvPicPr/>
-                <p:nvPr/>
-              </p:nvPicPr>
-              <p:blipFill>
-                <a:blip r:embed="rId12"/>
-                <a:stretch>
-                  <a:fillRect/>
-                </a:stretch>
-              </p:blipFill>
-              <p:spPr>
-                <a:xfrm>
-                  <a:off x="8599104" y="3699576"/>
-                  <a:ext cx="57600" cy="216720"/>
-                </a:xfrm>
-                <a:prstGeom prst="rect">
-                  <a:avLst/>
-                </a:prstGeom>
-              </p:spPr>
-            </p:pic>
-          </mc:Fallback>
-        </mc:AlternateContent>
-      </p:grpSp>
-      <p:grpSp>
-        <p:nvGrpSpPr>
-          <p:cNvPr id="15" name="Group 14">
-            <a:extLst>
-              <a:ext uri="{FF2B5EF4-FFF2-40B4-BE49-F238E27FC236}">
-                <a16:creationId xmlns:a16="http://schemas.microsoft.com/office/drawing/2014/main" id="{3ED3C637-A0AA-32BC-2D51-D50C6479BA1F}"/>
-              </a:ext>
-            </a:extLst>
-          </p:cNvPr>
-          <p:cNvGrpSpPr/>
-          <p:nvPr/>
-        </p:nvGrpSpPr>
-        <p:grpSpPr>
-          <a:xfrm>
-            <a:off x="10320984" y="3738816"/>
-            <a:ext cx="758880" cy="282960"/>
-            <a:chOff x="10320984" y="3738816"/>
-            <a:chExt cx="758880" cy="282960"/>
-          </a:xfrm>
-        </p:grpSpPr>
-        <mc:AlternateContent xmlns:mc="http://schemas.openxmlformats.org/markup-compatibility/2006" xmlns:p14="http://schemas.microsoft.com/office/powerpoint/2010/main">
-          <mc:Choice Requires="p14">
-            <p:contentPart p14:bwMode="auto" r:id="rId13">
-              <p14:nvContentPartPr>
-                <p14:cNvPr id="9" name="Ink 8">
-                  <a:extLst>
-                    <a:ext uri="{FF2B5EF4-FFF2-40B4-BE49-F238E27FC236}">
-                      <a16:creationId xmlns:a16="http://schemas.microsoft.com/office/drawing/2014/main" id="{0826EA8C-70EF-E1F8-DB7B-9CF12BC8A0A2}"/>
-                    </a:ext>
-                  </a:extLst>
-                </p14:cNvPr>
-                <p14:cNvContentPartPr/>
-                <p14:nvPr/>
-              </p14:nvContentPartPr>
-              <p14:xfrm>
-                <a:off x="10320984" y="3758976"/>
-                <a:ext cx="252360" cy="13680"/>
-              </p14:xfrm>
-            </p:contentPart>
-          </mc:Choice>
-          <mc:Fallback xmlns="">
-            <p:pic>
-              <p:nvPicPr>
-                <p:cNvPr id="9" name="Ink 8">
-                  <a:extLst>
-                    <a:ext uri="{FF2B5EF4-FFF2-40B4-BE49-F238E27FC236}">
-                      <a16:creationId xmlns:a16="http://schemas.microsoft.com/office/drawing/2014/main" id="{0826EA8C-70EF-E1F8-DB7B-9CF12BC8A0A2}"/>
-                    </a:ext>
-                  </a:extLst>
-                </p:cNvPr>
-                <p:cNvPicPr/>
-                <p:nvPr/>
-              </p:nvPicPr>
-              <p:blipFill>
-                <a:blip r:embed="rId14"/>
-                <a:stretch>
-                  <a:fillRect/>
-                </a:stretch>
-              </p:blipFill>
-              <p:spPr>
-                <a:xfrm>
-                  <a:off x="10302984" y="3741336"/>
-                  <a:ext cx="288000" cy="49320"/>
-                </a:xfrm>
-                <a:prstGeom prst="rect">
-                  <a:avLst/>
-                </a:prstGeom>
-              </p:spPr>
-            </p:pic>
-          </mc:Fallback>
-        </mc:AlternateContent>
-        <mc:AlternateContent xmlns:mc="http://schemas.openxmlformats.org/markup-compatibility/2006" xmlns:p14="http://schemas.microsoft.com/office/powerpoint/2010/main">
-          <mc:Choice Requires="p14">
-            <p:contentPart p14:bwMode="auto" r:id="rId15">
-              <p14:nvContentPartPr>
-                <p14:cNvPr id="11" name="Ink 10">
-                  <a:extLst>
-                    <a:ext uri="{FF2B5EF4-FFF2-40B4-BE49-F238E27FC236}">
-                      <a16:creationId xmlns:a16="http://schemas.microsoft.com/office/drawing/2014/main" id="{410A0E0E-0D79-8ECF-41DA-5991452B3273}"/>
-                    </a:ext>
-                  </a:extLst>
-                </p14:cNvPr>
-                <p14:cNvContentPartPr/>
-                <p14:nvPr/>
-              </p14:nvContentPartPr>
-              <p14:xfrm>
-                <a:off x="10454544" y="3796416"/>
-                <a:ext cx="55440" cy="132120"/>
-              </p14:xfrm>
-            </p:contentPart>
-          </mc:Choice>
-          <mc:Fallback xmlns="">
-            <p:pic>
-              <p:nvPicPr>
-                <p:cNvPr id="11" name="Ink 10">
-                  <a:extLst>
-                    <a:ext uri="{FF2B5EF4-FFF2-40B4-BE49-F238E27FC236}">
-                      <a16:creationId xmlns:a16="http://schemas.microsoft.com/office/drawing/2014/main" id="{410A0E0E-0D79-8ECF-41DA-5991452B3273}"/>
-                    </a:ext>
-                  </a:extLst>
-                </p:cNvPr>
-                <p:cNvPicPr/>
-                <p:nvPr/>
-              </p:nvPicPr>
-              <p:blipFill>
-                <a:blip r:embed="rId16"/>
-                <a:stretch>
-                  <a:fillRect/>
-                </a:stretch>
-              </p:blipFill>
-              <p:spPr>
-                <a:xfrm>
-                  <a:off x="10436544" y="3778776"/>
-                  <a:ext cx="91080" cy="167760"/>
-                </a:xfrm>
-                <a:prstGeom prst="rect">
-                  <a:avLst/>
-                </a:prstGeom>
-              </p:spPr>
-            </p:pic>
-          </mc:Fallback>
-        </mc:AlternateContent>
-        <mc:AlternateContent xmlns:mc="http://schemas.openxmlformats.org/markup-compatibility/2006" xmlns:p14="http://schemas.microsoft.com/office/powerpoint/2010/main">
-          <mc:Choice Requires="p14">
-            <p:contentPart p14:bwMode="auto" r:id="rId17">
-              <p14:nvContentPartPr>
-                <p14:cNvPr id="12" name="Ink 11">
-                  <a:extLst>
-                    <a:ext uri="{FF2B5EF4-FFF2-40B4-BE49-F238E27FC236}">
-                      <a16:creationId xmlns:a16="http://schemas.microsoft.com/office/drawing/2014/main" id="{DAB75736-98EB-0C51-0F44-ACB6086F3197}"/>
-                    </a:ext>
-                  </a:extLst>
-                </p14:cNvPr>
-                <p14:cNvContentPartPr/>
-                <p14:nvPr/>
-              </p14:nvContentPartPr>
-              <p14:xfrm>
-                <a:off x="10618344" y="3858696"/>
-                <a:ext cx="128880" cy="72360"/>
-              </p14:xfrm>
-            </p:contentPart>
-          </mc:Choice>
-          <mc:Fallback xmlns="">
-            <p:pic>
-              <p:nvPicPr>
-                <p:cNvPr id="12" name="Ink 11">
-                  <a:extLst>
-                    <a:ext uri="{FF2B5EF4-FFF2-40B4-BE49-F238E27FC236}">
-                      <a16:creationId xmlns:a16="http://schemas.microsoft.com/office/drawing/2014/main" id="{DAB75736-98EB-0C51-0F44-ACB6086F3197}"/>
-                    </a:ext>
-                  </a:extLst>
-                </p:cNvPr>
-                <p:cNvPicPr/>
-                <p:nvPr/>
-              </p:nvPicPr>
-              <p:blipFill>
-                <a:blip r:embed="rId18"/>
-                <a:stretch>
-                  <a:fillRect/>
-                </a:stretch>
-              </p:blipFill>
-              <p:spPr>
-                <a:xfrm>
-                  <a:off x="10600704" y="3841056"/>
-                  <a:ext cx="164520" cy="108000"/>
-                </a:xfrm>
-                <a:prstGeom prst="rect">
-                  <a:avLst/>
-                </a:prstGeom>
-              </p:spPr>
-            </p:pic>
-          </mc:Fallback>
-        </mc:AlternateContent>
-        <mc:AlternateContent xmlns:mc="http://schemas.openxmlformats.org/markup-compatibility/2006" xmlns:p14="http://schemas.microsoft.com/office/powerpoint/2010/main">
-          <mc:Choice Requires="p14">
-            <p:contentPart p14:bwMode="auto" r:id="rId19">
-              <p14:nvContentPartPr>
-                <p14:cNvPr id="13" name="Ink 12">
-                  <a:extLst>
-                    <a:ext uri="{FF2B5EF4-FFF2-40B4-BE49-F238E27FC236}">
-                      <a16:creationId xmlns:a16="http://schemas.microsoft.com/office/drawing/2014/main" id="{2E29F467-E273-82BE-96EA-C2A5780B6EEE}"/>
-                    </a:ext>
-                  </a:extLst>
-                </p14:cNvPr>
-                <p14:cNvContentPartPr/>
-                <p14:nvPr/>
-              </p14:nvContentPartPr>
-              <p14:xfrm>
-                <a:off x="10861704" y="3869496"/>
-                <a:ext cx="97200" cy="75600"/>
-              </p14:xfrm>
-            </p:contentPart>
-          </mc:Choice>
-          <mc:Fallback xmlns="">
-            <p:pic>
-              <p:nvPicPr>
-                <p:cNvPr id="13" name="Ink 12">
-                  <a:extLst>
-                    <a:ext uri="{FF2B5EF4-FFF2-40B4-BE49-F238E27FC236}">
-                      <a16:creationId xmlns:a16="http://schemas.microsoft.com/office/drawing/2014/main" id="{2E29F467-E273-82BE-96EA-C2A5780B6EEE}"/>
-                    </a:ext>
-                  </a:extLst>
-                </p:cNvPr>
-                <p:cNvPicPr/>
-                <p:nvPr/>
-              </p:nvPicPr>
-              <p:blipFill>
-                <a:blip r:embed="rId20"/>
-                <a:stretch>
-                  <a:fillRect/>
-                </a:stretch>
-              </p:blipFill>
-              <p:spPr>
-                <a:xfrm>
-                  <a:off x="10843704" y="3851496"/>
-                  <a:ext cx="132840" cy="111240"/>
-                </a:xfrm>
-                <a:prstGeom prst="rect">
-                  <a:avLst/>
-                </a:prstGeom>
-              </p:spPr>
-            </p:pic>
-          </mc:Fallback>
-        </mc:AlternateContent>
-        <mc:AlternateContent xmlns:mc="http://schemas.openxmlformats.org/markup-compatibility/2006" xmlns:p14="http://schemas.microsoft.com/office/powerpoint/2010/main">
-          <mc:Choice Requires="p14">
-            <p:contentPart p14:bwMode="auto" r:id="rId21">
-              <p14:nvContentPartPr>
-                <p14:cNvPr id="14" name="Ink 13">
-                  <a:extLst>
-                    <a:ext uri="{FF2B5EF4-FFF2-40B4-BE49-F238E27FC236}">
-                      <a16:creationId xmlns:a16="http://schemas.microsoft.com/office/drawing/2014/main" id="{8763CD9A-04F7-5DCF-C8EE-72D25AB2EE78}"/>
-                    </a:ext>
-                  </a:extLst>
-                </p14:cNvPr>
-                <p14:cNvContentPartPr/>
-                <p14:nvPr/>
-              </p14:nvContentPartPr>
-              <p14:xfrm>
-                <a:off x="11055744" y="3738816"/>
-                <a:ext cx="24120" cy="282960"/>
-              </p14:xfrm>
-            </p:contentPart>
-          </mc:Choice>
-          <mc:Fallback xmlns="">
-            <p:pic>
-              <p:nvPicPr>
-                <p:cNvPr id="14" name="Ink 13">
-                  <a:extLst>
-                    <a:ext uri="{FF2B5EF4-FFF2-40B4-BE49-F238E27FC236}">
-                      <a16:creationId xmlns:a16="http://schemas.microsoft.com/office/drawing/2014/main" id="{8763CD9A-04F7-5DCF-C8EE-72D25AB2EE78}"/>
-                    </a:ext>
-                  </a:extLst>
-                </p:cNvPr>
-                <p:cNvPicPr/>
-                <p:nvPr/>
-              </p:nvPicPr>
-              <p:blipFill>
-                <a:blip r:embed="rId22"/>
-                <a:stretch>
-                  <a:fillRect/>
-                </a:stretch>
-              </p:blipFill>
-              <p:spPr>
-                <a:xfrm>
-                  <a:off x="11037744" y="3720816"/>
-                  <a:ext cx="59760" cy="318600"/>
-                </a:xfrm>
-                <a:prstGeom prst="rect">
-                  <a:avLst/>
-                </a:prstGeom>
-              </p:spPr>
-            </p:pic>
-          </mc:Fallback>
-        </mc:AlternateContent>
-      </p:grpSp>
-      <p:grpSp>
-        <p:nvGrpSpPr>
-          <p:cNvPr id="23" name="Group 22">
-            <a:extLst>
-              <a:ext uri="{FF2B5EF4-FFF2-40B4-BE49-F238E27FC236}">
-                <a16:creationId xmlns:a16="http://schemas.microsoft.com/office/drawing/2014/main" id="{5F47BD0F-5A5B-CF9F-D951-037492FF1890}"/>
-              </a:ext>
-            </a:extLst>
-          </p:cNvPr>
-          <p:cNvGrpSpPr/>
-          <p:nvPr/>
-        </p:nvGrpSpPr>
-        <p:grpSpPr>
-          <a:xfrm>
-            <a:off x="8151624" y="6055056"/>
-            <a:ext cx="486360" cy="241560"/>
-            <a:chOff x="8151624" y="6055056"/>
-            <a:chExt cx="486360" cy="241560"/>
-          </a:xfrm>
-        </p:grpSpPr>
-        <mc:AlternateContent xmlns:mc="http://schemas.openxmlformats.org/markup-compatibility/2006" xmlns:p14="http://schemas.microsoft.com/office/powerpoint/2010/main">
-          <mc:Choice Requires="p14">
-            <p:contentPart p14:bwMode="auto" r:id="rId23">
-              <p14:nvContentPartPr>
-                <p14:cNvPr id="17" name="Ink 16">
-                  <a:extLst>
-                    <a:ext uri="{FF2B5EF4-FFF2-40B4-BE49-F238E27FC236}">
-                      <a16:creationId xmlns:a16="http://schemas.microsoft.com/office/drawing/2014/main" id="{841C2656-6362-BC91-FA6A-01140C152E03}"/>
-                    </a:ext>
-                  </a:extLst>
-                </p14:cNvPr>
-                <p14:cNvContentPartPr/>
-                <p14:nvPr/>
-              </p14:nvContentPartPr>
-              <p14:xfrm>
-                <a:off x="8151624" y="6055056"/>
-                <a:ext cx="209880" cy="33120"/>
-              </p14:xfrm>
-            </p:contentPart>
-          </mc:Choice>
-          <mc:Fallback xmlns="">
-            <p:pic>
-              <p:nvPicPr>
-                <p:cNvPr id="17" name="Ink 16">
-                  <a:extLst>
-                    <a:ext uri="{FF2B5EF4-FFF2-40B4-BE49-F238E27FC236}">
-                      <a16:creationId xmlns:a16="http://schemas.microsoft.com/office/drawing/2014/main" id="{841C2656-6362-BC91-FA6A-01140C152E03}"/>
-                    </a:ext>
-                  </a:extLst>
-                </p:cNvPr>
-                <p:cNvPicPr/>
-                <p:nvPr/>
-              </p:nvPicPr>
-              <p:blipFill>
-                <a:blip r:embed="rId24"/>
-                <a:stretch>
-                  <a:fillRect/>
-                </a:stretch>
-              </p:blipFill>
-              <p:spPr>
-                <a:xfrm>
-                  <a:off x="8133624" y="6037416"/>
-                  <a:ext cx="245520" cy="68760"/>
-                </a:xfrm>
-                <a:prstGeom prst="rect">
-                  <a:avLst/>
-                </a:prstGeom>
-              </p:spPr>
-            </p:pic>
-          </mc:Fallback>
-        </mc:AlternateContent>
-        <mc:AlternateContent xmlns:mc="http://schemas.openxmlformats.org/markup-compatibility/2006" xmlns:p14="http://schemas.microsoft.com/office/powerpoint/2010/main">
-          <mc:Choice Requires="p14">
-            <p:contentPart p14:bwMode="auto" r:id="rId25">
-              <p14:nvContentPartPr>
-                <p14:cNvPr id="18" name="Ink 17">
-                  <a:extLst>
-                    <a:ext uri="{FF2B5EF4-FFF2-40B4-BE49-F238E27FC236}">
-                      <a16:creationId xmlns:a16="http://schemas.microsoft.com/office/drawing/2014/main" id="{68567494-E8DD-6D67-75EE-A4011040ECAD}"/>
-                    </a:ext>
-                  </a:extLst>
-                </p14:cNvPr>
-                <p14:cNvContentPartPr/>
-                <p14:nvPr/>
-              </p14:nvContentPartPr>
-              <p14:xfrm>
-                <a:off x="8265384" y="6081696"/>
-                <a:ext cx="18360" cy="167040"/>
-              </p14:xfrm>
-            </p:contentPart>
-          </mc:Choice>
-          <mc:Fallback xmlns="">
-            <p:pic>
-              <p:nvPicPr>
-                <p:cNvPr id="18" name="Ink 17">
-                  <a:extLst>
-                    <a:ext uri="{FF2B5EF4-FFF2-40B4-BE49-F238E27FC236}">
-                      <a16:creationId xmlns:a16="http://schemas.microsoft.com/office/drawing/2014/main" id="{68567494-E8DD-6D67-75EE-A4011040ECAD}"/>
-                    </a:ext>
-                  </a:extLst>
-                </p:cNvPr>
-                <p:cNvPicPr/>
-                <p:nvPr/>
-              </p:nvPicPr>
-              <p:blipFill>
-                <a:blip r:embed="rId26"/>
-                <a:stretch>
-                  <a:fillRect/>
-                </a:stretch>
-              </p:blipFill>
-              <p:spPr>
-                <a:xfrm>
-                  <a:off x="8247384" y="6063696"/>
-                  <a:ext cx="54000" cy="202680"/>
-                </a:xfrm>
-                <a:prstGeom prst="rect">
-                  <a:avLst/>
-                </a:prstGeom>
-              </p:spPr>
-            </p:pic>
-          </mc:Fallback>
-        </mc:AlternateContent>
-        <mc:AlternateContent xmlns:mc="http://schemas.openxmlformats.org/markup-compatibility/2006" xmlns:p14="http://schemas.microsoft.com/office/powerpoint/2010/main">
-          <mc:Choice Requires="p14">
-            <p:contentPart p14:bwMode="auto" r:id="rId27">
-              <p14:nvContentPartPr>
-                <p14:cNvPr id="20" name="Ink 19">
-                  <a:extLst>
-                    <a:ext uri="{FF2B5EF4-FFF2-40B4-BE49-F238E27FC236}">
-                      <a16:creationId xmlns:a16="http://schemas.microsoft.com/office/drawing/2014/main" id="{C4026110-10D3-0613-B1AD-AE664229D175}"/>
-                    </a:ext>
-                  </a:extLst>
-                </p14:cNvPr>
-                <p14:cNvContentPartPr/>
-                <p14:nvPr/>
-              </p14:nvContentPartPr>
-              <p14:xfrm>
-                <a:off x="8367264" y="6161976"/>
-                <a:ext cx="69480" cy="77040"/>
-              </p14:xfrm>
-            </p:contentPart>
-          </mc:Choice>
-          <mc:Fallback xmlns="">
-            <p:pic>
-              <p:nvPicPr>
-                <p:cNvPr id="20" name="Ink 19">
-                  <a:extLst>
-                    <a:ext uri="{FF2B5EF4-FFF2-40B4-BE49-F238E27FC236}">
-                      <a16:creationId xmlns:a16="http://schemas.microsoft.com/office/drawing/2014/main" id="{C4026110-10D3-0613-B1AD-AE664229D175}"/>
-                    </a:ext>
-                  </a:extLst>
-                </p:cNvPr>
-                <p:cNvPicPr/>
-                <p:nvPr/>
-              </p:nvPicPr>
-              <p:blipFill>
-                <a:blip r:embed="rId28"/>
-                <a:stretch>
-                  <a:fillRect/>
-                </a:stretch>
-              </p:blipFill>
-              <p:spPr>
-                <a:xfrm>
-                  <a:off x="8349624" y="6143976"/>
-                  <a:ext cx="105120" cy="112680"/>
-                </a:xfrm>
-                <a:prstGeom prst="rect">
-                  <a:avLst/>
-                </a:prstGeom>
-              </p:spPr>
-            </p:pic>
-          </mc:Fallback>
-        </mc:AlternateContent>
-        <mc:AlternateContent xmlns:mc="http://schemas.openxmlformats.org/markup-compatibility/2006" xmlns:p14="http://schemas.microsoft.com/office/powerpoint/2010/main">
-          <mc:Choice Requires="p14">
-            <p:contentPart p14:bwMode="auto" r:id="rId29">
-              <p14:nvContentPartPr>
-                <p14:cNvPr id="21" name="Ink 20">
-                  <a:extLst>
-                    <a:ext uri="{FF2B5EF4-FFF2-40B4-BE49-F238E27FC236}">
-                      <a16:creationId xmlns:a16="http://schemas.microsoft.com/office/drawing/2014/main" id="{B924AEC3-86DD-07F7-84B3-74D86CB38740}"/>
-                    </a:ext>
-                  </a:extLst>
-                </p14:cNvPr>
-                <p14:cNvContentPartPr/>
-                <p14:nvPr/>
-              </p14:nvContentPartPr>
-              <p14:xfrm>
-                <a:off x="8484264" y="6177816"/>
-                <a:ext cx="45360" cy="80280"/>
-              </p14:xfrm>
-            </p:contentPart>
-          </mc:Choice>
-          <mc:Fallback xmlns="">
-            <p:pic>
-              <p:nvPicPr>
-                <p:cNvPr id="21" name="Ink 20">
-                  <a:extLst>
-                    <a:ext uri="{FF2B5EF4-FFF2-40B4-BE49-F238E27FC236}">
-                      <a16:creationId xmlns:a16="http://schemas.microsoft.com/office/drawing/2014/main" id="{B924AEC3-86DD-07F7-84B3-74D86CB38740}"/>
-                    </a:ext>
-                  </a:extLst>
-                </p:cNvPr>
-                <p:cNvPicPr/>
-                <p:nvPr/>
-              </p:nvPicPr>
-              <p:blipFill>
-                <a:blip r:embed="rId30"/>
-                <a:stretch>
-                  <a:fillRect/>
-                </a:stretch>
-              </p:blipFill>
-              <p:spPr>
-                <a:xfrm>
-                  <a:off x="8466264" y="6160176"/>
-                  <a:ext cx="81000" cy="115920"/>
-                </a:xfrm>
-                <a:prstGeom prst="rect">
-                  <a:avLst/>
-                </a:prstGeom>
-              </p:spPr>
-            </p:pic>
-          </mc:Fallback>
-        </mc:AlternateContent>
-        <mc:AlternateContent xmlns:mc="http://schemas.openxmlformats.org/markup-compatibility/2006" xmlns:p14="http://schemas.microsoft.com/office/powerpoint/2010/main">
-          <mc:Choice Requires="p14">
-            <p:contentPart p14:bwMode="auto" r:id="rId31">
-              <p14:nvContentPartPr>
-                <p14:cNvPr id="22" name="Ink 21">
-                  <a:extLst>
-                    <a:ext uri="{FF2B5EF4-FFF2-40B4-BE49-F238E27FC236}">
-                      <a16:creationId xmlns:a16="http://schemas.microsoft.com/office/drawing/2014/main" id="{2AE3788D-E0DF-DBC6-0BCD-367E9BB5C472}"/>
-                    </a:ext>
-                  </a:extLst>
-                </p14:cNvPr>
-                <p14:cNvContentPartPr/>
-                <p14:nvPr/>
-              </p14:nvContentPartPr>
-              <p14:xfrm>
-                <a:off x="8593344" y="6065136"/>
-                <a:ext cx="44640" cy="231480"/>
-              </p14:xfrm>
-            </p:contentPart>
-          </mc:Choice>
-          <mc:Fallback xmlns="">
-            <p:pic>
-              <p:nvPicPr>
-                <p:cNvPr id="22" name="Ink 21">
-                  <a:extLst>
-                    <a:ext uri="{FF2B5EF4-FFF2-40B4-BE49-F238E27FC236}">
-                      <a16:creationId xmlns:a16="http://schemas.microsoft.com/office/drawing/2014/main" id="{2AE3788D-E0DF-DBC6-0BCD-367E9BB5C472}"/>
-                    </a:ext>
-                  </a:extLst>
-                </p:cNvPr>
-                <p:cNvPicPr/>
-                <p:nvPr/>
-              </p:nvPicPr>
-              <p:blipFill>
-                <a:blip r:embed="rId32"/>
-                <a:stretch>
-                  <a:fillRect/>
-                </a:stretch>
-              </p:blipFill>
-              <p:spPr>
-                <a:xfrm>
-                  <a:off x="8575344" y="6047136"/>
-                  <a:ext cx="80280" cy="267120"/>
-                </a:xfrm>
-                <a:prstGeom prst="rect">
-                  <a:avLst/>
-                </a:prstGeom>
-              </p:spPr>
-            </p:pic>
-          </mc:Fallback>
-        </mc:AlternateContent>
-      </p:grpSp>
-      <p:grpSp>
-        <p:nvGrpSpPr>
-          <p:cNvPr id="29" name="Group 28">
-            <a:extLst>
-              <a:ext uri="{FF2B5EF4-FFF2-40B4-BE49-F238E27FC236}">
-                <a16:creationId xmlns:a16="http://schemas.microsoft.com/office/drawing/2014/main" id="{62592EEB-87A5-D5A8-50DB-0A746CBCFB47}"/>
-              </a:ext>
-            </a:extLst>
-          </p:cNvPr>
-          <p:cNvGrpSpPr/>
-          <p:nvPr/>
-        </p:nvGrpSpPr>
-        <p:grpSpPr>
-          <a:xfrm>
-            <a:off x="10162944" y="6227496"/>
-            <a:ext cx="489240" cy="180360"/>
-            <a:chOff x="10162944" y="6227496"/>
-            <a:chExt cx="489240" cy="180360"/>
-          </a:xfrm>
-        </p:grpSpPr>
-        <mc:AlternateContent xmlns:mc="http://schemas.openxmlformats.org/markup-compatibility/2006" xmlns:p14="http://schemas.microsoft.com/office/powerpoint/2010/main">
-          <mc:Choice Requires="p14">
-            <p:contentPart p14:bwMode="auto" r:id="rId33">
-              <p14:nvContentPartPr>
-                <p14:cNvPr id="24" name="Ink 23">
-                  <a:extLst>
-                    <a:ext uri="{FF2B5EF4-FFF2-40B4-BE49-F238E27FC236}">
-                      <a16:creationId xmlns:a16="http://schemas.microsoft.com/office/drawing/2014/main" id="{3C433583-78C0-AD2D-0B46-E58C13BD248B}"/>
-                    </a:ext>
-                  </a:extLst>
-                </p14:cNvPr>
-                <p14:cNvContentPartPr/>
-                <p14:nvPr/>
-              </p14:nvContentPartPr>
-              <p14:xfrm>
-                <a:off x="10162944" y="6227496"/>
-                <a:ext cx="201960" cy="17280"/>
-              </p14:xfrm>
-            </p:contentPart>
-          </mc:Choice>
-          <mc:Fallback xmlns="">
-            <p:pic>
-              <p:nvPicPr>
-                <p:cNvPr id="24" name="Ink 23">
-                  <a:extLst>
-                    <a:ext uri="{FF2B5EF4-FFF2-40B4-BE49-F238E27FC236}">
-                      <a16:creationId xmlns:a16="http://schemas.microsoft.com/office/drawing/2014/main" id="{3C433583-78C0-AD2D-0B46-E58C13BD248B}"/>
-                    </a:ext>
-                  </a:extLst>
-                </p:cNvPr>
-                <p:cNvPicPr/>
-                <p:nvPr/>
-              </p:nvPicPr>
-              <p:blipFill>
-                <a:blip r:embed="rId34"/>
-                <a:stretch>
-                  <a:fillRect/>
-                </a:stretch>
-              </p:blipFill>
-              <p:spPr>
-                <a:xfrm>
-                  <a:off x="10145304" y="6209856"/>
-                  <a:ext cx="237600" cy="52920"/>
-                </a:xfrm>
-                <a:prstGeom prst="rect">
-                  <a:avLst/>
-                </a:prstGeom>
-              </p:spPr>
-            </p:pic>
-          </mc:Fallback>
-        </mc:AlternateContent>
-        <mc:AlternateContent xmlns:mc="http://schemas.openxmlformats.org/markup-compatibility/2006" xmlns:p14="http://schemas.microsoft.com/office/powerpoint/2010/main">
-          <mc:Choice Requires="p14">
-            <p:contentPart p14:bwMode="auto" r:id="rId35">
-              <p14:nvContentPartPr>
-                <p14:cNvPr id="25" name="Ink 24">
-                  <a:extLst>
-                    <a:ext uri="{FF2B5EF4-FFF2-40B4-BE49-F238E27FC236}">
-                      <a16:creationId xmlns:a16="http://schemas.microsoft.com/office/drawing/2014/main" id="{97544F39-4382-95D6-A3B8-9F567BC07034}"/>
-                    </a:ext>
-                  </a:extLst>
-                </p14:cNvPr>
-                <p14:cNvContentPartPr/>
-                <p14:nvPr/>
-              </p14:nvContentPartPr>
-              <p14:xfrm>
-                <a:off x="10263744" y="6266016"/>
-                <a:ext cx="34920" cy="138240"/>
-              </p14:xfrm>
-            </p:contentPart>
-          </mc:Choice>
-          <mc:Fallback xmlns="">
-            <p:pic>
-              <p:nvPicPr>
-                <p:cNvPr id="25" name="Ink 24">
-                  <a:extLst>
-                    <a:ext uri="{FF2B5EF4-FFF2-40B4-BE49-F238E27FC236}">
-                      <a16:creationId xmlns:a16="http://schemas.microsoft.com/office/drawing/2014/main" id="{97544F39-4382-95D6-A3B8-9F567BC07034}"/>
-                    </a:ext>
-                  </a:extLst>
-                </p:cNvPr>
-                <p:cNvPicPr/>
-                <p:nvPr/>
-              </p:nvPicPr>
-              <p:blipFill>
-                <a:blip r:embed="rId36"/>
-                <a:stretch>
-                  <a:fillRect/>
-                </a:stretch>
-              </p:blipFill>
-              <p:spPr>
-                <a:xfrm>
-                  <a:off x="10246104" y="6248016"/>
-                  <a:ext cx="70560" cy="173880"/>
-                </a:xfrm>
-                <a:prstGeom prst="rect">
-                  <a:avLst/>
-                </a:prstGeom>
-              </p:spPr>
-            </p:pic>
-          </mc:Fallback>
-        </mc:AlternateContent>
-        <mc:AlternateContent xmlns:mc="http://schemas.openxmlformats.org/markup-compatibility/2006" xmlns:p14="http://schemas.microsoft.com/office/powerpoint/2010/main">
-          <mc:Choice Requires="p14">
-            <p:contentPart p14:bwMode="auto" r:id="rId37">
-              <p14:nvContentPartPr>
-                <p14:cNvPr id="26" name="Ink 25">
-                  <a:extLst>
-                    <a:ext uri="{FF2B5EF4-FFF2-40B4-BE49-F238E27FC236}">
-                      <a16:creationId xmlns:a16="http://schemas.microsoft.com/office/drawing/2014/main" id="{29E84AAC-5134-3F57-E191-F2DA492651EC}"/>
-                    </a:ext>
-                  </a:extLst>
-                </p14:cNvPr>
-                <p14:cNvContentPartPr/>
-                <p14:nvPr/>
-              </p14:nvContentPartPr>
-              <p14:xfrm>
-                <a:off x="10365984" y="6338736"/>
-                <a:ext cx="74520" cy="59760"/>
-              </p14:xfrm>
-            </p:contentPart>
-          </mc:Choice>
-          <mc:Fallback xmlns="">
-            <p:pic>
-              <p:nvPicPr>
-                <p:cNvPr id="26" name="Ink 25">
-                  <a:extLst>
-                    <a:ext uri="{FF2B5EF4-FFF2-40B4-BE49-F238E27FC236}">
-                      <a16:creationId xmlns:a16="http://schemas.microsoft.com/office/drawing/2014/main" id="{29E84AAC-5134-3F57-E191-F2DA492651EC}"/>
-                    </a:ext>
-                  </a:extLst>
-                </p:cNvPr>
-                <p:cNvPicPr/>
-                <p:nvPr/>
-              </p:nvPicPr>
-              <p:blipFill>
-                <a:blip r:embed="rId38"/>
-                <a:stretch>
-                  <a:fillRect/>
-                </a:stretch>
-              </p:blipFill>
-              <p:spPr>
-                <a:xfrm>
-                  <a:off x="10348344" y="6321096"/>
-                  <a:ext cx="110160" cy="95400"/>
-                </a:xfrm>
-                <a:prstGeom prst="rect">
-                  <a:avLst/>
-                </a:prstGeom>
-              </p:spPr>
-            </p:pic>
-          </mc:Fallback>
-        </mc:AlternateContent>
-        <mc:AlternateContent xmlns:mc="http://schemas.openxmlformats.org/markup-compatibility/2006" xmlns:p14="http://schemas.microsoft.com/office/powerpoint/2010/main">
-          <mc:Choice Requires="p14">
-            <p:contentPart p14:bwMode="auto" r:id="rId39">
-              <p14:nvContentPartPr>
-                <p14:cNvPr id="27" name="Ink 26">
-                  <a:extLst>
-                    <a:ext uri="{FF2B5EF4-FFF2-40B4-BE49-F238E27FC236}">
-                      <a16:creationId xmlns:a16="http://schemas.microsoft.com/office/drawing/2014/main" id="{5D95ABE0-609F-73F5-56E8-E57C665A3D4A}"/>
-                    </a:ext>
-                  </a:extLst>
-                </p14:cNvPr>
-                <p14:cNvContentPartPr/>
-                <p14:nvPr/>
-              </p14:nvContentPartPr>
-              <p14:xfrm>
-                <a:off x="10519704" y="6353856"/>
-                <a:ext cx="71280" cy="54000"/>
-              </p14:xfrm>
-            </p:contentPart>
-          </mc:Choice>
-          <mc:Fallback xmlns="">
-            <p:pic>
-              <p:nvPicPr>
-                <p:cNvPr id="27" name="Ink 26">
-                  <a:extLst>
-                    <a:ext uri="{FF2B5EF4-FFF2-40B4-BE49-F238E27FC236}">
-                      <a16:creationId xmlns:a16="http://schemas.microsoft.com/office/drawing/2014/main" id="{5D95ABE0-609F-73F5-56E8-E57C665A3D4A}"/>
-                    </a:ext>
-                  </a:extLst>
-                </p:cNvPr>
-                <p:cNvPicPr/>
-                <p:nvPr/>
-              </p:nvPicPr>
-              <p:blipFill>
-                <a:blip r:embed="rId40"/>
-                <a:stretch>
-                  <a:fillRect/>
-                </a:stretch>
-              </p:blipFill>
-              <p:spPr>
-                <a:xfrm>
-                  <a:off x="10501704" y="6336216"/>
-                  <a:ext cx="106920" cy="89640"/>
-                </a:xfrm>
-                <a:prstGeom prst="rect">
-                  <a:avLst/>
-                </a:prstGeom>
-              </p:spPr>
-            </p:pic>
-          </mc:Fallback>
-        </mc:AlternateContent>
-        <mc:AlternateContent xmlns:mc="http://schemas.openxmlformats.org/markup-compatibility/2006" xmlns:p14="http://schemas.microsoft.com/office/powerpoint/2010/main">
-          <mc:Choice Requires="p14">
-            <p:contentPart p14:bwMode="auto" r:id="rId41">
-              <p14:nvContentPartPr>
-                <p14:cNvPr id="28" name="Ink 27">
-                  <a:extLst>
-                    <a:ext uri="{FF2B5EF4-FFF2-40B4-BE49-F238E27FC236}">
-                      <a16:creationId xmlns:a16="http://schemas.microsoft.com/office/drawing/2014/main" id="{4540A086-D55C-D1DF-D0CE-2B78C8C611C1}"/>
-                    </a:ext>
-                  </a:extLst>
-                </p14:cNvPr>
-                <p14:cNvContentPartPr/>
-                <p14:nvPr/>
-              </p14:nvContentPartPr>
-              <p14:xfrm>
-                <a:off x="10625184" y="6249096"/>
-                <a:ext cx="27000" cy="122040"/>
-              </p14:xfrm>
-            </p:contentPart>
-          </mc:Choice>
-          <mc:Fallback xmlns="">
-            <p:pic>
-              <p:nvPicPr>
-                <p:cNvPr id="28" name="Ink 27">
-                  <a:extLst>
-                    <a:ext uri="{FF2B5EF4-FFF2-40B4-BE49-F238E27FC236}">
-                      <a16:creationId xmlns:a16="http://schemas.microsoft.com/office/drawing/2014/main" id="{4540A086-D55C-D1DF-D0CE-2B78C8C611C1}"/>
-                    </a:ext>
-                  </a:extLst>
-                </p:cNvPr>
-                <p:cNvPicPr/>
-                <p:nvPr/>
-              </p:nvPicPr>
-              <p:blipFill>
-                <a:blip r:embed="rId42"/>
-                <a:stretch>
-                  <a:fillRect/>
-                </a:stretch>
-              </p:blipFill>
-              <p:spPr>
-                <a:xfrm>
-                  <a:off x="10607544" y="6231096"/>
-                  <a:ext cx="62640" cy="157680"/>
-                </a:xfrm>
-                <a:prstGeom prst="rect">
-                  <a:avLst/>
-                </a:prstGeom>
-              </p:spPr>
-            </p:pic>
-          </mc:Fallback>
-        </mc:AlternateContent>
-      </p:grpSp>
       <p:sp>
         <p:nvSpPr>
           <p:cNvPr id="19" name="Rectangle 18">

--- a/AgenticAI/2-Core-Concepts/1_components_of_AI_agents.pptx
+++ b/AgenticAI/2-Core-Concepts/1_components_of_AI_agents.pptx
@@ -244,7 +244,7 @@
           <a:p>
             <a:fld id="{7BAEECA8-D063-486F-AE31-5020270C1449}" type="datetimeFigureOut">
               <a:rPr lang="en-US" smtClean="0"/>
-              <a:t>9/5/2026</a:t>
+              <a:t>9/13/2026</a:t>
             </a:fld>
             <a:endParaRPr lang="en-US"/>
           </a:p>
@@ -2853,7 +2853,7 @@
           <a:p>
             <a:fld id="{CB233BD1-3BA8-448D-9D08-7846095EA517}" type="datetimeFigureOut">
               <a:rPr lang="en-US" smtClean="0"/>
-              <a:t>9/5/2026</a:t>
+              <a:t>9/13/2026</a:t>
             </a:fld>
             <a:endParaRPr lang="en-US"/>
           </a:p>
@@ -3267,7 +3267,7 @@
           <a:p>
             <a:fld id="{6383FAE1-13DE-4511-8C1B-C8AFB720664C}" type="datetimeFigureOut">
               <a:rPr lang="en-US" smtClean="0"/>
-              <a:t>9/5/2026</a:t>
+              <a:t>9/13/2026</a:t>
             </a:fld>
             <a:endParaRPr lang="en-US"/>
           </a:p>
@@ -3465,7 +3465,7 @@
           <a:p>
             <a:fld id="{6383FAE1-13DE-4511-8C1B-C8AFB720664C}" type="datetimeFigureOut">
               <a:rPr lang="en-US" smtClean="0"/>
-              <a:t>9/5/2026</a:t>
+              <a:t>9/13/2026</a:t>
             </a:fld>
             <a:endParaRPr lang="en-US"/>
           </a:p>
@@ -3673,7 +3673,7 @@
           <a:p>
             <a:fld id="{6383FAE1-13DE-4511-8C1B-C8AFB720664C}" type="datetimeFigureOut">
               <a:rPr lang="en-US" smtClean="0"/>
-              <a:t>9/5/2026</a:t>
+              <a:t>9/13/2026</a:t>
             </a:fld>
             <a:endParaRPr lang="en-US"/>
           </a:p>
@@ -3871,7 +3871,7 @@
           <a:p>
             <a:fld id="{6383FAE1-13DE-4511-8C1B-C8AFB720664C}" type="datetimeFigureOut">
               <a:rPr lang="en-US" smtClean="0"/>
-              <a:t>9/5/2026</a:t>
+              <a:t>9/13/2026</a:t>
             </a:fld>
             <a:endParaRPr lang="en-US"/>
           </a:p>
@@ -4146,7 +4146,7 @@
           <a:p>
             <a:fld id="{6383FAE1-13DE-4511-8C1B-C8AFB720664C}" type="datetimeFigureOut">
               <a:rPr lang="en-US" smtClean="0"/>
-              <a:t>9/5/2026</a:t>
+              <a:t>9/13/2026</a:t>
             </a:fld>
             <a:endParaRPr lang="en-US"/>
           </a:p>
@@ -4411,7 +4411,7 @@
           <a:p>
             <a:fld id="{6383FAE1-13DE-4511-8C1B-C8AFB720664C}" type="datetimeFigureOut">
               <a:rPr lang="en-US" smtClean="0"/>
-              <a:t>9/5/2026</a:t>
+              <a:t>9/13/2026</a:t>
             </a:fld>
             <a:endParaRPr lang="en-US"/>
           </a:p>
@@ -4823,7 +4823,7 @@
           <a:p>
             <a:fld id="{6383FAE1-13DE-4511-8C1B-C8AFB720664C}" type="datetimeFigureOut">
               <a:rPr lang="en-US" smtClean="0"/>
-              <a:t>9/5/2026</a:t>
+              <a:t>9/13/2026</a:t>
             </a:fld>
             <a:endParaRPr lang="en-US"/>
           </a:p>
@@ -4964,7 +4964,7 @@
           <a:p>
             <a:fld id="{6383FAE1-13DE-4511-8C1B-C8AFB720664C}" type="datetimeFigureOut">
               <a:rPr lang="en-US" smtClean="0"/>
-              <a:t>9/5/2026</a:t>
+              <a:t>9/13/2026</a:t>
             </a:fld>
             <a:endParaRPr lang="en-US"/>
           </a:p>
@@ -5077,7 +5077,7 @@
           <a:p>
             <a:fld id="{6383FAE1-13DE-4511-8C1B-C8AFB720664C}" type="datetimeFigureOut">
               <a:rPr lang="en-US" smtClean="0"/>
-              <a:t>9/5/2026</a:t>
+              <a:t>9/13/2026</a:t>
             </a:fld>
             <a:endParaRPr lang="en-US"/>
           </a:p>
@@ -5388,7 +5388,7 @@
           <a:p>
             <a:fld id="{6383FAE1-13DE-4511-8C1B-C8AFB720664C}" type="datetimeFigureOut">
               <a:rPr lang="en-US" smtClean="0"/>
-              <a:t>9/5/2026</a:t>
+              <a:t>9/13/2026</a:t>
             </a:fld>
             <a:endParaRPr lang="en-US"/>
           </a:p>
@@ -5679,7 +5679,7 @@
           <a:p>
             <a:fld id="{6383FAE1-13DE-4511-8C1B-C8AFB720664C}" type="datetimeFigureOut">
               <a:rPr lang="en-US" smtClean="0"/>
-              <a:t>9/5/2026</a:t>
+              <a:t>9/13/2026</a:t>
             </a:fld>
             <a:endParaRPr lang="en-US"/>
           </a:p>
@@ -5923,7 +5923,7 @@
           <a:p>
             <a:fld id="{6383FAE1-13DE-4511-8C1B-C8AFB720664C}" type="datetimeFigureOut">
               <a:rPr lang="en-US" smtClean="0"/>
-              <a:t>9/5/2026</a:t>
+              <a:t>9/13/2026</a:t>
             </a:fld>
             <a:endParaRPr lang="en-US"/>
           </a:p>
@@ -6496,8 +6496,8 @@
         </p:nvSpPr>
         <p:spPr>
           <a:xfrm>
-            <a:off x="477520" y="1003776"/>
-            <a:ext cx="10292080" cy="461665"/>
+            <a:off x="733552" y="2101056"/>
+            <a:ext cx="10292080" cy="923330"/>
           </a:xfrm>
           <a:prstGeom prst="rect">
             <a:avLst/>
@@ -6514,7 +6514,7 @@
               <a:buNone/>
             </a:pPr>
             <a:r>
-              <a:rPr lang="en-US" sz="2400" dirty="0">
+              <a:rPr lang="en-US" sz="5400" b="1" dirty="0">
                 <a:solidFill>
                   <a:schemeClr val="accent6">
                     <a:lumMod val="60000"/>
@@ -8295,7 +8295,7 @@
         </p:nvSpPr>
         <p:spPr>
           <a:xfrm>
-            <a:off x="123444" y="146304"/>
+            <a:off x="141732" y="1042416"/>
             <a:ext cx="10309860" cy="1569660"/>
           </a:xfrm>
           <a:prstGeom prst="rect">
@@ -10411,7 +10411,7 @@
         <p:spPr>
           <a:xfrm>
             <a:off x="292608" y="528288"/>
-            <a:ext cx="11899392" cy="2677656"/>
+            <a:ext cx="11899392" cy="1938992"/>
           </a:xfrm>
           <a:prstGeom prst="rect">
             <a:avLst/>
@@ -10463,8 +10463,7 @@
           </a:p>
           <a:p>
             <a:pPr marL="457200" indent="-457200">
-              <a:buFont typeface="+mj-lt"/>
-              <a:buAutoNum type="arabicPeriod"/>
+              <a:buAutoNum type="arabicParenR"/>
             </a:pPr>
             <a:r>
               <a:rPr lang="en-US" sz="2400" dirty="0">
@@ -10476,6 +10475,22 @@
                 </a:solidFill>
               </a:rPr>
               <a:t>perceive its environment, </a:t>
+            </a:r>
+          </a:p>
+          <a:p>
+            <a:pPr marL="457200" indent="-457200">
+              <a:buAutoNum type="arabicParenR"/>
+            </a:pPr>
+            <a:r>
+              <a:rPr lang="en-US" sz="2400" dirty="0">
+                <a:solidFill>
+                  <a:schemeClr val="accent6">
+                    <a:lumMod val="60000"/>
+                    <a:lumOff val="40000"/>
+                  </a:schemeClr>
+                </a:solidFill>
+              </a:rPr>
+              <a:t>make independent decisions, and </a:t>
             </a:r>
           </a:p>
           <a:p>
@@ -10492,23 +10507,6 @@
                   </a:schemeClr>
                 </a:solidFill>
               </a:rPr>
-              <a:t>make independent decisions, and </a:t>
-            </a:r>
-          </a:p>
-          <a:p>
-            <a:pPr marL="457200" indent="-457200">
-              <a:buFont typeface="+mj-lt"/>
-              <a:buAutoNum type="arabicPeriod"/>
-            </a:pPr>
-            <a:r>
-              <a:rPr lang="en-US" sz="2400" dirty="0">
-                <a:solidFill>
-                  <a:schemeClr val="accent6">
-                    <a:lumMod val="60000"/>
-                    <a:lumOff val="40000"/>
-                  </a:schemeClr>
-                </a:solidFill>
-              </a:rPr>
               <a:t>use tools to achieve a specific goal.</a:t>
             </a:r>
           </a:p>
@@ -10548,35 +10546,6 @@
                 </a:solidFill>
               </a:rPr>
               <a:t>.</a:t>
-            </a:r>
-          </a:p>
-          <a:p>
-            <a:pPr>
-              <a:buNone/>
-            </a:pPr>
-            <a:endParaRPr lang="en-US" sz="2400" dirty="0">
-              <a:solidFill>
-                <a:schemeClr val="accent6">
-                  <a:lumMod val="60000"/>
-                  <a:lumOff val="40000"/>
-                </a:schemeClr>
-              </a:solidFill>
-            </a:endParaRPr>
-          </a:p>
-          <a:p>
-            <a:pPr>
-              <a:buNone/>
-            </a:pPr>
-            <a:r>
-              <a:rPr lang="en-US" sz="2400" dirty="0">
-                <a:solidFill>
-                  <a:schemeClr val="accent6">
-                    <a:lumMod val="60000"/>
-                    <a:lumOff val="40000"/>
-                  </a:schemeClr>
-                </a:solidFill>
-              </a:rPr>
-              <a:t>Architecture of a single AI agent</a:t>
             </a:r>
           </a:p>
         </p:txBody>
@@ -10802,6 +10771,51 @@
             <a:r>
               <a:rPr lang="en-US" dirty="0"/>
               <a:t>Memory</a:t>
+            </a:r>
+          </a:p>
+        </p:txBody>
+      </p:sp>
+      <p:sp>
+        <p:nvSpPr>
+          <p:cNvPr id="5" name="TextBox 4">
+            <a:extLst>
+              <a:ext uri="{FF2B5EF4-FFF2-40B4-BE49-F238E27FC236}">
+                <a16:creationId xmlns:a16="http://schemas.microsoft.com/office/drawing/2014/main" id="{7F95ED62-B95B-D484-EFD2-FEA9704B8D3C}"/>
+              </a:ext>
+            </a:extLst>
+          </p:cNvPr>
+          <p:cNvSpPr txBox="1"/>
+          <p:nvPr/>
+        </p:nvSpPr>
+        <p:spPr>
+          <a:xfrm>
+            <a:off x="77724" y="2899248"/>
+            <a:ext cx="8563356" cy="461665"/>
+          </a:xfrm>
+          <a:prstGeom prst="rect">
+            <a:avLst/>
+          </a:prstGeom>
+          <a:noFill/>
+        </p:spPr>
+        <p:txBody>
+          <a:bodyPr wrap="square">
+            <a:spAutoFit/>
+          </a:bodyPr>
+          <a:lstStyle/>
+          <a:p>
+            <a:pPr>
+              <a:buNone/>
+            </a:pPr>
+            <a:r>
+              <a:rPr lang="en-US" sz="2400" dirty="0">
+                <a:solidFill>
+                  <a:schemeClr val="accent6">
+                    <a:lumMod val="60000"/>
+                    <a:lumOff val="40000"/>
+                  </a:schemeClr>
+                </a:solidFill>
+              </a:rPr>
+              <a:t>Architecture of a single AI agent (3 main components)</a:t>
             </a:r>
           </a:p>
         </p:txBody>
@@ -15547,7 +15561,29 @@
                   </a:schemeClr>
                 </a:solidFill>
               </a:rPr>
-              <a:t>To retain, recall, and build on information over time.</a:t>
+              <a:t>To </a:t>
+            </a:r>
+            <a:r>
+              <a:rPr lang="en-US" sz="2400" b="1" i="1" dirty="0">
+                <a:solidFill>
+                  <a:schemeClr val="accent6">
+                    <a:lumMod val="60000"/>
+                    <a:lumOff val="40000"/>
+                  </a:schemeClr>
+                </a:solidFill>
+              </a:rPr>
+              <a:t>remember</a:t>
+            </a:r>
+            <a:r>
+              <a:rPr lang="en-US" sz="2400" dirty="0">
+                <a:solidFill>
+                  <a:schemeClr val="accent6">
+                    <a:lumMod val="60000"/>
+                    <a:lumOff val="40000"/>
+                  </a:schemeClr>
+                </a:solidFill>
+              </a:rPr>
+              <a:t> and build on information over time.</a:t>
             </a:r>
           </a:p>
           <a:p>
@@ -16035,7 +16071,7 @@
                   </a:schemeClr>
                 </a:solidFill>
               </a:rPr>
-              <a:t>Send email </a:t>
+              <a:t>Send email</a:t>
             </a:r>
           </a:p>
         </p:txBody>
@@ -16146,7 +16182,7 @@
                   </a:schemeClr>
                 </a:solidFill>
               </a:rPr>
-              <a:t>LLM vs AI Agent:</a:t>
+              <a:t>ChatBot vs AI Agent</a:t>
             </a:r>
           </a:p>
         </p:txBody>
@@ -16814,8 +16850,8 @@
           </mc:Fallback>
         </mc:AlternateContent>
       </p:grpSp>
-      <mc:AlternateContent xmlns:mc="http://schemas.openxmlformats.org/markup-compatibility/2006">
-        <mc:Choice xmlns:p14="http://schemas.microsoft.com/office/powerpoint/2010/main" Requires="p14">
+      <mc:AlternateContent xmlns:mc="http://schemas.openxmlformats.org/markup-compatibility/2006" xmlns:p14="http://schemas.microsoft.com/office/powerpoint/2010/main">
+        <mc:Choice Requires="p14">
           <p:contentPart p14:bwMode="auto" r:id="rId14">
             <p14:nvContentPartPr>
               <p14:cNvPr id="26" name="Ink 25">
@@ -16834,7 +16870,7 @@
             </p14:xfrm>
           </p:contentPart>
         </mc:Choice>
-        <mc:Fallback>
+        <mc:Fallback xmlns="">
           <p:pic>
             <p:nvPicPr>
               <p:cNvPr id="26" name="Ink 25">
@@ -16880,7 +16916,7 @@
         <p:spPr>
           <a:xfrm>
             <a:off x="88314" y="560129"/>
-            <a:ext cx="4886022" cy="2677656"/>
+            <a:ext cx="5187774" cy="3046988"/>
           </a:xfrm>
           <a:prstGeom prst="rect">
             <a:avLst/>
@@ -16905,7 +16941,23 @@
                   </a:schemeClr>
                 </a:solidFill>
               </a:rPr>
-              <a:t>A regular AI model (like a chatbot) takes your input, thinks once, and gives you an answer. That's it — one shot, done.</a:t>
+              <a:t>A simple chatbot (like ChatGPT) takes your input, thinks once, and gives you an answer. </a:t>
+            </a:r>
+          </a:p>
+          <a:p>
+            <a:pPr>
+              <a:buNone/>
+            </a:pPr>
+            <a:r>
+              <a:rPr lang="en-US" sz="2400" dirty="0">
+                <a:solidFill>
+                  <a:schemeClr val="accent6">
+                    <a:lumMod val="60000"/>
+                    <a:lumOff val="40000"/>
+                  </a:schemeClr>
+                </a:solidFill>
+              </a:rPr>
+              <a:t>That's it — one shot, done.</a:t>
             </a:r>
           </a:p>
           <a:p>
@@ -16945,7 +16997,23 @@
                   </a:schemeClr>
                 </a:solidFill>
               </a:rPr>
-              <a:t>“How to go on metro from Gurgaon to Noida”</a:t>
+              <a:t>“How to reach from Delhi to Srinagar”</a:t>
+            </a:r>
+          </a:p>
+          <a:p>
+            <a:pPr>
+              <a:buNone/>
+            </a:pPr>
+            <a:r>
+              <a:rPr lang="en-US" sz="2400" b="1" i="1" dirty="0">
+                <a:solidFill>
+                  <a:schemeClr val="accent6">
+                    <a:lumMod val="60000"/>
+                    <a:lumOff val="40000"/>
+                  </a:schemeClr>
+                </a:solidFill>
+              </a:rPr>
+              <a:t>It will advise you. NO ACTION</a:t>
             </a:r>
           </a:p>
         </p:txBody>
@@ -16965,7 +17033,7 @@
         <p:spPr>
           <a:xfrm>
             <a:off x="6560290" y="572736"/>
-            <a:ext cx="5269458" cy="2677656"/>
+            <a:ext cx="5269458" cy="3046988"/>
           </a:xfrm>
           <a:prstGeom prst="rect">
             <a:avLst/>
@@ -17131,7 +17199,7 @@
                   </a:schemeClr>
                 </a:solidFill>
               </a:rPr>
-              <a:t>“Book a ticket to Noida with 1</a:t>
+              <a:t>“Book a train ticket from Delhi to Srinagar with 1</a:t>
             </a:r>
             <a:r>
               <a:rPr lang="en-US" sz="2400" i="1" baseline="30000" dirty="0">
@@ -17153,7 +17221,23 @@
                   </a:schemeClr>
                 </a:solidFill>
               </a:rPr>
-              <a:t> class AC”</a:t>
+              <a:t> class AC for summer.”</a:t>
+            </a:r>
+          </a:p>
+          <a:p>
+            <a:pPr>
+              <a:buNone/>
+            </a:pPr>
+            <a:r>
+              <a:rPr lang="en-US" sz="2400" b="1" i="1" dirty="0">
+                <a:solidFill>
+                  <a:schemeClr val="accent6">
+                    <a:lumMod val="60000"/>
+                    <a:lumOff val="40000"/>
+                  </a:schemeClr>
+                </a:solidFill>
+              </a:rPr>
+              <a:t>THERE IS ACTION</a:t>
             </a:r>
           </a:p>
         </p:txBody>
@@ -17173,7 +17257,7 @@
         <p:spPr>
           <a:xfrm>
             <a:off x="304020" y="3527549"/>
-            <a:ext cx="6190488" cy="461665"/>
+            <a:ext cx="4112532" cy="461665"/>
           </a:xfrm>
           <a:prstGeom prst="rect">
             <a:avLst/>
@@ -17198,7 +17282,7 @@
                   </a:schemeClr>
                 </a:solidFill>
               </a:rPr>
-              <a:t>The workflow of an agent:</a:t>
+              <a:t>The workflow of an AI Agent:</a:t>
             </a:r>
           </a:p>
         </p:txBody>
@@ -17329,7 +17413,7 @@
                   </a:schemeClr>
                 </a:solidFill>
               </a:rPr>
-              <a:t>Agent would </a:t>
+              <a:t>AI Agent would </a:t>
             </a:r>
           </a:p>
           <a:p>
@@ -17346,7 +17430,7 @@
                   </a:schemeClr>
                 </a:solidFill>
               </a:rPr>
-              <a:t>search flights, ( by searching the web )</a:t>
+              <a:t>search flights, (by searching the web )</a:t>
             </a:r>
           </a:p>
           <a:p>
@@ -18682,8 +18766,8 @@
         </p:nvSpPr>
         <p:spPr>
           <a:xfrm>
-            <a:off x="201168" y="948848"/>
-            <a:ext cx="11631168" cy="2308324"/>
+            <a:off x="109728" y="691828"/>
+            <a:ext cx="11631168" cy="3046988"/>
           </a:xfrm>
           <a:prstGeom prst="rect">
             <a:avLst/>
@@ -18696,49 +18780,22 @@
           </a:bodyPr>
           <a:lstStyle/>
           <a:p>
-            <a:pPr marL="0" indent="0">
-              <a:buNone/>
-            </a:pPr>
-            <a:r>
-              <a:rPr lang="en-US" sz="2400" dirty="0">
-                <a:solidFill>
-                  <a:schemeClr val="accent6">
-                    <a:lumMod val="60000"/>
-                    <a:lumOff val="40000"/>
-                  </a:schemeClr>
-                </a:solidFill>
-              </a:rPr>
-              <a:t>Unlike traditional automation that follows predefined paths, </a:t>
-            </a:r>
-            <a:r>
-              <a:rPr lang="en-US" sz="2400" b="1" dirty="0">
-                <a:solidFill>
-                  <a:schemeClr val="accent6">
-                    <a:lumMod val="60000"/>
-                    <a:lumOff val="40000"/>
-                  </a:schemeClr>
-                </a:solidFill>
-              </a:rPr>
-              <a:t>agents can dynamically adapt </a:t>
-            </a:r>
-            <a:r>
-              <a:rPr lang="en-US" sz="2400" dirty="0">
-                <a:solidFill>
-                  <a:schemeClr val="accent6">
-                    <a:lumMod val="60000"/>
-                    <a:lumOff val="40000"/>
-                  </a:schemeClr>
-                </a:solidFill>
-              </a:rPr>
-              <a:t>their approach based on </a:t>
-            </a:r>
-          </a:p>
-          <a:p>
             <a:pPr marL="342900" indent="-342900">
               <a:buFont typeface="Arial" panose="020B0604020202020204" pitchFamily="34" charset="0"/>
               <a:buChar char="•"/>
             </a:pPr>
             <a:r>
+              <a:rPr lang="en-US" sz="2400" b="1" dirty="0">
+                <a:solidFill>
+                  <a:schemeClr val="accent6">
+                    <a:lumMod val="60000"/>
+                    <a:lumOff val="40000"/>
+                  </a:schemeClr>
+                </a:solidFill>
+              </a:rPr>
+              <a:t>Automation</a:t>
+            </a:r>
+            <a:r>
               <a:rPr lang="en-US" sz="2400" dirty="0">
                 <a:solidFill>
                   <a:schemeClr val="accent6">
@@ -18747,8 +18804,18 @@
                   </a:schemeClr>
                 </a:solidFill>
               </a:rPr>
-              <a:t>context and </a:t>
-            </a:r>
+              <a:t> follows a predefined path</a:t>
+            </a:r>
+          </a:p>
+          <a:p>
+            <a:endParaRPr lang="en-US" sz="2400" dirty="0">
+              <a:solidFill>
+                <a:schemeClr val="accent6">
+                  <a:lumMod val="60000"/>
+                  <a:lumOff val="40000"/>
+                </a:schemeClr>
+              </a:solidFill>
+            </a:endParaRPr>
           </a:p>
           <a:p>
             <a:pPr marL="342900" indent="-342900">
@@ -18756,6 +18823,17 @@
               <a:buChar char="•"/>
             </a:pPr>
             <a:r>
+              <a:rPr lang="en-US" sz="2400" b="1" dirty="0">
+                <a:solidFill>
+                  <a:schemeClr val="accent6">
+                    <a:lumMod val="60000"/>
+                    <a:lumOff val="40000"/>
+                  </a:schemeClr>
+                </a:solidFill>
+              </a:rPr>
+              <a:t>AI agents can dynamically adapt </a:t>
+            </a:r>
+            <a:r>
               <a:rPr lang="en-US" sz="2400" dirty="0">
                 <a:solidFill>
                   <a:schemeClr val="accent6">
@@ -18764,14 +18842,57 @@
                   </a:schemeClr>
                 </a:solidFill>
               </a:rPr>
-              <a:t>intermediate results. </a:t>
-            </a:r>
-          </a:p>
-          <a:p>
-            <a:pPr marL="342900" indent="-342900">
+              <a:t>their approach based on </a:t>
+            </a:r>
+          </a:p>
+          <a:p>
+            <a:pPr marL="800100" lvl="1" indent="-342900">
               <a:buFont typeface="Arial" panose="020B0604020202020204" pitchFamily="34" charset="0"/>
               <a:buChar char="•"/>
             </a:pPr>
+            <a:r>
+              <a:rPr lang="en-US" sz="2400" dirty="0">
+                <a:solidFill>
+                  <a:schemeClr val="accent6">
+                    <a:lumMod val="60000"/>
+                    <a:lumOff val="40000"/>
+                  </a:schemeClr>
+                </a:solidFill>
+              </a:rPr>
+              <a:t>context and </a:t>
+            </a:r>
+          </a:p>
+          <a:p>
+            <a:pPr marL="800100" lvl="1" indent="-342900">
+              <a:buFont typeface="Arial" panose="020B0604020202020204" pitchFamily="34" charset="0"/>
+              <a:buChar char="•"/>
+            </a:pPr>
+            <a:r>
+              <a:rPr lang="en-US" sz="2400" dirty="0">
+                <a:solidFill>
+                  <a:schemeClr val="accent6">
+                    <a:lumMod val="60000"/>
+                    <a:lumOff val="40000"/>
+                  </a:schemeClr>
+                </a:solidFill>
+              </a:rPr>
+              <a:t>intermediate results. </a:t>
+            </a:r>
+          </a:p>
+          <a:p>
+            <a:r>
+              <a:rPr lang="en-US" sz="2400" dirty="0">
+                <a:solidFill>
+                  <a:schemeClr val="accent6">
+                    <a:lumMod val="60000"/>
+                    <a:lumOff val="40000"/>
+                  </a:schemeClr>
+                </a:solidFill>
+              </a:rPr>
+              <a:t>They do NOT follow predefined paths,</a:t>
+            </a:r>
+          </a:p>
+          <a:p>
             <a:endParaRPr lang="en-US" sz="2400" dirty="0">
               <a:solidFill>
                 <a:schemeClr val="accent6">
@@ -19039,6 +19160,51 @@
             <a:r>
               <a:rPr lang="en-US" dirty="0"/>
               <a:t>Memory</a:t>
+            </a:r>
+          </a:p>
+        </p:txBody>
+      </p:sp>
+      <p:sp>
+        <p:nvSpPr>
+          <p:cNvPr id="3" name="TextBox 2">
+            <a:extLst>
+              <a:ext uri="{FF2B5EF4-FFF2-40B4-BE49-F238E27FC236}">
+                <a16:creationId xmlns:a16="http://schemas.microsoft.com/office/drawing/2014/main" id="{DEC661E2-755C-2E31-351F-F4ED2666A82F}"/>
+              </a:ext>
+            </a:extLst>
+          </p:cNvPr>
+          <p:cNvSpPr txBox="1"/>
+          <p:nvPr/>
+        </p:nvSpPr>
+        <p:spPr>
+          <a:xfrm>
+            <a:off x="4684386" y="98464"/>
+            <a:ext cx="3782958" cy="461665"/>
+          </a:xfrm>
+          <a:prstGeom prst="rect">
+            <a:avLst/>
+          </a:prstGeom>
+          <a:noFill/>
+        </p:spPr>
+        <p:txBody>
+          <a:bodyPr wrap="square">
+            <a:spAutoFit/>
+          </a:bodyPr>
+          <a:lstStyle/>
+          <a:p>
+            <a:pPr>
+              <a:buNone/>
+            </a:pPr>
+            <a:r>
+              <a:rPr lang="en-US" sz="2400" b="1" dirty="0">
+                <a:solidFill>
+                  <a:schemeClr val="accent6">
+                    <a:lumMod val="60000"/>
+                    <a:lumOff val="40000"/>
+                  </a:schemeClr>
+                </a:solidFill>
+              </a:rPr>
+              <a:t>Automation vs AI Agent</a:t>
             </a:r>
           </a:p>
         </p:txBody>
